--- a/LabBook_20.pptx
+++ b/LabBook_20.pptx
@@ -5,10 +5,10 @@
     <p:sldMasterId id="2147483648" r:id="rId1"/>
   </p:sldMasterIdLst>
   <p:notesMasterIdLst>
-    <p:notesMasterId r:id="rId27"/>
+    <p:notesMasterId r:id="rId29"/>
   </p:notesMasterIdLst>
   <p:handoutMasterIdLst>
-    <p:handoutMasterId r:id="rId28"/>
+    <p:handoutMasterId r:id="rId30"/>
   </p:handoutMasterIdLst>
   <p:sldIdLst>
     <p:sldId id="256" r:id="rId2"/>
@@ -28,14 +28,16 @@
     <p:sldId id="311" r:id="rId16"/>
     <p:sldId id="312" r:id="rId17"/>
     <p:sldId id="294" r:id="rId18"/>
-    <p:sldId id="299" r:id="rId19"/>
-    <p:sldId id="300" r:id="rId20"/>
-    <p:sldId id="301" r:id="rId21"/>
-    <p:sldId id="290" r:id="rId22"/>
-    <p:sldId id="297" r:id="rId23"/>
-    <p:sldId id="292" r:id="rId24"/>
-    <p:sldId id="298" r:id="rId25"/>
-    <p:sldId id="288" r:id="rId26"/>
+    <p:sldId id="313" r:id="rId19"/>
+    <p:sldId id="299" r:id="rId20"/>
+    <p:sldId id="300" r:id="rId21"/>
+    <p:sldId id="314" r:id="rId22"/>
+    <p:sldId id="301" r:id="rId23"/>
+    <p:sldId id="290" r:id="rId24"/>
+    <p:sldId id="297" r:id="rId25"/>
+    <p:sldId id="292" r:id="rId26"/>
+    <p:sldId id="298" r:id="rId27"/>
+    <p:sldId id="288" r:id="rId28"/>
   </p:sldIdLst>
   <p:sldSz cx="12192000" cy="6858000"/>
   <p:notesSz cx="12192000" cy="6858000"/>
@@ -826,7 +828,7 @@
           <a:p>
             <a:fld id="{8438F8DC-35B0-48E6-A86E-42F1F08DD00F}" type="datetimeFigureOut">
               <a:rPr lang="es-ES" smtClean="0"/>
-              <a:t>26/04/2026</a:t>
+              <a:t>27/04/2026</a:t>
             </a:fld>
             <a:endParaRPr lang="es-ES"/>
           </a:p>
@@ -1003,7 +1005,7 @@
           <a:p>
             <a:fld id="{FACBDC12-F39B-4B97-8F4D-6734F9D366FF}" type="datetimeFigureOut">
               <a:rPr lang="es-ES" smtClean="0"/>
-              <a:t>26/04/2026</a:t>
+              <a:t>27/04/2026</a:t>
             </a:fld>
             <a:endParaRPr lang="es-ES"/>
           </a:p>
@@ -1794,6 +1796,114 @@
         <p:cNvPr id="1" name="">
           <a:extLst>
             <a:ext uri="{FF2B5EF4-FFF2-40B4-BE49-F238E27FC236}">
+              <a16:creationId xmlns:a16="http://schemas.microsoft.com/office/drawing/2014/main" id="{A85ED715-E0AF-B835-3E3D-4C34BA73BEC7}"/>
+            </a:ext>
+          </a:extLst>
+        </p:cNvPr>
+        <p:cNvGrpSpPr/>
+        <p:nvPr/>
+      </p:nvGrpSpPr>
+      <p:grpSpPr>
+        <a:xfrm>
+          <a:off x="0" y="0"/>
+          <a:ext cx="0" cy="0"/>
+          <a:chOff x="0" y="0"/>
+          <a:chExt cx="0" cy="0"/>
+        </a:xfrm>
+      </p:grpSpPr>
+      <p:sp>
+        <p:nvSpPr>
+          <p:cNvPr id="2" name="Marcador de imagen de diapositiva 1">
+            <a:extLst>
+              <a:ext uri="{FF2B5EF4-FFF2-40B4-BE49-F238E27FC236}">
+                <a16:creationId xmlns:a16="http://schemas.microsoft.com/office/drawing/2014/main" id="{4CDB9127-61EF-9CD1-9094-0C61E61EA787}"/>
+              </a:ext>
+            </a:extLst>
+          </p:cNvPr>
+          <p:cNvSpPr>
+            <a:spLocks noGrp="1" noRot="1" noChangeAspect="1"/>
+          </p:cNvSpPr>
+          <p:nvPr>
+            <p:ph type="sldImg"/>
+          </p:nvPr>
+        </p:nvSpPr>
+        <p:spPr/>
+      </p:sp>
+      <p:sp>
+        <p:nvSpPr>
+          <p:cNvPr id="3" name="Marcador de notas 2">
+            <a:extLst>
+              <a:ext uri="{FF2B5EF4-FFF2-40B4-BE49-F238E27FC236}">
+                <a16:creationId xmlns:a16="http://schemas.microsoft.com/office/drawing/2014/main" id="{0CE1E093-FF3C-2B3E-8E5D-C38A77397D7C}"/>
+              </a:ext>
+            </a:extLst>
+          </p:cNvPr>
+          <p:cNvSpPr>
+            <a:spLocks noGrp="1"/>
+          </p:cNvSpPr>
+          <p:nvPr>
+            <p:ph type="body" idx="1"/>
+          </p:nvPr>
+        </p:nvSpPr>
+        <p:spPr/>
+        <p:txBody>
+          <a:bodyPr/>
+          <a:lstStyle/>
+          <a:p>
+            <a:endParaRPr lang="es-ES" dirty="0"/>
+          </a:p>
+        </p:txBody>
+      </p:sp>
+      <p:sp>
+        <p:nvSpPr>
+          <p:cNvPr id="4" name="Marcador de número de diapositiva 3">
+            <a:extLst>
+              <a:ext uri="{FF2B5EF4-FFF2-40B4-BE49-F238E27FC236}">
+                <a16:creationId xmlns:a16="http://schemas.microsoft.com/office/drawing/2014/main" id="{F99AB70F-764F-327D-064C-98ED0121B8B9}"/>
+              </a:ext>
+            </a:extLst>
+          </p:cNvPr>
+          <p:cNvSpPr>
+            <a:spLocks noGrp="1"/>
+          </p:cNvSpPr>
+          <p:nvPr>
+            <p:ph type="sldNum" sz="quarter" idx="5"/>
+          </p:nvPr>
+        </p:nvSpPr>
+        <p:spPr/>
+        <p:txBody>
+          <a:bodyPr/>
+          <a:lstStyle/>
+          <a:p>
+            <a:fld id="{676223B9-C868-4436-87D9-1A3152E1157A}" type="slidenum">
+              <a:rPr lang="es-ES" smtClean="0"/>
+              <a:t>18</a:t>
+            </a:fld>
+            <a:endParaRPr lang="es-ES"/>
+          </a:p>
+        </p:txBody>
+      </p:sp>
+    </p:spTree>
+    <p:extLst>
+      <p:ext uri="{BB962C8B-B14F-4D97-AF65-F5344CB8AC3E}">
+        <p14:creationId xmlns:p14="http://schemas.microsoft.com/office/powerpoint/2010/main" val="3840741899"/>
+      </p:ext>
+    </p:extLst>
+  </p:cSld>
+  <p:clrMapOvr>
+    <a:masterClrMapping/>
+  </p:clrMapOvr>
+</p:notes>
+</file>
+
+<file path=ppt/notesSlides/notesSlide15.xml><?xml version="1.0" encoding="utf-8"?>
+<p:notes xmlns:a="http://schemas.openxmlformats.org/drawingml/2006/main" xmlns:r="http://schemas.openxmlformats.org/officeDocument/2006/relationships" xmlns:p="http://schemas.openxmlformats.org/presentationml/2006/main">
+  <p:cSld>
+    <p:spTree>
+      <p:nvGrpSpPr>
+        <p:cNvPr id="1" name="">
+          <a:extLst>
+            <a:ext uri="{FF2B5EF4-FFF2-40B4-BE49-F238E27FC236}">
               <a16:creationId xmlns:a16="http://schemas.microsoft.com/office/drawing/2014/main" id="{9946B1C6-3682-4180-87C4-06A6C4E8012F}"/>
             </a:ext>
           </a:extLst>
@@ -1875,7 +1985,7 @@
           <a:p>
             <a:fld id="{676223B9-C868-4436-87D9-1A3152E1157A}" type="slidenum">
               <a:rPr lang="es-ES" smtClean="0"/>
-              <a:t>18</a:t>
+              <a:t>19</a:t>
             </a:fld>
             <a:endParaRPr lang="es-ES"/>
           </a:p>
@@ -1894,7 +2004,7 @@
 </p:notes>
 </file>
 
-<file path=ppt/notesSlides/notesSlide15.xml><?xml version="1.0" encoding="utf-8"?>
+<file path=ppt/notesSlides/notesSlide16.xml><?xml version="1.0" encoding="utf-8"?>
 <p:notes xmlns:a="http://schemas.openxmlformats.org/drawingml/2006/main" xmlns:r="http://schemas.openxmlformats.org/officeDocument/2006/relationships" xmlns:p="http://schemas.openxmlformats.org/presentationml/2006/main">
   <p:cSld>
     <p:spTree>
@@ -1983,7 +2093,7 @@
           <a:p>
             <a:fld id="{676223B9-C868-4436-87D9-1A3152E1157A}" type="slidenum">
               <a:rPr lang="es-ES" smtClean="0"/>
-              <a:t>19</a:t>
+              <a:t>20</a:t>
             </a:fld>
             <a:endParaRPr lang="es-ES"/>
           </a:p>
@@ -2002,7 +2112,115 @@
 </p:notes>
 </file>
 
-<file path=ppt/notesSlides/notesSlide16.xml><?xml version="1.0" encoding="utf-8"?>
+<file path=ppt/notesSlides/notesSlide17.xml><?xml version="1.0" encoding="utf-8"?>
+<p:notes xmlns:a="http://schemas.openxmlformats.org/drawingml/2006/main" xmlns:r="http://schemas.openxmlformats.org/officeDocument/2006/relationships" xmlns:p="http://schemas.openxmlformats.org/presentationml/2006/main">
+  <p:cSld>
+    <p:spTree>
+      <p:nvGrpSpPr>
+        <p:cNvPr id="1" name="">
+          <a:extLst>
+            <a:ext uri="{FF2B5EF4-FFF2-40B4-BE49-F238E27FC236}">
+              <a16:creationId xmlns:a16="http://schemas.microsoft.com/office/drawing/2014/main" id="{9EFCFB65-B08E-9414-2220-EC66BF5F527C}"/>
+            </a:ext>
+          </a:extLst>
+        </p:cNvPr>
+        <p:cNvGrpSpPr/>
+        <p:nvPr/>
+      </p:nvGrpSpPr>
+      <p:grpSpPr>
+        <a:xfrm>
+          <a:off x="0" y="0"/>
+          <a:ext cx="0" cy="0"/>
+          <a:chOff x="0" y="0"/>
+          <a:chExt cx="0" cy="0"/>
+        </a:xfrm>
+      </p:grpSpPr>
+      <p:sp>
+        <p:nvSpPr>
+          <p:cNvPr id="2" name="Marcador de imagen de diapositiva 1">
+            <a:extLst>
+              <a:ext uri="{FF2B5EF4-FFF2-40B4-BE49-F238E27FC236}">
+                <a16:creationId xmlns:a16="http://schemas.microsoft.com/office/drawing/2014/main" id="{C068E61E-781E-2507-62AC-8F751BE982E5}"/>
+              </a:ext>
+            </a:extLst>
+          </p:cNvPr>
+          <p:cNvSpPr>
+            <a:spLocks noGrp="1" noRot="1" noChangeAspect="1"/>
+          </p:cNvSpPr>
+          <p:nvPr>
+            <p:ph type="sldImg"/>
+          </p:nvPr>
+        </p:nvSpPr>
+        <p:spPr/>
+      </p:sp>
+      <p:sp>
+        <p:nvSpPr>
+          <p:cNvPr id="3" name="Marcador de notas 2">
+            <a:extLst>
+              <a:ext uri="{FF2B5EF4-FFF2-40B4-BE49-F238E27FC236}">
+                <a16:creationId xmlns:a16="http://schemas.microsoft.com/office/drawing/2014/main" id="{046F5E14-ABD4-746F-B180-9A4F1F5B5B91}"/>
+              </a:ext>
+            </a:extLst>
+          </p:cNvPr>
+          <p:cNvSpPr>
+            <a:spLocks noGrp="1"/>
+          </p:cNvSpPr>
+          <p:nvPr>
+            <p:ph type="body" idx="1"/>
+          </p:nvPr>
+        </p:nvSpPr>
+        <p:spPr/>
+        <p:txBody>
+          <a:bodyPr/>
+          <a:lstStyle/>
+          <a:p>
+            <a:endParaRPr lang="es-ES" dirty="0"/>
+          </a:p>
+        </p:txBody>
+      </p:sp>
+      <p:sp>
+        <p:nvSpPr>
+          <p:cNvPr id="4" name="Marcador de número de diapositiva 3">
+            <a:extLst>
+              <a:ext uri="{FF2B5EF4-FFF2-40B4-BE49-F238E27FC236}">
+                <a16:creationId xmlns:a16="http://schemas.microsoft.com/office/drawing/2014/main" id="{D42F473B-5C73-E53D-451D-9CD71E6F5DC5}"/>
+              </a:ext>
+            </a:extLst>
+          </p:cNvPr>
+          <p:cNvSpPr>
+            <a:spLocks noGrp="1"/>
+          </p:cNvSpPr>
+          <p:nvPr>
+            <p:ph type="sldNum" sz="quarter" idx="5"/>
+          </p:nvPr>
+        </p:nvSpPr>
+        <p:spPr/>
+        <p:txBody>
+          <a:bodyPr/>
+          <a:lstStyle/>
+          <a:p>
+            <a:fld id="{676223B9-C868-4436-87D9-1A3152E1157A}" type="slidenum">
+              <a:rPr lang="es-ES" smtClean="0"/>
+              <a:t>21</a:t>
+            </a:fld>
+            <a:endParaRPr lang="es-ES"/>
+          </a:p>
+        </p:txBody>
+      </p:sp>
+    </p:spTree>
+    <p:extLst>
+      <p:ext uri="{BB962C8B-B14F-4D97-AF65-F5344CB8AC3E}">
+        <p14:creationId xmlns:p14="http://schemas.microsoft.com/office/powerpoint/2010/main" val="3501069989"/>
+      </p:ext>
+    </p:extLst>
+  </p:cSld>
+  <p:clrMapOvr>
+    <a:masterClrMapping/>
+  </p:clrMapOvr>
+</p:notes>
+</file>
+
+<file path=ppt/notesSlides/notesSlide18.xml><?xml version="1.0" encoding="utf-8"?>
 <p:notes xmlns:a="http://schemas.openxmlformats.org/drawingml/2006/main" xmlns:r="http://schemas.openxmlformats.org/officeDocument/2006/relationships" xmlns:p="http://schemas.openxmlformats.org/presentationml/2006/main">
   <p:cSld>
     <p:spTree>
@@ -2091,7 +2309,7 @@
           <a:p>
             <a:fld id="{676223B9-C868-4436-87D9-1A3152E1157A}" type="slidenum">
               <a:rPr lang="es-ES" smtClean="0"/>
-              <a:t>20</a:t>
+              <a:t>22</a:t>
             </a:fld>
             <a:endParaRPr lang="es-ES"/>
           </a:p>
@@ -2110,7 +2328,7 @@
 </p:notes>
 </file>
 
-<file path=ppt/notesSlides/notesSlide17.xml><?xml version="1.0" encoding="utf-8"?>
+<file path=ppt/notesSlides/notesSlide19.xml><?xml version="1.0" encoding="utf-8"?>
 <p:notes xmlns:a="http://schemas.openxmlformats.org/drawingml/2006/main" xmlns:r="http://schemas.openxmlformats.org/officeDocument/2006/relationships" xmlns:p="http://schemas.openxmlformats.org/presentationml/2006/main">
   <p:cSld>
     <p:spTree>
@@ -2175,7 +2393,7 @@
           <a:p>
             <a:fld id="{676223B9-C868-4436-87D9-1A3152E1157A}" type="slidenum">
               <a:rPr lang="es-ES" smtClean="0"/>
-              <a:t>21</a:t>
+              <a:t>23</a:t>
             </a:fld>
             <a:endParaRPr lang="es-ES"/>
           </a:p>
@@ -2185,222 +2403,6 @@
     <p:extLst>
       <p:ext uri="{BB962C8B-B14F-4D97-AF65-F5344CB8AC3E}">
         <p14:creationId xmlns:p14="http://schemas.microsoft.com/office/powerpoint/2010/main" val="942232946"/>
-      </p:ext>
-    </p:extLst>
-  </p:cSld>
-  <p:clrMapOvr>
-    <a:masterClrMapping/>
-  </p:clrMapOvr>
-</p:notes>
-</file>
-
-<file path=ppt/notesSlides/notesSlide18.xml><?xml version="1.0" encoding="utf-8"?>
-<p:notes xmlns:a="http://schemas.openxmlformats.org/drawingml/2006/main" xmlns:r="http://schemas.openxmlformats.org/officeDocument/2006/relationships" xmlns:p="http://schemas.openxmlformats.org/presentationml/2006/main">
-  <p:cSld>
-    <p:spTree>
-      <p:nvGrpSpPr>
-        <p:cNvPr id="1" name="">
-          <a:extLst>
-            <a:ext uri="{FF2B5EF4-FFF2-40B4-BE49-F238E27FC236}">
-              <a16:creationId xmlns:a16="http://schemas.microsoft.com/office/drawing/2014/main" id="{1AC9112F-7FB7-4F49-F4F6-C1D0DC6ADBEE}"/>
-            </a:ext>
-          </a:extLst>
-        </p:cNvPr>
-        <p:cNvGrpSpPr/>
-        <p:nvPr/>
-      </p:nvGrpSpPr>
-      <p:grpSpPr>
-        <a:xfrm>
-          <a:off x="0" y="0"/>
-          <a:ext cx="0" cy="0"/>
-          <a:chOff x="0" y="0"/>
-          <a:chExt cx="0" cy="0"/>
-        </a:xfrm>
-      </p:grpSpPr>
-      <p:sp>
-        <p:nvSpPr>
-          <p:cNvPr id="2" name="Marcador de imagen de diapositiva 1">
-            <a:extLst>
-              <a:ext uri="{FF2B5EF4-FFF2-40B4-BE49-F238E27FC236}">
-                <a16:creationId xmlns:a16="http://schemas.microsoft.com/office/drawing/2014/main" id="{5190F532-536D-B583-3561-FD0C56234D42}"/>
-              </a:ext>
-            </a:extLst>
-          </p:cNvPr>
-          <p:cNvSpPr>
-            <a:spLocks noGrp="1" noRot="1" noChangeAspect="1"/>
-          </p:cNvSpPr>
-          <p:nvPr>
-            <p:ph type="sldImg"/>
-          </p:nvPr>
-        </p:nvSpPr>
-        <p:spPr/>
-      </p:sp>
-      <p:sp>
-        <p:nvSpPr>
-          <p:cNvPr id="3" name="Marcador de notas 2">
-            <a:extLst>
-              <a:ext uri="{FF2B5EF4-FFF2-40B4-BE49-F238E27FC236}">
-                <a16:creationId xmlns:a16="http://schemas.microsoft.com/office/drawing/2014/main" id="{CC233B1A-142E-BC7B-FE19-6D22CE4082B2}"/>
-              </a:ext>
-            </a:extLst>
-          </p:cNvPr>
-          <p:cNvSpPr>
-            <a:spLocks noGrp="1"/>
-          </p:cNvSpPr>
-          <p:nvPr>
-            <p:ph type="body" idx="1"/>
-          </p:nvPr>
-        </p:nvSpPr>
-        <p:spPr/>
-        <p:txBody>
-          <a:bodyPr/>
-          <a:lstStyle/>
-          <a:p>
-            <a:endParaRPr lang="es-ES" dirty="0"/>
-          </a:p>
-        </p:txBody>
-      </p:sp>
-      <p:sp>
-        <p:nvSpPr>
-          <p:cNvPr id="4" name="Marcador de número de diapositiva 3">
-            <a:extLst>
-              <a:ext uri="{FF2B5EF4-FFF2-40B4-BE49-F238E27FC236}">
-                <a16:creationId xmlns:a16="http://schemas.microsoft.com/office/drawing/2014/main" id="{685087E6-8FC6-B2E3-2D74-B3C5168F5568}"/>
-              </a:ext>
-            </a:extLst>
-          </p:cNvPr>
-          <p:cNvSpPr>
-            <a:spLocks noGrp="1"/>
-          </p:cNvSpPr>
-          <p:nvPr>
-            <p:ph type="sldNum" sz="quarter" idx="5"/>
-          </p:nvPr>
-        </p:nvSpPr>
-        <p:spPr/>
-        <p:txBody>
-          <a:bodyPr/>
-          <a:lstStyle/>
-          <a:p>
-            <a:fld id="{676223B9-C868-4436-87D9-1A3152E1157A}" type="slidenum">
-              <a:rPr lang="es-ES" smtClean="0"/>
-              <a:t>22</a:t>
-            </a:fld>
-            <a:endParaRPr lang="es-ES"/>
-          </a:p>
-        </p:txBody>
-      </p:sp>
-    </p:spTree>
-    <p:extLst>
-      <p:ext uri="{BB962C8B-B14F-4D97-AF65-F5344CB8AC3E}">
-        <p14:creationId xmlns:p14="http://schemas.microsoft.com/office/powerpoint/2010/main" val="1581859005"/>
-      </p:ext>
-    </p:extLst>
-  </p:cSld>
-  <p:clrMapOvr>
-    <a:masterClrMapping/>
-  </p:clrMapOvr>
-</p:notes>
-</file>
-
-<file path=ppt/notesSlides/notesSlide19.xml><?xml version="1.0" encoding="utf-8"?>
-<p:notes xmlns:a="http://schemas.openxmlformats.org/drawingml/2006/main" xmlns:r="http://schemas.openxmlformats.org/officeDocument/2006/relationships" xmlns:p="http://schemas.openxmlformats.org/presentationml/2006/main">
-  <p:cSld>
-    <p:spTree>
-      <p:nvGrpSpPr>
-        <p:cNvPr id="1" name="">
-          <a:extLst>
-            <a:ext uri="{FF2B5EF4-FFF2-40B4-BE49-F238E27FC236}">
-              <a16:creationId xmlns:a16="http://schemas.microsoft.com/office/drawing/2014/main" id="{95993BBE-3704-D894-1C10-5488EE611F08}"/>
-            </a:ext>
-          </a:extLst>
-        </p:cNvPr>
-        <p:cNvGrpSpPr/>
-        <p:nvPr/>
-      </p:nvGrpSpPr>
-      <p:grpSpPr>
-        <a:xfrm>
-          <a:off x="0" y="0"/>
-          <a:ext cx="0" cy="0"/>
-          <a:chOff x="0" y="0"/>
-          <a:chExt cx="0" cy="0"/>
-        </a:xfrm>
-      </p:grpSpPr>
-      <p:sp>
-        <p:nvSpPr>
-          <p:cNvPr id="2" name="Marcador de imagen de diapositiva 1">
-            <a:extLst>
-              <a:ext uri="{FF2B5EF4-FFF2-40B4-BE49-F238E27FC236}">
-                <a16:creationId xmlns:a16="http://schemas.microsoft.com/office/drawing/2014/main" id="{19BB04E2-F70F-42F7-9964-3D274C49FB9C}"/>
-              </a:ext>
-            </a:extLst>
-          </p:cNvPr>
-          <p:cNvSpPr>
-            <a:spLocks noGrp="1" noRot="1" noChangeAspect="1"/>
-          </p:cNvSpPr>
-          <p:nvPr>
-            <p:ph type="sldImg"/>
-          </p:nvPr>
-        </p:nvSpPr>
-        <p:spPr/>
-      </p:sp>
-      <p:sp>
-        <p:nvSpPr>
-          <p:cNvPr id="3" name="Marcador de notas 2">
-            <a:extLst>
-              <a:ext uri="{FF2B5EF4-FFF2-40B4-BE49-F238E27FC236}">
-                <a16:creationId xmlns:a16="http://schemas.microsoft.com/office/drawing/2014/main" id="{F6664AEC-7D1D-9DDC-3B94-3AE8450C7E5E}"/>
-              </a:ext>
-            </a:extLst>
-          </p:cNvPr>
-          <p:cNvSpPr>
-            <a:spLocks noGrp="1"/>
-          </p:cNvSpPr>
-          <p:nvPr>
-            <p:ph type="body" idx="1"/>
-          </p:nvPr>
-        </p:nvSpPr>
-        <p:spPr/>
-        <p:txBody>
-          <a:bodyPr/>
-          <a:lstStyle/>
-          <a:p>
-            <a:endParaRPr lang="es-ES" dirty="0"/>
-          </a:p>
-        </p:txBody>
-      </p:sp>
-      <p:sp>
-        <p:nvSpPr>
-          <p:cNvPr id="4" name="Marcador de número de diapositiva 3">
-            <a:extLst>
-              <a:ext uri="{FF2B5EF4-FFF2-40B4-BE49-F238E27FC236}">
-                <a16:creationId xmlns:a16="http://schemas.microsoft.com/office/drawing/2014/main" id="{E8F62EEB-2D30-2026-D252-4267AF688251}"/>
-              </a:ext>
-            </a:extLst>
-          </p:cNvPr>
-          <p:cNvSpPr>
-            <a:spLocks noGrp="1"/>
-          </p:cNvSpPr>
-          <p:nvPr>
-            <p:ph type="sldNum" sz="quarter" idx="5"/>
-          </p:nvPr>
-        </p:nvSpPr>
-        <p:spPr/>
-        <p:txBody>
-          <a:bodyPr/>
-          <a:lstStyle/>
-          <a:p>
-            <a:fld id="{676223B9-C868-4436-87D9-1A3152E1157A}" type="slidenum">
-              <a:rPr lang="es-ES" smtClean="0"/>
-              <a:t>23</a:t>
-            </a:fld>
-            <a:endParaRPr lang="es-ES"/>
-          </a:p>
-        </p:txBody>
-      </p:sp>
-    </p:spTree>
-    <p:extLst>
-      <p:ext uri="{BB962C8B-B14F-4D97-AF65-F5344CB8AC3E}">
-        <p14:creationId xmlns:p14="http://schemas.microsoft.com/office/powerpoint/2010/main" val="2905953062"/>
       </p:ext>
     </p:extLst>
   </p:cSld>
@@ -2526,6 +2528,222 @@
         <p:cNvPr id="1" name="">
           <a:extLst>
             <a:ext uri="{FF2B5EF4-FFF2-40B4-BE49-F238E27FC236}">
+              <a16:creationId xmlns:a16="http://schemas.microsoft.com/office/drawing/2014/main" id="{1AC9112F-7FB7-4F49-F4F6-C1D0DC6ADBEE}"/>
+            </a:ext>
+          </a:extLst>
+        </p:cNvPr>
+        <p:cNvGrpSpPr/>
+        <p:nvPr/>
+      </p:nvGrpSpPr>
+      <p:grpSpPr>
+        <a:xfrm>
+          <a:off x="0" y="0"/>
+          <a:ext cx="0" cy="0"/>
+          <a:chOff x="0" y="0"/>
+          <a:chExt cx="0" cy="0"/>
+        </a:xfrm>
+      </p:grpSpPr>
+      <p:sp>
+        <p:nvSpPr>
+          <p:cNvPr id="2" name="Marcador de imagen de diapositiva 1">
+            <a:extLst>
+              <a:ext uri="{FF2B5EF4-FFF2-40B4-BE49-F238E27FC236}">
+                <a16:creationId xmlns:a16="http://schemas.microsoft.com/office/drawing/2014/main" id="{5190F532-536D-B583-3561-FD0C56234D42}"/>
+              </a:ext>
+            </a:extLst>
+          </p:cNvPr>
+          <p:cNvSpPr>
+            <a:spLocks noGrp="1" noRot="1" noChangeAspect="1"/>
+          </p:cNvSpPr>
+          <p:nvPr>
+            <p:ph type="sldImg"/>
+          </p:nvPr>
+        </p:nvSpPr>
+        <p:spPr/>
+      </p:sp>
+      <p:sp>
+        <p:nvSpPr>
+          <p:cNvPr id="3" name="Marcador de notas 2">
+            <a:extLst>
+              <a:ext uri="{FF2B5EF4-FFF2-40B4-BE49-F238E27FC236}">
+                <a16:creationId xmlns:a16="http://schemas.microsoft.com/office/drawing/2014/main" id="{CC233B1A-142E-BC7B-FE19-6D22CE4082B2}"/>
+              </a:ext>
+            </a:extLst>
+          </p:cNvPr>
+          <p:cNvSpPr>
+            <a:spLocks noGrp="1"/>
+          </p:cNvSpPr>
+          <p:nvPr>
+            <p:ph type="body" idx="1"/>
+          </p:nvPr>
+        </p:nvSpPr>
+        <p:spPr/>
+        <p:txBody>
+          <a:bodyPr/>
+          <a:lstStyle/>
+          <a:p>
+            <a:endParaRPr lang="es-ES" dirty="0"/>
+          </a:p>
+        </p:txBody>
+      </p:sp>
+      <p:sp>
+        <p:nvSpPr>
+          <p:cNvPr id="4" name="Marcador de número de diapositiva 3">
+            <a:extLst>
+              <a:ext uri="{FF2B5EF4-FFF2-40B4-BE49-F238E27FC236}">
+                <a16:creationId xmlns:a16="http://schemas.microsoft.com/office/drawing/2014/main" id="{685087E6-8FC6-B2E3-2D74-B3C5168F5568}"/>
+              </a:ext>
+            </a:extLst>
+          </p:cNvPr>
+          <p:cNvSpPr>
+            <a:spLocks noGrp="1"/>
+          </p:cNvSpPr>
+          <p:nvPr>
+            <p:ph type="sldNum" sz="quarter" idx="5"/>
+          </p:nvPr>
+        </p:nvSpPr>
+        <p:spPr/>
+        <p:txBody>
+          <a:bodyPr/>
+          <a:lstStyle/>
+          <a:p>
+            <a:fld id="{676223B9-C868-4436-87D9-1A3152E1157A}" type="slidenum">
+              <a:rPr lang="es-ES" smtClean="0"/>
+              <a:t>24</a:t>
+            </a:fld>
+            <a:endParaRPr lang="es-ES"/>
+          </a:p>
+        </p:txBody>
+      </p:sp>
+    </p:spTree>
+    <p:extLst>
+      <p:ext uri="{BB962C8B-B14F-4D97-AF65-F5344CB8AC3E}">
+        <p14:creationId xmlns:p14="http://schemas.microsoft.com/office/powerpoint/2010/main" val="1581859005"/>
+      </p:ext>
+    </p:extLst>
+  </p:cSld>
+  <p:clrMapOvr>
+    <a:masterClrMapping/>
+  </p:clrMapOvr>
+</p:notes>
+</file>
+
+<file path=ppt/notesSlides/notesSlide21.xml><?xml version="1.0" encoding="utf-8"?>
+<p:notes xmlns:a="http://schemas.openxmlformats.org/drawingml/2006/main" xmlns:r="http://schemas.openxmlformats.org/officeDocument/2006/relationships" xmlns:p="http://schemas.openxmlformats.org/presentationml/2006/main">
+  <p:cSld>
+    <p:spTree>
+      <p:nvGrpSpPr>
+        <p:cNvPr id="1" name="">
+          <a:extLst>
+            <a:ext uri="{FF2B5EF4-FFF2-40B4-BE49-F238E27FC236}">
+              <a16:creationId xmlns:a16="http://schemas.microsoft.com/office/drawing/2014/main" id="{95993BBE-3704-D894-1C10-5488EE611F08}"/>
+            </a:ext>
+          </a:extLst>
+        </p:cNvPr>
+        <p:cNvGrpSpPr/>
+        <p:nvPr/>
+      </p:nvGrpSpPr>
+      <p:grpSpPr>
+        <a:xfrm>
+          <a:off x="0" y="0"/>
+          <a:ext cx="0" cy="0"/>
+          <a:chOff x="0" y="0"/>
+          <a:chExt cx="0" cy="0"/>
+        </a:xfrm>
+      </p:grpSpPr>
+      <p:sp>
+        <p:nvSpPr>
+          <p:cNvPr id="2" name="Marcador de imagen de diapositiva 1">
+            <a:extLst>
+              <a:ext uri="{FF2B5EF4-FFF2-40B4-BE49-F238E27FC236}">
+                <a16:creationId xmlns:a16="http://schemas.microsoft.com/office/drawing/2014/main" id="{19BB04E2-F70F-42F7-9964-3D274C49FB9C}"/>
+              </a:ext>
+            </a:extLst>
+          </p:cNvPr>
+          <p:cNvSpPr>
+            <a:spLocks noGrp="1" noRot="1" noChangeAspect="1"/>
+          </p:cNvSpPr>
+          <p:nvPr>
+            <p:ph type="sldImg"/>
+          </p:nvPr>
+        </p:nvSpPr>
+        <p:spPr/>
+      </p:sp>
+      <p:sp>
+        <p:nvSpPr>
+          <p:cNvPr id="3" name="Marcador de notas 2">
+            <a:extLst>
+              <a:ext uri="{FF2B5EF4-FFF2-40B4-BE49-F238E27FC236}">
+                <a16:creationId xmlns:a16="http://schemas.microsoft.com/office/drawing/2014/main" id="{F6664AEC-7D1D-9DDC-3B94-3AE8450C7E5E}"/>
+              </a:ext>
+            </a:extLst>
+          </p:cNvPr>
+          <p:cNvSpPr>
+            <a:spLocks noGrp="1"/>
+          </p:cNvSpPr>
+          <p:nvPr>
+            <p:ph type="body" idx="1"/>
+          </p:nvPr>
+        </p:nvSpPr>
+        <p:spPr/>
+        <p:txBody>
+          <a:bodyPr/>
+          <a:lstStyle/>
+          <a:p>
+            <a:endParaRPr lang="es-ES" dirty="0"/>
+          </a:p>
+        </p:txBody>
+      </p:sp>
+      <p:sp>
+        <p:nvSpPr>
+          <p:cNvPr id="4" name="Marcador de número de diapositiva 3">
+            <a:extLst>
+              <a:ext uri="{FF2B5EF4-FFF2-40B4-BE49-F238E27FC236}">
+                <a16:creationId xmlns:a16="http://schemas.microsoft.com/office/drawing/2014/main" id="{E8F62EEB-2D30-2026-D252-4267AF688251}"/>
+              </a:ext>
+            </a:extLst>
+          </p:cNvPr>
+          <p:cNvSpPr>
+            <a:spLocks noGrp="1"/>
+          </p:cNvSpPr>
+          <p:nvPr>
+            <p:ph type="sldNum" sz="quarter" idx="5"/>
+          </p:nvPr>
+        </p:nvSpPr>
+        <p:spPr/>
+        <p:txBody>
+          <a:bodyPr/>
+          <a:lstStyle/>
+          <a:p>
+            <a:fld id="{676223B9-C868-4436-87D9-1A3152E1157A}" type="slidenum">
+              <a:rPr lang="es-ES" smtClean="0"/>
+              <a:t>25</a:t>
+            </a:fld>
+            <a:endParaRPr lang="es-ES"/>
+          </a:p>
+        </p:txBody>
+      </p:sp>
+    </p:spTree>
+    <p:extLst>
+      <p:ext uri="{BB962C8B-B14F-4D97-AF65-F5344CB8AC3E}">
+        <p14:creationId xmlns:p14="http://schemas.microsoft.com/office/powerpoint/2010/main" val="2905953062"/>
+      </p:ext>
+    </p:extLst>
+  </p:cSld>
+  <p:clrMapOvr>
+    <a:masterClrMapping/>
+  </p:clrMapOvr>
+</p:notes>
+</file>
+
+<file path=ppt/notesSlides/notesSlide22.xml><?xml version="1.0" encoding="utf-8"?>
+<p:notes xmlns:a="http://schemas.openxmlformats.org/drawingml/2006/main" xmlns:r="http://schemas.openxmlformats.org/officeDocument/2006/relationships" xmlns:p="http://schemas.openxmlformats.org/presentationml/2006/main">
+  <p:cSld>
+    <p:spTree>
+      <p:nvGrpSpPr>
+        <p:cNvPr id="1" name="">
+          <a:extLst>
+            <a:ext uri="{FF2B5EF4-FFF2-40B4-BE49-F238E27FC236}">
               <a16:creationId xmlns:a16="http://schemas.microsoft.com/office/drawing/2014/main" id="{D3E3BE0A-4FED-FF2A-A29F-A3D3BA9386AE}"/>
             </a:ext>
           </a:extLst>
@@ -2607,7 +2825,7 @@
           <a:p>
             <a:fld id="{676223B9-C868-4436-87D9-1A3152E1157A}" type="slidenum">
               <a:rPr lang="es-ES" smtClean="0"/>
-              <a:t>24</a:t>
+              <a:t>26</a:t>
             </a:fld>
             <a:endParaRPr lang="es-ES"/>
           </a:p>
@@ -5149,8 +5367,8 @@
           </a:p>
         </p:txBody>
       </p:sp>
-      <mc:AlternateContent xmlns:mc="http://schemas.openxmlformats.org/markup-compatibility/2006">
-        <mc:Choice xmlns:a14="http://schemas.microsoft.com/office/drawing/2010/main" Requires="a14">
+      <mc:AlternateContent xmlns:mc="http://schemas.openxmlformats.org/markup-compatibility/2006" xmlns:a14="http://schemas.microsoft.com/office/drawing/2010/main">
+        <mc:Choice Requires="a14">
           <p:sp>
             <p:nvSpPr>
               <p:cNvPr id="2" name="CuadroTexto 1">
@@ -5399,7 +5617,9 @@
                     <m:sSub>
                       <m:sSubPr>
                         <m:ctrlPr>
-                          <a:rPr lang="ar-AE" sz="1000"/>
+                          <a:rPr lang="ar-AE" sz="1000" i="1">
+                            <a:latin typeface="Cambria Math" panose="02040503050406030204" pitchFamily="18" charset="0"/>
+                          </a:rPr>
                         </m:ctrlPr>
                       </m:sSubPr>
                       <m:e>
@@ -5436,7 +5656,7 @@
             </p:txBody>
           </p:sp>
         </mc:Choice>
-        <mc:Fallback>
+        <mc:Fallback xmlns="">
           <p:sp>
             <p:nvSpPr>
               <p:cNvPr id="2" name="CuadroTexto 1">
@@ -5789,8 +6009,8 @@
           </a:p>
         </p:txBody>
       </p:sp>
-      <mc:AlternateContent xmlns:mc="http://schemas.openxmlformats.org/markup-compatibility/2006">
-        <mc:Choice xmlns:a14="http://schemas.microsoft.com/office/drawing/2010/main" Requires="a14">
+      <mc:AlternateContent xmlns:mc="http://schemas.openxmlformats.org/markup-compatibility/2006" xmlns:a14="http://schemas.microsoft.com/office/drawing/2010/main">
+        <mc:Choice Requires="a14">
           <p:sp>
             <p:nvSpPr>
               <p:cNvPr id="9" name="CuadroTexto 8">
@@ -5869,7 +6089,7 @@
             </p:txBody>
           </p:sp>
         </mc:Choice>
-        <mc:Fallback>
+        <mc:Fallback xmlns="">
           <p:sp>
             <p:nvSpPr>
               <p:cNvPr id="9" name="CuadroTexto 8">
@@ -5914,8 +6134,8 @@
           </p:sp>
         </mc:Fallback>
       </mc:AlternateContent>
-      <mc:AlternateContent xmlns:mc="http://schemas.openxmlformats.org/markup-compatibility/2006">
-        <mc:Choice xmlns:a14="http://schemas.microsoft.com/office/drawing/2010/main" Requires="a14">
+      <mc:AlternateContent xmlns:mc="http://schemas.openxmlformats.org/markup-compatibility/2006" xmlns:a14="http://schemas.microsoft.com/office/drawing/2010/main">
+        <mc:Choice Requires="a14">
           <p:sp>
             <p:nvSpPr>
               <p:cNvPr id="10" name="CuadroTexto 9">
@@ -6001,7 +6221,7 @@
             </p:txBody>
           </p:sp>
         </mc:Choice>
-        <mc:Fallback>
+        <mc:Fallback xmlns="">
           <p:sp>
             <p:nvSpPr>
               <p:cNvPr id="10" name="CuadroTexto 9">
@@ -6305,8 +6525,8 @@
           </a:p>
         </p:txBody>
       </p:sp>
-      <mc:AlternateContent xmlns:mc="http://schemas.openxmlformats.org/markup-compatibility/2006">
-        <mc:Choice xmlns:a14="http://schemas.microsoft.com/office/drawing/2010/main" Requires="a14">
+      <mc:AlternateContent xmlns:mc="http://schemas.openxmlformats.org/markup-compatibility/2006" xmlns:a14="http://schemas.microsoft.com/office/drawing/2010/main">
+        <mc:Choice Requires="a14">
           <p:sp>
             <p:nvSpPr>
               <p:cNvPr id="2" name="CuadroTexto 1">
@@ -6816,7 +7036,9 @@
                     <m:sSub>
                       <m:sSubPr>
                         <m:ctrlPr>
-                          <a:rPr lang="ar-AE" sz="1000"/>
+                          <a:rPr lang="ar-AE" sz="1000" i="1">
+                            <a:latin typeface="Cambria Math" panose="02040503050406030204" pitchFamily="18" charset="0"/>
+                          </a:rPr>
                         </m:ctrlPr>
                       </m:sSubPr>
                       <m:e>
@@ -6864,7 +7086,9 @@
                     <m:sSub>
                       <m:sSubPr>
                         <m:ctrlPr>
-                          <a:rPr lang="ar-AE" sz="1000"/>
+                          <a:rPr lang="ar-AE" sz="1000" i="1">
+                            <a:latin typeface="Cambria Math" panose="02040503050406030204" pitchFamily="18" charset="0"/>
+                          </a:rPr>
                         </m:ctrlPr>
                       </m:sSubPr>
                       <m:e>
@@ -7031,7 +7255,9 @@
                     <m:sSub>
                       <m:sSubPr>
                         <m:ctrlPr>
-                          <a:rPr lang="ar-AE" sz="1000"/>
+                          <a:rPr lang="ar-AE" sz="1000" i="1">
+                            <a:latin typeface="Cambria Math" panose="02040503050406030204" pitchFamily="18" charset="0"/>
+                          </a:rPr>
                         </m:ctrlPr>
                       </m:sSubPr>
                       <m:e>
@@ -7203,7 +7429,7 @@
             </p:txBody>
           </p:sp>
         </mc:Choice>
-        <mc:Fallback>
+        <mc:Fallback xmlns="">
           <p:sp>
             <p:nvSpPr>
               <p:cNvPr id="2" name="CuadroTexto 1">
@@ -8501,8 +8727,8 @@
           </a:p>
         </p:txBody>
       </p:sp>
-      <mc:AlternateContent xmlns:mc="http://schemas.openxmlformats.org/markup-compatibility/2006">
-        <mc:Choice xmlns:a14="http://schemas.microsoft.com/office/drawing/2010/main" Requires="a14">
+      <mc:AlternateContent xmlns:mc="http://schemas.openxmlformats.org/markup-compatibility/2006" xmlns:a14="http://schemas.microsoft.com/office/drawing/2010/main">
+        <mc:Choice Requires="a14">
           <p:sp>
             <p:nvSpPr>
               <p:cNvPr id="2" name="CuadroTexto 1">
@@ -8568,7 +8794,9 @@
                 <a14:m>
                   <m:oMath xmlns:m="http://schemas.openxmlformats.org/officeDocument/2006/math">
                     <m:r>
-                      <a:rPr lang="es-ES" sz="1000"/>
+                      <a:rPr lang="es-ES" sz="1000">
+                        <a:latin typeface="Cambria Math" panose="02040503050406030204" pitchFamily="18" charset="0"/>
+                      </a:rPr>
                       <m:t>12</m:t>
                     </m:r>
                     <m:r>
@@ -8582,11 +8810,15 @@
                       <m:t> </m:t>
                     </m:r>
                     <m:r>
-                      <a:rPr lang="es-ES" sz="1000" i="1"/>
+                      <a:rPr lang="es-ES" sz="1000" i="1">
+                        <a:latin typeface="Cambria Math" panose="02040503050406030204" pitchFamily="18" charset="0"/>
+                      </a:rPr>
                       <m:t>𝜇</m:t>
                     </m:r>
                     <m:r>
-                      <a:rPr lang="es-ES" sz="1000" i="1"/>
+                      <a:rPr lang="es-ES" sz="1000" i="1">
+                        <a:latin typeface="Cambria Math" panose="02040503050406030204" pitchFamily="18" charset="0"/>
+                      </a:rPr>
                       <m:t>𝑚</m:t>
                     </m:r>
                   </m:oMath>
@@ -8601,15 +8833,21 @@
                 <a14:m>
                   <m:oMath xmlns:m="http://schemas.openxmlformats.org/officeDocument/2006/math">
                     <m:r>
-                      <a:rPr lang="es-ES" sz="1000"/>
+                      <a:rPr lang="es-ES" sz="1000">
+                        <a:latin typeface="Cambria Math" panose="02040503050406030204" pitchFamily="18" charset="0"/>
+                      </a:rPr>
                       <m:t>1</m:t>
                     </m:r>
                     <m:r>
-                      <a:rPr lang="es-ES" sz="1000"/>
+                      <a:rPr lang="es-ES" sz="1000">
+                        <a:latin typeface="Cambria Math" panose="02040503050406030204" pitchFamily="18" charset="0"/>
+                      </a:rPr>
                       <m:t>.</m:t>
                     </m:r>
                     <m:r>
-                      <a:rPr lang="es-ES" sz="1000"/>
+                      <a:rPr lang="es-ES" sz="1000">
+                        <a:latin typeface="Cambria Math" panose="02040503050406030204" pitchFamily="18" charset="0"/>
+                      </a:rPr>
                       <m:t>55</m:t>
                     </m:r>
                     <m:r>
@@ -8623,11 +8861,15 @@
                       <m:t> </m:t>
                     </m:r>
                     <m:r>
-                      <a:rPr lang="es-ES" sz="1000" i="1"/>
+                      <a:rPr lang="es-ES" sz="1000" i="1">
+                        <a:latin typeface="Cambria Math" panose="02040503050406030204" pitchFamily="18" charset="0"/>
+                      </a:rPr>
                       <m:t>𝜇</m:t>
                     </m:r>
                     <m:r>
-                      <a:rPr lang="es-ES" sz="1000" i="1"/>
+                      <a:rPr lang="es-ES" sz="1000" i="1">
+                        <a:latin typeface="Cambria Math" panose="02040503050406030204" pitchFamily="18" charset="0"/>
+                      </a:rPr>
                       <m:t>𝑚</m:t>
                     </m:r>
                   </m:oMath>
@@ -8703,12 +8945,16 @@
                     <m:sSub>
                       <m:sSubPr>
                         <m:ctrlPr>
-                          <a:rPr lang="ar-AE" sz="1000"/>
+                          <a:rPr lang="ar-AE" sz="1000" i="1">
+                            <a:latin typeface="Cambria Math" panose="02040503050406030204" pitchFamily="18" charset="0"/>
+                          </a:rPr>
                         </m:ctrlPr>
                       </m:sSubPr>
                       <m:e>
                         <m:r>
-                          <a:rPr lang="ar-AE" sz="1000" i="1"/>
+                          <a:rPr lang="ar-AE" sz="1000" i="1">
+                            <a:latin typeface="Cambria Math" panose="02040503050406030204" pitchFamily="18" charset="0"/>
+                          </a:rPr>
                           <m:t>𝑛</m:t>
                         </m:r>
                       </m:e>
@@ -8756,18 +9002,24 @@
                     <m:sSub>
                       <m:sSubPr>
                         <m:ctrlPr>
-                          <a:rPr lang="ar-AE" sz="1000"/>
+                          <a:rPr lang="ar-AE" sz="1000" i="1">
+                            <a:latin typeface="Cambria Math" panose="02040503050406030204" pitchFamily="18" charset="0"/>
+                          </a:rPr>
                         </m:ctrlPr>
                       </m:sSubPr>
                       <m:e>
                         <m:r>
-                          <a:rPr lang="ar-AE" sz="1000" i="1"/>
+                          <a:rPr lang="ar-AE" sz="1000" i="1">
+                            <a:latin typeface="Cambria Math" panose="02040503050406030204" pitchFamily="18" charset="0"/>
+                          </a:rPr>
                           <m:t>𝐸</m:t>
                         </m:r>
                       </m:e>
                       <m:sub>
                         <m:r>
-                          <a:rPr lang="ar-AE" sz="1000" i="1"/>
+                          <a:rPr lang="ar-AE" sz="1000" i="1">
+                            <a:latin typeface="Cambria Math" panose="02040503050406030204" pitchFamily="18" charset="0"/>
+                          </a:rPr>
                           <m:t>𝑥</m:t>
                         </m:r>
                       </m:sub>
@@ -8810,18 +9062,24 @@
                     <m:sSub>
                       <m:sSubPr>
                         <m:ctrlPr>
-                          <a:rPr lang="ar-AE" sz="1000"/>
+                          <a:rPr lang="ar-AE" sz="1000" i="1">
+                            <a:latin typeface="Cambria Math" panose="02040503050406030204" pitchFamily="18" charset="0"/>
+                          </a:rPr>
                         </m:ctrlPr>
                       </m:sSubPr>
                       <m:e>
                         <m:r>
-                          <a:rPr lang="ar-AE" sz="1000" i="1"/>
+                          <a:rPr lang="ar-AE" sz="1000" i="1">
+                            <a:latin typeface="Cambria Math" panose="02040503050406030204" pitchFamily="18" charset="0"/>
+                          </a:rPr>
                           <m:t>𝐿</m:t>
                         </m:r>
                       </m:e>
                       <m:sub>
                         <m:r>
-                          <a:rPr lang="ar-AE" sz="1000" i="1"/>
+                          <a:rPr lang="ar-AE" sz="1000" i="1">
+                            <a:latin typeface="Cambria Math" panose="02040503050406030204" pitchFamily="18" charset="0"/>
+                          </a:rPr>
                           <m:t>𝜋</m:t>
                         </m:r>
                       </m:sub>
@@ -8943,7 +9201,7 @@
             </p:txBody>
           </p:sp>
         </mc:Choice>
-        <mc:Fallback>
+        <mc:Fallback xmlns="">
           <p:sp>
             <p:nvSpPr>
               <p:cNvPr id="2" name="CuadroTexto 1">
@@ -9195,103 +9453,6 @@
       </p:sp>
       <p:sp>
         <p:nvSpPr>
-          <p:cNvPr id="2" name="CuadroTexto 1">
-            <a:extLst>
-              <a:ext uri="{FF2B5EF4-FFF2-40B4-BE49-F238E27FC236}">
-                <a16:creationId xmlns:a16="http://schemas.microsoft.com/office/drawing/2014/main" id="{B5029729-ADF3-3B30-4FF9-83BE1DB82BD7}"/>
-              </a:ext>
-            </a:extLst>
-          </p:cNvPr>
-          <p:cNvSpPr txBox="1"/>
-          <p:nvPr/>
-        </p:nvSpPr>
-        <p:spPr>
-          <a:xfrm>
-            <a:off x="609441" y="4819471"/>
-            <a:ext cx="11199971" cy="1200329"/>
-          </a:xfrm>
-          <a:prstGeom prst="rect">
-            <a:avLst/>
-          </a:prstGeom>
-          <a:solidFill>
-            <a:schemeClr val="bg1">
-              <a:lumMod val="95000"/>
-            </a:schemeClr>
-          </a:solidFill>
-          <a:ln w="28575">
-            <a:solidFill>
-              <a:srgbClr val="E0700D"/>
-            </a:solidFill>
-          </a:ln>
-        </p:spPr>
-        <p:txBody>
-          <a:bodyPr wrap="square" rtlCol="0">
-            <a:spAutoFit/>
-          </a:bodyPr>
-          <a:lstStyle/>
-          <a:p>
-            <a:pPr algn="just"/>
-            <a:r>
-              <a:rPr lang="en-US" sz="1200" dirty="0">
-                <a:latin typeface="Arial" panose="020B0604020202020204" pitchFamily="34" charset="0"/>
-                <a:cs typeface="Arial" panose="020B0604020202020204" pitchFamily="34" charset="0"/>
-              </a:rPr>
-              <a:t>Comment results (Coupling relationship, </a:t>
-            </a:r>
-            <a:r>
-              <a:rPr lang="en-US" sz="1200" dirty="0" err="1">
-                <a:latin typeface="Arial" panose="020B0604020202020204" pitchFamily="34" charset="0"/>
-                <a:cs typeface="Arial" panose="020B0604020202020204" pitchFamily="34" charset="0"/>
-              </a:rPr>
-              <a:t>Lpi</a:t>
-            </a:r>
-            <a:r>
-              <a:rPr lang="en-US" sz="1200" dirty="0">
-                <a:latin typeface="Arial" panose="020B0604020202020204" pitchFamily="34" charset="0"/>
-                <a:cs typeface="Arial" panose="020B0604020202020204" pitchFamily="34" charset="0"/>
-              </a:rPr>
-              <a:t>,  losses, comparison with Directional Coupler… )</a:t>
-            </a:r>
-          </a:p>
-          <a:p>
-            <a:pPr algn="just"/>
-            <a:endParaRPr lang="en-US" sz="1200" dirty="0">
-              <a:latin typeface="Arial" panose="020B0604020202020204" pitchFamily="34" charset="0"/>
-              <a:cs typeface="Arial" panose="020B0604020202020204" pitchFamily="34" charset="0"/>
-            </a:endParaRPr>
-          </a:p>
-          <a:p>
-            <a:pPr algn="just"/>
-            <a:endParaRPr lang="en-US" sz="1200" dirty="0">
-              <a:latin typeface="Arial" panose="020B0604020202020204" pitchFamily="34" charset="0"/>
-              <a:cs typeface="Arial" panose="020B0604020202020204" pitchFamily="34" charset="0"/>
-            </a:endParaRPr>
-          </a:p>
-          <a:p>
-            <a:pPr algn="just"/>
-            <a:endParaRPr lang="en-US" sz="1200" dirty="0">
-              <a:latin typeface="Arial" panose="020B0604020202020204" pitchFamily="34" charset="0"/>
-              <a:cs typeface="Arial" panose="020B0604020202020204" pitchFamily="34" charset="0"/>
-            </a:endParaRPr>
-          </a:p>
-          <a:p>
-            <a:pPr algn="just"/>
-            <a:endParaRPr lang="en-US" sz="1200" dirty="0">
-              <a:latin typeface="Arial" panose="020B0604020202020204" pitchFamily="34" charset="0"/>
-              <a:cs typeface="Arial" panose="020B0604020202020204" pitchFamily="34" charset="0"/>
-            </a:endParaRPr>
-          </a:p>
-          <a:p>
-            <a:pPr algn="just"/>
-            <a:endParaRPr lang="en-US" sz="1200" dirty="0">
-              <a:latin typeface="Arial" panose="020B0604020202020204" pitchFamily="34" charset="0"/>
-              <a:cs typeface="Arial" panose="020B0604020202020204" pitchFamily="34" charset="0"/>
-            </a:endParaRPr>
-          </a:p>
-        </p:txBody>
-      </p:sp>
-      <p:sp>
-        <p:nvSpPr>
           <p:cNvPr id="7" name="Rectángulo 6">
             <a:extLst>
               <a:ext uri="{FF2B5EF4-FFF2-40B4-BE49-F238E27FC236}">
@@ -9342,57 +9503,66 @@
           </a:p>
         </p:txBody>
       </p:sp>
-      <p:sp>
-        <p:nvSpPr>
-          <p:cNvPr id="8" name="CuadroTexto 7">
+      <p:pic>
+        <p:nvPicPr>
+          <p:cNvPr id="5" name="Imagen 4">
             <a:extLst>
               <a:ext uri="{FF2B5EF4-FFF2-40B4-BE49-F238E27FC236}">
-                <a16:creationId xmlns:a16="http://schemas.microsoft.com/office/drawing/2014/main" id="{0DA14DBA-172E-DA2C-0573-6A00BF18F4A5}"/>
+                <a16:creationId xmlns:a16="http://schemas.microsoft.com/office/drawing/2014/main" id="{006FD154-64D2-1DE0-45D4-F432BC8409D4}"/>
               </a:ext>
             </a:extLst>
           </p:cNvPr>
-          <p:cNvSpPr txBox="1"/>
+          <p:cNvPicPr>
+            <a:picLocks noChangeAspect="1"/>
+          </p:cNvPicPr>
           <p:nvPr/>
-        </p:nvSpPr>
+        </p:nvPicPr>
+        <p:blipFill>
+          <a:blip r:embed="rId4"/>
+          <a:stretch>
+            <a:fillRect/>
+          </a:stretch>
+        </p:blipFill>
         <p:spPr>
           <a:xfrm>
-            <a:off x="2286000" y="2630415"/>
-            <a:ext cx="7718580" cy="923330"/>
+            <a:off x="679580" y="1811324"/>
+            <a:ext cx="6014038" cy="2438400"/>
           </a:xfrm>
           <a:prstGeom prst="rect">
             <a:avLst/>
           </a:prstGeom>
-          <a:noFill/>
         </p:spPr>
-        <p:txBody>
-          <a:bodyPr wrap="square" rtlCol="0">
-            <a:spAutoFit/>
-          </a:bodyPr>
-          <a:lstStyle/>
-          <a:p>
-            <a:pPr algn="ctr"/>
-            <a:r>
-              <a:rPr lang="en-US" b="1" dirty="0"/>
-              <a:t>deep</a:t>
-            </a:r>
-            <a:r>
-              <a:rPr lang="en-US" dirty="0"/>
-              <a:t> waveguide</a:t>
-            </a:r>
-          </a:p>
-          <a:p>
-            <a:pPr algn="ctr"/>
-            <a:endParaRPr lang="en-US" dirty="0"/>
-          </a:p>
-          <a:p>
-            <a:pPr algn="ctr"/>
-            <a:r>
-              <a:rPr lang="en-US" dirty="0"/>
-              <a:t>Paste propagation plots and console results</a:t>
-            </a:r>
-          </a:p>
-        </p:txBody>
-      </p:sp>
+      </p:pic>
+      <p:pic>
+        <p:nvPicPr>
+          <p:cNvPr id="9" name="Imagen 8">
+            <a:extLst>
+              <a:ext uri="{FF2B5EF4-FFF2-40B4-BE49-F238E27FC236}">
+                <a16:creationId xmlns:a16="http://schemas.microsoft.com/office/drawing/2014/main" id="{BF0C916D-8ABE-7B53-C4E1-0802006735C1}"/>
+              </a:ext>
+            </a:extLst>
+          </p:cNvPr>
+          <p:cNvPicPr>
+            <a:picLocks noChangeAspect="1"/>
+          </p:cNvPicPr>
+          <p:nvPr/>
+        </p:nvPicPr>
+        <p:blipFill>
+          <a:blip r:embed="rId5"/>
+          <a:stretch>
+            <a:fillRect/>
+          </a:stretch>
+        </p:blipFill>
+        <p:spPr>
+          <a:xfrm>
+            <a:off x="7010400" y="1733586"/>
+            <a:ext cx="3323403" cy="2593875"/>
+          </a:xfrm>
+          <a:prstGeom prst="rect">
+            <a:avLst/>
+          </a:prstGeom>
+        </p:spPr>
+      </p:pic>
     </p:spTree>
     <p:extLst>
       <p:ext uri="{BB962C8B-B14F-4D97-AF65-F5344CB8AC3E}">
@@ -9407,6 +9577,1317 @@
 </file>
 
 <file path=ppt/slides/slide18.xml><?xml version="1.0" encoding="utf-8"?>
+<p:sld xmlns:a="http://schemas.openxmlformats.org/drawingml/2006/main" xmlns:r="http://schemas.openxmlformats.org/officeDocument/2006/relationships" xmlns:p="http://schemas.openxmlformats.org/presentationml/2006/main">
+  <p:cSld>
+    <p:spTree>
+      <p:nvGrpSpPr>
+        <p:cNvPr id="1" name="">
+          <a:extLst>
+            <a:ext uri="{FF2B5EF4-FFF2-40B4-BE49-F238E27FC236}">
+              <a16:creationId xmlns:a16="http://schemas.microsoft.com/office/drawing/2014/main" id="{2D76E5C9-C008-133F-8869-2623D2B78B0F}"/>
+            </a:ext>
+          </a:extLst>
+        </p:cNvPr>
+        <p:cNvGrpSpPr/>
+        <p:nvPr/>
+      </p:nvGrpSpPr>
+      <p:grpSpPr>
+        <a:xfrm>
+          <a:off x="0" y="0"/>
+          <a:ext cx="0" cy="0"/>
+          <a:chOff x="0" y="0"/>
+          <a:chExt cx="0" cy="0"/>
+        </a:xfrm>
+      </p:grpSpPr>
+      <p:sp>
+        <p:nvSpPr>
+          <p:cNvPr id="16" name="object 16">
+            <a:extLst>
+              <a:ext uri="{FF2B5EF4-FFF2-40B4-BE49-F238E27FC236}">
+                <a16:creationId xmlns:a16="http://schemas.microsoft.com/office/drawing/2014/main" id="{4BF71F63-3A33-F072-9E8E-1D7E08A92714}"/>
+              </a:ext>
+            </a:extLst>
+          </p:cNvPr>
+          <p:cNvSpPr txBox="1">
+            <a:spLocks noGrp="1"/>
+          </p:cNvSpPr>
+          <p:nvPr>
+            <p:ph type="title"/>
+          </p:nvPr>
+        </p:nvSpPr>
+        <p:spPr>
+          <a:xfrm>
+            <a:off x="685800" y="408883"/>
+            <a:ext cx="10994410" cy="705321"/>
+          </a:xfrm>
+          <a:prstGeom prst="rect">
+            <a:avLst/>
+          </a:prstGeom>
+        </p:spPr>
+        <p:txBody>
+          <a:bodyPr vert="horz" wrap="square" lIns="0" tIns="12700" rIns="0" bIns="0" rtlCol="0">
+            <a:spAutoFit/>
+          </a:bodyPr>
+          <a:lstStyle/>
+          <a:p>
+            <a:pPr marL="12700">
+              <a:lnSpc>
+                <a:spcPct val="100000"/>
+              </a:lnSpc>
+              <a:spcBef>
+                <a:spcPts val="100"/>
+              </a:spcBef>
+            </a:pPr>
+            <a:r>
+              <a:rPr lang="en-US" sz="2500" dirty="0"/>
+              <a:t>Learning outcome #6 – 6.1 2x2 Multimode Interference Coupler </a:t>
+            </a:r>
+            <a:br>
+              <a:rPr lang="en-US" sz="2500" dirty="0"/>
+            </a:br>
+            <a:r>
+              <a:rPr lang="en-US" b="0" dirty="0"/>
+              <a:t>Wavelength 1.55 µm, </a:t>
+            </a:r>
+            <a:r>
+              <a:rPr lang="en-US" b="0" dirty="0" err="1"/>
+              <a:t>wMMI</a:t>
+            </a:r>
+            <a:r>
+              <a:rPr lang="en-US" b="0" dirty="0"/>
+              <a:t> = 6.6 µm</a:t>
+            </a:r>
+            <a:endParaRPr lang="en-US" sz="2500" b="0" dirty="0">
+              <a:latin typeface="+mj-lt"/>
+              <a:cs typeface="Lucida Sans"/>
+            </a:endParaRPr>
+          </a:p>
+        </p:txBody>
+      </p:sp>
+      <p:pic>
+        <p:nvPicPr>
+          <p:cNvPr id="83" name="Gráfico 82">
+            <a:extLst>
+              <a:ext uri="{FF2B5EF4-FFF2-40B4-BE49-F238E27FC236}">
+                <a16:creationId xmlns:a16="http://schemas.microsoft.com/office/drawing/2014/main" id="{C541D948-39F2-A12E-798A-1558C047F5DB}"/>
+              </a:ext>
+            </a:extLst>
+          </p:cNvPr>
+          <p:cNvPicPr>
+            <a:picLocks noChangeAspect="1"/>
+          </p:cNvPicPr>
+          <p:nvPr/>
+        </p:nvPicPr>
+        <p:blipFill>
+          <a:blip>
+            <a:extLst>
+              <a:ext uri="{96DAC541-7B7A-43D3-8B79-37D633B846F1}">
+                <asvg:svgBlip xmlns:asvg="http://schemas.microsoft.com/office/drawing/2016/SVG/main" r:embed="rId3"/>
+              </a:ext>
+            </a:extLst>
+          </a:blip>
+          <a:stretch>
+            <a:fillRect/>
+          </a:stretch>
+        </p:blipFill>
+        <p:spPr>
+          <a:xfrm>
+            <a:off x="5045006" y="6356057"/>
+            <a:ext cx="6409575" cy="363174"/>
+          </a:xfrm>
+          <a:prstGeom prst="rect">
+            <a:avLst/>
+          </a:prstGeom>
+        </p:spPr>
+      </p:pic>
+      <p:sp>
+        <p:nvSpPr>
+          <p:cNvPr id="84" name="Marcador de número de diapositiva 83">
+            <a:extLst>
+              <a:ext uri="{FF2B5EF4-FFF2-40B4-BE49-F238E27FC236}">
+                <a16:creationId xmlns:a16="http://schemas.microsoft.com/office/drawing/2014/main" id="{16EA6FED-20E3-3256-B342-72A22FF07825}"/>
+              </a:ext>
+            </a:extLst>
+          </p:cNvPr>
+          <p:cNvSpPr>
+            <a:spLocks noGrp="1"/>
+          </p:cNvSpPr>
+          <p:nvPr>
+            <p:ph type="sldNum" sz="quarter" idx="7"/>
+          </p:nvPr>
+        </p:nvSpPr>
+        <p:spPr/>
+        <p:txBody>
+          <a:bodyPr/>
+          <a:lstStyle/>
+          <a:p>
+            <a:fld id="{B6F15528-21DE-4FAA-801E-634DDDAF4B2B}" type="slidenum">
+              <a:rPr lang="es-ES" smtClean="0"/>
+              <a:t>18</a:t>
+            </a:fld>
+            <a:endParaRPr lang="es-ES"/>
+          </a:p>
+        </p:txBody>
+      </p:sp>
+      <p:sp>
+        <p:nvSpPr>
+          <p:cNvPr id="3" name="Marcador de pie de página 2">
+            <a:extLst>
+              <a:ext uri="{FF2B5EF4-FFF2-40B4-BE49-F238E27FC236}">
+                <a16:creationId xmlns:a16="http://schemas.microsoft.com/office/drawing/2014/main" id="{64246EAB-454C-1EA5-F2CC-315F030E8E50}"/>
+              </a:ext>
+            </a:extLst>
+          </p:cNvPr>
+          <p:cNvSpPr>
+            <a:spLocks noGrp="1"/>
+          </p:cNvSpPr>
+          <p:nvPr>
+            <p:ph type="ftr" sz="quarter" idx="5"/>
+          </p:nvPr>
+        </p:nvSpPr>
+        <p:spPr/>
+        <p:txBody>
+          <a:bodyPr/>
+          <a:lstStyle/>
+          <a:p>
+            <a:pPr marL="12700">
+              <a:spcBef>
+                <a:spcPts val="15"/>
+              </a:spcBef>
+            </a:pPr>
+            <a:r>
+              <a:rPr lang="es-ES" spc="-5"/>
+              <a:t>LAB 2.0. COUPLERS</a:t>
+            </a:r>
+            <a:endParaRPr lang="es-ES" spc="-5" dirty="0"/>
+          </a:p>
+        </p:txBody>
+      </p:sp>
+      <mc:AlternateContent xmlns:mc="http://schemas.openxmlformats.org/markup-compatibility/2006">
+        <mc:Choice xmlns:a14="http://schemas.microsoft.com/office/drawing/2010/main" Requires="a14">
+          <p:sp>
+            <p:nvSpPr>
+              <p:cNvPr id="2" name="CuadroTexto 1">
+                <a:extLst>
+                  <a:ext uri="{FF2B5EF4-FFF2-40B4-BE49-F238E27FC236}">
+                    <a16:creationId xmlns:a16="http://schemas.microsoft.com/office/drawing/2014/main" id="{329D122E-5098-7A1E-EC3C-23ED5C05C8F7}"/>
+                  </a:ext>
+                </a:extLst>
+              </p:cNvPr>
+              <p:cNvSpPr txBox="1"/>
+              <p:nvPr/>
+            </p:nvSpPr>
+            <p:spPr>
+              <a:xfrm>
+                <a:off x="583019" y="1524000"/>
+                <a:ext cx="11199971" cy="2646878"/>
+              </a:xfrm>
+              <a:prstGeom prst="rect">
+                <a:avLst/>
+              </a:prstGeom>
+              <a:solidFill>
+                <a:schemeClr val="bg1">
+                  <a:lumMod val="95000"/>
+                </a:schemeClr>
+              </a:solidFill>
+              <a:ln w="28575">
+                <a:solidFill>
+                  <a:srgbClr val="E0700D"/>
+                </a:solidFill>
+              </a:ln>
+            </p:spPr>
+            <p:txBody>
+              <a:bodyPr wrap="square" rtlCol="0">
+                <a:spAutoFit/>
+              </a:bodyPr>
+              <a:lstStyle/>
+              <a:p>
+                <a:pPr algn="just"/>
+                <a:r>
+                  <a:rPr lang="en-US" sz="1200" b="1" i="1" dirty="0">
+                    <a:latin typeface="Arial" panose="020B0604020202020204" pitchFamily="34" charset="0"/>
+                    <a:cs typeface="Arial" panose="020B0604020202020204" pitchFamily="34" charset="0"/>
+                  </a:rPr>
+                  <a:t>Comment results (Coupling relationship, </a:t>
+                </a:r>
+                <a:r>
+                  <a:rPr lang="en-US" sz="1200" b="1" i="1" dirty="0" err="1">
+                    <a:latin typeface="Arial" panose="020B0604020202020204" pitchFamily="34" charset="0"/>
+                    <a:cs typeface="Arial" panose="020B0604020202020204" pitchFamily="34" charset="0"/>
+                  </a:rPr>
+                  <a:t>Lpi</a:t>
+                </a:r>
+                <a:r>
+                  <a:rPr lang="en-US" sz="1200" b="1" i="1" dirty="0">
+                    <a:latin typeface="Arial" panose="020B0604020202020204" pitchFamily="34" charset="0"/>
+                    <a:cs typeface="Arial" panose="020B0604020202020204" pitchFamily="34" charset="0"/>
+                  </a:rPr>
+                  <a:t>,  losses, comparison with Directional Coupler… )</a:t>
+                </a:r>
+              </a:p>
+              <a:p>
+                <a:pPr algn="just"/>
+                <a:endParaRPr lang="en-US" sz="1200" dirty="0">
+                  <a:latin typeface="Arial" panose="020B0604020202020204" pitchFamily="34" charset="0"/>
+                  <a:cs typeface="Arial" panose="020B0604020202020204" pitchFamily="34" charset="0"/>
+                </a:endParaRPr>
+              </a:p>
+              <a:p>
+                <a:pPr algn="just"/>
+                <a:r>
+                  <a:rPr lang="en-US" sz="1000" dirty="0">
+                    <a:latin typeface="Arial" panose="020B0604020202020204" pitchFamily="34" charset="0"/>
+                    <a:cs typeface="Arial" panose="020B0604020202020204" pitchFamily="34" charset="0"/>
+                  </a:rPr>
+                  <a:t>En </a:t>
+                </a:r>
+                <a:r>
+                  <a:rPr lang="en-US" sz="1000" dirty="0" err="1">
+                    <a:latin typeface="Arial" panose="020B0604020202020204" pitchFamily="34" charset="0"/>
+                    <a:cs typeface="Arial" panose="020B0604020202020204" pitchFamily="34" charset="0"/>
+                  </a:rPr>
+                  <a:t>este</a:t>
+                </a:r>
+                <a:r>
+                  <a:rPr lang="en-US" sz="1000" dirty="0">
+                    <a:latin typeface="Arial" panose="020B0604020202020204" pitchFamily="34" charset="0"/>
+                    <a:cs typeface="Arial" panose="020B0604020202020204" pitchFamily="34" charset="0"/>
+                  </a:rPr>
+                  <a:t> primer </a:t>
+                </a:r>
+                <a:r>
+                  <a:rPr lang="en-US" sz="1000" dirty="0" err="1">
+                    <a:latin typeface="Arial" panose="020B0604020202020204" pitchFamily="34" charset="0"/>
+                    <a:cs typeface="Arial" panose="020B0604020202020204" pitchFamily="34" charset="0"/>
+                  </a:rPr>
+                  <a:t>apartado</a:t>
+                </a:r>
+                <a:r>
+                  <a:rPr lang="en-US" sz="1000" dirty="0">
+                    <a:latin typeface="Arial" panose="020B0604020202020204" pitchFamily="34" charset="0"/>
+                    <a:cs typeface="Arial" panose="020B0604020202020204" pitchFamily="34" charset="0"/>
+                  </a:rPr>
+                  <a:t>, se ha </a:t>
+                </a:r>
+                <a:r>
+                  <a:rPr lang="en-US" sz="1000" dirty="0" err="1">
+                    <a:latin typeface="Arial" panose="020B0604020202020204" pitchFamily="34" charset="0"/>
+                    <a:cs typeface="Arial" panose="020B0604020202020204" pitchFamily="34" charset="0"/>
+                  </a:rPr>
+                  <a:t>simulado</a:t>
+                </a:r>
+                <a:r>
+                  <a:rPr lang="en-US" sz="1000" dirty="0">
+                    <a:latin typeface="Arial" panose="020B0604020202020204" pitchFamily="34" charset="0"/>
+                    <a:cs typeface="Arial" panose="020B0604020202020204" pitchFamily="34" charset="0"/>
+                  </a:rPr>
+                  <a:t> un </a:t>
+                </a:r>
+                <a:r>
+                  <a:rPr lang="en-US" sz="1000" dirty="0" err="1">
+                    <a:latin typeface="Arial" panose="020B0604020202020204" pitchFamily="34" charset="0"/>
+                    <a:cs typeface="Arial" panose="020B0604020202020204" pitchFamily="34" charset="0"/>
+                  </a:rPr>
+                  <a:t>acoplador</a:t>
+                </a:r>
+                <a:r>
+                  <a:rPr lang="en-US" sz="1000" dirty="0">
+                    <a:latin typeface="Arial" panose="020B0604020202020204" pitchFamily="34" charset="0"/>
+                    <a:cs typeface="Arial" panose="020B0604020202020204" pitchFamily="34" charset="0"/>
+                  </a:rPr>
+                  <a:t> de </a:t>
+                </a:r>
+                <a:r>
+                  <a:rPr lang="en-US" sz="1000" dirty="0" err="1">
+                    <a:latin typeface="Arial" panose="020B0604020202020204" pitchFamily="34" charset="0"/>
+                    <a:cs typeface="Arial" panose="020B0604020202020204" pitchFamily="34" charset="0"/>
+                  </a:rPr>
+                  <a:t>interferencias</a:t>
+                </a:r>
+                <a:r>
+                  <a:rPr lang="en-US" sz="1000" dirty="0">
+                    <a:latin typeface="Arial" panose="020B0604020202020204" pitchFamily="34" charset="0"/>
+                    <a:cs typeface="Arial" panose="020B0604020202020204" pitchFamily="34" charset="0"/>
+                  </a:rPr>
+                  <a:t> </a:t>
+                </a:r>
+                <a:r>
+                  <a:rPr lang="en-US" sz="1000" dirty="0" err="1">
+                    <a:latin typeface="Arial" panose="020B0604020202020204" pitchFamily="34" charset="0"/>
+                    <a:cs typeface="Arial" panose="020B0604020202020204" pitchFamily="34" charset="0"/>
+                  </a:rPr>
+                  <a:t>multimodo</a:t>
+                </a:r>
+                <a:r>
+                  <a:rPr lang="en-US" sz="1000" dirty="0">
+                    <a:latin typeface="Arial" panose="020B0604020202020204" pitchFamily="34" charset="0"/>
+                    <a:cs typeface="Arial" panose="020B0604020202020204" pitchFamily="34" charset="0"/>
+                  </a:rPr>
+                  <a:t> MMI, con </a:t>
+                </a:r>
+                <a:r>
+                  <a:rPr lang="en-US" sz="1000" dirty="0" err="1">
+                    <a:latin typeface="Arial" panose="020B0604020202020204" pitchFamily="34" charset="0"/>
+                    <a:cs typeface="Arial" panose="020B0604020202020204" pitchFamily="34" charset="0"/>
+                  </a:rPr>
+                  <a:t>una</a:t>
+                </a:r>
+                <a:r>
+                  <a:rPr lang="en-US" sz="1000" dirty="0">
+                    <a:latin typeface="Arial" panose="020B0604020202020204" pitchFamily="34" charset="0"/>
+                    <a:cs typeface="Arial" panose="020B0604020202020204" pitchFamily="34" charset="0"/>
+                  </a:rPr>
+                  <a:t> </a:t>
+                </a:r>
+                <a:r>
+                  <a:rPr lang="en-US" sz="1000" dirty="0" err="1">
+                    <a:latin typeface="Arial" panose="020B0604020202020204" pitchFamily="34" charset="0"/>
+                    <a:cs typeface="Arial" panose="020B0604020202020204" pitchFamily="34" charset="0"/>
+                  </a:rPr>
+                  <a:t>estructura</a:t>
+                </a:r>
+                <a:r>
+                  <a:rPr lang="en-US" sz="1000" dirty="0">
+                    <a:latin typeface="Arial" panose="020B0604020202020204" pitchFamily="34" charset="0"/>
+                    <a:cs typeface="Arial" panose="020B0604020202020204" pitchFamily="34" charset="0"/>
+                  </a:rPr>
+                  <a:t> 2x2, y con la entrada </a:t>
+                </a:r>
+                <a:r>
+                  <a:rPr lang="en-US" sz="1000" dirty="0" err="1">
+                    <a:latin typeface="Arial" panose="020B0604020202020204" pitchFamily="34" charset="0"/>
+                    <a:cs typeface="Arial" panose="020B0604020202020204" pitchFamily="34" charset="0"/>
+                  </a:rPr>
+                  <a:t>situada</a:t>
+                </a:r>
+                <a:r>
+                  <a:rPr lang="en-US" sz="1000" dirty="0">
+                    <a:latin typeface="Arial" panose="020B0604020202020204" pitchFamily="34" charset="0"/>
+                    <a:cs typeface="Arial" panose="020B0604020202020204" pitchFamily="34" charset="0"/>
+                  </a:rPr>
+                  <a:t> a </a:t>
+                </a:r>
+                <a:r>
+                  <a:rPr lang="en-US" sz="1000" dirty="0" err="1">
+                    <a:latin typeface="Arial" panose="020B0604020202020204" pitchFamily="34" charset="0"/>
+                    <a:cs typeface="Arial" panose="020B0604020202020204" pitchFamily="34" charset="0"/>
+                  </a:rPr>
+                  <a:t>una</a:t>
+                </a:r>
+                <a:r>
+                  <a:rPr lang="en-US" sz="1000" dirty="0">
+                    <a:latin typeface="Arial" panose="020B0604020202020204" pitchFamily="34" charset="0"/>
+                    <a:cs typeface="Arial" panose="020B0604020202020204" pitchFamily="34" charset="0"/>
+                  </a:rPr>
+                  <a:t> </a:t>
+                </a:r>
+                <a:r>
+                  <a:rPr lang="en-US" sz="1000" dirty="0" err="1">
+                    <a:latin typeface="Arial" panose="020B0604020202020204" pitchFamily="34" charset="0"/>
+                    <a:cs typeface="Arial" panose="020B0604020202020204" pitchFamily="34" charset="0"/>
+                  </a:rPr>
+                  <a:t>distancia</a:t>
+                </a:r>
+                <a:r>
+                  <a:rPr lang="en-US" sz="1000" dirty="0">
+                    <a:latin typeface="Arial" panose="020B0604020202020204" pitchFamily="34" charset="0"/>
+                    <a:cs typeface="Arial" panose="020B0604020202020204" pitchFamily="34" charset="0"/>
+                  </a:rPr>
+                  <a:t> de 1/6 del </a:t>
+                </a:r>
+                <a:r>
+                  <a:rPr lang="en-US" sz="1000" dirty="0" err="1">
+                    <a:latin typeface="Arial" panose="020B0604020202020204" pitchFamily="34" charset="0"/>
+                    <a:cs typeface="Arial" panose="020B0604020202020204" pitchFamily="34" charset="0"/>
+                  </a:rPr>
+                  <a:t>centro</a:t>
+                </a:r>
+                <a:r>
+                  <a:rPr lang="en-US" sz="1000" dirty="0">
+                    <a:latin typeface="Arial" panose="020B0604020202020204" pitchFamily="34" charset="0"/>
+                    <a:cs typeface="Arial" panose="020B0604020202020204" pitchFamily="34" charset="0"/>
+                  </a:rPr>
+                  <a:t>, y </a:t>
+                </a:r>
+                <a:r>
+                  <a:rPr lang="en-US" sz="1000" dirty="0" err="1">
+                    <a:latin typeface="Arial" panose="020B0604020202020204" pitchFamily="34" charset="0"/>
+                    <a:cs typeface="Arial" panose="020B0604020202020204" pitchFamily="34" charset="0"/>
+                  </a:rPr>
+                  <a:t>teniendo</a:t>
+                </a:r>
+                <a:r>
+                  <a:rPr lang="en-US" sz="1000" dirty="0">
+                    <a:latin typeface="Arial" panose="020B0604020202020204" pitchFamily="34" charset="0"/>
+                    <a:cs typeface="Arial" panose="020B0604020202020204" pitchFamily="34" charset="0"/>
+                  </a:rPr>
+                  <a:t> </a:t>
+                </a:r>
+                <a:r>
+                  <a:rPr lang="en-US" sz="1000" dirty="0" err="1">
+                    <a:latin typeface="Arial" panose="020B0604020202020204" pitchFamily="34" charset="0"/>
+                    <a:cs typeface="Arial" panose="020B0604020202020204" pitchFamily="34" charset="0"/>
+                  </a:rPr>
+                  <a:t>en</a:t>
+                </a:r>
+                <a:r>
+                  <a:rPr lang="en-US" sz="1000" dirty="0">
+                    <a:latin typeface="Arial" panose="020B0604020202020204" pitchFamily="34" charset="0"/>
+                    <a:cs typeface="Arial" panose="020B0604020202020204" pitchFamily="34" charset="0"/>
+                  </a:rPr>
+                  <a:t> </a:t>
+                </a:r>
+                <a:r>
+                  <a:rPr lang="en-US" sz="1000" dirty="0" err="1">
+                    <a:latin typeface="Arial" panose="020B0604020202020204" pitchFamily="34" charset="0"/>
+                    <a:cs typeface="Arial" panose="020B0604020202020204" pitchFamily="34" charset="0"/>
+                  </a:rPr>
+                  <a:t>cuenta</a:t>
+                </a:r>
+                <a:r>
+                  <a:rPr lang="en-US" sz="1000" dirty="0">
+                    <a:latin typeface="Arial" panose="020B0604020202020204" pitchFamily="34" charset="0"/>
+                    <a:cs typeface="Arial" panose="020B0604020202020204" pitchFamily="34" charset="0"/>
+                  </a:rPr>
+                  <a:t> </a:t>
+                </a:r>
+                <a:r>
+                  <a:rPr lang="en-US" sz="1000" dirty="0" err="1">
+                    <a:latin typeface="Arial" panose="020B0604020202020204" pitchFamily="34" charset="0"/>
+                    <a:cs typeface="Arial" panose="020B0604020202020204" pitchFamily="34" charset="0"/>
+                  </a:rPr>
+                  <a:t>los</a:t>
+                </a:r>
+                <a:r>
+                  <a:rPr lang="en-US" sz="1000" dirty="0">
+                    <a:latin typeface="Arial" panose="020B0604020202020204" pitchFamily="34" charset="0"/>
+                    <a:cs typeface="Arial" panose="020B0604020202020204" pitchFamily="34" charset="0"/>
+                  </a:rPr>
+                  <a:t> 30 primeros </a:t>
+                </a:r>
+                <a:r>
+                  <a:rPr lang="en-US" sz="1000" dirty="0" err="1">
+                    <a:latin typeface="Arial" panose="020B0604020202020204" pitchFamily="34" charset="0"/>
+                    <a:cs typeface="Arial" panose="020B0604020202020204" pitchFamily="34" charset="0"/>
+                  </a:rPr>
+                  <a:t>modos</a:t>
+                </a:r>
+                <a:r>
+                  <a:rPr lang="en-US" sz="1000" dirty="0">
+                    <a:latin typeface="Arial" panose="020B0604020202020204" pitchFamily="34" charset="0"/>
+                    <a:cs typeface="Arial" panose="020B0604020202020204" pitchFamily="34" charset="0"/>
+                  </a:rPr>
+                  <a:t>.</a:t>
+                </a:r>
+              </a:p>
+              <a:p>
+                <a:pPr algn="just"/>
+                <a:endParaRPr lang="en-US" sz="1000" dirty="0">
+                  <a:latin typeface="Arial" panose="020B0604020202020204" pitchFamily="34" charset="0"/>
+                  <a:cs typeface="Arial" panose="020B0604020202020204" pitchFamily="34" charset="0"/>
+                </a:endParaRPr>
+              </a:p>
+              <a:p>
+                <a:pPr algn="just"/>
+                <a:r>
+                  <a:rPr lang="en-US" sz="1000" dirty="0">
+                    <a:latin typeface="Arial" panose="020B0604020202020204" pitchFamily="34" charset="0"/>
+                    <a:cs typeface="Arial" panose="020B0604020202020204" pitchFamily="34" charset="0"/>
+                  </a:rPr>
+                  <a:t>La </a:t>
+                </a:r>
+                <a:r>
+                  <a:rPr lang="en-US" sz="1000" dirty="0" err="1">
+                    <a:latin typeface="Arial" panose="020B0604020202020204" pitchFamily="34" charset="0"/>
+                    <a:cs typeface="Arial" panose="020B0604020202020204" pitchFamily="34" charset="0"/>
+                  </a:rPr>
+                  <a:t>distribución</a:t>
+                </a:r>
+                <a:r>
+                  <a:rPr lang="en-US" sz="1000" dirty="0">
+                    <a:latin typeface="Arial" panose="020B0604020202020204" pitchFamily="34" charset="0"/>
+                    <a:cs typeface="Arial" panose="020B0604020202020204" pitchFamily="34" charset="0"/>
+                  </a:rPr>
+                  <a:t> </a:t>
+                </a:r>
+                <a:r>
+                  <a:rPr lang="en-US" sz="1000" dirty="0" err="1">
+                    <a:latin typeface="Arial" panose="020B0604020202020204" pitchFamily="34" charset="0"/>
+                    <a:cs typeface="Arial" panose="020B0604020202020204" pitchFamily="34" charset="0"/>
+                  </a:rPr>
+                  <a:t>obtenida</a:t>
+                </a:r>
+                <a:r>
+                  <a:rPr lang="en-US" sz="1000" dirty="0">
+                    <a:latin typeface="Arial" panose="020B0604020202020204" pitchFamily="34" charset="0"/>
+                    <a:cs typeface="Arial" panose="020B0604020202020204" pitchFamily="34" charset="0"/>
+                  </a:rPr>
+                  <a:t> </a:t>
+                </a:r>
+                <a:r>
+                  <a:rPr lang="es-ES" sz="1000" dirty="0">
+                    <a:latin typeface="Arial" panose="020B0604020202020204" pitchFamily="34" charset="0"/>
+                    <a:cs typeface="Arial" panose="020B0604020202020204" pitchFamily="34" charset="0"/>
+                  </a:rPr>
+                  <a:t>muestra claramente el fenómeno de interferencia multimodo, donde los diferentes modos excitados en la región MMI interfieren entre sí dando lugar al efecto de </a:t>
+                </a:r>
+                <a:r>
+                  <a:rPr lang="es-ES" sz="1000" u="sng" dirty="0" err="1">
+                    <a:latin typeface="Arial" panose="020B0604020202020204" pitchFamily="34" charset="0"/>
+                    <a:cs typeface="Arial" panose="020B0604020202020204" pitchFamily="34" charset="0"/>
+                  </a:rPr>
+                  <a:t>self-imaging</a:t>
+                </a:r>
+                <a:r>
+                  <a:rPr lang="es-ES" sz="1000" dirty="0">
+                    <a:latin typeface="Arial" panose="020B0604020202020204" pitchFamily="34" charset="0"/>
+                    <a:cs typeface="Arial" panose="020B0604020202020204" pitchFamily="34" charset="0"/>
+                  </a:rPr>
+                  <a:t>, es decir, la reproducción del campo de entrada en posiciones concretas a lo largo del dispositivo</a:t>
+                </a:r>
+              </a:p>
+              <a:p>
+                <a:pPr algn="just"/>
+                <a:endParaRPr lang="en-US" sz="1000" dirty="0">
+                  <a:latin typeface="Arial" panose="020B0604020202020204" pitchFamily="34" charset="0"/>
+                  <a:cs typeface="Arial" panose="020B0604020202020204" pitchFamily="34" charset="0"/>
+                </a:endParaRPr>
+              </a:p>
+              <a:p>
+                <a:pPr algn="just"/>
+                <a:r>
+                  <a:rPr lang="en-US" sz="1000" dirty="0">
+                    <a:latin typeface="Arial" panose="020B0604020202020204" pitchFamily="34" charset="0"/>
+                    <a:cs typeface="Arial" panose="020B0604020202020204" pitchFamily="34" charset="0"/>
+                  </a:rPr>
+                  <a:t>La </a:t>
+                </a:r>
+                <a:r>
+                  <a:rPr lang="en-US" sz="1000" dirty="0" err="1">
+                    <a:latin typeface="Arial" panose="020B0604020202020204" pitchFamily="34" charset="0"/>
+                    <a:cs typeface="Arial" panose="020B0604020202020204" pitchFamily="34" charset="0"/>
+                  </a:rPr>
+                  <a:t>longitud</a:t>
+                </a:r>
+                <a:r>
+                  <a:rPr lang="en-US" sz="1000" dirty="0">
+                    <a:latin typeface="Arial" panose="020B0604020202020204" pitchFamily="34" charset="0"/>
+                    <a:cs typeface="Arial" panose="020B0604020202020204" pitchFamily="34" charset="0"/>
+                  </a:rPr>
+                  <a:t> del </a:t>
+                </a:r>
+                <a:r>
+                  <a:rPr lang="en-US" sz="1000" dirty="0" err="1">
+                    <a:latin typeface="Arial" panose="020B0604020202020204" pitchFamily="34" charset="0"/>
+                    <a:cs typeface="Arial" panose="020B0604020202020204" pitchFamily="34" charset="0"/>
+                  </a:rPr>
+                  <a:t>dispostivo</a:t>
+                </a:r>
+                <a:r>
+                  <a:rPr lang="en-US" sz="1000" dirty="0">
+                    <a:latin typeface="Arial" panose="020B0604020202020204" pitchFamily="34" charset="0"/>
+                    <a:cs typeface="Arial" panose="020B0604020202020204" pitchFamily="34" charset="0"/>
+                  </a:rPr>
+                  <a:t> </a:t>
+                </a:r>
+                <a:r>
+                  <a:rPr lang="en-US" sz="1000" dirty="0" err="1">
+                    <a:latin typeface="Arial" panose="020B0604020202020204" pitchFamily="34" charset="0"/>
+                    <a:cs typeface="Arial" panose="020B0604020202020204" pitchFamily="34" charset="0"/>
+                  </a:rPr>
+                  <a:t>obtenida</a:t>
+                </a:r>
+                <a:r>
+                  <a:rPr lang="en-US" sz="1000" dirty="0">
+                    <a:latin typeface="Arial" panose="020B0604020202020204" pitchFamily="34" charset="0"/>
+                    <a:cs typeface="Arial" panose="020B0604020202020204" pitchFamily="34" charset="0"/>
+                  </a:rPr>
+                  <a:t> </a:t>
+                </a:r>
+                <a:r>
+                  <a:rPr lang="en-US" sz="1000" dirty="0" err="1">
+                    <a:latin typeface="Arial" panose="020B0604020202020204" pitchFamily="34" charset="0"/>
+                    <a:cs typeface="Arial" panose="020B0604020202020204" pitchFamily="34" charset="0"/>
+                  </a:rPr>
+                  <a:t>será</a:t>
+                </a:r>
+                <a:r>
+                  <a:rPr lang="en-US" sz="1000" dirty="0">
+                    <a:latin typeface="Arial" panose="020B0604020202020204" pitchFamily="34" charset="0"/>
+                    <a:cs typeface="Arial" panose="020B0604020202020204" pitchFamily="34" charset="0"/>
+                  </a:rPr>
+                  <a:t> de 34.51 um, la </a:t>
+                </a:r>
+                <a:r>
+                  <a:rPr lang="en-US" sz="1000" dirty="0" err="1">
+                    <a:latin typeface="Arial" panose="020B0604020202020204" pitchFamily="34" charset="0"/>
+                    <a:cs typeface="Arial" panose="020B0604020202020204" pitchFamily="34" charset="0"/>
+                  </a:rPr>
+                  <a:t>cual</a:t>
+                </a:r>
+                <a:r>
+                  <a:rPr lang="en-US" sz="1000" dirty="0">
+                    <a:latin typeface="Arial" panose="020B0604020202020204" pitchFamily="34" charset="0"/>
+                    <a:cs typeface="Arial" panose="020B0604020202020204" pitchFamily="34" charset="0"/>
+                  </a:rPr>
+                  <a:t> </a:t>
+                </a:r>
+                <a:r>
+                  <a:rPr lang="en-US" sz="1000" dirty="0" err="1">
+                    <a:latin typeface="Arial" panose="020B0604020202020204" pitchFamily="34" charset="0"/>
+                    <a:cs typeface="Arial" panose="020B0604020202020204" pitchFamily="34" charset="0"/>
+                  </a:rPr>
+                  <a:t>está</a:t>
+                </a:r>
+                <a:r>
+                  <a:rPr lang="en-US" sz="1000" dirty="0">
+                    <a:latin typeface="Arial" panose="020B0604020202020204" pitchFamily="34" charset="0"/>
+                    <a:cs typeface="Arial" panose="020B0604020202020204" pitchFamily="34" charset="0"/>
+                  </a:rPr>
+                  <a:t> </a:t>
+                </a:r>
+                <a:r>
+                  <a:rPr lang="en-US" sz="1000" dirty="0" err="1">
+                    <a:latin typeface="Arial" panose="020B0604020202020204" pitchFamily="34" charset="0"/>
+                    <a:cs typeface="Arial" panose="020B0604020202020204" pitchFamily="34" charset="0"/>
+                  </a:rPr>
+                  <a:t>relacionada</a:t>
+                </a:r>
+                <a:r>
+                  <a:rPr lang="en-US" sz="1000" dirty="0">
+                    <a:latin typeface="Arial" panose="020B0604020202020204" pitchFamily="34" charset="0"/>
+                    <a:cs typeface="Arial" panose="020B0604020202020204" pitchFamily="34" charset="0"/>
+                  </a:rPr>
+                  <a:t> con </a:t>
+                </a:r>
+                <a14:m>
+                  <m:oMath xmlns:m="http://schemas.openxmlformats.org/officeDocument/2006/math">
+                    <m:sSub>
+                      <m:sSubPr>
+                        <m:ctrlPr>
+                          <a:rPr lang="ar-AE" sz="1000" i="1">
+                            <a:latin typeface="Cambria Math" panose="02040503050406030204" pitchFamily="18" charset="0"/>
+                          </a:rPr>
+                        </m:ctrlPr>
+                      </m:sSubPr>
+                      <m:e>
+                        <m:r>
+                          <a:rPr lang="ar-AE" sz="1000" i="1">
+                            <a:latin typeface="Cambria Math" panose="02040503050406030204" pitchFamily="18" charset="0"/>
+                          </a:rPr>
+                          <m:t>𝐿</m:t>
+                        </m:r>
+                      </m:e>
+                      <m:sub>
+                        <m:r>
+                          <a:rPr lang="ar-AE" sz="1000" i="1">
+                            <a:latin typeface="Cambria Math" panose="02040503050406030204" pitchFamily="18" charset="0"/>
+                          </a:rPr>
+                          <m:t>𝜋</m:t>
+                        </m:r>
+                      </m:sub>
+                    </m:sSub>
+                  </m:oMath>
+                </a14:m>
+                <a:r>
+                  <a:rPr lang="en-US" sz="1000" dirty="0">
+                    <a:latin typeface="Arial" panose="020B0604020202020204" pitchFamily="34" charset="0"/>
+                    <a:cs typeface="Arial" panose="020B0604020202020204" pitchFamily="34" charset="0"/>
+                  </a:rPr>
+                  <a:t>, </a:t>
+                </a:r>
+                <a:r>
+                  <a:rPr lang="en-US" sz="1000" dirty="0" err="1">
+                    <a:latin typeface="Arial" panose="020B0604020202020204" pitchFamily="34" charset="0"/>
+                    <a:cs typeface="Arial" panose="020B0604020202020204" pitchFamily="34" charset="0"/>
+                  </a:rPr>
+                  <a:t>que</a:t>
+                </a:r>
+                <a:r>
+                  <a:rPr lang="en-US" sz="1000" dirty="0">
+                    <a:latin typeface="Arial" panose="020B0604020202020204" pitchFamily="34" charset="0"/>
+                    <a:cs typeface="Arial" panose="020B0604020202020204" pitchFamily="34" charset="0"/>
+                  </a:rPr>
+                  <a:t> </a:t>
+                </a:r>
+                <a:r>
+                  <a:rPr lang="en-US" sz="1000" dirty="0" err="1">
+                    <a:latin typeface="Arial" panose="020B0604020202020204" pitchFamily="34" charset="0"/>
+                    <a:cs typeface="Arial" panose="020B0604020202020204" pitchFamily="34" charset="0"/>
+                  </a:rPr>
+                  <a:t>determina</a:t>
+                </a:r>
+                <a:r>
+                  <a:rPr lang="en-US" sz="1000" dirty="0">
+                    <a:latin typeface="Arial" panose="020B0604020202020204" pitchFamily="34" charset="0"/>
+                    <a:cs typeface="Arial" panose="020B0604020202020204" pitchFamily="34" charset="0"/>
+                  </a:rPr>
+                  <a:t> las </a:t>
+                </a:r>
+                <a:r>
+                  <a:rPr lang="en-US" sz="1000" dirty="0" err="1">
+                    <a:latin typeface="Arial" panose="020B0604020202020204" pitchFamily="34" charset="0"/>
+                    <a:cs typeface="Arial" panose="020B0604020202020204" pitchFamily="34" charset="0"/>
+                  </a:rPr>
+                  <a:t>posiciones</a:t>
+                </a:r>
+                <a:r>
+                  <a:rPr lang="en-US" sz="1000" dirty="0">
+                    <a:latin typeface="Arial" panose="020B0604020202020204" pitchFamily="34" charset="0"/>
+                    <a:cs typeface="Arial" panose="020B0604020202020204" pitchFamily="34" charset="0"/>
+                  </a:rPr>
+                  <a:t> </a:t>
+                </a:r>
+                <a:r>
+                  <a:rPr lang="en-US" sz="1000" dirty="0" err="1">
+                    <a:latin typeface="Arial" panose="020B0604020202020204" pitchFamily="34" charset="0"/>
+                    <a:cs typeface="Arial" panose="020B0604020202020204" pitchFamily="34" charset="0"/>
+                  </a:rPr>
+                  <a:t>donde</a:t>
+                </a:r>
+                <a:r>
+                  <a:rPr lang="en-US" sz="1000" dirty="0">
+                    <a:latin typeface="Arial" panose="020B0604020202020204" pitchFamily="34" charset="0"/>
+                    <a:cs typeface="Arial" panose="020B0604020202020204" pitchFamily="34" charset="0"/>
+                  </a:rPr>
+                  <a:t> se </a:t>
+                </a:r>
+                <a:r>
+                  <a:rPr lang="en-US" sz="1000" dirty="0" err="1">
+                    <a:latin typeface="Arial" panose="020B0604020202020204" pitchFamily="34" charset="0"/>
+                    <a:cs typeface="Arial" panose="020B0604020202020204" pitchFamily="34" charset="0"/>
+                  </a:rPr>
+                  <a:t>forman</a:t>
+                </a:r>
+                <a:r>
+                  <a:rPr lang="en-US" sz="1000" dirty="0">
+                    <a:latin typeface="Arial" panose="020B0604020202020204" pitchFamily="34" charset="0"/>
+                    <a:cs typeface="Arial" panose="020B0604020202020204" pitchFamily="34" charset="0"/>
+                  </a:rPr>
+                  <a:t> </a:t>
+                </a:r>
+                <a:r>
+                  <a:rPr lang="en-US" sz="1000" dirty="0" err="1">
+                    <a:latin typeface="Arial" panose="020B0604020202020204" pitchFamily="34" charset="0"/>
+                    <a:cs typeface="Arial" panose="020B0604020202020204" pitchFamily="34" charset="0"/>
+                  </a:rPr>
+                  <a:t>estas</a:t>
+                </a:r>
+                <a:r>
+                  <a:rPr lang="en-US" sz="1000" dirty="0">
+                    <a:latin typeface="Arial" panose="020B0604020202020204" pitchFamily="34" charset="0"/>
+                    <a:cs typeface="Arial" panose="020B0604020202020204" pitchFamily="34" charset="0"/>
+                  </a:rPr>
+                  <a:t> </a:t>
+                </a:r>
+                <a:r>
+                  <a:rPr lang="en-US" sz="1000" dirty="0" err="1">
+                    <a:latin typeface="Arial" panose="020B0604020202020204" pitchFamily="34" charset="0"/>
+                    <a:cs typeface="Arial" panose="020B0604020202020204" pitchFamily="34" charset="0"/>
+                  </a:rPr>
+                  <a:t>autoimágenes</a:t>
+                </a:r>
+                <a:r>
+                  <a:rPr lang="en-US" sz="1000" dirty="0">
+                    <a:latin typeface="Arial" panose="020B0604020202020204" pitchFamily="34" charset="0"/>
+                    <a:cs typeface="Arial" panose="020B0604020202020204" pitchFamily="34" charset="0"/>
+                  </a:rPr>
+                  <a:t>.</a:t>
+                </a:r>
+              </a:p>
+              <a:p>
+                <a:pPr algn="just"/>
+                <a:r>
+                  <a:rPr lang="en-US" sz="1000" dirty="0">
+                    <a:latin typeface="Arial" panose="020B0604020202020204" pitchFamily="34" charset="0"/>
+                    <a:cs typeface="Arial" panose="020B0604020202020204" pitchFamily="34" charset="0"/>
+                  </a:rPr>
+                  <a:t>Por </a:t>
+                </a:r>
+                <a:r>
+                  <a:rPr lang="en-US" sz="1000" dirty="0" err="1">
+                    <a:latin typeface="Arial" panose="020B0604020202020204" pitchFamily="34" charset="0"/>
+                    <a:cs typeface="Arial" panose="020B0604020202020204" pitchFamily="34" charset="0"/>
+                  </a:rPr>
+                  <a:t>otro</a:t>
+                </a:r>
+                <a:r>
+                  <a:rPr lang="en-US" sz="1000" dirty="0">
+                    <a:latin typeface="Arial" panose="020B0604020202020204" pitchFamily="34" charset="0"/>
+                    <a:cs typeface="Arial" panose="020B0604020202020204" pitchFamily="34" charset="0"/>
+                  </a:rPr>
+                  <a:t> </a:t>
+                </a:r>
+                <a:r>
+                  <a:rPr lang="en-US" sz="1000" dirty="0" err="1">
+                    <a:latin typeface="Arial" panose="020B0604020202020204" pitchFamily="34" charset="0"/>
+                    <a:cs typeface="Arial" panose="020B0604020202020204" pitchFamily="34" charset="0"/>
+                  </a:rPr>
+                  <a:t>lado</a:t>
+                </a:r>
+                <a:r>
+                  <a:rPr lang="en-US" sz="1000" dirty="0">
+                    <a:latin typeface="Arial" panose="020B0604020202020204" pitchFamily="34" charset="0"/>
+                    <a:cs typeface="Arial" panose="020B0604020202020204" pitchFamily="34" charset="0"/>
+                  </a:rPr>
+                  <a:t>, las </a:t>
+                </a:r>
+                <a:r>
+                  <a:rPr lang="en-US" sz="1000" dirty="0" err="1">
+                    <a:latin typeface="Arial" panose="020B0604020202020204" pitchFamily="34" charset="0"/>
+                    <a:cs typeface="Arial" panose="020B0604020202020204" pitchFamily="34" charset="0"/>
+                  </a:rPr>
+                  <a:t>pérdidas</a:t>
+                </a:r>
+                <a:r>
+                  <a:rPr lang="en-US" sz="1000" dirty="0">
+                    <a:latin typeface="Arial" panose="020B0604020202020204" pitchFamily="34" charset="0"/>
+                    <a:cs typeface="Arial" panose="020B0604020202020204" pitchFamily="34" charset="0"/>
+                  </a:rPr>
+                  <a:t> son de 0.42 dB y </a:t>
+                </a:r>
+                <a:r>
+                  <a:rPr lang="en-US" sz="1000" dirty="0" err="1">
+                    <a:latin typeface="Arial" panose="020B0604020202020204" pitchFamily="34" charset="0"/>
+                    <a:cs typeface="Arial" panose="020B0604020202020204" pitchFamily="34" charset="0"/>
+                  </a:rPr>
+                  <a:t>el</a:t>
+                </a:r>
+                <a:r>
+                  <a:rPr lang="en-US" sz="1000" dirty="0">
+                    <a:latin typeface="Arial" panose="020B0604020202020204" pitchFamily="34" charset="0"/>
+                    <a:cs typeface="Arial" panose="020B0604020202020204" pitchFamily="34" charset="0"/>
+                  </a:rPr>
+                  <a:t> </a:t>
+                </a:r>
+                <a:r>
+                  <a:rPr lang="en-US" sz="1000" dirty="0" err="1">
+                    <a:latin typeface="Arial" panose="020B0604020202020204" pitchFamily="34" charset="0"/>
+                    <a:cs typeface="Arial" panose="020B0604020202020204" pitchFamily="34" charset="0"/>
+                  </a:rPr>
+                  <a:t>reparto</a:t>
+                </a:r>
+                <a:r>
+                  <a:rPr lang="en-US" sz="1000" dirty="0">
+                    <a:latin typeface="Arial" panose="020B0604020202020204" pitchFamily="34" charset="0"/>
+                    <a:cs typeface="Arial" panose="020B0604020202020204" pitchFamily="34" charset="0"/>
+                  </a:rPr>
+                  <a:t> de </a:t>
+                </a:r>
+                <a:r>
+                  <a:rPr lang="en-US" sz="1000" dirty="0" err="1">
+                    <a:latin typeface="Arial" panose="020B0604020202020204" pitchFamily="34" charset="0"/>
+                    <a:cs typeface="Arial" panose="020B0604020202020204" pitchFamily="34" charset="0"/>
+                  </a:rPr>
+                  <a:t>potencia</a:t>
+                </a:r>
+                <a:r>
+                  <a:rPr lang="en-US" sz="1000" dirty="0">
+                    <a:latin typeface="Arial" panose="020B0604020202020204" pitchFamily="34" charset="0"/>
+                    <a:cs typeface="Arial" panose="020B0604020202020204" pitchFamily="34" charset="0"/>
+                  </a:rPr>
+                  <a:t> entre las dos </a:t>
+                </a:r>
+                <a:r>
+                  <a:rPr lang="en-US" sz="1000" dirty="0" err="1">
+                    <a:latin typeface="Arial" panose="020B0604020202020204" pitchFamily="34" charset="0"/>
+                    <a:cs typeface="Arial" panose="020B0604020202020204" pitchFamily="34" charset="0"/>
+                  </a:rPr>
+                  <a:t>salidas</a:t>
+                </a:r>
+                <a:r>
+                  <a:rPr lang="en-US" sz="1000" dirty="0">
+                    <a:latin typeface="Arial" panose="020B0604020202020204" pitchFamily="34" charset="0"/>
+                    <a:cs typeface="Arial" panose="020B0604020202020204" pitchFamily="34" charset="0"/>
+                  </a:rPr>
+                  <a:t> no es </a:t>
+                </a:r>
+                <a:r>
+                  <a:rPr lang="en-US" sz="1000" dirty="0" err="1">
+                    <a:latin typeface="Arial" panose="020B0604020202020204" pitchFamily="34" charset="0"/>
+                    <a:cs typeface="Arial" panose="020B0604020202020204" pitchFamily="34" charset="0"/>
+                  </a:rPr>
+                  <a:t>equitativo</a:t>
+                </a:r>
+                <a:r>
+                  <a:rPr lang="en-US" sz="1000" dirty="0">
+                    <a:latin typeface="Arial" panose="020B0604020202020204" pitchFamily="34" charset="0"/>
+                    <a:cs typeface="Arial" panose="020B0604020202020204" pitchFamily="34" charset="0"/>
+                  </a:rPr>
+                  <a:t> (es </a:t>
+                </a:r>
+                <a:r>
+                  <a:rPr lang="en-US" sz="1000" dirty="0" err="1">
+                    <a:latin typeface="Arial" panose="020B0604020202020204" pitchFamily="34" charset="0"/>
+                    <a:cs typeface="Arial" panose="020B0604020202020204" pitchFamily="34" charset="0"/>
+                  </a:rPr>
+                  <a:t>decir</a:t>
+                </a:r>
+                <a:r>
+                  <a:rPr lang="en-US" sz="1000" dirty="0">
+                    <a:latin typeface="Arial" panose="020B0604020202020204" pitchFamily="34" charset="0"/>
+                    <a:cs typeface="Arial" panose="020B0604020202020204" pitchFamily="34" charset="0"/>
+                  </a:rPr>
+                  <a:t>, </a:t>
+                </a:r>
+                <a:r>
+                  <a:rPr lang="en-US" sz="1000" dirty="0" err="1">
+                    <a:latin typeface="Arial" panose="020B0604020202020204" pitchFamily="34" charset="0"/>
+                    <a:cs typeface="Arial" panose="020B0604020202020204" pitchFamily="34" charset="0"/>
+                  </a:rPr>
+                  <a:t>por</a:t>
+                </a:r>
+                <a:r>
+                  <a:rPr lang="en-US" sz="1000" dirty="0">
+                    <a:latin typeface="Arial" panose="020B0604020202020204" pitchFamily="34" charset="0"/>
+                    <a:cs typeface="Arial" panose="020B0604020202020204" pitchFamily="34" charset="0"/>
+                  </a:rPr>
+                  <a:t> </a:t>
+                </a:r>
+                <a:r>
+                  <a:rPr lang="en-US" sz="1000" dirty="0" err="1">
+                    <a:latin typeface="Arial" panose="020B0604020202020204" pitchFamily="34" charset="0"/>
+                    <a:cs typeface="Arial" panose="020B0604020202020204" pitchFamily="34" charset="0"/>
+                  </a:rPr>
+                  <a:t>una</a:t>
+                </a:r>
+                <a:r>
+                  <a:rPr lang="en-US" sz="1000" dirty="0">
+                    <a:latin typeface="Arial" panose="020B0604020202020204" pitchFamily="34" charset="0"/>
+                    <a:cs typeface="Arial" panose="020B0604020202020204" pitchFamily="34" charset="0"/>
+                  </a:rPr>
+                  <a:t> </a:t>
+                </a:r>
+                <a:r>
+                  <a:rPr lang="en-US" sz="1000" dirty="0" err="1">
+                    <a:latin typeface="Arial" panose="020B0604020202020204" pitchFamily="34" charset="0"/>
+                    <a:cs typeface="Arial" panose="020B0604020202020204" pitchFamily="34" charset="0"/>
+                  </a:rPr>
+                  <a:t>salida</a:t>
+                </a:r>
+                <a:r>
+                  <a:rPr lang="en-US" sz="1000" dirty="0">
+                    <a:latin typeface="Arial" panose="020B0604020202020204" pitchFamily="34" charset="0"/>
+                    <a:cs typeface="Arial" panose="020B0604020202020204" pitchFamily="34" charset="0"/>
+                  </a:rPr>
+                  <a:t> se </a:t>
+                </a:r>
+                <a:r>
+                  <a:rPr lang="en-US" sz="1000" dirty="0" err="1">
+                    <a:latin typeface="Arial" panose="020B0604020202020204" pitchFamily="34" charset="0"/>
+                    <a:cs typeface="Arial" panose="020B0604020202020204" pitchFamily="34" charset="0"/>
+                  </a:rPr>
+                  <a:t>obtiene</a:t>
+                </a:r>
+                <a:r>
+                  <a:rPr lang="en-US" sz="1000" dirty="0">
+                    <a:latin typeface="Arial" panose="020B0604020202020204" pitchFamily="34" charset="0"/>
+                    <a:cs typeface="Arial" panose="020B0604020202020204" pitchFamily="34" charset="0"/>
+                  </a:rPr>
+                  <a:t> </a:t>
+                </a:r>
+                <a:r>
+                  <a:rPr lang="en-US" sz="1000" dirty="0" err="1">
+                    <a:latin typeface="Arial" panose="020B0604020202020204" pitchFamily="34" charset="0"/>
+                    <a:cs typeface="Arial" panose="020B0604020202020204" pitchFamily="34" charset="0"/>
+                  </a:rPr>
+                  <a:t>ligeramente</a:t>
+                </a:r>
+                <a:r>
+                  <a:rPr lang="en-US" sz="1000" dirty="0">
+                    <a:latin typeface="Arial" panose="020B0604020202020204" pitchFamily="34" charset="0"/>
+                    <a:cs typeface="Arial" panose="020B0604020202020204" pitchFamily="34" charset="0"/>
+                  </a:rPr>
+                  <a:t> </a:t>
+                </a:r>
+                <a:r>
+                  <a:rPr lang="en-US" sz="1000" dirty="0" err="1">
+                    <a:latin typeface="Arial" panose="020B0604020202020204" pitchFamily="34" charset="0"/>
+                    <a:cs typeface="Arial" panose="020B0604020202020204" pitchFamily="34" charset="0"/>
+                  </a:rPr>
+                  <a:t>más</a:t>
+                </a:r>
+                <a:r>
+                  <a:rPr lang="en-US" sz="1000" dirty="0">
+                    <a:latin typeface="Arial" panose="020B0604020202020204" pitchFamily="34" charset="0"/>
+                    <a:cs typeface="Arial" panose="020B0604020202020204" pitchFamily="34" charset="0"/>
+                  </a:rPr>
+                  <a:t> </a:t>
+                </a:r>
+                <a:r>
+                  <a:rPr lang="en-US" sz="1000" dirty="0" err="1">
+                    <a:latin typeface="Arial" panose="020B0604020202020204" pitchFamily="34" charset="0"/>
+                    <a:cs typeface="Arial" panose="020B0604020202020204" pitchFamily="34" charset="0"/>
+                  </a:rPr>
+                  <a:t>potencia</a:t>
+                </a:r>
+                <a:r>
+                  <a:rPr lang="en-US" sz="1000" dirty="0">
+                    <a:latin typeface="Arial" panose="020B0604020202020204" pitchFamily="34" charset="0"/>
+                    <a:cs typeface="Arial" panose="020B0604020202020204" pitchFamily="34" charset="0"/>
+                  </a:rPr>
+                  <a:t> </a:t>
+                </a:r>
+                <a:r>
+                  <a:rPr lang="en-US" sz="1000" dirty="0" err="1">
+                    <a:latin typeface="Arial" panose="020B0604020202020204" pitchFamily="34" charset="0"/>
+                    <a:cs typeface="Arial" panose="020B0604020202020204" pitchFamily="34" charset="0"/>
+                  </a:rPr>
+                  <a:t>que</a:t>
+                </a:r>
+                <a:r>
+                  <a:rPr lang="en-US" sz="1000" dirty="0">
+                    <a:latin typeface="Arial" panose="020B0604020202020204" pitchFamily="34" charset="0"/>
+                    <a:cs typeface="Arial" panose="020B0604020202020204" pitchFamily="34" charset="0"/>
+                  </a:rPr>
+                  <a:t> </a:t>
+                </a:r>
+                <a:r>
+                  <a:rPr lang="en-US" sz="1000" dirty="0" err="1">
+                    <a:latin typeface="Arial" panose="020B0604020202020204" pitchFamily="34" charset="0"/>
+                    <a:cs typeface="Arial" panose="020B0604020202020204" pitchFamily="34" charset="0"/>
+                  </a:rPr>
+                  <a:t>por</a:t>
+                </a:r>
+                <a:r>
+                  <a:rPr lang="en-US" sz="1000" dirty="0">
+                    <a:latin typeface="Arial" panose="020B0604020202020204" pitchFamily="34" charset="0"/>
+                    <a:cs typeface="Arial" panose="020B0604020202020204" pitchFamily="34" charset="0"/>
+                  </a:rPr>
+                  <a:t> la </a:t>
+                </a:r>
+                <a:r>
+                  <a:rPr lang="en-US" sz="1000" dirty="0" err="1">
+                    <a:latin typeface="Arial" panose="020B0604020202020204" pitchFamily="34" charset="0"/>
+                    <a:cs typeface="Arial" panose="020B0604020202020204" pitchFamily="34" charset="0"/>
+                  </a:rPr>
+                  <a:t>otra</a:t>
+                </a:r>
+                <a:r>
+                  <a:rPr lang="en-US" sz="1000" dirty="0">
+                    <a:latin typeface="Arial" panose="020B0604020202020204" pitchFamily="34" charset="0"/>
+                    <a:cs typeface="Arial" panose="020B0604020202020204" pitchFamily="34" charset="0"/>
+                  </a:rPr>
+                  <a:t>) </a:t>
+                </a:r>
+                <a:r>
+                  <a:rPr lang="en-US" sz="1000" dirty="0" err="1">
+                    <a:latin typeface="Arial" panose="020B0604020202020204" pitchFamily="34" charset="0"/>
+                    <a:cs typeface="Arial" panose="020B0604020202020204" pitchFamily="34" charset="0"/>
+                  </a:rPr>
+                  <a:t>debido</a:t>
+                </a:r>
+                <a:r>
+                  <a:rPr lang="en-US" sz="1000" dirty="0">
+                    <a:latin typeface="Arial" panose="020B0604020202020204" pitchFamily="34" charset="0"/>
+                    <a:cs typeface="Arial" panose="020B0604020202020204" pitchFamily="34" charset="0"/>
+                  </a:rPr>
+                  <a:t> a la </a:t>
+                </a:r>
+                <a:r>
+                  <a:rPr lang="en-US" sz="1000" dirty="0" err="1">
+                    <a:latin typeface="Arial" panose="020B0604020202020204" pitchFamily="34" charset="0"/>
+                    <a:cs typeface="Arial" panose="020B0604020202020204" pitchFamily="34" charset="0"/>
+                  </a:rPr>
+                  <a:t>posición</a:t>
+                </a:r>
+                <a:r>
+                  <a:rPr lang="en-US" sz="1000" dirty="0">
+                    <a:latin typeface="Arial" panose="020B0604020202020204" pitchFamily="34" charset="0"/>
+                    <a:cs typeface="Arial" panose="020B0604020202020204" pitchFamily="34" charset="0"/>
+                  </a:rPr>
+                  <a:t> </a:t>
+                </a:r>
+                <a:r>
+                  <a:rPr lang="en-US" sz="1000" dirty="0" err="1">
+                    <a:latin typeface="Arial" panose="020B0604020202020204" pitchFamily="34" charset="0"/>
+                    <a:cs typeface="Arial" panose="020B0604020202020204" pitchFamily="34" charset="0"/>
+                  </a:rPr>
+                  <a:t>descentrada</a:t>
+                </a:r>
+                <a:r>
+                  <a:rPr lang="en-US" sz="1000" dirty="0">
+                    <a:latin typeface="Arial" panose="020B0604020202020204" pitchFamily="34" charset="0"/>
+                    <a:cs typeface="Arial" panose="020B0604020202020204" pitchFamily="34" charset="0"/>
+                  </a:rPr>
+                  <a:t> de la entrada, </a:t>
+                </a:r>
+                <a:r>
+                  <a:rPr lang="en-US" sz="1000" dirty="0" err="1">
+                    <a:latin typeface="Arial" panose="020B0604020202020204" pitchFamily="34" charset="0"/>
+                    <a:cs typeface="Arial" panose="020B0604020202020204" pitchFamily="34" charset="0"/>
+                  </a:rPr>
+                  <a:t>rompiendo</a:t>
+                </a:r>
+                <a:r>
+                  <a:rPr lang="en-US" sz="1000" dirty="0">
+                    <a:latin typeface="Arial" panose="020B0604020202020204" pitchFamily="34" charset="0"/>
+                    <a:cs typeface="Arial" panose="020B0604020202020204" pitchFamily="34" charset="0"/>
+                  </a:rPr>
+                  <a:t> la </a:t>
+                </a:r>
+                <a:r>
+                  <a:rPr lang="en-US" sz="1000" dirty="0" err="1">
+                    <a:latin typeface="Arial" panose="020B0604020202020204" pitchFamily="34" charset="0"/>
+                    <a:cs typeface="Arial" panose="020B0604020202020204" pitchFamily="34" charset="0"/>
+                  </a:rPr>
+                  <a:t>simetría</a:t>
+                </a:r>
+                <a:r>
+                  <a:rPr lang="en-US" sz="1000" dirty="0">
+                    <a:latin typeface="Arial" panose="020B0604020202020204" pitchFamily="34" charset="0"/>
+                    <a:cs typeface="Arial" panose="020B0604020202020204" pitchFamily="34" charset="0"/>
+                  </a:rPr>
+                  <a:t> del </a:t>
+                </a:r>
+                <a:r>
+                  <a:rPr lang="en-US" sz="1000" dirty="0" err="1">
+                    <a:latin typeface="Arial" panose="020B0604020202020204" pitchFamily="34" charset="0"/>
+                    <a:cs typeface="Arial" panose="020B0604020202020204" pitchFamily="34" charset="0"/>
+                  </a:rPr>
+                  <a:t>dispositivo</a:t>
+                </a:r>
+                <a:r>
+                  <a:rPr lang="en-US" sz="1000" dirty="0">
+                    <a:latin typeface="Arial" panose="020B0604020202020204" pitchFamily="34" charset="0"/>
+                    <a:cs typeface="Arial" panose="020B0604020202020204" pitchFamily="34" charset="0"/>
+                  </a:rPr>
+                  <a:t>.</a:t>
+                </a:r>
+              </a:p>
+              <a:p>
+                <a:pPr algn="just"/>
+                <a:endParaRPr lang="en-US" sz="1000" dirty="0">
+                  <a:latin typeface="Arial" panose="020B0604020202020204" pitchFamily="34" charset="0"/>
+                  <a:cs typeface="Arial" panose="020B0604020202020204" pitchFamily="34" charset="0"/>
+                </a:endParaRPr>
+              </a:p>
+              <a:p>
+                <a:pPr algn="just"/>
+                <a:r>
+                  <a:rPr lang="es-ES" sz="1000" dirty="0">
+                    <a:latin typeface="Arial" panose="020B0604020202020204" pitchFamily="34" charset="0"/>
+                    <a:cs typeface="Arial" panose="020B0604020202020204" pitchFamily="34" charset="0"/>
+                  </a:rPr>
+                  <a:t>Por último, en comparación con el </a:t>
+                </a:r>
+                <a:r>
+                  <a:rPr lang="es-ES" sz="1000" i="1" dirty="0" err="1">
+                    <a:latin typeface="Arial" panose="020B0604020202020204" pitchFamily="34" charset="0"/>
+                    <a:cs typeface="Arial" panose="020B0604020202020204" pitchFamily="34" charset="0"/>
+                  </a:rPr>
+                  <a:t>directional</a:t>
+                </a:r>
+                <a:r>
+                  <a:rPr lang="es-ES" sz="1000" i="1" dirty="0">
+                    <a:latin typeface="Arial" panose="020B0604020202020204" pitchFamily="34" charset="0"/>
+                    <a:cs typeface="Arial" panose="020B0604020202020204" pitchFamily="34" charset="0"/>
+                  </a:rPr>
+                  <a:t> </a:t>
+                </a:r>
+                <a:r>
+                  <a:rPr lang="es-ES" sz="1000" i="1" dirty="0" err="1">
+                    <a:latin typeface="Arial" panose="020B0604020202020204" pitchFamily="34" charset="0"/>
+                    <a:cs typeface="Arial" panose="020B0604020202020204" pitchFamily="34" charset="0"/>
+                  </a:rPr>
+                  <a:t>coupler</a:t>
+                </a:r>
+                <a:r>
+                  <a:rPr lang="es-ES" sz="1000" dirty="0">
+                    <a:latin typeface="Arial" panose="020B0604020202020204" pitchFamily="34" charset="0"/>
+                    <a:cs typeface="Arial" panose="020B0604020202020204" pitchFamily="34" charset="0"/>
+                  </a:rPr>
+                  <a:t>, este último basa su funcionamiento en el acoplo evanescente entre dos guías y puede diseñarse para obtener un reparto 50/50, aunque es muy sensible a parámetros críticos como el </a:t>
+                </a:r>
+                <a:r>
+                  <a:rPr lang="es-ES" sz="1000" i="1" dirty="0">
+                    <a:latin typeface="Arial" panose="020B0604020202020204" pitchFamily="34" charset="0"/>
+                    <a:cs typeface="Arial" panose="020B0604020202020204" pitchFamily="34" charset="0"/>
+                  </a:rPr>
+                  <a:t>gap</a:t>
+                </a:r>
+                <a:r>
+                  <a:rPr lang="es-ES" sz="1000" dirty="0">
+                    <a:latin typeface="Arial" panose="020B0604020202020204" pitchFamily="34" charset="0"/>
+                    <a:cs typeface="Arial" panose="020B0604020202020204" pitchFamily="34" charset="0"/>
+                  </a:rPr>
+                  <a:t> y la longitud del dispositivo. En cambio, el MMI se basa en interferencia multimodo, lo que lo hace más robusto frente a variaciones geométricas y de fabricación.</a:t>
+                </a:r>
+              </a:p>
+              <a:p>
+                <a:pPr algn="just"/>
+                <a:endParaRPr lang="en-US" sz="1200" dirty="0">
+                  <a:latin typeface="Arial" panose="020B0604020202020204" pitchFamily="34" charset="0"/>
+                  <a:cs typeface="Arial" panose="020B0604020202020204" pitchFamily="34" charset="0"/>
+                </a:endParaRPr>
+              </a:p>
+            </p:txBody>
+          </p:sp>
+        </mc:Choice>
+        <mc:Fallback>
+          <p:sp>
+            <p:nvSpPr>
+              <p:cNvPr id="2" name="CuadroTexto 1">
+                <a:extLst>
+                  <a:ext uri="{FF2B5EF4-FFF2-40B4-BE49-F238E27FC236}">
+                    <a16:creationId xmlns:a16="http://schemas.microsoft.com/office/drawing/2014/main" id="{329D122E-5098-7A1E-EC3C-23ED5C05C8F7}"/>
+                  </a:ext>
+                </a:extLst>
+              </p:cNvPr>
+              <p:cNvSpPr txBox="1">
+                <a:spLocks noRot="1" noChangeAspect="1" noMove="1" noResize="1" noEditPoints="1" noAdjustHandles="1" noChangeArrowheads="1" noChangeShapeType="1" noTextEdit="1"/>
+              </p:cNvSpPr>
+              <p:nvPr/>
+            </p:nvSpPr>
+            <p:spPr>
+              <a:xfrm>
+                <a:off x="583019" y="1524000"/>
+                <a:ext cx="11199971" cy="2646878"/>
+              </a:xfrm>
+              <a:prstGeom prst="rect">
+                <a:avLst/>
+              </a:prstGeom>
+              <a:blipFill>
+                <a:blip r:embed="rId4"/>
+                <a:stretch>
+                  <a:fillRect/>
+                </a:stretch>
+              </a:blipFill>
+              <a:ln w="28575">
+                <a:solidFill>
+                  <a:srgbClr val="E0700D"/>
+                </a:solidFill>
+              </a:ln>
+            </p:spPr>
+            <p:txBody>
+              <a:bodyPr/>
+              <a:lstStyle/>
+              <a:p>
+                <a:r>
+                  <a:rPr lang="es-ES">
+                    <a:noFill/>
+                  </a:rPr>
+                  <a:t> </a:t>
+                </a:r>
+              </a:p>
+            </p:txBody>
+          </p:sp>
+        </mc:Fallback>
+      </mc:AlternateContent>
+    </p:spTree>
+    <p:extLst>
+      <p:ext uri="{BB962C8B-B14F-4D97-AF65-F5344CB8AC3E}">
+        <p14:creationId xmlns:p14="http://schemas.microsoft.com/office/powerpoint/2010/main" val="1497317086"/>
+      </p:ext>
+    </p:extLst>
+  </p:cSld>
+  <p:clrMapOvr>
+    <a:masterClrMapping/>
+  </p:clrMapOvr>
+</p:sld>
+</file>
+
+<file path=ppt/slides/slide19.xml><?xml version="1.0" encoding="utf-8"?>
 <p:sld xmlns:a="http://schemas.openxmlformats.org/drawingml/2006/main" xmlns:r="http://schemas.openxmlformats.org/officeDocument/2006/relationships" xmlns:p="http://schemas.openxmlformats.org/presentationml/2006/main">
   <p:cSld>
     <p:spTree>
@@ -9553,7 +11034,7 @@
           <a:p>
             <a:fld id="{B6F15528-21DE-4FAA-801E-634DDDAF4B2B}" type="slidenum">
               <a:rPr lang="es-ES" smtClean="0"/>
-              <a:t>18</a:t>
+              <a:t>19</a:t>
             </a:fld>
             <a:endParaRPr lang="es-ES"/>
           </a:p>
@@ -9595,96 +11076,6 @@
       </p:sp>
       <p:sp>
         <p:nvSpPr>
-          <p:cNvPr id="2" name="CuadroTexto 1">
-            <a:extLst>
-              <a:ext uri="{FF2B5EF4-FFF2-40B4-BE49-F238E27FC236}">
-                <a16:creationId xmlns:a16="http://schemas.microsoft.com/office/drawing/2014/main" id="{43D7D9E5-DAC3-2BB8-7377-826863CBAD4E}"/>
-              </a:ext>
-            </a:extLst>
-          </p:cNvPr>
-          <p:cNvSpPr txBox="1"/>
-          <p:nvPr/>
-        </p:nvSpPr>
-        <p:spPr>
-          <a:xfrm>
-            <a:off x="609441" y="4819471"/>
-            <a:ext cx="11199971" cy="1384995"/>
-          </a:xfrm>
-          <a:prstGeom prst="rect">
-            <a:avLst/>
-          </a:prstGeom>
-          <a:solidFill>
-            <a:schemeClr val="bg1">
-              <a:lumMod val="95000"/>
-            </a:schemeClr>
-          </a:solidFill>
-          <a:ln w="28575">
-            <a:solidFill>
-              <a:srgbClr val="E0700D"/>
-            </a:solidFill>
-          </a:ln>
-        </p:spPr>
-        <p:txBody>
-          <a:bodyPr wrap="square" rtlCol="0">
-            <a:spAutoFit/>
-          </a:bodyPr>
-          <a:lstStyle/>
-          <a:p>
-            <a:pPr algn="just"/>
-            <a:r>
-              <a:rPr lang="en-US" sz="1200" dirty="0">
-                <a:latin typeface="Arial" panose="020B0604020202020204" pitchFamily="34" charset="0"/>
-                <a:cs typeface="Arial" panose="020B0604020202020204" pitchFamily="34" charset="0"/>
-              </a:rPr>
-              <a:t>Comment results</a:t>
-            </a:r>
-          </a:p>
-          <a:p>
-            <a:pPr algn="just"/>
-            <a:endParaRPr lang="en-US" sz="1200" dirty="0">
-              <a:latin typeface="Arial" panose="020B0604020202020204" pitchFamily="34" charset="0"/>
-              <a:cs typeface="Arial" panose="020B0604020202020204" pitchFamily="34" charset="0"/>
-            </a:endParaRPr>
-          </a:p>
-          <a:p>
-            <a:pPr algn="just"/>
-            <a:endParaRPr lang="en-US" sz="1200" dirty="0">
-              <a:latin typeface="Arial" panose="020B0604020202020204" pitchFamily="34" charset="0"/>
-              <a:cs typeface="Arial" panose="020B0604020202020204" pitchFamily="34" charset="0"/>
-            </a:endParaRPr>
-          </a:p>
-          <a:p>
-            <a:pPr algn="just"/>
-            <a:endParaRPr lang="en-US" sz="1200" dirty="0">
-              <a:latin typeface="Arial" panose="020B0604020202020204" pitchFamily="34" charset="0"/>
-              <a:cs typeface="Arial" panose="020B0604020202020204" pitchFamily="34" charset="0"/>
-            </a:endParaRPr>
-          </a:p>
-          <a:p>
-            <a:pPr algn="just"/>
-            <a:endParaRPr lang="en-US" sz="1200" dirty="0">
-              <a:latin typeface="Arial" panose="020B0604020202020204" pitchFamily="34" charset="0"/>
-              <a:cs typeface="Arial" panose="020B0604020202020204" pitchFamily="34" charset="0"/>
-            </a:endParaRPr>
-          </a:p>
-          <a:p>
-            <a:pPr algn="just"/>
-            <a:endParaRPr lang="en-US" sz="1200" dirty="0">
-              <a:latin typeface="Arial" panose="020B0604020202020204" pitchFamily="34" charset="0"/>
-              <a:cs typeface="Arial" panose="020B0604020202020204" pitchFamily="34" charset="0"/>
-            </a:endParaRPr>
-          </a:p>
-          <a:p>
-            <a:pPr algn="just"/>
-            <a:endParaRPr lang="en-US" sz="1200" dirty="0">
-              <a:latin typeface="Arial" panose="020B0604020202020204" pitchFamily="34" charset="0"/>
-              <a:cs typeface="Arial" panose="020B0604020202020204" pitchFamily="34" charset="0"/>
-            </a:endParaRPr>
-          </a:p>
-        </p:txBody>
-      </p:sp>
-      <p:sp>
-        <p:nvSpPr>
           <p:cNvPr id="7" name="Rectángulo 6">
             <a:extLst>
               <a:ext uri="{FF2B5EF4-FFF2-40B4-BE49-F238E27FC236}">
@@ -9698,7 +11089,7 @@
         <p:spPr>
           <a:xfrm>
             <a:off x="609441" y="1377510"/>
-            <a:ext cx="11199971" cy="3306028"/>
+            <a:ext cx="11199971" cy="3118290"/>
           </a:xfrm>
           <a:prstGeom prst="rect">
             <a:avLst/>
@@ -9735,225 +11126,12 @@
           </a:p>
         </p:txBody>
       </p:sp>
-      <p:sp>
-        <p:nvSpPr>
-          <p:cNvPr id="8" name="CuadroTexto 7">
-            <a:extLst>
-              <a:ext uri="{FF2B5EF4-FFF2-40B4-BE49-F238E27FC236}">
-                <a16:creationId xmlns:a16="http://schemas.microsoft.com/office/drawing/2014/main" id="{643565A9-7DB6-D6EE-152F-2852C8BA7986}"/>
-              </a:ext>
-            </a:extLst>
-          </p:cNvPr>
-          <p:cNvSpPr txBox="1"/>
-          <p:nvPr/>
-        </p:nvSpPr>
-        <p:spPr>
-          <a:xfrm>
-            <a:off x="640245" y="1942909"/>
-            <a:ext cx="11199972" cy="2708434"/>
-          </a:xfrm>
-          <a:prstGeom prst="rect">
-            <a:avLst/>
-          </a:prstGeom>
-          <a:noFill/>
-        </p:spPr>
-        <p:txBody>
-          <a:bodyPr wrap="square" rtlCol="0">
-            <a:spAutoFit/>
-          </a:bodyPr>
-          <a:lstStyle/>
-          <a:p>
-            <a:pPr algn="ctr"/>
-            <a:r>
-              <a:rPr lang="en-US" b="1" dirty="0"/>
-              <a:t>deep</a:t>
-            </a:r>
-            <a:r>
-              <a:rPr lang="en-US" dirty="0"/>
-              <a:t> waveguide</a:t>
-            </a:r>
-          </a:p>
-          <a:p>
-            <a:pPr algn="ctr"/>
-            <a:endParaRPr lang="en-US" dirty="0"/>
-          </a:p>
-          <a:p>
-            <a:pPr algn="ctr"/>
-            <a:r>
-              <a:rPr lang="en-US" dirty="0"/>
-              <a:t>Paste propagation plot and console results</a:t>
-            </a:r>
-          </a:p>
-          <a:p>
-            <a:pPr algn="ctr"/>
-            <a:endParaRPr lang="en-US" dirty="0"/>
-          </a:p>
-          <a:p>
-            <a:pPr algn="ctr"/>
-            <a:endParaRPr lang="en-US" dirty="0"/>
-          </a:p>
-          <a:p>
-            <a:pPr algn="r"/>
-            <a:r>
-              <a:rPr lang="en-US" sz="1600" b="1" dirty="0"/>
-              <a:t>Target</a:t>
-            </a:r>
-            <a:r>
-              <a:rPr lang="en-US" sz="1600" dirty="0"/>
-              <a:t>: make equal ratio over outputs (even if not 0.5) and minimize excess loss (even if not 0.0 dB)</a:t>
-            </a:r>
-          </a:p>
-          <a:p>
-            <a:pPr algn="r"/>
-            <a:r>
-              <a:rPr lang="en-US" sz="1600" dirty="0"/>
-              <a:t>With same settings of previous LO, now adjust try to manually optimize the MMI by changing iteratively:</a:t>
-            </a:r>
-          </a:p>
-          <a:p>
-            <a:pPr algn="r"/>
-            <a:r>
-              <a:rPr lang="en-US" sz="1600" dirty="0"/>
-              <a:t>- Change </a:t>
-            </a:r>
-            <a:r>
-              <a:rPr lang="en-US" sz="1600" dirty="0" err="1"/>
-              <a:t>dL_MMI</a:t>
-            </a:r>
-            <a:endParaRPr lang="en-US" sz="1600" dirty="0"/>
-          </a:p>
-          <a:p>
-            <a:pPr algn="r"/>
-            <a:r>
-              <a:rPr lang="en-US" sz="1600" dirty="0"/>
-              <a:t>- Change I/O waveguide position +/- </a:t>
-            </a:r>
-            <a:r>
-              <a:rPr lang="en-US" sz="1600" dirty="0" err="1"/>
-              <a:t>dy</a:t>
-            </a:r>
-            <a:endParaRPr lang="en-US" sz="1600" dirty="0"/>
-          </a:p>
-          <a:p>
-            <a:pPr algn="r"/>
-            <a:r>
-              <a:rPr lang="en-US" sz="1600" b="1" dirty="0"/>
-              <a:t>Hints</a:t>
-            </a:r>
-            <a:r>
-              <a:rPr lang="en-US" sz="1600" dirty="0"/>
-              <a:t>: observe the 2D EME propagation results to guide you to the best settings of a) and b).</a:t>
-            </a:r>
-          </a:p>
-        </p:txBody>
-      </p:sp>
-    </p:spTree>
-    <p:extLst>
-      <p:ext uri="{BB962C8B-B14F-4D97-AF65-F5344CB8AC3E}">
-        <p14:creationId xmlns:p14="http://schemas.microsoft.com/office/powerpoint/2010/main" val="2685215753"/>
-      </p:ext>
-    </p:extLst>
-  </p:cSld>
-  <p:clrMapOvr>
-    <a:masterClrMapping/>
-  </p:clrMapOvr>
-</p:sld>
-</file>
-
-<file path=ppt/slides/slide19.xml><?xml version="1.0" encoding="utf-8"?>
-<p:sld xmlns:a="http://schemas.openxmlformats.org/drawingml/2006/main" xmlns:r="http://schemas.openxmlformats.org/officeDocument/2006/relationships" xmlns:p="http://schemas.openxmlformats.org/presentationml/2006/main">
-  <p:cSld>
-    <p:spTree>
-      <p:nvGrpSpPr>
-        <p:cNvPr id="1" name="">
-          <a:extLst>
-            <a:ext uri="{FF2B5EF4-FFF2-40B4-BE49-F238E27FC236}">
-              <a16:creationId xmlns:a16="http://schemas.microsoft.com/office/drawing/2014/main" id="{F32A9819-E058-DC4F-FB99-88F20442D9F4}"/>
-            </a:ext>
-          </a:extLst>
-        </p:cNvPr>
-        <p:cNvGrpSpPr/>
-        <p:nvPr/>
-      </p:nvGrpSpPr>
-      <p:grpSpPr>
-        <a:xfrm>
-          <a:off x="0" y="0"/>
-          <a:ext cx="0" cy="0"/>
-          <a:chOff x="0" y="0"/>
-          <a:chExt cx="0" cy="0"/>
-        </a:xfrm>
-      </p:grpSpPr>
-      <p:sp>
-        <p:nvSpPr>
-          <p:cNvPr id="16" name="object 16">
-            <a:extLst>
-              <a:ext uri="{FF2B5EF4-FFF2-40B4-BE49-F238E27FC236}">
-                <a16:creationId xmlns:a16="http://schemas.microsoft.com/office/drawing/2014/main" id="{E1662E38-DE72-ADF3-A38E-08ED40DCC2AD}"/>
-              </a:ext>
-            </a:extLst>
-          </p:cNvPr>
-          <p:cNvSpPr txBox="1">
-            <a:spLocks noGrp="1"/>
-          </p:cNvSpPr>
-          <p:nvPr>
-            <p:ph type="title"/>
-          </p:nvPr>
-        </p:nvSpPr>
-        <p:spPr>
-          <a:xfrm>
-            <a:off x="685800" y="408883"/>
-            <a:ext cx="10994410" cy="705321"/>
-          </a:xfrm>
-          <a:prstGeom prst="rect">
-            <a:avLst/>
-          </a:prstGeom>
-        </p:spPr>
-        <p:txBody>
-          <a:bodyPr vert="horz" wrap="square" lIns="0" tIns="12700" rIns="0" bIns="0" rtlCol="0">
-            <a:spAutoFit/>
-          </a:bodyPr>
-          <a:lstStyle/>
-          <a:p>
-            <a:pPr marL="12700">
-              <a:lnSpc>
-                <a:spcPct val="100000"/>
-              </a:lnSpc>
-              <a:spcBef>
-                <a:spcPts val="100"/>
-              </a:spcBef>
-            </a:pPr>
-            <a:r>
-              <a:rPr lang="en-US" sz="2500" dirty="0"/>
-              <a:t>Learning outcome #6.3 – 2x2 Multimode Interference Coupler – Optimization (II)</a:t>
-            </a:r>
-            <a:br>
-              <a:rPr lang="en-US" sz="2500" dirty="0"/>
-            </a:br>
-            <a:r>
-              <a:rPr lang="en-US" b="0" dirty="0"/>
-              <a:t>Wavelength 1.55 µm, </a:t>
-            </a:r>
-            <a:r>
-              <a:rPr lang="en-US" b="0" dirty="0" err="1"/>
-              <a:t>wMMI</a:t>
-            </a:r>
-            <a:r>
-              <a:rPr lang="en-US" b="0" dirty="0"/>
-              <a:t> = 6.6 µm</a:t>
-            </a:r>
-            <a:endParaRPr lang="en-US" sz="2500" b="0" dirty="0">
-              <a:latin typeface="+mj-lt"/>
-              <a:cs typeface="Lucida Sans"/>
-            </a:endParaRPr>
-          </a:p>
-        </p:txBody>
-      </p:sp>
       <p:pic>
         <p:nvPicPr>
-          <p:cNvPr id="83" name="Gráfico 82">
+          <p:cNvPr id="9" name="Imagen 8">
             <a:extLst>
               <a:ext uri="{FF2B5EF4-FFF2-40B4-BE49-F238E27FC236}">
-                <a16:creationId xmlns:a16="http://schemas.microsoft.com/office/drawing/2014/main" id="{1CD4B005-DA76-DF7C-8A51-CA16DFD2CA3A}"/>
+                <a16:creationId xmlns:a16="http://schemas.microsoft.com/office/drawing/2014/main" id="{18853588-9BAA-91C4-4A79-9F54CC5E87EE}"/>
               </a:ext>
             </a:extLst>
           </p:cNvPr>
@@ -9963,21 +11141,45 @@
           <p:nvPr/>
         </p:nvPicPr>
         <p:blipFill>
-          <a:blip>
-            <a:extLst>
-              <a:ext uri="{96DAC541-7B7A-43D3-8B79-37D633B846F1}">
-                <asvg:svgBlip xmlns:asvg="http://schemas.microsoft.com/office/drawing/2016/SVG/main" r:embed="rId3"/>
-              </a:ext>
-            </a:extLst>
-          </a:blip>
+          <a:blip r:embed="rId4"/>
           <a:stretch>
             <a:fillRect/>
           </a:stretch>
         </p:blipFill>
         <p:spPr>
           <a:xfrm>
-            <a:off x="5045006" y="6356057"/>
-            <a:ext cx="6409575" cy="363174"/>
+            <a:off x="807216" y="1582438"/>
+            <a:ext cx="6545384" cy="2708434"/>
+          </a:xfrm>
+          <a:prstGeom prst="rect">
+            <a:avLst/>
+          </a:prstGeom>
+        </p:spPr>
+      </p:pic>
+      <p:pic>
+        <p:nvPicPr>
+          <p:cNvPr id="11" name="Imagen 10">
+            <a:extLst>
+              <a:ext uri="{FF2B5EF4-FFF2-40B4-BE49-F238E27FC236}">
+                <a16:creationId xmlns:a16="http://schemas.microsoft.com/office/drawing/2014/main" id="{063740EB-B0BA-1AC4-E18F-09B193AD0D9C}"/>
+              </a:ext>
+            </a:extLst>
+          </p:cNvPr>
+          <p:cNvPicPr>
+            <a:picLocks noChangeAspect="1"/>
+          </p:cNvPicPr>
+          <p:nvPr/>
+        </p:nvPicPr>
+        <p:blipFill>
+          <a:blip r:embed="rId5"/>
+          <a:stretch>
+            <a:fillRect/>
+          </a:stretch>
+        </p:blipFill>
+        <p:spPr>
+          <a:xfrm>
+            <a:off x="7550375" y="1582438"/>
+            <a:ext cx="3522530" cy="2708434"/>
           </a:xfrm>
           <a:prstGeom prst="rect">
             <a:avLst/>
@@ -9986,73 +11188,10 @@
       </p:pic>
       <p:sp>
         <p:nvSpPr>
-          <p:cNvPr id="84" name="Marcador de número de diapositiva 83">
+          <p:cNvPr id="12" name="CuadroTexto 11">
             <a:extLst>
               <a:ext uri="{FF2B5EF4-FFF2-40B4-BE49-F238E27FC236}">
-                <a16:creationId xmlns:a16="http://schemas.microsoft.com/office/drawing/2014/main" id="{0B06F952-20FD-3223-6AB8-83339507AFE8}"/>
-              </a:ext>
-            </a:extLst>
-          </p:cNvPr>
-          <p:cNvSpPr>
-            <a:spLocks noGrp="1"/>
-          </p:cNvSpPr>
-          <p:nvPr>
-            <p:ph type="sldNum" sz="quarter" idx="7"/>
-          </p:nvPr>
-        </p:nvSpPr>
-        <p:spPr/>
-        <p:txBody>
-          <a:bodyPr/>
-          <a:lstStyle/>
-          <a:p>
-            <a:fld id="{B6F15528-21DE-4FAA-801E-634DDDAF4B2B}" type="slidenum">
-              <a:rPr lang="es-ES" smtClean="0"/>
-              <a:t>19</a:t>
-            </a:fld>
-            <a:endParaRPr lang="es-ES"/>
-          </a:p>
-        </p:txBody>
-      </p:sp>
-      <p:sp>
-        <p:nvSpPr>
-          <p:cNvPr id="3" name="Marcador de pie de página 2">
-            <a:extLst>
-              <a:ext uri="{FF2B5EF4-FFF2-40B4-BE49-F238E27FC236}">
-                <a16:creationId xmlns:a16="http://schemas.microsoft.com/office/drawing/2014/main" id="{8B06152F-2A2C-A19B-581F-494FDFF33752}"/>
-              </a:ext>
-            </a:extLst>
-          </p:cNvPr>
-          <p:cNvSpPr>
-            <a:spLocks noGrp="1"/>
-          </p:cNvSpPr>
-          <p:nvPr>
-            <p:ph type="ftr" sz="quarter" idx="5"/>
-          </p:nvPr>
-        </p:nvSpPr>
-        <p:spPr/>
-        <p:txBody>
-          <a:bodyPr/>
-          <a:lstStyle/>
-          <a:p>
-            <a:pPr marL="12700">
-              <a:spcBef>
-                <a:spcPts val="15"/>
-              </a:spcBef>
-            </a:pPr>
-            <a:r>
-              <a:rPr lang="es-ES" spc="-5"/>
-              <a:t>LAB 2.0. COUPLERS</a:t>
-            </a:r>
-            <a:endParaRPr lang="es-ES" spc="-5" dirty="0"/>
-          </a:p>
-        </p:txBody>
-      </p:sp>
-      <p:sp>
-        <p:nvSpPr>
-          <p:cNvPr id="2" name="CuadroTexto 1">
-            <a:extLst>
-              <a:ext uri="{FF2B5EF4-FFF2-40B4-BE49-F238E27FC236}">
-                <a16:creationId xmlns:a16="http://schemas.microsoft.com/office/drawing/2014/main" id="{EF5B7948-A25A-9043-7061-DD15A9023924}"/>
+                <a16:creationId xmlns:a16="http://schemas.microsoft.com/office/drawing/2014/main" id="{59F653BA-AA38-729C-92F0-6C88B2EF6A8F}"/>
               </a:ext>
             </a:extLst>
           </p:cNvPr>
@@ -10061,8 +11200,8 @@
         </p:nvSpPr>
         <p:spPr>
           <a:xfrm>
-            <a:off x="609441" y="4819471"/>
-            <a:ext cx="11199971" cy="1384995"/>
+            <a:off x="609440" y="4603352"/>
+            <a:ext cx="11199971" cy="1569660"/>
           </a:xfrm>
           <a:prstGeom prst="rect">
             <a:avLst/>
@@ -10086,11 +11225,640 @@
           <a:p>
             <a:pPr algn="just"/>
             <a:r>
-              <a:rPr lang="en-US" sz="1200" dirty="0">
+              <a:rPr lang="en-US" sz="1200" b="1" i="1" dirty="0">
                 <a:latin typeface="Arial" panose="020B0604020202020204" pitchFamily="34" charset="0"/>
                 <a:cs typeface="Arial" panose="020B0604020202020204" pitchFamily="34" charset="0"/>
               </a:rPr>
               <a:t>Comment results</a:t>
+            </a:r>
+          </a:p>
+          <a:p>
+            <a:pPr algn="just"/>
+            <a:endParaRPr lang="en-US" sz="1000" dirty="0">
+              <a:latin typeface="Arial" panose="020B0604020202020204" pitchFamily="34" charset="0"/>
+              <a:cs typeface="Arial" panose="020B0604020202020204" pitchFamily="34" charset="0"/>
+            </a:endParaRPr>
+          </a:p>
+          <a:p>
+            <a:pPr algn="just"/>
+            <a:r>
+              <a:rPr lang="en-US" sz="1000" dirty="0">
+                <a:latin typeface="Arial" panose="020B0604020202020204" pitchFamily="34" charset="0"/>
+                <a:cs typeface="Arial" panose="020B0604020202020204" pitchFamily="34" charset="0"/>
+              </a:rPr>
+              <a:t>En </a:t>
+            </a:r>
+            <a:r>
+              <a:rPr lang="en-US" sz="1000" dirty="0" err="1">
+                <a:latin typeface="Arial" panose="020B0604020202020204" pitchFamily="34" charset="0"/>
+                <a:cs typeface="Arial" panose="020B0604020202020204" pitchFamily="34" charset="0"/>
+              </a:rPr>
+              <a:t>este</a:t>
+            </a:r>
+            <a:r>
+              <a:rPr lang="en-US" sz="1000" dirty="0">
+                <a:latin typeface="Arial" panose="020B0604020202020204" pitchFamily="34" charset="0"/>
+                <a:cs typeface="Arial" panose="020B0604020202020204" pitchFamily="34" charset="0"/>
+              </a:rPr>
+              <a:t> </a:t>
+            </a:r>
+            <a:r>
+              <a:rPr lang="en-US" sz="1000" dirty="0" err="1">
+                <a:latin typeface="Arial" panose="020B0604020202020204" pitchFamily="34" charset="0"/>
+                <a:cs typeface="Arial" panose="020B0604020202020204" pitchFamily="34" charset="0"/>
+              </a:rPr>
+              <a:t>caso</a:t>
+            </a:r>
+            <a:r>
+              <a:rPr lang="en-US" sz="1000" dirty="0">
+                <a:latin typeface="Arial" panose="020B0604020202020204" pitchFamily="34" charset="0"/>
+                <a:cs typeface="Arial" panose="020B0604020202020204" pitchFamily="34" charset="0"/>
+              </a:rPr>
+              <a:t>, se ha </a:t>
+            </a:r>
+            <a:r>
+              <a:rPr lang="en-US" sz="1000" dirty="0" err="1">
+                <a:latin typeface="Arial" panose="020B0604020202020204" pitchFamily="34" charset="0"/>
+                <a:cs typeface="Arial" panose="020B0604020202020204" pitchFamily="34" charset="0"/>
+              </a:rPr>
+              <a:t>realizado</a:t>
+            </a:r>
+            <a:r>
+              <a:rPr lang="en-US" sz="1000" dirty="0">
+                <a:latin typeface="Arial" panose="020B0604020202020204" pitchFamily="34" charset="0"/>
+                <a:cs typeface="Arial" panose="020B0604020202020204" pitchFamily="34" charset="0"/>
+              </a:rPr>
+              <a:t> </a:t>
+            </a:r>
+            <a:r>
+              <a:rPr lang="en-US" sz="1000" dirty="0" err="1">
+                <a:latin typeface="Arial" panose="020B0604020202020204" pitchFamily="34" charset="0"/>
+                <a:cs typeface="Arial" panose="020B0604020202020204" pitchFamily="34" charset="0"/>
+              </a:rPr>
+              <a:t>una</a:t>
+            </a:r>
+            <a:r>
+              <a:rPr lang="en-US" sz="1000" dirty="0">
+                <a:latin typeface="Arial" panose="020B0604020202020204" pitchFamily="34" charset="0"/>
+                <a:cs typeface="Arial" panose="020B0604020202020204" pitchFamily="34" charset="0"/>
+              </a:rPr>
+              <a:t> </a:t>
+            </a:r>
+            <a:r>
+              <a:rPr lang="en-US" sz="1000" dirty="0" err="1">
+                <a:latin typeface="Arial" panose="020B0604020202020204" pitchFamily="34" charset="0"/>
+                <a:cs typeface="Arial" panose="020B0604020202020204" pitchFamily="34" charset="0"/>
+              </a:rPr>
+              <a:t>optimización</a:t>
+            </a:r>
+            <a:r>
+              <a:rPr lang="en-US" sz="1000" dirty="0">
+                <a:latin typeface="Arial" panose="020B0604020202020204" pitchFamily="34" charset="0"/>
+                <a:cs typeface="Arial" panose="020B0604020202020204" pitchFamily="34" charset="0"/>
+              </a:rPr>
+              <a:t> manual del </a:t>
+            </a:r>
+            <a:r>
+              <a:rPr lang="en-US" sz="1000" dirty="0" err="1">
+                <a:latin typeface="Arial" panose="020B0604020202020204" pitchFamily="34" charset="0"/>
+                <a:cs typeface="Arial" panose="020B0604020202020204" pitchFamily="34" charset="0"/>
+              </a:rPr>
+              <a:t>acoplador</a:t>
+            </a:r>
+            <a:r>
+              <a:rPr lang="en-US" sz="1000" dirty="0">
+                <a:latin typeface="Arial" panose="020B0604020202020204" pitchFamily="34" charset="0"/>
+                <a:cs typeface="Arial" panose="020B0604020202020204" pitchFamily="34" charset="0"/>
+              </a:rPr>
+              <a:t>, </a:t>
+            </a:r>
+            <a:r>
+              <a:rPr lang="en-US" sz="1000" dirty="0" err="1">
+                <a:latin typeface="Arial" panose="020B0604020202020204" pitchFamily="34" charset="0"/>
+                <a:cs typeface="Arial" panose="020B0604020202020204" pitchFamily="34" charset="0"/>
+              </a:rPr>
+              <a:t>ajustando</a:t>
+            </a:r>
+            <a:r>
+              <a:rPr lang="en-US" sz="1000" dirty="0">
+                <a:latin typeface="Arial" panose="020B0604020202020204" pitchFamily="34" charset="0"/>
+                <a:cs typeface="Arial" panose="020B0604020202020204" pitchFamily="34" charset="0"/>
+              </a:rPr>
+              <a:t> </a:t>
+            </a:r>
+            <a:r>
+              <a:rPr lang="en-US" sz="1000" dirty="0" err="1">
+                <a:latin typeface="Arial" panose="020B0604020202020204" pitchFamily="34" charset="0"/>
+                <a:cs typeface="Arial" panose="020B0604020202020204" pitchFamily="34" charset="0"/>
+              </a:rPr>
+              <a:t>los</a:t>
+            </a:r>
+            <a:r>
+              <a:rPr lang="en-US" sz="1000" dirty="0">
+                <a:latin typeface="Arial" panose="020B0604020202020204" pitchFamily="34" charset="0"/>
+                <a:cs typeface="Arial" panose="020B0604020202020204" pitchFamily="34" charset="0"/>
+              </a:rPr>
+              <a:t> </a:t>
+            </a:r>
+            <a:r>
+              <a:rPr lang="en-US" sz="1000" dirty="0" err="1">
+                <a:latin typeface="Arial" panose="020B0604020202020204" pitchFamily="34" charset="0"/>
+                <a:cs typeface="Arial" panose="020B0604020202020204" pitchFamily="34" charset="0"/>
+              </a:rPr>
+              <a:t>parámetros</a:t>
+            </a:r>
+            <a:r>
+              <a:rPr lang="en-US" sz="1000" dirty="0">
+                <a:latin typeface="Arial" panose="020B0604020202020204" pitchFamily="34" charset="0"/>
+                <a:cs typeface="Arial" panose="020B0604020202020204" pitchFamily="34" charset="0"/>
+              </a:rPr>
+              <a:t> </a:t>
+            </a:r>
+            <a:r>
+              <a:rPr lang="en-US" sz="1000" dirty="0" err="1">
+                <a:latin typeface="Arial" panose="020B0604020202020204" pitchFamily="34" charset="0"/>
+                <a:cs typeface="Arial" panose="020B0604020202020204" pitchFamily="34" charset="0"/>
+              </a:rPr>
+              <a:t>dy</a:t>
+            </a:r>
+            <a:r>
+              <a:rPr lang="en-US" sz="1000" dirty="0">
+                <a:latin typeface="Arial" panose="020B0604020202020204" pitchFamily="34" charset="0"/>
+                <a:cs typeface="Arial" panose="020B0604020202020204" pitchFamily="34" charset="0"/>
+              </a:rPr>
+              <a:t> y </a:t>
+            </a:r>
+            <a:r>
+              <a:rPr lang="en-US" sz="1000" dirty="0" err="1">
+                <a:latin typeface="Arial" panose="020B0604020202020204" pitchFamily="34" charset="0"/>
+                <a:cs typeface="Arial" panose="020B0604020202020204" pitchFamily="34" charset="0"/>
+              </a:rPr>
+              <a:t>dL_MMI</a:t>
+            </a:r>
+            <a:r>
+              <a:rPr lang="en-US" sz="1000" dirty="0">
+                <a:latin typeface="Arial" panose="020B0604020202020204" pitchFamily="34" charset="0"/>
+                <a:cs typeface="Arial" panose="020B0604020202020204" pitchFamily="34" charset="0"/>
+              </a:rPr>
+              <a:t> para </a:t>
+            </a:r>
+            <a:r>
+              <a:rPr lang="en-US" sz="1000" dirty="0" err="1">
+                <a:latin typeface="Arial" panose="020B0604020202020204" pitchFamily="34" charset="0"/>
+                <a:cs typeface="Arial" panose="020B0604020202020204" pitchFamily="34" charset="0"/>
+              </a:rPr>
+              <a:t>mejorar</a:t>
+            </a:r>
+            <a:r>
+              <a:rPr lang="en-US" sz="1000" dirty="0">
+                <a:latin typeface="Arial" panose="020B0604020202020204" pitchFamily="34" charset="0"/>
+                <a:cs typeface="Arial" panose="020B0604020202020204" pitchFamily="34" charset="0"/>
+              </a:rPr>
+              <a:t> </a:t>
+            </a:r>
+            <a:r>
+              <a:rPr lang="en-US" sz="1000" dirty="0" err="1">
+                <a:latin typeface="Arial" panose="020B0604020202020204" pitchFamily="34" charset="0"/>
+                <a:cs typeface="Arial" panose="020B0604020202020204" pitchFamily="34" charset="0"/>
+              </a:rPr>
+              <a:t>el</a:t>
+            </a:r>
+            <a:r>
+              <a:rPr lang="en-US" sz="1000" dirty="0">
+                <a:latin typeface="Arial" panose="020B0604020202020204" pitchFamily="34" charset="0"/>
+                <a:cs typeface="Arial" panose="020B0604020202020204" pitchFamily="34" charset="0"/>
+              </a:rPr>
+              <a:t> </a:t>
+            </a:r>
+            <a:r>
+              <a:rPr lang="en-US" sz="1000" dirty="0" err="1">
+                <a:latin typeface="Arial" panose="020B0604020202020204" pitchFamily="34" charset="0"/>
+                <a:cs typeface="Arial" panose="020B0604020202020204" pitchFamily="34" charset="0"/>
+              </a:rPr>
+              <a:t>reparto</a:t>
+            </a:r>
+            <a:r>
+              <a:rPr lang="en-US" sz="1000" dirty="0">
+                <a:latin typeface="Arial" panose="020B0604020202020204" pitchFamily="34" charset="0"/>
+                <a:cs typeface="Arial" panose="020B0604020202020204" pitchFamily="34" charset="0"/>
+              </a:rPr>
+              <a:t> de </a:t>
+            </a:r>
+            <a:r>
+              <a:rPr lang="en-US" sz="1000" dirty="0" err="1">
+                <a:latin typeface="Arial" panose="020B0604020202020204" pitchFamily="34" charset="0"/>
+                <a:cs typeface="Arial" panose="020B0604020202020204" pitchFamily="34" charset="0"/>
+              </a:rPr>
+              <a:t>potencia</a:t>
+            </a:r>
+            <a:r>
+              <a:rPr lang="en-US" sz="1000" dirty="0">
+                <a:latin typeface="Arial" panose="020B0604020202020204" pitchFamily="34" charset="0"/>
+                <a:cs typeface="Arial" panose="020B0604020202020204" pitchFamily="34" charset="0"/>
+              </a:rPr>
+              <a:t> entre las </a:t>
+            </a:r>
+            <a:r>
+              <a:rPr lang="en-US" sz="1000" dirty="0" err="1">
+                <a:latin typeface="Arial" panose="020B0604020202020204" pitchFamily="34" charset="0"/>
+                <a:cs typeface="Arial" panose="020B0604020202020204" pitchFamily="34" charset="0"/>
+              </a:rPr>
+              <a:t>salidas</a:t>
+            </a:r>
+            <a:r>
+              <a:rPr lang="en-US" sz="1000" dirty="0">
+                <a:latin typeface="Arial" panose="020B0604020202020204" pitchFamily="34" charset="0"/>
+                <a:cs typeface="Arial" panose="020B0604020202020204" pitchFamily="34" charset="0"/>
+              </a:rPr>
+              <a:t> y </a:t>
+            </a:r>
+            <a:r>
+              <a:rPr lang="en-US" sz="1000" dirty="0" err="1">
+                <a:latin typeface="Arial" panose="020B0604020202020204" pitchFamily="34" charset="0"/>
+                <a:cs typeface="Arial" panose="020B0604020202020204" pitchFamily="34" charset="0"/>
+              </a:rPr>
+              <a:t>reducir</a:t>
+            </a:r>
+            <a:r>
+              <a:rPr lang="en-US" sz="1000" dirty="0">
+                <a:latin typeface="Arial" panose="020B0604020202020204" pitchFamily="34" charset="0"/>
+                <a:cs typeface="Arial" panose="020B0604020202020204" pitchFamily="34" charset="0"/>
+              </a:rPr>
+              <a:t> las </a:t>
+            </a:r>
+            <a:r>
+              <a:rPr lang="en-US" sz="1000" dirty="0" err="1">
+                <a:latin typeface="Arial" panose="020B0604020202020204" pitchFamily="34" charset="0"/>
+                <a:cs typeface="Arial" panose="020B0604020202020204" pitchFamily="34" charset="0"/>
+              </a:rPr>
+              <a:t>pérdidas</a:t>
+            </a:r>
+            <a:r>
+              <a:rPr lang="en-US" sz="1000" dirty="0">
+                <a:latin typeface="Arial" panose="020B0604020202020204" pitchFamily="34" charset="0"/>
+                <a:cs typeface="Arial" panose="020B0604020202020204" pitchFamily="34" charset="0"/>
+              </a:rPr>
+              <a:t>. </a:t>
+            </a:r>
+          </a:p>
+          <a:p>
+            <a:pPr algn="just"/>
+            <a:endParaRPr lang="en-US" sz="1000" dirty="0">
+              <a:latin typeface="Arial" panose="020B0604020202020204" pitchFamily="34" charset="0"/>
+              <a:cs typeface="Arial" panose="020B0604020202020204" pitchFamily="34" charset="0"/>
+            </a:endParaRPr>
+          </a:p>
+          <a:p>
+            <a:pPr algn="just"/>
+            <a:r>
+              <a:rPr lang="en-US" sz="1000" dirty="0">
+                <a:latin typeface="Arial" panose="020B0604020202020204" pitchFamily="34" charset="0"/>
+                <a:cs typeface="Arial" panose="020B0604020202020204" pitchFamily="34" charset="0"/>
+              </a:rPr>
+              <a:t>Tras </a:t>
+            </a:r>
+            <a:r>
+              <a:rPr lang="en-US" sz="1000" dirty="0" err="1">
+                <a:latin typeface="Arial" panose="020B0604020202020204" pitchFamily="34" charset="0"/>
+                <a:cs typeface="Arial" panose="020B0604020202020204" pitchFamily="34" charset="0"/>
+              </a:rPr>
+              <a:t>varias</a:t>
+            </a:r>
+            <a:r>
+              <a:rPr lang="en-US" sz="1000" dirty="0">
+                <a:latin typeface="Arial" panose="020B0604020202020204" pitchFamily="34" charset="0"/>
+                <a:cs typeface="Arial" panose="020B0604020202020204" pitchFamily="34" charset="0"/>
+              </a:rPr>
+              <a:t> </a:t>
+            </a:r>
+            <a:r>
+              <a:rPr lang="en-US" sz="1000" dirty="0" err="1">
+                <a:latin typeface="Arial" panose="020B0604020202020204" pitchFamily="34" charset="0"/>
+                <a:cs typeface="Arial" panose="020B0604020202020204" pitchFamily="34" charset="0"/>
+              </a:rPr>
+              <a:t>iteraciones</a:t>
+            </a:r>
+            <a:r>
+              <a:rPr lang="en-US" sz="1000" dirty="0">
+                <a:latin typeface="Arial" panose="020B0604020202020204" pitchFamily="34" charset="0"/>
+                <a:cs typeface="Arial" panose="020B0604020202020204" pitchFamily="34" charset="0"/>
+              </a:rPr>
+              <a:t>, se ha </a:t>
+            </a:r>
+            <a:r>
+              <a:rPr lang="en-US" sz="1000" dirty="0" err="1">
+                <a:latin typeface="Arial" panose="020B0604020202020204" pitchFamily="34" charset="0"/>
+                <a:cs typeface="Arial" panose="020B0604020202020204" pitchFamily="34" charset="0"/>
+              </a:rPr>
+              <a:t>conseguido</a:t>
+            </a:r>
+            <a:r>
+              <a:rPr lang="en-US" sz="1000" dirty="0">
+                <a:latin typeface="Arial" panose="020B0604020202020204" pitchFamily="34" charset="0"/>
+                <a:cs typeface="Arial" panose="020B0604020202020204" pitchFamily="34" charset="0"/>
+              </a:rPr>
+              <a:t> un </a:t>
+            </a:r>
+            <a:r>
+              <a:rPr lang="en-US" sz="1000" dirty="0" err="1">
+                <a:latin typeface="Arial" panose="020B0604020202020204" pitchFamily="34" charset="0"/>
+                <a:cs typeface="Arial" panose="020B0604020202020204" pitchFamily="34" charset="0"/>
+              </a:rPr>
+              <a:t>reparto</a:t>
+            </a:r>
+            <a:r>
+              <a:rPr lang="en-US" sz="1000" dirty="0">
+                <a:latin typeface="Arial" panose="020B0604020202020204" pitchFamily="34" charset="0"/>
+                <a:cs typeface="Arial" panose="020B0604020202020204" pitchFamily="34" charset="0"/>
+              </a:rPr>
+              <a:t> de </a:t>
+            </a:r>
+            <a:r>
+              <a:rPr lang="en-US" sz="1000" dirty="0" err="1">
+                <a:latin typeface="Arial" panose="020B0604020202020204" pitchFamily="34" charset="0"/>
+                <a:cs typeface="Arial" panose="020B0604020202020204" pitchFamily="34" charset="0"/>
+              </a:rPr>
+              <a:t>potencia</a:t>
+            </a:r>
+            <a:r>
+              <a:rPr lang="en-US" sz="1000" dirty="0">
+                <a:latin typeface="Arial" panose="020B0604020202020204" pitchFamily="34" charset="0"/>
+                <a:cs typeface="Arial" panose="020B0604020202020204" pitchFamily="34" charset="0"/>
+              </a:rPr>
+              <a:t> </a:t>
+            </a:r>
+            <a:r>
+              <a:rPr lang="en-US" sz="1000" dirty="0" err="1">
+                <a:latin typeface="Arial" panose="020B0604020202020204" pitchFamily="34" charset="0"/>
+                <a:cs typeface="Arial" panose="020B0604020202020204" pitchFamily="34" charset="0"/>
+              </a:rPr>
+              <a:t>prácticamente</a:t>
+            </a:r>
+            <a:r>
+              <a:rPr lang="en-US" sz="1000" dirty="0">
+                <a:latin typeface="Arial" panose="020B0604020202020204" pitchFamily="34" charset="0"/>
+                <a:cs typeface="Arial" panose="020B0604020202020204" pitchFamily="34" charset="0"/>
+              </a:rPr>
+              <a:t> </a:t>
+            </a:r>
+            <a:r>
+              <a:rPr lang="en-US" sz="1000" dirty="0" err="1">
+                <a:latin typeface="Arial" panose="020B0604020202020204" pitchFamily="34" charset="0"/>
+                <a:cs typeface="Arial" panose="020B0604020202020204" pitchFamily="34" charset="0"/>
+              </a:rPr>
+              <a:t>equitativo</a:t>
+            </a:r>
+            <a:r>
+              <a:rPr lang="en-US" sz="1000" dirty="0">
+                <a:latin typeface="Arial" panose="020B0604020202020204" pitchFamily="34" charset="0"/>
+                <a:cs typeface="Arial" panose="020B0604020202020204" pitchFamily="34" charset="0"/>
+              </a:rPr>
+              <a:t> (0.5/0.49), con </a:t>
+            </a:r>
+            <a:r>
+              <a:rPr lang="en-US" sz="1000" dirty="0" err="1">
+                <a:latin typeface="Arial" panose="020B0604020202020204" pitchFamily="34" charset="0"/>
+                <a:cs typeface="Arial" panose="020B0604020202020204" pitchFamily="34" charset="0"/>
+              </a:rPr>
+              <a:t>unas</a:t>
+            </a:r>
+            <a:r>
+              <a:rPr lang="en-US" sz="1000" dirty="0">
+                <a:latin typeface="Arial" panose="020B0604020202020204" pitchFamily="34" charset="0"/>
+                <a:cs typeface="Arial" panose="020B0604020202020204" pitchFamily="34" charset="0"/>
+              </a:rPr>
+              <a:t> </a:t>
+            </a:r>
+            <a:r>
+              <a:rPr lang="en-US" sz="1000" dirty="0" err="1">
+                <a:latin typeface="Arial" panose="020B0604020202020204" pitchFamily="34" charset="0"/>
+                <a:cs typeface="Arial" panose="020B0604020202020204" pitchFamily="34" charset="0"/>
+              </a:rPr>
+              <a:t>pérdidas</a:t>
+            </a:r>
+            <a:r>
+              <a:rPr lang="en-US" sz="1000" dirty="0">
+                <a:latin typeface="Arial" panose="020B0604020202020204" pitchFamily="34" charset="0"/>
+                <a:cs typeface="Arial" panose="020B0604020202020204" pitchFamily="34" charset="0"/>
+              </a:rPr>
+              <a:t> de 0.33 </a:t>
+            </a:r>
+            <a:r>
+              <a:rPr lang="en-US" sz="1000" dirty="0" err="1">
+                <a:latin typeface="Arial" panose="020B0604020202020204" pitchFamily="34" charset="0"/>
+                <a:cs typeface="Arial" panose="020B0604020202020204" pitchFamily="34" charset="0"/>
+              </a:rPr>
+              <a:t>dB.</a:t>
+            </a:r>
+            <a:r>
+              <a:rPr lang="en-US" sz="1000" dirty="0">
+                <a:latin typeface="Arial" panose="020B0604020202020204" pitchFamily="34" charset="0"/>
+                <a:cs typeface="Arial" panose="020B0604020202020204" pitchFamily="34" charset="0"/>
+              </a:rPr>
+              <a:t> Este </a:t>
+            </a:r>
+            <a:r>
+              <a:rPr lang="en-US" sz="1000" dirty="0" err="1">
+                <a:latin typeface="Arial" panose="020B0604020202020204" pitchFamily="34" charset="0"/>
+                <a:cs typeface="Arial" panose="020B0604020202020204" pitchFamily="34" charset="0"/>
+              </a:rPr>
+              <a:t>resultado</a:t>
+            </a:r>
+            <a:r>
+              <a:rPr lang="en-US" sz="1000" dirty="0">
+                <a:latin typeface="Arial" panose="020B0604020202020204" pitchFamily="34" charset="0"/>
+                <a:cs typeface="Arial" panose="020B0604020202020204" pitchFamily="34" charset="0"/>
+              </a:rPr>
+              <a:t> se </a:t>
+            </a:r>
+            <a:r>
+              <a:rPr lang="en-US" sz="1000" dirty="0" err="1">
+                <a:latin typeface="Arial" panose="020B0604020202020204" pitchFamily="34" charset="0"/>
+                <a:cs typeface="Arial" panose="020B0604020202020204" pitchFamily="34" charset="0"/>
+              </a:rPr>
+              <a:t>obtiene</a:t>
+            </a:r>
+            <a:r>
+              <a:rPr lang="en-US" sz="1000" dirty="0">
+                <a:latin typeface="Arial" panose="020B0604020202020204" pitchFamily="34" charset="0"/>
+                <a:cs typeface="Arial" panose="020B0604020202020204" pitchFamily="34" charset="0"/>
+              </a:rPr>
+              <a:t> para </a:t>
+            </a:r>
+            <a:r>
+              <a:rPr lang="en-US" sz="1000" dirty="0" err="1">
+                <a:latin typeface="Arial" panose="020B0604020202020204" pitchFamily="34" charset="0"/>
+                <a:cs typeface="Arial" panose="020B0604020202020204" pitchFamily="34" charset="0"/>
+              </a:rPr>
+              <a:t>valores</a:t>
+            </a:r>
+            <a:r>
+              <a:rPr lang="en-US" sz="1000" dirty="0">
+                <a:latin typeface="Arial" panose="020B0604020202020204" pitchFamily="34" charset="0"/>
+                <a:cs typeface="Arial" panose="020B0604020202020204" pitchFamily="34" charset="0"/>
+              </a:rPr>
+              <a:t> de </a:t>
+            </a:r>
+            <a:r>
+              <a:rPr lang="en-US" sz="1000" dirty="0" err="1">
+                <a:latin typeface="Arial" panose="020B0604020202020204" pitchFamily="34" charset="0"/>
+                <a:cs typeface="Arial" panose="020B0604020202020204" pitchFamily="34" charset="0"/>
+              </a:rPr>
+              <a:t>dy</a:t>
+            </a:r>
+            <a:r>
+              <a:rPr lang="en-US" sz="1000" dirty="0">
+                <a:latin typeface="Arial" panose="020B0604020202020204" pitchFamily="34" charset="0"/>
+                <a:cs typeface="Arial" panose="020B0604020202020204" pitchFamily="34" charset="0"/>
+              </a:rPr>
+              <a:t> = 0.09 y </a:t>
+            </a:r>
+            <a:r>
+              <a:rPr lang="en-US" sz="1000" dirty="0" err="1">
+                <a:latin typeface="Arial" panose="020B0604020202020204" pitchFamily="34" charset="0"/>
+                <a:cs typeface="Arial" panose="020B0604020202020204" pitchFamily="34" charset="0"/>
+              </a:rPr>
+              <a:t>dL_MMI</a:t>
+            </a:r>
+            <a:r>
+              <a:rPr lang="en-US" sz="1000" dirty="0">
+                <a:latin typeface="Arial" panose="020B0604020202020204" pitchFamily="34" charset="0"/>
+                <a:cs typeface="Arial" panose="020B0604020202020204" pitchFamily="34" charset="0"/>
+              </a:rPr>
+              <a:t> = -0.8. Se </a:t>
+            </a:r>
+            <a:r>
+              <a:rPr lang="en-US" sz="1000" dirty="0" err="1">
+                <a:latin typeface="Arial" panose="020B0604020202020204" pitchFamily="34" charset="0"/>
+                <a:cs typeface="Arial" panose="020B0604020202020204" pitchFamily="34" charset="0"/>
+              </a:rPr>
+              <a:t>observa</a:t>
+            </a:r>
+            <a:r>
+              <a:rPr lang="en-US" sz="1000" dirty="0">
+                <a:latin typeface="Arial" panose="020B0604020202020204" pitchFamily="34" charset="0"/>
+                <a:cs typeface="Arial" panose="020B0604020202020204" pitchFamily="34" charset="0"/>
+              </a:rPr>
+              <a:t> </a:t>
+            </a:r>
+            <a:r>
+              <a:rPr lang="en-US" sz="1000" dirty="0" err="1">
+                <a:latin typeface="Arial" panose="020B0604020202020204" pitchFamily="34" charset="0"/>
+                <a:cs typeface="Arial" panose="020B0604020202020204" pitchFamily="34" charset="0"/>
+              </a:rPr>
+              <a:t>que</a:t>
+            </a:r>
+            <a:r>
+              <a:rPr lang="en-US" sz="1000" dirty="0">
+                <a:latin typeface="Arial" panose="020B0604020202020204" pitchFamily="34" charset="0"/>
+                <a:cs typeface="Arial" panose="020B0604020202020204" pitchFamily="34" charset="0"/>
+              </a:rPr>
+              <a:t> </a:t>
+            </a:r>
+            <a:r>
+              <a:rPr lang="en-US" sz="1000" dirty="0" err="1">
+                <a:latin typeface="Arial" panose="020B0604020202020204" pitchFamily="34" charset="0"/>
+                <a:cs typeface="Arial" panose="020B0604020202020204" pitchFamily="34" charset="0"/>
+              </a:rPr>
+              <a:t>pequeños</a:t>
+            </a:r>
+            <a:r>
+              <a:rPr lang="en-US" sz="1000" dirty="0">
+                <a:latin typeface="Arial" panose="020B0604020202020204" pitchFamily="34" charset="0"/>
+                <a:cs typeface="Arial" panose="020B0604020202020204" pitchFamily="34" charset="0"/>
+              </a:rPr>
+              <a:t> </a:t>
+            </a:r>
+            <a:r>
+              <a:rPr lang="en-US" sz="1000" dirty="0" err="1">
+                <a:latin typeface="Arial" panose="020B0604020202020204" pitchFamily="34" charset="0"/>
+                <a:cs typeface="Arial" panose="020B0604020202020204" pitchFamily="34" charset="0"/>
+              </a:rPr>
+              <a:t>ajustes</a:t>
+            </a:r>
+            <a:r>
+              <a:rPr lang="en-US" sz="1000" dirty="0">
+                <a:latin typeface="Arial" panose="020B0604020202020204" pitchFamily="34" charset="0"/>
+                <a:cs typeface="Arial" panose="020B0604020202020204" pitchFamily="34" charset="0"/>
+              </a:rPr>
+              <a:t> </a:t>
+            </a:r>
+            <a:r>
+              <a:rPr lang="en-US" sz="1000" dirty="0" err="1">
+                <a:latin typeface="Arial" panose="020B0604020202020204" pitchFamily="34" charset="0"/>
+                <a:cs typeface="Arial" panose="020B0604020202020204" pitchFamily="34" charset="0"/>
+              </a:rPr>
+              <a:t>en</a:t>
+            </a:r>
+            <a:r>
+              <a:rPr lang="en-US" sz="1000" dirty="0">
+                <a:latin typeface="Arial" panose="020B0604020202020204" pitchFamily="34" charset="0"/>
+                <a:cs typeface="Arial" panose="020B0604020202020204" pitchFamily="34" charset="0"/>
+              </a:rPr>
+              <a:t> la </a:t>
+            </a:r>
+            <a:r>
+              <a:rPr lang="en-US" sz="1000" dirty="0" err="1">
+                <a:latin typeface="Arial" panose="020B0604020202020204" pitchFamily="34" charset="0"/>
+                <a:cs typeface="Arial" panose="020B0604020202020204" pitchFamily="34" charset="0"/>
+              </a:rPr>
+              <a:t>posición</a:t>
+            </a:r>
+            <a:r>
+              <a:rPr lang="en-US" sz="1000" dirty="0">
+                <a:latin typeface="Arial" panose="020B0604020202020204" pitchFamily="34" charset="0"/>
+                <a:cs typeface="Arial" panose="020B0604020202020204" pitchFamily="34" charset="0"/>
+              </a:rPr>
+              <a:t> de las </a:t>
+            </a:r>
+            <a:r>
+              <a:rPr lang="en-US" sz="1000" dirty="0" err="1">
+                <a:latin typeface="Arial" panose="020B0604020202020204" pitchFamily="34" charset="0"/>
+                <a:cs typeface="Arial" panose="020B0604020202020204" pitchFamily="34" charset="0"/>
+              </a:rPr>
+              <a:t>guías</a:t>
+            </a:r>
+            <a:r>
+              <a:rPr lang="en-US" sz="1000" dirty="0">
+                <a:latin typeface="Arial" panose="020B0604020202020204" pitchFamily="34" charset="0"/>
+                <a:cs typeface="Arial" panose="020B0604020202020204" pitchFamily="34" charset="0"/>
+              </a:rPr>
+              <a:t> (</a:t>
+            </a:r>
+            <a:r>
+              <a:rPr lang="en-US" sz="1000" dirty="0" err="1">
+                <a:latin typeface="Arial" panose="020B0604020202020204" pitchFamily="34" charset="0"/>
+                <a:cs typeface="Arial" panose="020B0604020202020204" pitchFamily="34" charset="0"/>
+              </a:rPr>
+              <a:t>dy</a:t>
+            </a:r>
+            <a:r>
+              <a:rPr lang="en-US" sz="1000" dirty="0">
+                <a:latin typeface="Arial" panose="020B0604020202020204" pitchFamily="34" charset="0"/>
+                <a:cs typeface="Arial" panose="020B0604020202020204" pitchFamily="34" charset="0"/>
+              </a:rPr>
+              <a:t>) </a:t>
+            </a:r>
+            <a:r>
+              <a:rPr lang="es-ES" sz="1000" dirty="0">
+                <a:latin typeface="Arial" panose="020B0604020202020204" pitchFamily="34" charset="0"/>
+                <a:cs typeface="Arial" panose="020B0604020202020204" pitchFamily="34" charset="0"/>
+              </a:rPr>
+              <a:t>permiten mejorar la simetría del acoplo, mientras que la longitud efectiva del MMI (</a:t>
+            </a:r>
+            <a:r>
+              <a:rPr lang="es-ES" sz="1000" i="1" dirty="0" err="1">
+                <a:latin typeface="Arial" panose="020B0604020202020204" pitchFamily="34" charset="0"/>
+                <a:cs typeface="Arial" panose="020B0604020202020204" pitchFamily="34" charset="0"/>
+              </a:rPr>
+              <a:t>dL_MMI</a:t>
+            </a:r>
+            <a:r>
+              <a:rPr lang="es-ES" sz="1000" dirty="0">
+                <a:latin typeface="Arial" panose="020B0604020202020204" pitchFamily="34" charset="0"/>
+                <a:cs typeface="Arial" panose="020B0604020202020204" pitchFamily="34" charset="0"/>
+              </a:rPr>
+              <a:t>) influye en la formación de las autoimágenes, afectando directamente al reparto de potencia en las salidas.</a:t>
             </a:r>
           </a:p>
           <a:p>
@@ -10107,198 +11875,12 @@
               <a:cs typeface="Arial" panose="020B0604020202020204" pitchFamily="34" charset="0"/>
             </a:endParaRPr>
           </a:p>
-          <a:p>
-            <a:pPr algn="just"/>
-            <a:endParaRPr lang="en-US" sz="1200" dirty="0">
-              <a:latin typeface="Arial" panose="020B0604020202020204" pitchFamily="34" charset="0"/>
-              <a:cs typeface="Arial" panose="020B0604020202020204" pitchFamily="34" charset="0"/>
-            </a:endParaRPr>
-          </a:p>
-          <a:p>
-            <a:pPr algn="just"/>
-            <a:endParaRPr lang="en-US" sz="1200" dirty="0">
-              <a:latin typeface="Arial" panose="020B0604020202020204" pitchFamily="34" charset="0"/>
-              <a:cs typeface="Arial" panose="020B0604020202020204" pitchFamily="34" charset="0"/>
-            </a:endParaRPr>
-          </a:p>
-          <a:p>
-            <a:pPr algn="just"/>
-            <a:endParaRPr lang="en-US" sz="1200" dirty="0">
-              <a:latin typeface="Arial" panose="020B0604020202020204" pitchFamily="34" charset="0"/>
-              <a:cs typeface="Arial" panose="020B0604020202020204" pitchFamily="34" charset="0"/>
-            </a:endParaRPr>
-          </a:p>
-          <a:p>
-            <a:pPr algn="just"/>
-            <a:endParaRPr lang="en-US" sz="1200" dirty="0">
-              <a:latin typeface="Arial" panose="020B0604020202020204" pitchFamily="34" charset="0"/>
-              <a:cs typeface="Arial" panose="020B0604020202020204" pitchFamily="34" charset="0"/>
-            </a:endParaRPr>
-          </a:p>
-        </p:txBody>
-      </p:sp>
-      <p:sp>
-        <p:nvSpPr>
-          <p:cNvPr id="7" name="Rectángulo 6">
-            <a:extLst>
-              <a:ext uri="{FF2B5EF4-FFF2-40B4-BE49-F238E27FC236}">
-                <a16:creationId xmlns:a16="http://schemas.microsoft.com/office/drawing/2014/main" id="{C8036B97-F577-1F3C-3CE2-BD45F7D1FFC2}"/>
-              </a:ext>
-            </a:extLst>
-          </p:cNvPr>
-          <p:cNvSpPr/>
-          <p:nvPr/>
-        </p:nvSpPr>
-        <p:spPr>
-          <a:xfrm>
-            <a:off x="609441" y="1377510"/>
-            <a:ext cx="11199971" cy="3306028"/>
-          </a:xfrm>
-          <a:prstGeom prst="rect">
-            <a:avLst/>
-          </a:prstGeom>
-          <a:noFill/>
-          <a:ln w="28575">
-            <a:solidFill>
-              <a:srgbClr val="E0700D"/>
-            </a:solidFill>
-          </a:ln>
-        </p:spPr>
-        <p:style>
-          <a:lnRef idx="2">
-            <a:schemeClr val="accent1">
-              <a:shade val="15000"/>
-            </a:schemeClr>
-          </a:lnRef>
-          <a:fillRef idx="1">
-            <a:schemeClr val="accent1"/>
-          </a:fillRef>
-          <a:effectRef idx="0">
-            <a:schemeClr val="accent1"/>
-          </a:effectRef>
-          <a:fontRef idx="minor">
-            <a:schemeClr val="lt1"/>
-          </a:fontRef>
-        </p:style>
-        <p:txBody>
-          <a:bodyPr rtlCol="0" anchor="ctr"/>
-          <a:lstStyle/>
-          <a:p>
-            <a:pPr algn="ctr"/>
-            <a:endParaRPr lang="en-US"/>
-          </a:p>
-        </p:txBody>
-      </p:sp>
-      <p:sp>
-        <p:nvSpPr>
-          <p:cNvPr id="8" name="CuadroTexto 7">
-            <a:extLst>
-              <a:ext uri="{FF2B5EF4-FFF2-40B4-BE49-F238E27FC236}">
-                <a16:creationId xmlns:a16="http://schemas.microsoft.com/office/drawing/2014/main" id="{B0CFB20A-64F3-A296-71E8-F4FA17D35314}"/>
-              </a:ext>
-            </a:extLst>
-          </p:cNvPr>
-          <p:cNvSpPr txBox="1"/>
-          <p:nvPr/>
-        </p:nvSpPr>
-        <p:spPr>
-          <a:xfrm>
-            <a:off x="640245" y="1942909"/>
-            <a:ext cx="11199972" cy="2708434"/>
-          </a:xfrm>
-          <a:prstGeom prst="rect">
-            <a:avLst/>
-          </a:prstGeom>
-          <a:noFill/>
-        </p:spPr>
-        <p:txBody>
-          <a:bodyPr wrap="square" rtlCol="0">
-            <a:spAutoFit/>
-          </a:bodyPr>
-          <a:lstStyle/>
-          <a:p>
-            <a:pPr algn="ctr"/>
-            <a:r>
-              <a:rPr lang="en-US" b="1" dirty="0"/>
-              <a:t>deep</a:t>
-            </a:r>
-            <a:r>
-              <a:rPr lang="en-US" dirty="0"/>
-              <a:t> waveguide</a:t>
-            </a:r>
-          </a:p>
-          <a:p>
-            <a:pPr algn="ctr"/>
-            <a:endParaRPr lang="en-US" dirty="0"/>
-          </a:p>
-          <a:p>
-            <a:pPr algn="ctr"/>
-            <a:r>
-              <a:rPr lang="en-US" dirty="0"/>
-              <a:t>Paste propagation plot and console results</a:t>
-            </a:r>
-          </a:p>
-          <a:p>
-            <a:pPr algn="ctr"/>
-            <a:endParaRPr lang="en-US" dirty="0"/>
-          </a:p>
-          <a:p>
-            <a:pPr algn="ctr"/>
-            <a:endParaRPr lang="en-US" dirty="0"/>
-          </a:p>
-          <a:p>
-            <a:pPr algn="r"/>
-            <a:r>
-              <a:rPr lang="en-US" sz="1600" b="1" dirty="0"/>
-              <a:t>Target</a:t>
-            </a:r>
-            <a:r>
-              <a:rPr lang="en-US" sz="1600" dirty="0"/>
-              <a:t>: make ratio over outputs 0.5 + excess loss &lt; 0.1 dB</a:t>
-            </a:r>
-          </a:p>
-          <a:p>
-            <a:pPr algn="r"/>
-            <a:r>
-              <a:rPr lang="en-US" sz="1600" dirty="0"/>
-              <a:t>With same settings of previous LO, now modify the notebook so I/O waveguides have a different width. </a:t>
-            </a:r>
-          </a:p>
-          <a:p>
-            <a:pPr algn="r"/>
-            <a:r>
-              <a:rPr lang="en-US" sz="1600" u="sng" dirty="0"/>
-              <a:t>- The nominal I/O waveguide width you have been using is 1.0 µm, increase it.</a:t>
-            </a:r>
-          </a:p>
-          <a:p>
-            <a:pPr algn="r"/>
-            <a:r>
-              <a:rPr lang="en-US" sz="1600" b="1" dirty="0"/>
-              <a:t>(Warning</a:t>
-            </a:r>
-            <a:r>
-              <a:rPr lang="en-US" sz="1600" dirty="0"/>
-              <a:t>! Every time you change the I/O waveguide width you have to re-run modes calculation)</a:t>
-            </a:r>
-          </a:p>
-          <a:p>
-            <a:pPr algn="r"/>
-            <a:r>
-              <a:rPr lang="en-US" sz="1600" b="1" dirty="0"/>
-              <a:t>Hints</a:t>
-            </a:r>
-            <a:r>
-              <a:rPr lang="en-US" sz="1600" dirty="0"/>
-              <a:t>: observe the 2D EME propagation results to guide you to the best settings of a) and b).</a:t>
-            </a:r>
-          </a:p>
         </p:txBody>
       </p:sp>
     </p:spTree>
     <p:extLst>
       <p:ext uri="{BB962C8B-B14F-4D97-AF65-F5344CB8AC3E}">
-        <p14:creationId xmlns:p14="http://schemas.microsoft.com/office/powerpoint/2010/main" val="1023731220"/>
+        <p14:creationId xmlns:p14="http://schemas.microsoft.com/office/powerpoint/2010/main" val="2685215753"/>
       </p:ext>
     </p:extLst>
   </p:cSld>
@@ -12345,7 +13927,7 @@
         <p:cNvPr id="1" name="">
           <a:extLst>
             <a:ext uri="{FF2B5EF4-FFF2-40B4-BE49-F238E27FC236}">
-              <a16:creationId xmlns:a16="http://schemas.microsoft.com/office/drawing/2014/main" id="{200A1363-C83E-82B6-7BDE-AD2801F8B66D}"/>
+              <a16:creationId xmlns:a16="http://schemas.microsoft.com/office/drawing/2014/main" id="{F32A9819-E058-DC4F-FB99-88F20442D9F4}"/>
             </a:ext>
           </a:extLst>
         </p:cNvPr>
@@ -12365,7 +13947,7 @@
           <p:cNvPr id="16" name="object 16">
             <a:extLst>
               <a:ext uri="{FF2B5EF4-FFF2-40B4-BE49-F238E27FC236}">
-                <a16:creationId xmlns:a16="http://schemas.microsoft.com/office/drawing/2014/main" id="{1E256546-3103-104D-A87F-78AEBE5D595E}"/>
+                <a16:creationId xmlns:a16="http://schemas.microsoft.com/office/drawing/2014/main" id="{E1662E38-DE72-ADF3-A38E-08ED40DCC2AD}"/>
               </a:ext>
             </a:extLst>
           </p:cNvPr>
@@ -12401,7 +13983,7 @@
             </a:pPr>
             <a:r>
               <a:rPr lang="en-US" sz="2500" dirty="0"/>
-              <a:t>Learning outcome #7 – 1x4 Multimode Interference Coupler </a:t>
+              <a:t>Learning outcome #6.3 – 2x2 Multimode Interference Coupler – Optimization (II)</a:t>
             </a:r>
             <a:br>
               <a:rPr lang="en-US" sz="2500" dirty="0"/>
@@ -12416,7 +13998,7 @@
             </a:r>
             <a:r>
               <a:rPr lang="en-US" b="0" dirty="0"/>
-              <a:t> = ? µm</a:t>
+              <a:t> = 6.6 µm</a:t>
             </a:r>
             <a:endParaRPr lang="en-US" sz="2500" b="0" dirty="0">
               <a:latin typeface="+mj-lt"/>
@@ -12430,7 +14012,7 @@
           <p:cNvPr id="83" name="Gráfico 82">
             <a:extLst>
               <a:ext uri="{FF2B5EF4-FFF2-40B4-BE49-F238E27FC236}">
-                <a16:creationId xmlns:a16="http://schemas.microsoft.com/office/drawing/2014/main" id="{4BFCA3D8-29F6-7091-7099-77888A9F863B}"/>
+                <a16:creationId xmlns:a16="http://schemas.microsoft.com/office/drawing/2014/main" id="{1CD4B005-DA76-DF7C-8A51-CA16DFD2CA3A}"/>
               </a:ext>
             </a:extLst>
           </p:cNvPr>
@@ -12466,7 +14048,7 @@
           <p:cNvPr id="84" name="Marcador de número de diapositiva 83">
             <a:extLst>
               <a:ext uri="{FF2B5EF4-FFF2-40B4-BE49-F238E27FC236}">
-                <a16:creationId xmlns:a16="http://schemas.microsoft.com/office/drawing/2014/main" id="{42E75535-0FBC-4C5F-9AC5-7008914FCF56}"/>
+                <a16:creationId xmlns:a16="http://schemas.microsoft.com/office/drawing/2014/main" id="{0B06F952-20FD-3223-6AB8-83339507AFE8}"/>
               </a:ext>
             </a:extLst>
           </p:cNvPr>
@@ -12495,7 +14077,7 @@
           <p:cNvPr id="3" name="Marcador de pie de página 2">
             <a:extLst>
               <a:ext uri="{FF2B5EF4-FFF2-40B4-BE49-F238E27FC236}">
-                <a16:creationId xmlns:a16="http://schemas.microsoft.com/office/drawing/2014/main" id="{07AC2AFF-A7D9-EBCD-7C5A-6CDF61B69366}"/>
+                <a16:creationId xmlns:a16="http://schemas.microsoft.com/office/drawing/2014/main" id="{8B06152F-2A2C-A19B-581F-494FDFF33752}"/>
               </a:ext>
             </a:extLst>
           </p:cNvPr>
@@ -12526,107 +14108,10 @@
       </p:sp>
       <p:sp>
         <p:nvSpPr>
-          <p:cNvPr id="2" name="CuadroTexto 1">
+          <p:cNvPr id="7" name="Rectángulo 6">
             <a:extLst>
               <a:ext uri="{FF2B5EF4-FFF2-40B4-BE49-F238E27FC236}">
-                <a16:creationId xmlns:a16="http://schemas.microsoft.com/office/drawing/2014/main" id="{42D73A2E-0E5A-8A39-6B70-F9E94D6DBB70}"/>
-              </a:ext>
-            </a:extLst>
-          </p:cNvPr>
-          <p:cNvSpPr txBox="1"/>
-          <p:nvPr/>
-        </p:nvSpPr>
-        <p:spPr>
-          <a:xfrm>
-            <a:off x="609441" y="4819471"/>
-            <a:ext cx="11199971" cy="1200329"/>
-          </a:xfrm>
-          <a:prstGeom prst="rect">
-            <a:avLst/>
-          </a:prstGeom>
-          <a:solidFill>
-            <a:schemeClr val="bg1">
-              <a:lumMod val="95000"/>
-            </a:schemeClr>
-          </a:solidFill>
-          <a:ln w="28575">
-            <a:solidFill>
-              <a:srgbClr val="E0700D"/>
-            </a:solidFill>
-          </a:ln>
-        </p:spPr>
-        <p:txBody>
-          <a:bodyPr wrap="square" rtlCol="0">
-            <a:spAutoFit/>
-          </a:bodyPr>
-          <a:lstStyle/>
-          <a:p>
-            <a:pPr algn="just"/>
-            <a:r>
-              <a:rPr lang="en-US" sz="1200" dirty="0">
-                <a:latin typeface="Arial" panose="020B0604020202020204" pitchFamily="34" charset="0"/>
-                <a:cs typeface="Arial" panose="020B0604020202020204" pitchFamily="34" charset="0"/>
-              </a:rPr>
-              <a:t>Repeat all the design </a:t>
-            </a:r>
-            <a:r>
-              <a:rPr lang="en-US" sz="1200">
-                <a:latin typeface="Arial" panose="020B0604020202020204" pitchFamily="34" charset="0"/>
-                <a:cs typeface="Arial" panose="020B0604020202020204" pitchFamily="34" charset="0"/>
-              </a:rPr>
-              <a:t>process for a </a:t>
-            </a:r>
-            <a:r>
-              <a:rPr lang="en-US" sz="1200" dirty="0">
-                <a:latin typeface="Arial" panose="020B0604020202020204" pitchFamily="34" charset="0"/>
-                <a:cs typeface="Arial" panose="020B0604020202020204" pitchFamily="34" charset="0"/>
-              </a:rPr>
-              <a:t>1x4 MMI Coupler.  </a:t>
-            </a:r>
-          </a:p>
-          <a:p>
-            <a:pPr algn="just"/>
-            <a:endParaRPr lang="en-US" sz="1200" dirty="0">
-              <a:latin typeface="Arial" panose="020B0604020202020204" pitchFamily="34" charset="0"/>
-              <a:cs typeface="Arial" panose="020B0604020202020204" pitchFamily="34" charset="0"/>
-            </a:endParaRPr>
-          </a:p>
-          <a:p>
-            <a:pPr algn="just"/>
-            <a:endParaRPr lang="en-US" sz="1200" dirty="0">
-              <a:latin typeface="Arial" panose="020B0604020202020204" pitchFamily="34" charset="0"/>
-              <a:cs typeface="Arial" panose="020B0604020202020204" pitchFamily="34" charset="0"/>
-            </a:endParaRPr>
-          </a:p>
-          <a:p>
-            <a:pPr algn="just"/>
-            <a:endParaRPr lang="en-US" sz="1200" dirty="0">
-              <a:latin typeface="Arial" panose="020B0604020202020204" pitchFamily="34" charset="0"/>
-              <a:cs typeface="Arial" panose="020B0604020202020204" pitchFamily="34" charset="0"/>
-            </a:endParaRPr>
-          </a:p>
-          <a:p>
-            <a:pPr algn="just"/>
-            <a:endParaRPr lang="en-US" sz="1200" dirty="0">
-              <a:latin typeface="Arial" panose="020B0604020202020204" pitchFamily="34" charset="0"/>
-              <a:cs typeface="Arial" panose="020B0604020202020204" pitchFamily="34" charset="0"/>
-            </a:endParaRPr>
-          </a:p>
-          <a:p>
-            <a:pPr algn="just"/>
-            <a:endParaRPr lang="en-US" sz="1200" dirty="0">
-              <a:latin typeface="Arial" panose="020B0604020202020204" pitchFamily="34" charset="0"/>
-              <a:cs typeface="Arial" panose="020B0604020202020204" pitchFamily="34" charset="0"/>
-            </a:endParaRPr>
-          </a:p>
-        </p:txBody>
-      </p:sp>
-      <p:sp>
-        <p:nvSpPr>
-          <p:cNvPr id="7" name="Rectángulo 6">
-            <a:extLst>
-              <a:ext uri="{FF2B5EF4-FFF2-40B4-BE49-F238E27FC236}">
-                <a16:creationId xmlns:a16="http://schemas.microsoft.com/office/drawing/2014/main" id="{AFB86587-21D4-5A33-7D00-DDF170C919BA}"/>
+                <a16:creationId xmlns:a16="http://schemas.microsoft.com/office/drawing/2014/main" id="{C8036B97-F577-1F3C-3CE2-BD45F7D1FFC2}"/>
               </a:ext>
             </a:extLst>
           </p:cNvPr>
@@ -12673,6 +14158,1061 @@
           </a:p>
         </p:txBody>
       </p:sp>
+      <p:pic>
+        <p:nvPicPr>
+          <p:cNvPr id="9" name="Imagen 8">
+            <a:extLst>
+              <a:ext uri="{FF2B5EF4-FFF2-40B4-BE49-F238E27FC236}">
+                <a16:creationId xmlns:a16="http://schemas.microsoft.com/office/drawing/2014/main" id="{8E93F285-4DE0-2EF7-F9F7-2C22D1DE2F05}"/>
+              </a:ext>
+            </a:extLst>
+          </p:cNvPr>
+          <p:cNvPicPr>
+            <a:picLocks noChangeAspect="1"/>
+          </p:cNvPicPr>
+          <p:nvPr/>
+        </p:nvPicPr>
+        <p:blipFill>
+          <a:blip r:embed="rId4"/>
+          <a:stretch>
+            <a:fillRect/>
+          </a:stretch>
+        </p:blipFill>
+        <p:spPr>
+          <a:xfrm>
+            <a:off x="685800" y="1690317"/>
+            <a:ext cx="6595538" cy="2708434"/>
+          </a:xfrm>
+          <a:prstGeom prst="rect">
+            <a:avLst/>
+          </a:prstGeom>
+        </p:spPr>
+      </p:pic>
+      <p:pic>
+        <p:nvPicPr>
+          <p:cNvPr id="11" name="Imagen 10">
+            <a:extLst>
+              <a:ext uri="{FF2B5EF4-FFF2-40B4-BE49-F238E27FC236}">
+                <a16:creationId xmlns:a16="http://schemas.microsoft.com/office/drawing/2014/main" id="{AD1442A2-C538-C78E-67BD-BFA8ED02BCF3}"/>
+              </a:ext>
+            </a:extLst>
+          </p:cNvPr>
+          <p:cNvPicPr>
+            <a:picLocks noChangeAspect="1"/>
+          </p:cNvPicPr>
+          <p:nvPr/>
+        </p:nvPicPr>
+        <p:blipFill>
+          <a:blip r:embed="rId5"/>
+          <a:stretch>
+            <a:fillRect/>
+          </a:stretch>
+        </p:blipFill>
+        <p:spPr>
+          <a:xfrm>
+            <a:off x="7455299" y="1524000"/>
+            <a:ext cx="3999282" cy="2966680"/>
+          </a:xfrm>
+          <a:prstGeom prst="rect">
+            <a:avLst/>
+          </a:prstGeom>
+        </p:spPr>
+      </p:pic>
+    </p:spTree>
+    <p:extLst>
+      <p:ext uri="{BB962C8B-B14F-4D97-AF65-F5344CB8AC3E}">
+        <p14:creationId xmlns:p14="http://schemas.microsoft.com/office/powerpoint/2010/main" val="1023731220"/>
+      </p:ext>
+    </p:extLst>
+  </p:cSld>
+  <p:clrMapOvr>
+    <a:masterClrMapping/>
+  </p:clrMapOvr>
+</p:sld>
+</file>
+
+<file path=ppt/slides/slide21.xml><?xml version="1.0" encoding="utf-8"?>
+<p:sld xmlns:a="http://schemas.openxmlformats.org/drawingml/2006/main" xmlns:r="http://schemas.openxmlformats.org/officeDocument/2006/relationships" xmlns:p="http://schemas.openxmlformats.org/presentationml/2006/main">
+  <p:cSld>
+    <p:spTree>
+      <p:nvGrpSpPr>
+        <p:cNvPr id="1" name="">
+          <a:extLst>
+            <a:ext uri="{FF2B5EF4-FFF2-40B4-BE49-F238E27FC236}">
+              <a16:creationId xmlns:a16="http://schemas.microsoft.com/office/drawing/2014/main" id="{00D77A80-5995-D3B8-FF2C-04D20FE01914}"/>
+            </a:ext>
+          </a:extLst>
+        </p:cNvPr>
+        <p:cNvGrpSpPr/>
+        <p:nvPr/>
+      </p:nvGrpSpPr>
+      <p:grpSpPr>
+        <a:xfrm>
+          <a:off x="0" y="0"/>
+          <a:ext cx="0" cy="0"/>
+          <a:chOff x="0" y="0"/>
+          <a:chExt cx="0" cy="0"/>
+        </a:xfrm>
+      </p:grpSpPr>
+      <p:sp>
+        <p:nvSpPr>
+          <p:cNvPr id="16" name="object 16">
+            <a:extLst>
+              <a:ext uri="{FF2B5EF4-FFF2-40B4-BE49-F238E27FC236}">
+                <a16:creationId xmlns:a16="http://schemas.microsoft.com/office/drawing/2014/main" id="{A7EA34DB-0764-B541-6F66-40D9F7EF3865}"/>
+              </a:ext>
+            </a:extLst>
+          </p:cNvPr>
+          <p:cNvSpPr txBox="1">
+            <a:spLocks noGrp="1"/>
+          </p:cNvSpPr>
+          <p:nvPr>
+            <p:ph type="title"/>
+          </p:nvPr>
+        </p:nvSpPr>
+        <p:spPr>
+          <a:xfrm>
+            <a:off x="685800" y="408883"/>
+            <a:ext cx="10994410" cy="705321"/>
+          </a:xfrm>
+          <a:prstGeom prst="rect">
+            <a:avLst/>
+          </a:prstGeom>
+        </p:spPr>
+        <p:txBody>
+          <a:bodyPr vert="horz" wrap="square" lIns="0" tIns="12700" rIns="0" bIns="0" rtlCol="0">
+            <a:spAutoFit/>
+          </a:bodyPr>
+          <a:lstStyle/>
+          <a:p>
+            <a:pPr marL="12700">
+              <a:lnSpc>
+                <a:spcPct val="100000"/>
+              </a:lnSpc>
+              <a:spcBef>
+                <a:spcPts val="100"/>
+              </a:spcBef>
+            </a:pPr>
+            <a:r>
+              <a:rPr lang="en-US" sz="2500" dirty="0"/>
+              <a:t>Learning outcome #6.3 – 2x2 Multimode Interference Coupler – Optimization (II)</a:t>
+            </a:r>
+            <a:br>
+              <a:rPr lang="en-US" sz="2500" dirty="0"/>
+            </a:br>
+            <a:r>
+              <a:rPr lang="en-US" b="0" dirty="0"/>
+              <a:t>Wavelength 1.55 µm, </a:t>
+            </a:r>
+            <a:r>
+              <a:rPr lang="en-US" b="0" dirty="0" err="1"/>
+              <a:t>wMMI</a:t>
+            </a:r>
+            <a:r>
+              <a:rPr lang="en-US" b="0" dirty="0"/>
+              <a:t> = 6.6 µm</a:t>
+            </a:r>
+            <a:endParaRPr lang="en-US" sz="2500" b="0" dirty="0">
+              <a:latin typeface="+mj-lt"/>
+              <a:cs typeface="Lucida Sans"/>
+            </a:endParaRPr>
+          </a:p>
+        </p:txBody>
+      </p:sp>
+      <p:pic>
+        <p:nvPicPr>
+          <p:cNvPr id="83" name="Gráfico 82">
+            <a:extLst>
+              <a:ext uri="{FF2B5EF4-FFF2-40B4-BE49-F238E27FC236}">
+                <a16:creationId xmlns:a16="http://schemas.microsoft.com/office/drawing/2014/main" id="{9116F70E-1098-61AE-7259-907D2AF7A3F9}"/>
+              </a:ext>
+            </a:extLst>
+          </p:cNvPr>
+          <p:cNvPicPr>
+            <a:picLocks noChangeAspect="1"/>
+          </p:cNvPicPr>
+          <p:nvPr/>
+        </p:nvPicPr>
+        <p:blipFill>
+          <a:blip>
+            <a:extLst>
+              <a:ext uri="{96DAC541-7B7A-43D3-8B79-37D633B846F1}">
+                <asvg:svgBlip xmlns:asvg="http://schemas.microsoft.com/office/drawing/2016/SVG/main" r:embed="rId3"/>
+              </a:ext>
+            </a:extLst>
+          </a:blip>
+          <a:stretch>
+            <a:fillRect/>
+          </a:stretch>
+        </p:blipFill>
+        <p:spPr>
+          <a:xfrm>
+            <a:off x="5045006" y="6356057"/>
+            <a:ext cx="6409575" cy="363174"/>
+          </a:xfrm>
+          <a:prstGeom prst="rect">
+            <a:avLst/>
+          </a:prstGeom>
+        </p:spPr>
+      </p:pic>
+      <p:sp>
+        <p:nvSpPr>
+          <p:cNvPr id="84" name="Marcador de número de diapositiva 83">
+            <a:extLst>
+              <a:ext uri="{FF2B5EF4-FFF2-40B4-BE49-F238E27FC236}">
+                <a16:creationId xmlns:a16="http://schemas.microsoft.com/office/drawing/2014/main" id="{750473D3-9CAA-B3AF-A9AC-7AB62C34A511}"/>
+              </a:ext>
+            </a:extLst>
+          </p:cNvPr>
+          <p:cNvSpPr>
+            <a:spLocks noGrp="1"/>
+          </p:cNvSpPr>
+          <p:nvPr>
+            <p:ph type="sldNum" sz="quarter" idx="7"/>
+          </p:nvPr>
+        </p:nvSpPr>
+        <p:spPr/>
+        <p:txBody>
+          <a:bodyPr/>
+          <a:lstStyle/>
+          <a:p>
+            <a:fld id="{B6F15528-21DE-4FAA-801E-634DDDAF4B2B}" type="slidenum">
+              <a:rPr lang="es-ES" smtClean="0"/>
+              <a:t>21</a:t>
+            </a:fld>
+            <a:endParaRPr lang="es-ES"/>
+          </a:p>
+        </p:txBody>
+      </p:sp>
+      <p:sp>
+        <p:nvSpPr>
+          <p:cNvPr id="3" name="Marcador de pie de página 2">
+            <a:extLst>
+              <a:ext uri="{FF2B5EF4-FFF2-40B4-BE49-F238E27FC236}">
+                <a16:creationId xmlns:a16="http://schemas.microsoft.com/office/drawing/2014/main" id="{9AEFF23A-FF19-6810-786A-9A11FB446153}"/>
+              </a:ext>
+            </a:extLst>
+          </p:cNvPr>
+          <p:cNvSpPr>
+            <a:spLocks noGrp="1"/>
+          </p:cNvSpPr>
+          <p:nvPr>
+            <p:ph type="ftr" sz="quarter" idx="5"/>
+          </p:nvPr>
+        </p:nvSpPr>
+        <p:spPr/>
+        <p:txBody>
+          <a:bodyPr/>
+          <a:lstStyle/>
+          <a:p>
+            <a:pPr marL="12700">
+              <a:spcBef>
+                <a:spcPts val="15"/>
+              </a:spcBef>
+            </a:pPr>
+            <a:r>
+              <a:rPr lang="es-ES" spc="-5"/>
+              <a:t>LAB 2.0. COUPLERS</a:t>
+            </a:r>
+            <a:endParaRPr lang="es-ES" spc="-5" dirty="0"/>
+          </a:p>
+        </p:txBody>
+      </p:sp>
+      <p:sp>
+        <p:nvSpPr>
+          <p:cNvPr id="2" name="CuadroTexto 1">
+            <a:extLst>
+              <a:ext uri="{FF2B5EF4-FFF2-40B4-BE49-F238E27FC236}">
+                <a16:creationId xmlns:a16="http://schemas.microsoft.com/office/drawing/2014/main" id="{6D190916-6718-03F4-1610-7EC3D7407CD6}"/>
+              </a:ext>
+            </a:extLst>
+          </p:cNvPr>
+          <p:cNvSpPr txBox="1"/>
+          <p:nvPr/>
+        </p:nvSpPr>
+        <p:spPr>
+          <a:xfrm>
+            <a:off x="496014" y="1371600"/>
+            <a:ext cx="11199971" cy="2000548"/>
+          </a:xfrm>
+          <a:prstGeom prst="rect">
+            <a:avLst/>
+          </a:prstGeom>
+          <a:solidFill>
+            <a:schemeClr val="bg1">
+              <a:lumMod val="95000"/>
+            </a:schemeClr>
+          </a:solidFill>
+          <a:ln w="28575">
+            <a:solidFill>
+              <a:srgbClr val="E0700D"/>
+            </a:solidFill>
+          </a:ln>
+        </p:spPr>
+        <p:txBody>
+          <a:bodyPr wrap="square" rtlCol="0">
+            <a:spAutoFit/>
+          </a:bodyPr>
+          <a:lstStyle/>
+          <a:p>
+            <a:pPr algn="just"/>
+            <a:r>
+              <a:rPr lang="en-US" sz="1200" b="1" i="1" dirty="0">
+                <a:latin typeface="Arial" panose="020B0604020202020204" pitchFamily="34" charset="0"/>
+                <a:cs typeface="Arial" panose="020B0604020202020204" pitchFamily="34" charset="0"/>
+              </a:rPr>
+              <a:t>Comment results</a:t>
+            </a:r>
+          </a:p>
+          <a:p>
+            <a:pPr algn="just"/>
+            <a:endParaRPr lang="en-US" sz="1200" b="1" i="1" dirty="0">
+              <a:latin typeface="Arial" panose="020B0604020202020204" pitchFamily="34" charset="0"/>
+              <a:cs typeface="Arial" panose="020B0604020202020204" pitchFamily="34" charset="0"/>
+            </a:endParaRPr>
+          </a:p>
+          <a:p>
+            <a:pPr algn="just"/>
+            <a:r>
+              <a:rPr lang="en-US" sz="1000" dirty="0">
+                <a:latin typeface="Arial" panose="020B0604020202020204" pitchFamily="34" charset="0"/>
+                <a:cs typeface="Arial" panose="020B0604020202020204" pitchFamily="34" charset="0"/>
+              </a:rPr>
+              <a:t>En </a:t>
+            </a:r>
+            <a:r>
+              <a:rPr lang="en-US" sz="1000" dirty="0" err="1">
+                <a:latin typeface="Arial" panose="020B0604020202020204" pitchFamily="34" charset="0"/>
+                <a:cs typeface="Arial" panose="020B0604020202020204" pitchFamily="34" charset="0"/>
+              </a:rPr>
+              <a:t>este</a:t>
+            </a:r>
+            <a:r>
+              <a:rPr lang="en-US" sz="1000" dirty="0">
+                <a:latin typeface="Arial" panose="020B0604020202020204" pitchFamily="34" charset="0"/>
+                <a:cs typeface="Arial" panose="020B0604020202020204" pitchFamily="34" charset="0"/>
+              </a:rPr>
+              <a:t> </a:t>
+            </a:r>
+            <a:r>
+              <a:rPr lang="en-US" sz="1000" dirty="0" err="1">
+                <a:latin typeface="Arial" panose="020B0604020202020204" pitchFamily="34" charset="0"/>
+                <a:cs typeface="Arial" panose="020B0604020202020204" pitchFamily="34" charset="0"/>
+              </a:rPr>
+              <a:t>último</a:t>
+            </a:r>
+            <a:r>
+              <a:rPr lang="en-US" sz="1000" dirty="0">
+                <a:latin typeface="Arial" panose="020B0604020202020204" pitchFamily="34" charset="0"/>
+                <a:cs typeface="Arial" panose="020B0604020202020204" pitchFamily="34" charset="0"/>
+              </a:rPr>
+              <a:t> </a:t>
+            </a:r>
+            <a:r>
+              <a:rPr lang="en-US" sz="1000" dirty="0" err="1">
+                <a:latin typeface="Arial" panose="020B0604020202020204" pitchFamily="34" charset="0"/>
+                <a:cs typeface="Arial" panose="020B0604020202020204" pitchFamily="34" charset="0"/>
+              </a:rPr>
+              <a:t>apartado</a:t>
+            </a:r>
+            <a:r>
+              <a:rPr lang="en-US" sz="1000" dirty="0">
+                <a:latin typeface="Arial" panose="020B0604020202020204" pitchFamily="34" charset="0"/>
+                <a:cs typeface="Arial" panose="020B0604020202020204" pitchFamily="34" charset="0"/>
+              </a:rPr>
+              <a:t> se ha </a:t>
+            </a:r>
+            <a:r>
+              <a:rPr lang="en-US" sz="1000" dirty="0" err="1">
+                <a:latin typeface="Arial" panose="020B0604020202020204" pitchFamily="34" charset="0"/>
+                <a:cs typeface="Arial" panose="020B0604020202020204" pitchFamily="34" charset="0"/>
+              </a:rPr>
+              <a:t>llevado</a:t>
+            </a:r>
+            <a:r>
+              <a:rPr lang="en-US" sz="1000" dirty="0">
+                <a:latin typeface="Arial" panose="020B0604020202020204" pitchFamily="34" charset="0"/>
+                <a:cs typeface="Arial" panose="020B0604020202020204" pitchFamily="34" charset="0"/>
+              </a:rPr>
+              <a:t> a </a:t>
+            </a:r>
+            <a:r>
+              <a:rPr lang="en-US" sz="1000" dirty="0" err="1">
+                <a:latin typeface="Arial" panose="020B0604020202020204" pitchFamily="34" charset="0"/>
+                <a:cs typeface="Arial" panose="020B0604020202020204" pitchFamily="34" charset="0"/>
+              </a:rPr>
+              <a:t>cabo</a:t>
+            </a:r>
+            <a:r>
+              <a:rPr lang="en-US" sz="1000" dirty="0">
+                <a:latin typeface="Arial" panose="020B0604020202020204" pitchFamily="34" charset="0"/>
+                <a:cs typeface="Arial" panose="020B0604020202020204" pitchFamily="34" charset="0"/>
+              </a:rPr>
+              <a:t> </a:t>
+            </a:r>
+            <a:r>
+              <a:rPr lang="en-US" sz="1000" dirty="0" err="1">
+                <a:latin typeface="Arial" panose="020B0604020202020204" pitchFamily="34" charset="0"/>
+                <a:cs typeface="Arial" panose="020B0604020202020204" pitchFamily="34" charset="0"/>
+              </a:rPr>
+              <a:t>una</a:t>
+            </a:r>
+            <a:r>
+              <a:rPr lang="en-US" sz="1000" dirty="0">
+                <a:latin typeface="Arial" panose="020B0604020202020204" pitchFamily="34" charset="0"/>
+                <a:cs typeface="Arial" panose="020B0604020202020204" pitchFamily="34" charset="0"/>
+              </a:rPr>
+              <a:t> </a:t>
+            </a:r>
+            <a:r>
+              <a:rPr lang="en-US" sz="1000" dirty="0" err="1">
+                <a:latin typeface="Arial" panose="020B0604020202020204" pitchFamily="34" charset="0"/>
+                <a:cs typeface="Arial" panose="020B0604020202020204" pitchFamily="34" charset="0"/>
+              </a:rPr>
+              <a:t>optimización</a:t>
+            </a:r>
+            <a:r>
+              <a:rPr lang="en-US" sz="1000" dirty="0">
+                <a:latin typeface="Arial" panose="020B0604020202020204" pitchFamily="34" charset="0"/>
+                <a:cs typeface="Arial" panose="020B0604020202020204" pitchFamily="34" charset="0"/>
+              </a:rPr>
+              <a:t> mas </a:t>
+            </a:r>
+            <a:r>
+              <a:rPr lang="en-US" sz="1000" dirty="0" err="1">
+                <a:latin typeface="Arial" panose="020B0604020202020204" pitchFamily="34" charset="0"/>
+                <a:cs typeface="Arial" panose="020B0604020202020204" pitchFamily="34" charset="0"/>
+              </a:rPr>
+              <a:t>avanzada</a:t>
+            </a:r>
+            <a:r>
+              <a:rPr lang="en-US" sz="1000" dirty="0">
+                <a:latin typeface="Arial" panose="020B0604020202020204" pitchFamily="34" charset="0"/>
+                <a:cs typeface="Arial" panose="020B0604020202020204" pitchFamily="34" charset="0"/>
+              </a:rPr>
+              <a:t> del </a:t>
+            </a:r>
+            <a:r>
+              <a:rPr lang="en-US" sz="1000" dirty="0" err="1">
+                <a:latin typeface="Arial" panose="020B0604020202020204" pitchFamily="34" charset="0"/>
+                <a:cs typeface="Arial" panose="020B0604020202020204" pitchFamily="34" charset="0"/>
+              </a:rPr>
+              <a:t>acoplador</a:t>
+            </a:r>
+            <a:r>
+              <a:rPr lang="en-US" sz="1000" dirty="0">
+                <a:latin typeface="Arial" panose="020B0604020202020204" pitchFamily="34" charset="0"/>
+                <a:cs typeface="Arial" panose="020B0604020202020204" pitchFamily="34" charset="0"/>
+              </a:rPr>
+              <a:t> MMI, </a:t>
+            </a:r>
+            <a:r>
+              <a:rPr lang="en-US" sz="1000" dirty="0" err="1">
+                <a:latin typeface="Arial" panose="020B0604020202020204" pitchFamily="34" charset="0"/>
+                <a:cs typeface="Arial" panose="020B0604020202020204" pitchFamily="34" charset="0"/>
+              </a:rPr>
+              <a:t>combinando</a:t>
+            </a:r>
+            <a:r>
+              <a:rPr lang="en-US" sz="1000" dirty="0">
+                <a:latin typeface="Arial" panose="020B0604020202020204" pitchFamily="34" charset="0"/>
+                <a:cs typeface="Arial" panose="020B0604020202020204" pitchFamily="34" charset="0"/>
+              </a:rPr>
+              <a:t> la </a:t>
+            </a:r>
+            <a:r>
+              <a:rPr lang="en-US" sz="1000" dirty="0" err="1">
+                <a:latin typeface="Arial" panose="020B0604020202020204" pitchFamily="34" charset="0"/>
+                <a:cs typeface="Arial" panose="020B0604020202020204" pitchFamily="34" charset="0"/>
+              </a:rPr>
+              <a:t>optimización</a:t>
+            </a:r>
+            <a:r>
+              <a:rPr lang="en-US" sz="1000" dirty="0">
+                <a:latin typeface="Arial" panose="020B0604020202020204" pitchFamily="34" charset="0"/>
+                <a:cs typeface="Arial" panose="020B0604020202020204" pitchFamily="34" charset="0"/>
+              </a:rPr>
+              <a:t> manual del </a:t>
+            </a:r>
+            <a:r>
+              <a:rPr lang="en-US" sz="1000" dirty="0" err="1">
+                <a:latin typeface="Arial" panose="020B0604020202020204" pitchFamily="34" charset="0"/>
+                <a:cs typeface="Arial" panose="020B0604020202020204" pitchFamily="34" charset="0"/>
+              </a:rPr>
+              <a:t>parámetros</a:t>
+            </a:r>
+            <a:r>
+              <a:rPr lang="en-US" sz="1000" dirty="0">
+                <a:latin typeface="Arial" panose="020B0604020202020204" pitchFamily="34" charset="0"/>
+                <a:cs typeface="Arial" panose="020B0604020202020204" pitchFamily="34" charset="0"/>
+              </a:rPr>
+              <a:t> </a:t>
+            </a:r>
+            <a:r>
+              <a:rPr lang="en-US" sz="1000" dirty="0" err="1">
+                <a:latin typeface="Arial" panose="020B0604020202020204" pitchFamily="34" charset="0"/>
+                <a:cs typeface="Arial" panose="020B0604020202020204" pitchFamily="34" charset="0"/>
+              </a:rPr>
+              <a:t>geométricos</a:t>
+            </a:r>
+            <a:r>
+              <a:rPr lang="en-US" sz="1000" dirty="0">
+                <a:latin typeface="Arial" panose="020B0604020202020204" pitchFamily="34" charset="0"/>
+                <a:cs typeface="Arial" panose="020B0604020202020204" pitchFamily="34" charset="0"/>
+              </a:rPr>
+              <a:t> con </a:t>
+            </a:r>
+            <a:r>
+              <a:rPr lang="es-ES" sz="1000" dirty="0">
+                <a:latin typeface="Arial" panose="020B0604020202020204" pitchFamily="34" charset="0"/>
+                <a:cs typeface="Arial" panose="020B0604020202020204" pitchFamily="34" charset="0"/>
+              </a:rPr>
+              <a:t>la modificación del ancho de las guías de entrada y salida.</a:t>
+            </a:r>
+            <a:r>
+              <a:rPr lang="en-US" sz="1000" dirty="0">
+                <a:latin typeface="Arial" panose="020B0604020202020204" pitchFamily="34" charset="0"/>
+                <a:cs typeface="Arial" panose="020B0604020202020204" pitchFamily="34" charset="0"/>
+              </a:rPr>
+              <a:t> En </a:t>
+            </a:r>
+            <a:r>
+              <a:rPr lang="en-US" sz="1000" dirty="0" err="1">
+                <a:latin typeface="Arial" panose="020B0604020202020204" pitchFamily="34" charset="0"/>
+                <a:cs typeface="Arial" panose="020B0604020202020204" pitchFamily="34" charset="0"/>
+              </a:rPr>
+              <a:t>concreto</a:t>
+            </a:r>
+            <a:r>
+              <a:rPr lang="en-US" sz="1000" dirty="0">
+                <a:latin typeface="Arial" panose="020B0604020202020204" pitchFamily="34" charset="0"/>
+                <a:cs typeface="Arial" panose="020B0604020202020204" pitchFamily="34" charset="0"/>
+              </a:rPr>
+              <a:t>, se ha </a:t>
+            </a:r>
+            <a:r>
+              <a:rPr lang="en-US" sz="1000" dirty="0" err="1">
+                <a:latin typeface="Arial" panose="020B0604020202020204" pitchFamily="34" charset="0"/>
+                <a:cs typeface="Arial" panose="020B0604020202020204" pitchFamily="34" charset="0"/>
+              </a:rPr>
+              <a:t>usado</a:t>
+            </a:r>
+            <a:r>
+              <a:rPr lang="en-US" sz="1000" dirty="0">
+                <a:latin typeface="Arial" panose="020B0604020202020204" pitchFamily="34" charset="0"/>
+                <a:cs typeface="Arial" panose="020B0604020202020204" pitchFamily="34" charset="0"/>
+              </a:rPr>
+              <a:t> un </a:t>
+            </a:r>
+            <a:r>
+              <a:rPr lang="en-US" sz="1000" dirty="0" err="1">
+                <a:latin typeface="Arial" panose="020B0604020202020204" pitchFamily="34" charset="0"/>
+                <a:cs typeface="Arial" panose="020B0604020202020204" pitchFamily="34" charset="0"/>
+              </a:rPr>
+              <a:t>incremento</a:t>
+            </a:r>
+            <a:r>
+              <a:rPr lang="en-US" sz="1000" dirty="0">
+                <a:latin typeface="Arial" panose="020B0604020202020204" pitchFamily="34" charset="0"/>
+                <a:cs typeface="Arial" panose="020B0604020202020204" pitchFamily="34" charset="0"/>
+              </a:rPr>
+              <a:t> de ancho de 1.2 um, junto con </a:t>
+            </a:r>
+            <a:r>
+              <a:rPr lang="en-US" sz="1000" dirty="0" err="1">
+                <a:latin typeface="Arial" panose="020B0604020202020204" pitchFamily="34" charset="0"/>
+                <a:cs typeface="Arial" panose="020B0604020202020204" pitchFamily="34" charset="0"/>
+              </a:rPr>
+              <a:t>valores</a:t>
+            </a:r>
+            <a:r>
+              <a:rPr lang="en-US" sz="1000" dirty="0">
+                <a:latin typeface="Arial" panose="020B0604020202020204" pitchFamily="34" charset="0"/>
+                <a:cs typeface="Arial" panose="020B0604020202020204" pitchFamily="34" charset="0"/>
+              </a:rPr>
+              <a:t> de </a:t>
+            </a:r>
+            <a:r>
+              <a:rPr lang="en-US" sz="1000" dirty="0" err="1">
+                <a:latin typeface="Arial" panose="020B0604020202020204" pitchFamily="34" charset="0"/>
+                <a:cs typeface="Arial" panose="020B0604020202020204" pitchFamily="34" charset="0"/>
+              </a:rPr>
+              <a:t>dy</a:t>
+            </a:r>
+            <a:r>
+              <a:rPr lang="en-US" sz="1000" dirty="0">
+                <a:latin typeface="Arial" panose="020B0604020202020204" pitchFamily="34" charset="0"/>
+                <a:cs typeface="Arial" panose="020B0604020202020204" pitchFamily="34" charset="0"/>
+              </a:rPr>
+              <a:t> = 0.15, y </a:t>
+            </a:r>
+            <a:r>
+              <a:rPr lang="en-US" sz="1000" dirty="0" err="1">
+                <a:latin typeface="Arial" panose="020B0604020202020204" pitchFamily="34" charset="0"/>
+                <a:cs typeface="Arial" panose="020B0604020202020204" pitchFamily="34" charset="0"/>
+              </a:rPr>
+              <a:t>dL_MMI</a:t>
+            </a:r>
+            <a:r>
+              <a:rPr lang="en-US" sz="1000" dirty="0">
+                <a:latin typeface="Arial" panose="020B0604020202020204" pitchFamily="34" charset="0"/>
+                <a:cs typeface="Arial" panose="020B0604020202020204" pitchFamily="34" charset="0"/>
+              </a:rPr>
+              <a:t> = 0.1.</a:t>
+            </a:r>
+          </a:p>
+          <a:p>
+            <a:pPr algn="just"/>
+            <a:endParaRPr lang="en-US" sz="1000" dirty="0">
+              <a:latin typeface="Arial" panose="020B0604020202020204" pitchFamily="34" charset="0"/>
+              <a:cs typeface="Arial" panose="020B0604020202020204" pitchFamily="34" charset="0"/>
+            </a:endParaRPr>
+          </a:p>
+          <a:p>
+            <a:pPr algn="just"/>
+            <a:r>
+              <a:rPr lang="es-ES" sz="1000" dirty="0">
+                <a:latin typeface="Arial" panose="020B0604020202020204" pitchFamily="34" charset="0"/>
+                <a:cs typeface="Arial" panose="020B0604020202020204" pitchFamily="34" charset="0"/>
+              </a:rPr>
+              <a:t>Este cambio en el ancho de las guías y del ajuste de los </a:t>
+            </a:r>
+            <a:r>
+              <a:rPr lang="es-ES" sz="1000">
+                <a:latin typeface="Arial" panose="020B0604020202020204" pitchFamily="34" charset="0"/>
+                <a:cs typeface="Arial" panose="020B0604020202020204" pitchFamily="34" charset="0"/>
+              </a:rPr>
+              <a:t>parámetros geométricos </a:t>
+            </a:r>
+            <a:r>
+              <a:rPr lang="es-ES" sz="1000" dirty="0">
+                <a:latin typeface="Arial" panose="020B0604020202020204" pitchFamily="34" charset="0"/>
+                <a:cs typeface="Arial" panose="020B0604020202020204" pitchFamily="34" charset="0"/>
+              </a:rPr>
+              <a:t>implica una modificación de los modos propagados en la estructura, lo que permite mejorar el acoplo y optimizar la interferencia dentro del MMI. Como resultado, se ha obtenido una distribución de potencia prácticamente equitativa entre las salidas (0.5 / 0.5) y unas pérdidas reducidas de aproximadamente 0.08 dB, cumpliendo así con las especificaciones requeridas.</a:t>
+            </a:r>
+          </a:p>
+          <a:p>
+            <a:pPr algn="just"/>
+            <a:endParaRPr lang="es-ES" sz="1000" dirty="0">
+              <a:latin typeface="Arial" panose="020B0604020202020204" pitchFamily="34" charset="0"/>
+              <a:cs typeface="Arial" panose="020B0604020202020204" pitchFamily="34" charset="0"/>
+            </a:endParaRPr>
+          </a:p>
+          <a:p>
+            <a:pPr algn="just"/>
+            <a:r>
+              <a:rPr lang="es-ES" sz="1000" dirty="0">
+                <a:latin typeface="Arial" panose="020B0604020202020204" pitchFamily="34" charset="0"/>
+                <a:cs typeface="Arial" panose="020B0604020202020204" pitchFamily="34" charset="0"/>
+              </a:rPr>
+              <a:t>Por último, se observa que el aumento del ancho de las guías contribuye principalmente a la reducción de las pérdidas del dispositivo, mientras que el reparto de potencia entre las salidas depende en mayor medida de los parámetros </a:t>
+            </a:r>
+            <a:r>
+              <a:rPr lang="es-ES" sz="1000" dirty="0" err="1">
+                <a:latin typeface="Arial" panose="020B0604020202020204" pitchFamily="34" charset="0"/>
+                <a:cs typeface="Arial" panose="020B0604020202020204" pitchFamily="34" charset="0"/>
+              </a:rPr>
+              <a:t>dy</a:t>
+            </a:r>
+            <a:r>
+              <a:rPr lang="es-ES" sz="1000" dirty="0">
+                <a:latin typeface="Arial" panose="020B0604020202020204" pitchFamily="34" charset="0"/>
+                <a:cs typeface="Arial" panose="020B0604020202020204" pitchFamily="34" charset="0"/>
+              </a:rPr>
+              <a:t> y </a:t>
+            </a:r>
+            <a:r>
+              <a:rPr lang="es-ES" sz="1000" dirty="0" err="1">
+                <a:latin typeface="Arial" panose="020B0604020202020204" pitchFamily="34" charset="0"/>
+                <a:cs typeface="Arial" panose="020B0604020202020204" pitchFamily="34" charset="0"/>
+              </a:rPr>
+              <a:t>dL_MMI</a:t>
+            </a:r>
+            <a:r>
+              <a:rPr lang="es-ES" sz="1000" dirty="0">
+                <a:latin typeface="Arial" panose="020B0604020202020204" pitchFamily="34" charset="0"/>
+                <a:cs typeface="Arial" panose="020B0604020202020204" pitchFamily="34" charset="0"/>
+              </a:rPr>
+              <a:t>, siendo especialmente sensible al valor de </a:t>
+            </a:r>
+            <a:r>
+              <a:rPr lang="es-ES" sz="1000" dirty="0" err="1">
+                <a:latin typeface="Arial" panose="020B0604020202020204" pitchFamily="34" charset="0"/>
+                <a:cs typeface="Arial" panose="020B0604020202020204" pitchFamily="34" charset="0"/>
+              </a:rPr>
+              <a:t>dy</a:t>
+            </a:r>
+            <a:r>
+              <a:rPr lang="es-ES" sz="1000" dirty="0">
+                <a:latin typeface="Arial" panose="020B0604020202020204" pitchFamily="34" charset="0"/>
+                <a:cs typeface="Arial" panose="020B0604020202020204" pitchFamily="34" charset="0"/>
+              </a:rPr>
+              <a:t>.</a:t>
+            </a:r>
+            <a:endParaRPr lang="en-US" sz="1000" dirty="0">
+              <a:latin typeface="Arial" panose="020B0604020202020204" pitchFamily="34" charset="0"/>
+              <a:cs typeface="Arial" panose="020B0604020202020204" pitchFamily="34" charset="0"/>
+            </a:endParaRPr>
+          </a:p>
+          <a:p>
+            <a:pPr algn="just"/>
+            <a:endParaRPr lang="en-US" sz="1000" i="1" dirty="0">
+              <a:latin typeface="Arial" panose="020B0604020202020204" pitchFamily="34" charset="0"/>
+              <a:cs typeface="Arial" panose="020B0604020202020204" pitchFamily="34" charset="0"/>
+            </a:endParaRPr>
+          </a:p>
+        </p:txBody>
+      </p:sp>
+    </p:spTree>
+    <p:extLst>
+      <p:ext uri="{BB962C8B-B14F-4D97-AF65-F5344CB8AC3E}">
+        <p14:creationId xmlns:p14="http://schemas.microsoft.com/office/powerpoint/2010/main" val="4102464270"/>
+      </p:ext>
+    </p:extLst>
+  </p:cSld>
+  <p:clrMapOvr>
+    <a:masterClrMapping/>
+  </p:clrMapOvr>
+</p:sld>
+</file>
+
+<file path=ppt/slides/slide22.xml><?xml version="1.0" encoding="utf-8"?>
+<p:sld xmlns:a="http://schemas.openxmlformats.org/drawingml/2006/main" xmlns:r="http://schemas.openxmlformats.org/officeDocument/2006/relationships" xmlns:p="http://schemas.openxmlformats.org/presentationml/2006/main">
+  <p:cSld>
+    <p:spTree>
+      <p:nvGrpSpPr>
+        <p:cNvPr id="1" name="">
+          <a:extLst>
+            <a:ext uri="{FF2B5EF4-FFF2-40B4-BE49-F238E27FC236}">
+              <a16:creationId xmlns:a16="http://schemas.microsoft.com/office/drawing/2014/main" id="{200A1363-C83E-82B6-7BDE-AD2801F8B66D}"/>
+            </a:ext>
+          </a:extLst>
+        </p:cNvPr>
+        <p:cNvGrpSpPr/>
+        <p:nvPr/>
+      </p:nvGrpSpPr>
+      <p:grpSpPr>
+        <a:xfrm>
+          <a:off x="0" y="0"/>
+          <a:ext cx="0" cy="0"/>
+          <a:chOff x="0" y="0"/>
+          <a:chExt cx="0" cy="0"/>
+        </a:xfrm>
+      </p:grpSpPr>
+      <p:sp>
+        <p:nvSpPr>
+          <p:cNvPr id="16" name="object 16">
+            <a:extLst>
+              <a:ext uri="{FF2B5EF4-FFF2-40B4-BE49-F238E27FC236}">
+                <a16:creationId xmlns:a16="http://schemas.microsoft.com/office/drawing/2014/main" id="{1E256546-3103-104D-A87F-78AEBE5D595E}"/>
+              </a:ext>
+            </a:extLst>
+          </p:cNvPr>
+          <p:cNvSpPr txBox="1">
+            <a:spLocks noGrp="1"/>
+          </p:cNvSpPr>
+          <p:nvPr>
+            <p:ph type="title"/>
+          </p:nvPr>
+        </p:nvSpPr>
+        <p:spPr>
+          <a:xfrm>
+            <a:off x="685800" y="408883"/>
+            <a:ext cx="10994410" cy="705321"/>
+          </a:xfrm>
+          <a:prstGeom prst="rect">
+            <a:avLst/>
+          </a:prstGeom>
+        </p:spPr>
+        <p:txBody>
+          <a:bodyPr vert="horz" wrap="square" lIns="0" tIns="12700" rIns="0" bIns="0" rtlCol="0">
+            <a:spAutoFit/>
+          </a:bodyPr>
+          <a:lstStyle/>
+          <a:p>
+            <a:pPr marL="12700">
+              <a:lnSpc>
+                <a:spcPct val="100000"/>
+              </a:lnSpc>
+              <a:spcBef>
+                <a:spcPts val="100"/>
+              </a:spcBef>
+            </a:pPr>
+            <a:r>
+              <a:rPr lang="en-US" sz="2500" dirty="0"/>
+              <a:t>Learning outcome #7 – 1x4 Multimode Interference Coupler </a:t>
+            </a:r>
+            <a:br>
+              <a:rPr lang="en-US" sz="2500" dirty="0"/>
+            </a:br>
+            <a:r>
+              <a:rPr lang="en-US" b="0" dirty="0"/>
+              <a:t>Wavelength 1.55 µm, </a:t>
+            </a:r>
+            <a:r>
+              <a:rPr lang="en-US" b="0" dirty="0" err="1"/>
+              <a:t>wMMI</a:t>
+            </a:r>
+            <a:r>
+              <a:rPr lang="en-US" b="0" dirty="0"/>
+              <a:t> = ? µm</a:t>
+            </a:r>
+            <a:endParaRPr lang="en-US" sz="2500" b="0" dirty="0">
+              <a:latin typeface="+mj-lt"/>
+              <a:cs typeface="Lucida Sans"/>
+            </a:endParaRPr>
+          </a:p>
+        </p:txBody>
+      </p:sp>
+      <p:pic>
+        <p:nvPicPr>
+          <p:cNvPr id="83" name="Gráfico 82">
+            <a:extLst>
+              <a:ext uri="{FF2B5EF4-FFF2-40B4-BE49-F238E27FC236}">
+                <a16:creationId xmlns:a16="http://schemas.microsoft.com/office/drawing/2014/main" id="{4BFCA3D8-29F6-7091-7099-77888A9F863B}"/>
+              </a:ext>
+            </a:extLst>
+          </p:cNvPr>
+          <p:cNvPicPr>
+            <a:picLocks noChangeAspect="1"/>
+          </p:cNvPicPr>
+          <p:nvPr/>
+        </p:nvPicPr>
+        <p:blipFill>
+          <a:blip>
+            <a:extLst>
+              <a:ext uri="{96DAC541-7B7A-43D3-8B79-37D633B846F1}">
+                <asvg:svgBlip xmlns:asvg="http://schemas.microsoft.com/office/drawing/2016/SVG/main" r:embed="rId3"/>
+              </a:ext>
+            </a:extLst>
+          </a:blip>
+          <a:stretch>
+            <a:fillRect/>
+          </a:stretch>
+        </p:blipFill>
+        <p:spPr>
+          <a:xfrm>
+            <a:off x="5045006" y="6356057"/>
+            <a:ext cx="6409575" cy="363174"/>
+          </a:xfrm>
+          <a:prstGeom prst="rect">
+            <a:avLst/>
+          </a:prstGeom>
+        </p:spPr>
+      </p:pic>
+      <p:sp>
+        <p:nvSpPr>
+          <p:cNvPr id="84" name="Marcador de número de diapositiva 83">
+            <a:extLst>
+              <a:ext uri="{FF2B5EF4-FFF2-40B4-BE49-F238E27FC236}">
+                <a16:creationId xmlns:a16="http://schemas.microsoft.com/office/drawing/2014/main" id="{42E75535-0FBC-4C5F-9AC5-7008914FCF56}"/>
+              </a:ext>
+            </a:extLst>
+          </p:cNvPr>
+          <p:cNvSpPr>
+            <a:spLocks noGrp="1"/>
+          </p:cNvSpPr>
+          <p:nvPr>
+            <p:ph type="sldNum" sz="quarter" idx="7"/>
+          </p:nvPr>
+        </p:nvSpPr>
+        <p:spPr/>
+        <p:txBody>
+          <a:bodyPr/>
+          <a:lstStyle/>
+          <a:p>
+            <a:fld id="{B6F15528-21DE-4FAA-801E-634DDDAF4B2B}" type="slidenum">
+              <a:rPr lang="es-ES" smtClean="0"/>
+              <a:t>22</a:t>
+            </a:fld>
+            <a:endParaRPr lang="es-ES"/>
+          </a:p>
+        </p:txBody>
+      </p:sp>
+      <p:sp>
+        <p:nvSpPr>
+          <p:cNvPr id="3" name="Marcador de pie de página 2">
+            <a:extLst>
+              <a:ext uri="{FF2B5EF4-FFF2-40B4-BE49-F238E27FC236}">
+                <a16:creationId xmlns:a16="http://schemas.microsoft.com/office/drawing/2014/main" id="{07AC2AFF-A7D9-EBCD-7C5A-6CDF61B69366}"/>
+              </a:ext>
+            </a:extLst>
+          </p:cNvPr>
+          <p:cNvSpPr>
+            <a:spLocks noGrp="1"/>
+          </p:cNvSpPr>
+          <p:nvPr>
+            <p:ph type="ftr" sz="quarter" idx="5"/>
+          </p:nvPr>
+        </p:nvSpPr>
+        <p:spPr/>
+        <p:txBody>
+          <a:bodyPr/>
+          <a:lstStyle/>
+          <a:p>
+            <a:pPr marL="12700">
+              <a:spcBef>
+                <a:spcPts val="15"/>
+              </a:spcBef>
+            </a:pPr>
+            <a:r>
+              <a:rPr lang="es-ES" spc="-5"/>
+              <a:t>LAB 2.0. COUPLERS</a:t>
+            </a:r>
+            <a:endParaRPr lang="es-ES" spc="-5" dirty="0"/>
+          </a:p>
+        </p:txBody>
+      </p:sp>
+      <p:sp>
+        <p:nvSpPr>
+          <p:cNvPr id="2" name="CuadroTexto 1">
+            <a:extLst>
+              <a:ext uri="{FF2B5EF4-FFF2-40B4-BE49-F238E27FC236}">
+                <a16:creationId xmlns:a16="http://schemas.microsoft.com/office/drawing/2014/main" id="{42D73A2E-0E5A-8A39-6B70-F9E94D6DBB70}"/>
+              </a:ext>
+            </a:extLst>
+          </p:cNvPr>
+          <p:cNvSpPr txBox="1"/>
+          <p:nvPr/>
+        </p:nvSpPr>
+        <p:spPr>
+          <a:xfrm>
+            <a:off x="609441" y="4819471"/>
+            <a:ext cx="11199971" cy="1200329"/>
+          </a:xfrm>
+          <a:prstGeom prst="rect">
+            <a:avLst/>
+          </a:prstGeom>
+          <a:solidFill>
+            <a:schemeClr val="bg1">
+              <a:lumMod val="95000"/>
+            </a:schemeClr>
+          </a:solidFill>
+          <a:ln w="28575">
+            <a:solidFill>
+              <a:srgbClr val="E0700D"/>
+            </a:solidFill>
+          </a:ln>
+        </p:spPr>
+        <p:txBody>
+          <a:bodyPr wrap="square" rtlCol="0">
+            <a:spAutoFit/>
+          </a:bodyPr>
+          <a:lstStyle/>
+          <a:p>
+            <a:pPr algn="just"/>
+            <a:r>
+              <a:rPr lang="en-US" sz="1200" dirty="0">
+                <a:latin typeface="Arial" panose="020B0604020202020204" pitchFamily="34" charset="0"/>
+                <a:cs typeface="Arial" panose="020B0604020202020204" pitchFamily="34" charset="0"/>
+              </a:rPr>
+              <a:t>Repeat all the design </a:t>
+            </a:r>
+            <a:r>
+              <a:rPr lang="en-US" sz="1200">
+                <a:latin typeface="Arial" panose="020B0604020202020204" pitchFamily="34" charset="0"/>
+                <a:cs typeface="Arial" panose="020B0604020202020204" pitchFamily="34" charset="0"/>
+              </a:rPr>
+              <a:t>process for a </a:t>
+            </a:r>
+            <a:r>
+              <a:rPr lang="en-US" sz="1200" dirty="0">
+                <a:latin typeface="Arial" panose="020B0604020202020204" pitchFamily="34" charset="0"/>
+                <a:cs typeface="Arial" panose="020B0604020202020204" pitchFamily="34" charset="0"/>
+              </a:rPr>
+              <a:t>1x4 MMI Coupler.  </a:t>
+            </a:r>
+          </a:p>
+          <a:p>
+            <a:pPr algn="just"/>
+            <a:endParaRPr lang="en-US" sz="1200" dirty="0">
+              <a:latin typeface="Arial" panose="020B0604020202020204" pitchFamily="34" charset="0"/>
+              <a:cs typeface="Arial" panose="020B0604020202020204" pitchFamily="34" charset="0"/>
+            </a:endParaRPr>
+          </a:p>
+          <a:p>
+            <a:pPr algn="just"/>
+            <a:endParaRPr lang="en-US" sz="1200" dirty="0">
+              <a:latin typeface="Arial" panose="020B0604020202020204" pitchFamily="34" charset="0"/>
+              <a:cs typeface="Arial" panose="020B0604020202020204" pitchFamily="34" charset="0"/>
+            </a:endParaRPr>
+          </a:p>
+          <a:p>
+            <a:pPr algn="just"/>
+            <a:endParaRPr lang="en-US" sz="1200" dirty="0">
+              <a:latin typeface="Arial" panose="020B0604020202020204" pitchFamily="34" charset="0"/>
+              <a:cs typeface="Arial" panose="020B0604020202020204" pitchFamily="34" charset="0"/>
+            </a:endParaRPr>
+          </a:p>
+          <a:p>
+            <a:pPr algn="just"/>
+            <a:endParaRPr lang="en-US" sz="1200" dirty="0">
+              <a:latin typeface="Arial" panose="020B0604020202020204" pitchFamily="34" charset="0"/>
+              <a:cs typeface="Arial" panose="020B0604020202020204" pitchFamily="34" charset="0"/>
+            </a:endParaRPr>
+          </a:p>
+          <a:p>
+            <a:pPr algn="just"/>
+            <a:endParaRPr lang="en-US" sz="1200" dirty="0">
+              <a:latin typeface="Arial" panose="020B0604020202020204" pitchFamily="34" charset="0"/>
+              <a:cs typeface="Arial" panose="020B0604020202020204" pitchFamily="34" charset="0"/>
+            </a:endParaRPr>
+          </a:p>
+        </p:txBody>
+      </p:sp>
+      <p:sp>
+        <p:nvSpPr>
+          <p:cNvPr id="7" name="Rectángulo 6">
+            <a:extLst>
+              <a:ext uri="{FF2B5EF4-FFF2-40B4-BE49-F238E27FC236}">
+                <a16:creationId xmlns:a16="http://schemas.microsoft.com/office/drawing/2014/main" id="{AFB86587-21D4-5A33-7D00-DDF170C919BA}"/>
+              </a:ext>
+            </a:extLst>
+          </p:cNvPr>
+          <p:cNvSpPr/>
+          <p:nvPr/>
+        </p:nvSpPr>
+        <p:spPr>
+          <a:xfrm>
+            <a:off x="609441" y="1377510"/>
+            <a:ext cx="11199971" cy="3306028"/>
+          </a:xfrm>
+          <a:prstGeom prst="rect">
+            <a:avLst/>
+          </a:prstGeom>
+          <a:noFill/>
+          <a:ln w="28575">
+            <a:solidFill>
+              <a:srgbClr val="E0700D"/>
+            </a:solidFill>
+          </a:ln>
+        </p:spPr>
+        <p:style>
+          <a:lnRef idx="2">
+            <a:schemeClr val="accent1">
+              <a:shade val="15000"/>
+            </a:schemeClr>
+          </a:lnRef>
+          <a:fillRef idx="1">
+            <a:schemeClr val="accent1"/>
+          </a:fillRef>
+          <a:effectRef idx="0">
+            <a:schemeClr val="accent1"/>
+          </a:effectRef>
+          <a:fontRef idx="minor">
+            <a:schemeClr val="lt1"/>
+          </a:fontRef>
+        </p:style>
+        <p:txBody>
+          <a:bodyPr rtlCol="0" anchor="ctr"/>
+          <a:lstStyle/>
+          <a:p>
+            <a:pPr algn="ctr"/>
+            <a:endParaRPr lang="en-US"/>
+          </a:p>
+        </p:txBody>
+      </p:sp>
       <p:sp>
         <p:nvSpPr>
           <p:cNvPr id="8" name="CuadroTexto 7">
@@ -12737,7 +15277,7 @@
 </p:sld>
 </file>
 
-<file path=ppt/slides/slide21.xml><?xml version="1.0" encoding="utf-8"?>
+<file path=ppt/slides/slide23.xml><?xml version="1.0" encoding="utf-8"?>
 <p:sld xmlns:a="http://schemas.openxmlformats.org/drawingml/2006/main" xmlns:r="http://schemas.openxmlformats.org/officeDocument/2006/relationships" xmlns:p="http://schemas.openxmlformats.org/presentationml/2006/main">
   <p:cSld>
     <p:spTree>
@@ -12890,7 +15430,7 @@
           <a:p>
             <a:fld id="{B6F15528-21DE-4FAA-801E-634DDDAF4B2B}" type="slidenum">
               <a:rPr lang="es-ES" smtClean="0"/>
-              <a:t>21</a:t>
+              <a:t>23</a:t>
             </a:fld>
             <a:endParaRPr lang="es-ES"/>
           </a:p>
@@ -13423,7 +15963,7 @@
 </p:sld>
 </file>
 
-<file path=ppt/slides/slide22.xml><?xml version="1.0" encoding="utf-8"?>
+<file path=ppt/slides/slide24.xml><?xml version="1.0" encoding="utf-8"?>
 <p:sld xmlns:a="http://schemas.openxmlformats.org/drawingml/2006/main" xmlns:r="http://schemas.openxmlformats.org/officeDocument/2006/relationships" xmlns:p="http://schemas.openxmlformats.org/presentationml/2006/main">
   <p:cSld>
     <p:spTree>
@@ -13579,7 +16119,7 @@
           <a:p>
             <a:fld id="{B6F15528-21DE-4FAA-801E-634DDDAF4B2B}" type="slidenum">
               <a:rPr lang="es-ES" smtClean="0"/>
-              <a:t>22</a:t>
+              <a:t>24</a:t>
             </a:fld>
             <a:endParaRPr lang="es-ES"/>
           </a:p>
@@ -14135,7 +16675,7 @@
 </p:sld>
 </file>
 
-<file path=ppt/slides/slide23.xml><?xml version="1.0" encoding="utf-8"?>
+<file path=ppt/slides/slide25.xml><?xml version="1.0" encoding="utf-8"?>
 <p:sld xmlns:a="http://schemas.openxmlformats.org/drawingml/2006/main" xmlns:r="http://schemas.openxmlformats.org/officeDocument/2006/relationships" xmlns:p="http://schemas.openxmlformats.org/presentationml/2006/main">
   <p:cSld>
     <p:spTree>
@@ -14285,7 +16825,7 @@
           <a:p>
             <a:fld id="{B6F15528-21DE-4FAA-801E-634DDDAF4B2B}" type="slidenum">
               <a:rPr lang="es-ES" smtClean="0"/>
-              <a:t>23</a:t>
+              <a:t>25</a:t>
             </a:fld>
             <a:endParaRPr lang="es-ES"/>
           </a:p>
@@ -14841,7 +17381,7 @@
 </p:sld>
 </file>
 
-<file path=ppt/slides/slide24.xml><?xml version="1.0" encoding="utf-8"?>
+<file path=ppt/slides/slide26.xml><?xml version="1.0" encoding="utf-8"?>
 <p:sld xmlns:a="http://schemas.openxmlformats.org/drawingml/2006/main" xmlns:r="http://schemas.openxmlformats.org/officeDocument/2006/relationships" xmlns:p="http://schemas.openxmlformats.org/presentationml/2006/main">
   <p:cSld>
     <p:spTree>
@@ -14991,7 +17531,7 @@
           <a:p>
             <a:fld id="{B6F15528-21DE-4FAA-801E-634DDDAF4B2B}" type="slidenum">
               <a:rPr lang="es-ES" smtClean="0"/>
-              <a:t>24</a:t>
+              <a:t>26</a:t>
             </a:fld>
             <a:endParaRPr lang="es-ES"/>
           </a:p>
@@ -15538,7 +18078,7 @@
 </p:sld>
 </file>
 
-<file path=ppt/slides/slide25.xml><?xml version="1.0" encoding="utf-8"?>
+<file path=ppt/slides/slide27.xml><?xml version="1.0" encoding="utf-8"?>
 <p:sld xmlns:a="http://schemas.openxmlformats.org/drawingml/2006/main" xmlns:r="http://schemas.openxmlformats.org/officeDocument/2006/relationships" xmlns:p="http://schemas.openxmlformats.org/presentationml/2006/main">
   <p:cSld>
     <p:spTree>
@@ -15677,7 +18217,7 @@
           <a:p>
             <a:fld id="{B6F15528-21DE-4FAA-801E-634DDDAF4B2B}" type="slidenum">
               <a:rPr lang="es-ES" smtClean="0"/>
-              <a:t>25</a:t>
+              <a:t>27</a:t>
             </a:fld>
             <a:endParaRPr lang="es-ES"/>
           </a:p>
@@ -16008,8 +18548,8 @@
           </a:p>
         </p:txBody>
       </p:sp>
-      <mc:AlternateContent xmlns:mc="http://schemas.openxmlformats.org/markup-compatibility/2006">
-        <mc:Choice xmlns:a14="http://schemas.microsoft.com/office/drawing/2010/main" Requires="a14">
+      <mc:AlternateContent xmlns:mc="http://schemas.openxmlformats.org/markup-compatibility/2006" xmlns:a14="http://schemas.microsoft.com/office/drawing/2010/main">
+        <mc:Choice Requires="a14">
           <p:sp>
             <p:nvSpPr>
               <p:cNvPr id="4" name="Marcador de texto 2">
@@ -16243,7 +18783,7 @@
             </p:txBody>
           </p:sp>
         </mc:Choice>
-        <mc:Fallback>
+        <mc:Fallback xmlns="">
           <p:sp>
             <p:nvSpPr>
               <p:cNvPr id="4" name="Marcador de texto 2">
@@ -17699,8 +20239,8 @@
           </a:p>
         </p:txBody>
       </p:sp>
-      <mc:AlternateContent xmlns:mc="http://schemas.openxmlformats.org/markup-compatibility/2006">
-        <mc:Choice xmlns:a14="http://schemas.microsoft.com/office/drawing/2010/main" Requires="a14">
+      <mc:AlternateContent xmlns:mc="http://schemas.openxmlformats.org/markup-compatibility/2006" xmlns:a14="http://schemas.microsoft.com/office/drawing/2010/main">
+        <mc:Choice Requires="a14">
           <p:sp>
             <p:nvSpPr>
               <p:cNvPr id="2" name="CuadroTexto 1">
@@ -18123,44 +20663,62 @@
                     <m:sSub>
                       <m:sSubPr>
                         <m:ctrlPr>
-                          <a:rPr lang="ar-AE" sz="900"/>
+                          <a:rPr lang="ar-AE" sz="900" i="1">
+                            <a:latin typeface="Cambria Math" panose="02040503050406030204" pitchFamily="18" charset="0"/>
+                          </a:rPr>
                         </m:ctrlPr>
                       </m:sSubPr>
                       <m:e>
                         <m:r>
-                          <a:rPr lang="ar-AE" sz="900" b="0" i="1"/>
+                          <a:rPr lang="ar-AE" sz="900" b="0" i="1">
+                            <a:latin typeface="Cambria Math" panose="02040503050406030204" pitchFamily="18" charset="0"/>
+                          </a:rPr>
                           <m:t>𝐿</m:t>
                         </m:r>
                       </m:e>
                       <m:sub>
                         <m:r>
-                          <a:rPr lang="ar-AE" sz="900" b="0" i="1"/>
+                          <a:rPr lang="ar-AE" sz="900" b="0" i="1">
+                            <a:latin typeface="Cambria Math" panose="02040503050406030204" pitchFamily="18" charset="0"/>
+                          </a:rPr>
                           <m:t>𝜋</m:t>
                         </m:r>
                         <m:r>
-                          <a:rPr lang="ar-AE" sz="900" b="0"/>
+                          <a:rPr lang="ar-AE" sz="900" b="0">
+                            <a:latin typeface="Cambria Math" panose="02040503050406030204" pitchFamily="18" charset="0"/>
+                          </a:rPr>
                           <m:t>,</m:t>
                         </m:r>
                         <m:r>
-                          <a:rPr lang="ar-AE" sz="900" b="0" i="1"/>
+                          <a:rPr lang="ar-AE" sz="900" b="0" i="1">
+                            <a:latin typeface="Cambria Math" panose="02040503050406030204" pitchFamily="18" charset="0"/>
+                          </a:rPr>
                           <m:t>𝑇𝐸</m:t>
                         </m:r>
                       </m:sub>
                     </m:sSub>
                     <m:r>
-                      <a:rPr lang="ar-AE" sz="900" b="0"/>
+                      <a:rPr lang="ar-AE" sz="900" b="0">
+                        <a:latin typeface="Cambria Math" panose="02040503050406030204" pitchFamily="18" charset="0"/>
+                      </a:rPr>
                       <m:t>=</m:t>
                     </m:r>
                     <m:r>
-                      <a:rPr lang="ar-AE" sz="900" b="0" i="1"/>
+                      <a:rPr lang="ar-AE" sz="900" b="0" i="1">
+                        <a:latin typeface="Cambria Math" panose="02040503050406030204" pitchFamily="18" charset="0"/>
+                      </a:rPr>
                       <m:t>93</m:t>
                     </m:r>
                     <m:r>
-                      <a:rPr lang="ar-AE" sz="900" b="0"/>
+                      <a:rPr lang="ar-AE" sz="900" b="0">
+                        <a:latin typeface="Cambria Math" panose="02040503050406030204" pitchFamily="18" charset="0"/>
+                      </a:rPr>
                       <m:t>.</m:t>
                     </m:r>
                     <m:r>
-                      <a:rPr lang="ar-AE" sz="900" b="0" i="1"/>
+                      <a:rPr lang="ar-AE" sz="900" b="0" i="1">
+                        <a:latin typeface="Cambria Math" panose="02040503050406030204" pitchFamily="18" charset="0"/>
+                      </a:rPr>
                       <m:t>84</m:t>
                     </m:r>
                     <m:r>
@@ -18174,11 +20732,15 @@
                       <m:t> </m:t>
                     </m:r>
                     <m:r>
-                      <a:rPr lang="ar-AE" sz="900" b="0" i="1"/>
+                      <a:rPr lang="ar-AE" sz="900" b="0" i="1">
+                        <a:latin typeface="Cambria Math" panose="02040503050406030204" pitchFamily="18" charset="0"/>
+                      </a:rPr>
                       <m:t>𝜇</m:t>
                     </m:r>
                     <m:r>
-                      <a:rPr lang="ar-AE" sz="900" b="0" i="1"/>
+                      <a:rPr lang="ar-AE" sz="900" b="0" i="1">
+                        <a:latin typeface="Cambria Math" panose="02040503050406030204" pitchFamily="18" charset="0"/>
+                      </a:rPr>
                       <m:t>𝑚</m:t>
                     </m:r>
                   </m:oMath>
@@ -18202,44 +20764,62 @@
                     <m:sSub>
                       <m:sSubPr>
                         <m:ctrlPr>
-                          <a:rPr lang="ar-AE" sz="900"/>
+                          <a:rPr lang="ar-AE" sz="900" i="1">
+                            <a:latin typeface="Cambria Math" panose="02040503050406030204" pitchFamily="18" charset="0"/>
+                          </a:rPr>
                         </m:ctrlPr>
                       </m:sSubPr>
                       <m:e>
                         <m:r>
-                          <a:rPr lang="ar-AE" sz="900" b="0" i="1"/>
+                          <a:rPr lang="ar-AE" sz="900" b="0" i="1">
+                            <a:latin typeface="Cambria Math" panose="02040503050406030204" pitchFamily="18" charset="0"/>
+                          </a:rPr>
                           <m:t>𝐿</m:t>
                         </m:r>
                       </m:e>
                       <m:sub>
                         <m:r>
-                          <a:rPr lang="ar-AE" sz="900" b="0" i="1"/>
+                          <a:rPr lang="ar-AE" sz="900" b="0" i="1">
+                            <a:latin typeface="Cambria Math" panose="02040503050406030204" pitchFamily="18" charset="0"/>
+                          </a:rPr>
                           <m:t>𝜋</m:t>
                         </m:r>
                         <m:r>
-                          <a:rPr lang="ar-AE" sz="900" b="0"/>
+                          <a:rPr lang="ar-AE" sz="900" b="0">
+                            <a:latin typeface="Cambria Math" panose="02040503050406030204" pitchFamily="18" charset="0"/>
+                          </a:rPr>
                           <m:t>,</m:t>
                         </m:r>
                         <m:r>
-                          <a:rPr lang="ar-AE" sz="900" b="0" i="1"/>
+                          <a:rPr lang="ar-AE" sz="900" b="0" i="1">
+                            <a:latin typeface="Cambria Math" panose="02040503050406030204" pitchFamily="18" charset="0"/>
+                          </a:rPr>
                           <m:t>𝑇𝑀</m:t>
                         </m:r>
                       </m:sub>
                     </m:sSub>
                     <m:r>
-                      <a:rPr lang="ar-AE" sz="900" b="0"/>
+                      <a:rPr lang="ar-AE" sz="900" b="0">
+                        <a:latin typeface="Cambria Math" panose="02040503050406030204" pitchFamily="18" charset="0"/>
+                      </a:rPr>
                       <m:t>=</m:t>
                     </m:r>
                     <m:r>
-                      <a:rPr lang="ar-AE" sz="900" b="0" i="1"/>
+                      <a:rPr lang="ar-AE" sz="900" b="0" i="1">
+                        <a:latin typeface="Cambria Math" panose="02040503050406030204" pitchFamily="18" charset="0"/>
+                      </a:rPr>
                       <m:t>52</m:t>
                     </m:r>
                     <m:r>
-                      <a:rPr lang="ar-AE" sz="900" b="0"/>
+                      <a:rPr lang="ar-AE" sz="900" b="0">
+                        <a:latin typeface="Cambria Math" panose="02040503050406030204" pitchFamily="18" charset="0"/>
+                      </a:rPr>
                       <m:t>.</m:t>
                     </m:r>
                     <m:r>
-                      <a:rPr lang="ar-AE" sz="900" b="0" i="1"/>
+                      <a:rPr lang="ar-AE" sz="900" b="0" i="1">
+                        <a:latin typeface="Cambria Math" panose="02040503050406030204" pitchFamily="18" charset="0"/>
+                      </a:rPr>
                       <m:t>26</m:t>
                     </m:r>
                     <m:r>
@@ -18253,11 +20833,15 @@
                       <m:t> </m:t>
                     </m:r>
                     <m:r>
-                      <a:rPr lang="ar-AE" sz="900" b="0" i="1"/>
+                      <a:rPr lang="ar-AE" sz="900" b="0" i="1">
+                        <a:latin typeface="Cambria Math" panose="02040503050406030204" pitchFamily="18" charset="0"/>
+                      </a:rPr>
                       <m:t>𝜇</m:t>
                     </m:r>
                     <m:r>
-                      <a:rPr lang="ar-AE" sz="900" b="0" i="1"/>
+                      <a:rPr lang="ar-AE" sz="900" b="0" i="1">
+                        <a:latin typeface="Cambria Math" panose="02040503050406030204" pitchFamily="18" charset="0"/>
+                      </a:rPr>
                       <m:t>𝑚</m:t>
                     </m:r>
                     <m:r>
@@ -18290,7 +20874,7 @@
             </p:txBody>
           </p:sp>
         </mc:Choice>
-        <mc:Fallback>
+        <mc:Fallback xmlns="">
           <p:sp>
             <p:nvSpPr>
               <p:cNvPr id="2" name="CuadroTexto 1">
@@ -18938,8 +21522,8 @@
           </a:p>
         </p:txBody>
       </p:sp>
-      <mc:AlternateContent xmlns:mc="http://schemas.openxmlformats.org/markup-compatibility/2006">
-        <mc:Choice xmlns:a14="http://schemas.microsoft.com/office/drawing/2010/main" Requires="a14">
+      <mc:AlternateContent xmlns:mc="http://schemas.openxmlformats.org/markup-compatibility/2006" xmlns:a14="http://schemas.microsoft.com/office/drawing/2010/main">
+        <mc:Choice Requires="a14">
           <p:sp>
             <p:nvSpPr>
               <p:cNvPr id="2" name="CuadroTexto 1">
@@ -20261,23 +22845,33 @@
                 <a14:m>
                   <m:oMath xmlns:m="http://schemas.openxmlformats.org/officeDocument/2006/math">
                     <m:r>
-                      <a:rPr lang="es-ES" sz="1000" b="0" i="1"/>
+                      <a:rPr lang="es-ES" sz="1000" b="0" i="1">
+                        <a:latin typeface="Cambria Math" panose="02040503050406030204" pitchFamily="18" charset="0"/>
+                      </a:rPr>
                       <m:t>𝐾</m:t>
                     </m:r>
                     <m:r>
-                      <a:rPr lang="es-ES" sz="1000" b="0"/>
+                      <a:rPr lang="es-ES" sz="1000" b="0">
+                        <a:latin typeface="Cambria Math" panose="02040503050406030204" pitchFamily="18" charset="0"/>
+                      </a:rPr>
                       <m:t>=</m:t>
                     </m:r>
                     <m:r>
-                      <a:rPr lang="es-ES" sz="1000" b="0" i="1"/>
+                      <a:rPr lang="es-ES" sz="1000" b="0" i="1">
+                        <a:latin typeface="Cambria Math" panose="02040503050406030204" pitchFamily="18" charset="0"/>
+                      </a:rPr>
                       <m:t>0</m:t>
                     </m:r>
                     <m:r>
-                      <a:rPr lang="es-ES" sz="1000" b="0"/>
+                      <a:rPr lang="es-ES" sz="1000" b="0">
+                        <a:latin typeface="Cambria Math" panose="02040503050406030204" pitchFamily="18" charset="0"/>
+                      </a:rPr>
                       <m:t>.</m:t>
                     </m:r>
                     <m:r>
-                      <a:rPr lang="es-ES" sz="1000" b="0" i="1"/>
+                      <a:rPr lang="es-ES" sz="1000" b="0" i="1">
+                        <a:latin typeface="Cambria Math" panose="02040503050406030204" pitchFamily="18" charset="0"/>
+                      </a:rPr>
                       <m:t>5</m:t>
                     </m:r>
                   </m:oMath>
@@ -20294,28 +22888,38 @@
                     <m:sSub>
                       <m:sSubPr>
                         <m:ctrlPr>
-                          <a:rPr lang="ar-AE" sz="1000"/>
+                          <a:rPr lang="ar-AE" sz="1000" i="1">
+                            <a:latin typeface="Cambria Math" panose="02040503050406030204" pitchFamily="18" charset="0"/>
+                          </a:rPr>
                         </m:ctrlPr>
                       </m:sSubPr>
                       <m:e>
                         <m:r>
-                          <a:rPr lang="ar-AE" sz="1000" b="0" i="1"/>
+                          <a:rPr lang="ar-AE" sz="1000" b="0" i="1">
+                            <a:latin typeface="Cambria Math" panose="02040503050406030204" pitchFamily="18" charset="0"/>
+                          </a:rPr>
                           <m:t>𝐿</m:t>
                         </m:r>
                       </m:e>
                       <m:sub>
                         <m:r>
-                          <a:rPr lang="ar-AE" sz="1000" b="0" i="1"/>
+                          <a:rPr lang="ar-AE" sz="1000" b="0" i="1">
+                            <a:latin typeface="Cambria Math" panose="02040503050406030204" pitchFamily="18" charset="0"/>
+                          </a:rPr>
                           <m:t>𝜋</m:t>
                         </m:r>
                       </m:sub>
                     </m:sSub>
                     <m:r>
-                      <a:rPr lang="ar-AE" sz="1000" b="0"/>
+                      <a:rPr lang="ar-AE" sz="1000" b="0">
+                        <a:latin typeface="Cambria Math" panose="02040503050406030204" pitchFamily="18" charset="0"/>
+                      </a:rPr>
                       <m:t>/</m:t>
                     </m:r>
                     <m:r>
-                      <a:rPr lang="ar-AE" sz="1000" b="0" i="1"/>
+                      <a:rPr lang="ar-AE" sz="1000" b="0" i="1">
+                        <a:latin typeface="Cambria Math" panose="02040503050406030204" pitchFamily="18" charset="0"/>
+                      </a:rPr>
                       <m:t>2</m:t>
                     </m:r>
                   </m:oMath>
@@ -20368,15 +22972,21 @@
                       <m:t>=</m:t>
                     </m:r>
                     <m:r>
-                      <a:rPr lang="es-ES" sz="1000" b="0" i="1"/>
+                      <a:rPr lang="es-ES" sz="1000" b="0" i="1">
+                        <a:latin typeface="Cambria Math" panose="02040503050406030204" pitchFamily="18" charset="0"/>
+                      </a:rPr>
                       <m:t>46</m:t>
                     </m:r>
                     <m:r>
-                      <a:rPr lang="es-ES" sz="1000" b="0"/>
+                      <a:rPr lang="es-ES" sz="1000" b="0">
+                        <a:latin typeface="Cambria Math" panose="02040503050406030204" pitchFamily="18" charset="0"/>
+                      </a:rPr>
                       <m:t>.</m:t>
                     </m:r>
                     <m:r>
-                      <a:rPr lang="es-ES" sz="1000" b="0" i="1"/>
+                      <a:rPr lang="es-ES" sz="1000" b="0" i="1">
+                        <a:latin typeface="Cambria Math" panose="02040503050406030204" pitchFamily="18" charset="0"/>
+                      </a:rPr>
                       <m:t>92</m:t>
                     </m:r>
                     <m:r>
@@ -20390,11 +23000,15 @@
                       <m:t> </m:t>
                     </m:r>
                     <m:r>
-                      <a:rPr lang="es-ES" sz="1000" b="0" i="1"/>
+                      <a:rPr lang="es-ES" sz="1000" b="0" i="1">
+                        <a:latin typeface="Cambria Math" panose="02040503050406030204" pitchFamily="18" charset="0"/>
+                      </a:rPr>
                       <m:t>𝜇</m:t>
                     </m:r>
                     <m:r>
-                      <a:rPr lang="es-ES" sz="1000" b="0" i="1"/>
+                      <a:rPr lang="es-ES" sz="1000" b="0" i="1">
+                        <a:latin typeface="Cambria Math" panose="02040503050406030204" pitchFamily="18" charset="0"/>
+                      </a:rPr>
                       <m:t>𝑚</m:t>
                     </m:r>
                   </m:oMath>
@@ -20440,15 +23054,21 @@
                       <m:t>=</m:t>
                     </m:r>
                     <m:r>
-                      <a:rPr lang="es-ES" sz="1000" b="0" i="1"/>
+                      <a:rPr lang="es-ES" sz="1000" b="0" i="1">
+                        <a:latin typeface="Cambria Math" panose="02040503050406030204" pitchFamily="18" charset="0"/>
+                      </a:rPr>
                       <m:t>26</m:t>
                     </m:r>
                     <m:r>
-                      <a:rPr lang="es-ES" sz="1000" b="0"/>
+                      <a:rPr lang="es-ES" sz="1000" b="0">
+                        <a:latin typeface="Cambria Math" panose="02040503050406030204" pitchFamily="18" charset="0"/>
+                      </a:rPr>
                       <m:t>.</m:t>
                     </m:r>
                     <m:r>
-                      <a:rPr lang="es-ES" sz="1000" b="0" i="1"/>
+                      <a:rPr lang="es-ES" sz="1000" b="0" i="1">
+                        <a:latin typeface="Cambria Math" panose="02040503050406030204" pitchFamily="18" charset="0"/>
+                      </a:rPr>
                       <m:t>13</m:t>
                     </m:r>
                     <m:r>
@@ -20462,11 +23082,15 @@
                       <m:t> </m:t>
                     </m:r>
                     <m:r>
-                      <a:rPr lang="es-ES" sz="1000" b="0" i="1"/>
+                      <a:rPr lang="es-ES" sz="1000" b="0" i="1">
+                        <a:latin typeface="Cambria Math" panose="02040503050406030204" pitchFamily="18" charset="0"/>
+                      </a:rPr>
                       <m:t>𝜇</m:t>
                     </m:r>
                     <m:r>
-                      <a:rPr lang="es-ES" sz="1000" b="0" i="1"/>
+                      <a:rPr lang="es-ES" sz="1000" b="0" i="1">
+                        <a:latin typeface="Cambria Math" panose="02040503050406030204" pitchFamily="18" charset="0"/>
+                      </a:rPr>
                       <m:t>𝑚</m:t>
                     </m:r>
                   </m:oMath>
@@ -20486,7 +23110,7 @@
             </p:txBody>
           </p:sp>
         </mc:Choice>
-        <mc:Fallback>
+        <mc:Fallback xmlns="">
           <p:sp>
             <p:nvSpPr>
               <p:cNvPr id="2" name="CuadroTexto 1">

--- a/LabBook_20.pptx
+++ b/LabBook_20.pptx
@@ -5,10 +5,10 @@
     <p:sldMasterId id="2147483648" r:id="rId1"/>
   </p:sldMasterIdLst>
   <p:notesMasterIdLst>
-    <p:notesMasterId r:id="rId29"/>
+    <p:notesMasterId r:id="rId30"/>
   </p:notesMasterIdLst>
   <p:handoutMasterIdLst>
-    <p:handoutMasterId r:id="rId30"/>
+    <p:handoutMasterId r:id="rId31"/>
   </p:handoutMasterIdLst>
   <p:sldIdLst>
     <p:sldId id="256" r:id="rId2"/>
@@ -33,11 +33,12 @@
     <p:sldId id="300" r:id="rId21"/>
     <p:sldId id="314" r:id="rId22"/>
     <p:sldId id="301" r:id="rId23"/>
-    <p:sldId id="290" r:id="rId24"/>
-    <p:sldId id="297" r:id="rId25"/>
-    <p:sldId id="292" r:id="rId26"/>
-    <p:sldId id="298" r:id="rId27"/>
-    <p:sldId id="288" r:id="rId28"/>
+    <p:sldId id="315" r:id="rId24"/>
+    <p:sldId id="290" r:id="rId25"/>
+    <p:sldId id="297" r:id="rId26"/>
+    <p:sldId id="292" r:id="rId27"/>
+    <p:sldId id="298" r:id="rId28"/>
+    <p:sldId id="288" r:id="rId29"/>
   </p:sldIdLst>
   <p:sldSz cx="12192000" cy="6858000"/>
   <p:notesSz cx="12192000" cy="6858000"/>
@@ -2333,6 +2334,222 @@
   <p:cSld>
     <p:spTree>
       <p:nvGrpSpPr>
+        <p:cNvPr id="1" name="">
+          <a:extLst>
+            <a:ext uri="{FF2B5EF4-FFF2-40B4-BE49-F238E27FC236}">
+              <a16:creationId xmlns:a16="http://schemas.microsoft.com/office/drawing/2014/main" id="{4628845F-146D-1B37-DA3A-EFBC8740DD52}"/>
+            </a:ext>
+          </a:extLst>
+        </p:cNvPr>
+        <p:cNvGrpSpPr/>
+        <p:nvPr/>
+      </p:nvGrpSpPr>
+      <p:grpSpPr>
+        <a:xfrm>
+          <a:off x="0" y="0"/>
+          <a:ext cx="0" cy="0"/>
+          <a:chOff x="0" y="0"/>
+          <a:chExt cx="0" cy="0"/>
+        </a:xfrm>
+      </p:grpSpPr>
+      <p:sp>
+        <p:nvSpPr>
+          <p:cNvPr id="2" name="Marcador de imagen de diapositiva 1">
+            <a:extLst>
+              <a:ext uri="{FF2B5EF4-FFF2-40B4-BE49-F238E27FC236}">
+                <a16:creationId xmlns:a16="http://schemas.microsoft.com/office/drawing/2014/main" id="{67DB63E4-A2EE-8E70-8D38-E4B3DC9917A5}"/>
+              </a:ext>
+            </a:extLst>
+          </p:cNvPr>
+          <p:cNvSpPr>
+            <a:spLocks noGrp="1" noRot="1" noChangeAspect="1"/>
+          </p:cNvSpPr>
+          <p:nvPr>
+            <p:ph type="sldImg"/>
+          </p:nvPr>
+        </p:nvSpPr>
+        <p:spPr/>
+      </p:sp>
+      <p:sp>
+        <p:nvSpPr>
+          <p:cNvPr id="3" name="Marcador de notas 2">
+            <a:extLst>
+              <a:ext uri="{FF2B5EF4-FFF2-40B4-BE49-F238E27FC236}">
+                <a16:creationId xmlns:a16="http://schemas.microsoft.com/office/drawing/2014/main" id="{92194DFE-C95A-3F0D-FB68-6AEC285D71C2}"/>
+              </a:ext>
+            </a:extLst>
+          </p:cNvPr>
+          <p:cNvSpPr>
+            <a:spLocks noGrp="1"/>
+          </p:cNvSpPr>
+          <p:nvPr>
+            <p:ph type="body" idx="1"/>
+          </p:nvPr>
+        </p:nvSpPr>
+        <p:spPr/>
+        <p:txBody>
+          <a:bodyPr/>
+          <a:lstStyle/>
+          <a:p>
+            <a:endParaRPr lang="es-ES" dirty="0"/>
+          </a:p>
+        </p:txBody>
+      </p:sp>
+      <p:sp>
+        <p:nvSpPr>
+          <p:cNvPr id="4" name="Marcador de número de diapositiva 3">
+            <a:extLst>
+              <a:ext uri="{FF2B5EF4-FFF2-40B4-BE49-F238E27FC236}">
+                <a16:creationId xmlns:a16="http://schemas.microsoft.com/office/drawing/2014/main" id="{F056D426-3AF8-8C2E-B9AA-6D06DC8839E9}"/>
+              </a:ext>
+            </a:extLst>
+          </p:cNvPr>
+          <p:cNvSpPr>
+            <a:spLocks noGrp="1"/>
+          </p:cNvSpPr>
+          <p:nvPr>
+            <p:ph type="sldNum" sz="quarter" idx="5"/>
+          </p:nvPr>
+        </p:nvSpPr>
+        <p:spPr/>
+        <p:txBody>
+          <a:bodyPr/>
+          <a:lstStyle/>
+          <a:p>
+            <a:fld id="{676223B9-C868-4436-87D9-1A3152E1157A}" type="slidenum">
+              <a:rPr lang="es-ES" smtClean="0"/>
+              <a:t>23</a:t>
+            </a:fld>
+            <a:endParaRPr lang="es-ES"/>
+          </a:p>
+        </p:txBody>
+      </p:sp>
+    </p:spTree>
+    <p:extLst>
+      <p:ext uri="{BB962C8B-B14F-4D97-AF65-F5344CB8AC3E}">
+        <p14:creationId xmlns:p14="http://schemas.microsoft.com/office/powerpoint/2010/main" val="3720195210"/>
+      </p:ext>
+    </p:extLst>
+  </p:cSld>
+  <p:clrMapOvr>
+    <a:masterClrMapping/>
+  </p:clrMapOvr>
+</p:notes>
+</file>
+
+<file path=ppt/notesSlides/notesSlide2.xml><?xml version="1.0" encoding="utf-8"?>
+<p:notes xmlns:a="http://schemas.openxmlformats.org/drawingml/2006/main" xmlns:r="http://schemas.openxmlformats.org/officeDocument/2006/relationships" xmlns:p="http://schemas.openxmlformats.org/presentationml/2006/main">
+  <p:cSld>
+    <p:spTree>
+      <p:nvGrpSpPr>
+        <p:cNvPr id="1" name="">
+          <a:extLst>
+            <a:ext uri="{FF2B5EF4-FFF2-40B4-BE49-F238E27FC236}">
+              <a16:creationId xmlns:a16="http://schemas.microsoft.com/office/drawing/2014/main" id="{26805FA0-8310-95D9-F59F-8F42EEDA245A}"/>
+            </a:ext>
+          </a:extLst>
+        </p:cNvPr>
+        <p:cNvGrpSpPr/>
+        <p:nvPr/>
+      </p:nvGrpSpPr>
+      <p:grpSpPr>
+        <a:xfrm>
+          <a:off x="0" y="0"/>
+          <a:ext cx="0" cy="0"/>
+          <a:chOff x="0" y="0"/>
+          <a:chExt cx="0" cy="0"/>
+        </a:xfrm>
+      </p:grpSpPr>
+      <p:sp>
+        <p:nvSpPr>
+          <p:cNvPr id="2" name="Marcador de imagen de diapositiva 1">
+            <a:extLst>
+              <a:ext uri="{FF2B5EF4-FFF2-40B4-BE49-F238E27FC236}">
+                <a16:creationId xmlns:a16="http://schemas.microsoft.com/office/drawing/2014/main" id="{53AABB8C-A6AF-3BA6-45D2-74E49192B4CE}"/>
+              </a:ext>
+            </a:extLst>
+          </p:cNvPr>
+          <p:cNvSpPr>
+            <a:spLocks noGrp="1" noRot="1" noChangeAspect="1"/>
+          </p:cNvSpPr>
+          <p:nvPr>
+            <p:ph type="sldImg"/>
+          </p:nvPr>
+        </p:nvSpPr>
+        <p:spPr/>
+      </p:sp>
+      <p:sp>
+        <p:nvSpPr>
+          <p:cNvPr id="3" name="Marcador de notas 2">
+            <a:extLst>
+              <a:ext uri="{FF2B5EF4-FFF2-40B4-BE49-F238E27FC236}">
+                <a16:creationId xmlns:a16="http://schemas.microsoft.com/office/drawing/2014/main" id="{4EF13E16-C481-3712-5627-1CB01BC0AFB9}"/>
+              </a:ext>
+            </a:extLst>
+          </p:cNvPr>
+          <p:cNvSpPr>
+            <a:spLocks noGrp="1"/>
+          </p:cNvSpPr>
+          <p:nvPr>
+            <p:ph type="body" idx="1"/>
+          </p:nvPr>
+        </p:nvSpPr>
+        <p:spPr/>
+        <p:txBody>
+          <a:bodyPr/>
+          <a:lstStyle/>
+          <a:p>
+            <a:endParaRPr lang="es-ES" dirty="0"/>
+          </a:p>
+        </p:txBody>
+      </p:sp>
+      <p:sp>
+        <p:nvSpPr>
+          <p:cNvPr id="4" name="Marcador de número de diapositiva 3">
+            <a:extLst>
+              <a:ext uri="{FF2B5EF4-FFF2-40B4-BE49-F238E27FC236}">
+                <a16:creationId xmlns:a16="http://schemas.microsoft.com/office/drawing/2014/main" id="{E134307B-A280-388B-6938-077D670A8B36}"/>
+              </a:ext>
+            </a:extLst>
+          </p:cNvPr>
+          <p:cNvSpPr>
+            <a:spLocks noGrp="1"/>
+          </p:cNvSpPr>
+          <p:nvPr>
+            <p:ph type="sldNum" sz="quarter" idx="5"/>
+          </p:nvPr>
+        </p:nvSpPr>
+        <p:spPr/>
+        <p:txBody>
+          <a:bodyPr/>
+          <a:lstStyle/>
+          <a:p>
+            <a:fld id="{676223B9-C868-4436-87D9-1A3152E1157A}" type="slidenum">
+              <a:rPr lang="es-ES" smtClean="0"/>
+              <a:t>5</a:t>
+            </a:fld>
+            <a:endParaRPr lang="es-ES"/>
+          </a:p>
+        </p:txBody>
+      </p:sp>
+    </p:spTree>
+    <p:extLst>
+      <p:ext uri="{BB962C8B-B14F-4D97-AF65-F5344CB8AC3E}">
+        <p14:creationId xmlns:p14="http://schemas.microsoft.com/office/powerpoint/2010/main" val="2243326811"/>
+      </p:ext>
+    </p:extLst>
+  </p:cSld>
+  <p:clrMapOvr>
+    <a:masterClrMapping/>
+  </p:clrMapOvr>
+</p:notes>
+</file>
+
+<file path=ppt/notesSlides/notesSlide20.xml><?xml version="1.0" encoding="utf-8"?>
+<p:notes xmlns:a="http://schemas.openxmlformats.org/drawingml/2006/main" xmlns:r="http://schemas.openxmlformats.org/officeDocument/2006/relationships" xmlns:p="http://schemas.openxmlformats.org/presentationml/2006/main">
+  <p:cSld>
+    <p:spTree>
+      <p:nvGrpSpPr>
         <p:cNvPr id="1" name=""/>
         <p:cNvGrpSpPr/>
         <p:nvPr/>
@@ -2393,7 +2610,7 @@
           <a:p>
             <a:fld id="{676223B9-C868-4436-87D9-1A3152E1157A}" type="slidenum">
               <a:rPr lang="es-ES" smtClean="0"/>
-              <a:t>23</a:t>
+              <a:t>24</a:t>
             </a:fld>
             <a:endParaRPr lang="es-ES"/>
           </a:p>
@@ -2412,115 +2629,7 @@
 </p:notes>
 </file>
 
-<file path=ppt/notesSlides/notesSlide2.xml><?xml version="1.0" encoding="utf-8"?>
-<p:notes xmlns:a="http://schemas.openxmlformats.org/drawingml/2006/main" xmlns:r="http://schemas.openxmlformats.org/officeDocument/2006/relationships" xmlns:p="http://schemas.openxmlformats.org/presentationml/2006/main">
-  <p:cSld>
-    <p:spTree>
-      <p:nvGrpSpPr>
-        <p:cNvPr id="1" name="">
-          <a:extLst>
-            <a:ext uri="{FF2B5EF4-FFF2-40B4-BE49-F238E27FC236}">
-              <a16:creationId xmlns:a16="http://schemas.microsoft.com/office/drawing/2014/main" id="{26805FA0-8310-95D9-F59F-8F42EEDA245A}"/>
-            </a:ext>
-          </a:extLst>
-        </p:cNvPr>
-        <p:cNvGrpSpPr/>
-        <p:nvPr/>
-      </p:nvGrpSpPr>
-      <p:grpSpPr>
-        <a:xfrm>
-          <a:off x="0" y="0"/>
-          <a:ext cx="0" cy="0"/>
-          <a:chOff x="0" y="0"/>
-          <a:chExt cx="0" cy="0"/>
-        </a:xfrm>
-      </p:grpSpPr>
-      <p:sp>
-        <p:nvSpPr>
-          <p:cNvPr id="2" name="Marcador de imagen de diapositiva 1">
-            <a:extLst>
-              <a:ext uri="{FF2B5EF4-FFF2-40B4-BE49-F238E27FC236}">
-                <a16:creationId xmlns:a16="http://schemas.microsoft.com/office/drawing/2014/main" id="{53AABB8C-A6AF-3BA6-45D2-74E49192B4CE}"/>
-              </a:ext>
-            </a:extLst>
-          </p:cNvPr>
-          <p:cNvSpPr>
-            <a:spLocks noGrp="1" noRot="1" noChangeAspect="1"/>
-          </p:cNvSpPr>
-          <p:nvPr>
-            <p:ph type="sldImg"/>
-          </p:nvPr>
-        </p:nvSpPr>
-        <p:spPr/>
-      </p:sp>
-      <p:sp>
-        <p:nvSpPr>
-          <p:cNvPr id="3" name="Marcador de notas 2">
-            <a:extLst>
-              <a:ext uri="{FF2B5EF4-FFF2-40B4-BE49-F238E27FC236}">
-                <a16:creationId xmlns:a16="http://schemas.microsoft.com/office/drawing/2014/main" id="{4EF13E16-C481-3712-5627-1CB01BC0AFB9}"/>
-              </a:ext>
-            </a:extLst>
-          </p:cNvPr>
-          <p:cNvSpPr>
-            <a:spLocks noGrp="1"/>
-          </p:cNvSpPr>
-          <p:nvPr>
-            <p:ph type="body" idx="1"/>
-          </p:nvPr>
-        </p:nvSpPr>
-        <p:spPr/>
-        <p:txBody>
-          <a:bodyPr/>
-          <a:lstStyle/>
-          <a:p>
-            <a:endParaRPr lang="es-ES" dirty="0"/>
-          </a:p>
-        </p:txBody>
-      </p:sp>
-      <p:sp>
-        <p:nvSpPr>
-          <p:cNvPr id="4" name="Marcador de número de diapositiva 3">
-            <a:extLst>
-              <a:ext uri="{FF2B5EF4-FFF2-40B4-BE49-F238E27FC236}">
-                <a16:creationId xmlns:a16="http://schemas.microsoft.com/office/drawing/2014/main" id="{E134307B-A280-388B-6938-077D670A8B36}"/>
-              </a:ext>
-            </a:extLst>
-          </p:cNvPr>
-          <p:cNvSpPr>
-            <a:spLocks noGrp="1"/>
-          </p:cNvSpPr>
-          <p:nvPr>
-            <p:ph type="sldNum" sz="quarter" idx="5"/>
-          </p:nvPr>
-        </p:nvSpPr>
-        <p:spPr/>
-        <p:txBody>
-          <a:bodyPr/>
-          <a:lstStyle/>
-          <a:p>
-            <a:fld id="{676223B9-C868-4436-87D9-1A3152E1157A}" type="slidenum">
-              <a:rPr lang="es-ES" smtClean="0"/>
-              <a:t>5</a:t>
-            </a:fld>
-            <a:endParaRPr lang="es-ES"/>
-          </a:p>
-        </p:txBody>
-      </p:sp>
-    </p:spTree>
-    <p:extLst>
-      <p:ext uri="{BB962C8B-B14F-4D97-AF65-F5344CB8AC3E}">
-        <p14:creationId xmlns:p14="http://schemas.microsoft.com/office/powerpoint/2010/main" val="2243326811"/>
-      </p:ext>
-    </p:extLst>
-  </p:cSld>
-  <p:clrMapOvr>
-    <a:masterClrMapping/>
-  </p:clrMapOvr>
-</p:notes>
-</file>
-
-<file path=ppt/notesSlides/notesSlide20.xml><?xml version="1.0" encoding="utf-8"?>
+<file path=ppt/notesSlides/notesSlide21.xml><?xml version="1.0" encoding="utf-8"?>
 <p:notes xmlns:a="http://schemas.openxmlformats.org/drawingml/2006/main" xmlns:r="http://schemas.openxmlformats.org/officeDocument/2006/relationships" xmlns:p="http://schemas.openxmlformats.org/presentationml/2006/main">
   <p:cSld>
     <p:spTree>
@@ -2609,7 +2718,7 @@
           <a:p>
             <a:fld id="{676223B9-C868-4436-87D9-1A3152E1157A}" type="slidenum">
               <a:rPr lang="es-ES" smtClean="0"/>
-              <a:t>24</a:t>
+              <a:t>25</a:t>
             </a:fld>
             <a:endParaRPr lang="es-ES"/>
           </a:p>
@@ -2628,7 +2737,7 @@
 </p:notes>
 </file>
 
-<file path=ppt/notesSlides/notesSlide21.xml><?xml version="1.0" encoding="utf-8"?>
+<file path=ppt/notesSlides/notesSlide22.xml><?xml version="1.0" encoding="utf-8"?>
 <p:notes xmlns:a="http://schemas.openxmlformats.org/drawingml/2006/main" xmlns:r="http://schemas.openxmlformats.org/officeDocument/2006/relationships" xmlns:p="http://schemas.openxmlformats.org/presentationml/2006/main">
   <p:cSld>
     <p:spTree>
@@ -2717,7 +2826,7 @@
           <a:p>
             <a:fld id="{676223B9-C868-4436-87D9-1A3152E1157A}" type="slidenum">
               <a:rPr lang="es-ES" smtClean="0"/>
-              <a:t>25</a:t>
+              <a:t>26</a:t>
             </a:fld>
             <a:endParaRPr lang="es-ES"/>
           </a:p>
@@ -2736,7 +2845,7 @@
 </p:notes>
 </file>
 
-<file path=ppt/notesSlides/notesSlide22.xml><?xml version="1.0" encoding="utf-8"?>
+<file path=ppt/notesSlides/notesSlide23.xml><?xml version="1.0" encoding="utf-8"?>
 <p:notes xmlns:a="http://schemas.openxmlformats.org/drawingml/2006/main" xmlns:r="http://schemas.openxmlformats.org/officeDocument/2006/relationships" xmlns:p="http://schemas.openxmlformats.org/presentationml/2006/main">
   <p:cSld>
     <p:spTree>
@@ -2825,7 +2934,7 @@
           <a:p>
             <a:fld id="{676223B9-C868-4436-87D9-1A3152E1157A}" type="slidenum">
               <a:rPr lang="es-ES" smtClean="0"/>
-              <a:t>26</a:t>
+              <a:t>27</a:t>
             </a:fld>
             <a:endParaRPr lang="es-ES"/>
           </a:p>
@@ -11375,7 +11484,7 @@
               <a:t> </a:t>
             </a:r>
             <a:r>
-              <a:rPr lang="en-US" sz="1000" dirty="0" err="1">
+              <a:rPr lang="en-US" sz="1000" i="1" dirty="0" err="1">
                 <a:latin typeface="Arial" panose="020B0604020202020204" pitchFamily="34" charset="0"/>
                 <a:cs typeface="Arial" panose="020B0604020202020204" pitchFamily="34" charset="0"/>
               </a:rPr>
@@ -11389,18 +11498,25 @@
               <a:t> y </a:t>
             </a:r>
             <a:r>
-              <a:rPr lang="en-US" sz="1000" dirty="0" err="1">
+              <a:rPr lang="en-US" sz="1000" i="1" dirty="0" err="1">
                 <a:latin typeface="Arial" panose="020B0604020202020204" pitchFamily="34" charset="0"/>
                 <a:cs typeface="Arial" panose="020B0604020202020204" pitchFamily="34" charset="0"/>
               </a:rPr>
               <a:t>dL_MMI</a:t>
+            </a:r>
+            <a:r>
+              <a:rPr lang="en-US" sz="1000" i="1" dirty="0">
+                <a:latin typeface="Arial" panose="020B0604020202020204" pitchFamily="34" charset="0"/>
+                <a:cs typeface="Arial" panose="020B0604020202020204" pitchFamily="34" charset="0"/>
+              </a:rPr>
+              <a:t> </a:t>
             </a:r>
             <a:r>
               <a:rPr lang="en-US" sz="1000" dirty="0">
                 <a:latin typeface="Arial" panose="020B0604020202020204" pitchFamily="34" charset="0"/>
                 <a:cs typeface="Arial" panose="020B0604020202020204" pitchFamily="34" charset="0"/>
               </a:rPr>
-              <a:t> para </a:t>
+              <a:t>para </a:t>
             </a:r>
             <a:r>
               <a:rPr lang="en-US" sz="1000" dirty="0" err="1">
@@ -11700,39 +11816,81 @@
               <a:t> de </a:t>
             </a:r>
             <a:r>
+              <a:rPr lang="en-US" sz="1000" i="1" dirty="0" err="1">
+                <a:latin typeface="Arial" panose="020B0604020202020204" pitchFamily="34" charset="0"/>
+                <a:cs typeface="Arial" panose="020B0604020202020204" pitchFamily="34" charset="0"/>
+              </a:rPr>
+              <a:t>dy</a:t>
+            </a:r>
+            <a:r>
+              <a:rPr lang="en-US" sz="1000" i="1" dirty="0">
+                <a:latin typeface="Arial" panose="020B0604020202020204" pitchFamily="34" charset="0"/>
+                <a:cs typeface="Arial" panose="020B0604020202020204" pitchFamily="34" charset="0"/>
+              </a:rPr>
+              <a:t> = 0.09 </a:t>
+            </a:r>
+            <a:r>
+              <a:rPr lang="en-US" sz="1000" dirty="0">
+                <a:latin typeface="Arial" panose="020B0604020202020204" pitchFamily="34" charset="0"/>
+                <a:cs typeface="Arial" panose="020B0604020202020204" pitchFamily="34" charset="0"/>
+              </a:rPr>
+              <a:t>y </a:t>
+            </a:r>
+            <a:r>
+              <a:rPr lang="en-US" sz="1000" i="1" dirty="0" err="1">
+                <a:latin typeface="Arial" panose="020B0604020202020204" pitchFamily="34" charset="0"/>
+                <a:cs typeface="Arial" panose="020B0604020202020204" pitchFamily="34" charset="0"/>
+              </a:rPr>
+              <a:t>dL_MMI</a:t>
+            </a:r>
+            <a:r>
+              <a:rPr lang="en-US" sz="1000" i="1" dirty="0">
+                <a:latin typeface="Arial" panose="020B0604020202020204" pitchFamily="34" charset="0"/>
+                <a:cs typeface="Arial" panose="020B0604020202020204" pitchFamily="34" charset="0"/>
+              </a:rPr>
+              <a:t> = -0.8</a:t>
+            </a:r>
+            <a:r>
+              <a:rPr lang="en-US" sz="1000" dirty="0">
+                <a:latin typeface="Arial" panose="020B0604020202020204" pitchFamily="34" charset="0"/>
+                <a:cs typeface="Arial" panose="020B0604020202020204" pitchFamily="34" charset="0"/>
+              </a:rPr>
+              <a:t>. Se </a:t>
+            </a:r>
+            <a:r>
               <a:rPr lang="en-US" sz="1000" dirty="0" err="1">
                 <a:latin typeface="Arial" panose="020B0604020202020204" pitchFamily="34" charset="0"/>
                 <a:cs typeface="Arial" panose="020B0604020202020204" pitchFamily="34" charset="0"/>
               </a:rPr>
-              <a:t>dy</a:t>
+              <a:t>observa</a:t>
             </a:r>
             <a:r>
               <a:rPr lang="en-US" sz="1000" dirty="0">
                 <a:latin typeface="Arial" panose="020B0604020202020204" pitchFamily="34" charset="0"/>
                 <a:cs typeface="Arial" panose="020B0604020202020204" pitchFamily="34" charset="0"/>
               </a:rPr>
-              <a:t> = 0.09 y </a:t>
+              <a:t> </a:t>
             </a:r>
             <a:r>
               <a:rPr lang="en-US" sz="1000" dirty="0" err="1">
                 <a:latin typeface="Arial" panose="020B0604020202020204" pitchFamily="34" charset="0"/>
                 <a:cs typeface="Arial" panose="020B0604020202020204" pitchFamily="34" charset="0"/>
               </a:rPr>
-              <a:t>dL_MMI</a:t>
+              <a:t>que</a:t>
             </a:r>
             <a:r>
               <a:rPr lang="en-US" sz="1000" dirty="0">
                 <a:latin typeface="Arial" panose="020B0604020202020204" pitchFamily="34" charset="0"/>
                 <a:cs typeface="Arial" panose="020B0604020202020204" pitchFamily="34" charset="0"/>
               </a:rPr>
-              <a:t> = -0.8. Se </a:t>
+              <a:t> </a:t>
             </a:r>
             <a:r>
               <a:rPr lang="en-US" sz="1000" dirty="0" err="1">
                 <a:latin typeface="Arial" panose="020B0604020202020204" pitchFamily="34" charset="0"/>
                 <a:cs typeface="Arial" panose="020B0604020202020204" pitchFamily="34" charset="0"/>
               </a:rPr>
-              <a:t>observa</a:t>
+              <a:t>pequeños</a:t>
             </a:r>
             <a:r>
               <a:rPr lang="en-US" sz="1000" dirty="0">
@@ -11746,7 +11904,7 @@
                 <a:latin typeface="Arial" panose="020B0604020202020204" pitchFamily="34" charset="0"/>
                 <a:cs typeface="Arial" panose="020B0604020202020204" pitchFamily="34" charset="0"/>
               </a:rPr>
-              <a:t>que</a:t>
+              <a:t>ajustes</a:t>
             </a:r>
             <a:r>
               <a:rPr lang="en-US" sz="1000" dirty="0">
@@ -11760,73 +11918,45 @@
                 <a:latin typeface="Arial" panose="020B0604020202020204" pitchFamily="34" charset="0"/>
                 <a:cs typeface="Arial" panose="020B0604020202020204" pitchFamily="34" charset="0"/>
               </a:rPr>
-              <a:t>pequeños</a:t>
+              <a:t>en</a:t>
             </a:r>
             <a:r>
               <a:rPr lang="en-US" sz="1000" dirty="0">
                 <a:latin typeface="Arial" panose="020B0604020202020204" pitchFamily="34" charset="0"/>
                 <a:cs typeface="Arial" panose="020B0604020202020204" pitchFamily="34" charset="0"/>
               </a:rPr>
-              <a:t> </a:t>
+              <a:t> la </a:t>
             </a:r>
             <a:r>
               <a:rPr lang="en-US" sz="1000" dirty="0" err="1">
                 <a:latin typeface="Arial" panose="020B0604020202020204" pitchFamily="34" charset="0"/>
                 <a:cs typeface="Arial" panose="020B0604020202020204" pitchFamily="34" charset="0"/>
               </a:rPr>
-              <a:t>ajustes</a:t>
+              <a:t>posición</a:t>
             </a:r>
             <a:r>
               <a:rPr lang="en-US" sz="1000" dirty="0">
                 <a:latin typeface="Arial" panose="020B0604020202020204" pitchFamily="34" charset="0"/>
                 <a:cs typeface="Arial" panose="020B0604020202020204" pitchFamily="34" charset="0"/>
               </a:rPr>
-              <a:t> </a:t>
+              <a:t> de las </a:t>
             </a:r>
             <a:r>
               <a:rPr lang="en-US" sz="1000" dirty="0" err="1">
                 <a:latin typeface="Arial" panose="020B0604020202020204" pitchFamily="34" charset="0"/>
                 <a:cs typeface="Arial" panose="020B0604020202020204" pitchFamily="34" charset="0"/>
               </a:rPr>
-              <a:t>en</a:t>
+              <a:t>guías</a:t>
             </a:r>
             <a:r>
               <a:rPr lang="en-US" sz="1000" dirty="0">
                 <a:latin typeface="Arial" panose="020B0604020202020204" pitchFamily="34" charset="0"/>
                 <a:cs typeface="Arial" panose="020B0604020202020204" pitchFamily="34" charset="0"/>
               </a:rPr>
-              <a:t> la </a:t>
-            </a:r>
-            <a:r>
-              <a:rPr lang="en-US" sz="1000" dirty="0" err="1">
-                <a:latin typeface="Arial" panose="020B0604020202020204" pitchFamily="34" charset="0"/>
-                <a:cs typeface="Arial" panose="020B0604020202020204" pitchFamily="34" charset="0"/>
-              </a:rPr>
-              <a:t>posición</a:t>
-            </a:r>
-            <a:r>
-              <a:rPr lang="en-US" sz="1000" dirty="0">
-                <a:latin typeface="Arial" panose="020B0604020202020204" pitchFamily="34" charset="0"/>
-                <a:cs typeface="Arial" panose="020B0604020202020204" pitchFamily="34" charset="0"/>
-              </a:rPr>
-              <a:t> de las </a:t>
-            </a:r>
-            <a:r>
-              <a:rPr lang="en-US" sz="1000" dirty="0" err="1">
-                <a:latin typeface="Arial" panose="020B0604020202020204" pitchFamily="34" charset="0"/>
-                <a:cs typeface="Arial" panose="020B0604020202020204" pitchFamily="34" charset="0"/>
-              </a:rPr>
-              <a:t>guías</a:t>
-            </a:r>
-            <a:r>
-              <a:rPr lang="en-US" sz="1000" dirty="0">
-                <a:latin typeface="Arial" panose="020B0604020202020204" pitchFamily="34" charset="0"/>
-                <a:cs typeface="Arial" panose="020B0604020202020204" pitchFamily="34" charset="0"/>
-              </a:rPr>
               <a:t> (</a:t>
             </a:r>
             <a:r>
-              <a:rPr lang="en-US" sz="1000" dirty="0" err="1">
+              <a:rPr lang="en-US" sz="1000" i="1" dirty="0" err="1">
                 <a:latin typeface="Arial" panose="020B0604020202020204" pitchFamily="34" charset="0"/>
                 <a:cs typeface="Arial" panose="020B0604020202020204" pitchFamily="34" charset="0"/>
               </a:rPr>
@@ -14733,32 +14863,46 @@
               <a:t> de </a:t>
             </a:r>
             <a:r>
-              <a:rPr lang="en-US" sz="1000" dirty="0" err="1">
+              <a:rPr lang="en-US" sz="1000" i="1" dirty="0" err="1">
                 <a:latin typeface="Arial" panose="020B0604020202020204" pitchFamily="34" charset="0"/>
                 <a:cs typeface="Arial" panose="020B0604020202020204" pitchFamily="34" charset="0"/>
               </a:rPr>
               <a:t>dy</a:t>
+            </a:r>
+            <a:r>
+              <a:rPr lang="en-US" sz="1000" i="1" dirty="0">
+                <a:latin typeface="Arial" panose="020B0604020202020204" pitchFamily="34" charset="0"/>
+                <a:cs typeface="Arial" panose="020B0604020202020204" pitchFamily="34" charset="0"/>
+              </a:rPr>
+              <a:t> = 0.15</a:t>
             </a:r>
             <a:r>
               <a:rPr lang="en-US" sz="1000" dirty="0">
                 <a:latin typeface="Arial" panose="020B0604020202020204" pitchFamily="34" charset="0"/>
                 <a:cs typeface="Arial" panose="020B0604020202020204" pitchFamily="34" charset="0"/>
               </a:rPr>
-              <a:t> = 0.15, y </a:t>
-            </a:r>
-            <a:r>
-              <a:rPr lang="en-US" sz="1000" dirty="0" err="1">
+              <a:t>, y </a:t>
+            </a:r>
+            <a:r>
+              <a:rPr lang="en-US" sz="1000" i="1" dirty="0" err="1">
                 <a:latin typeface="Arial" panose="020B0604020202020204" pitchFamily="34" charset="0"/>
                 <a:cs typeface="Arial" panose="020B0604020202020204" pitchFamily="34" charset="0"/>
               </a:rPr>
               <a:t>dL_MMI</a:t>
+            </a:r>
+            <a:r>
+              <a:rPr lang="en-US" sz="1000" i="1" dirty="0">
+                <a:latin typeface="Arial" panose="020B0604020202020204" pitchFamily="34" charset="0"/>
+                <a:cs typeface="Arial" panose="020B0604020202020204" pitchFamily="34" charset="0"/>
+              </a:rPr>
+              <a:t> = 0.1</a:t>
             </a:r>
             <a:r>
               <a:rPr lang="en-US" sz="1000" dirty="0">
                 <a:latin typeface="Arial" panose="020B0604020202020204" pitchFamily="34" charset="0"/>
                 <a:cs typeface="Arial" panose="020B0604020202020204" pitchFamily="34" charset="0"/>
               </a:rPr>
-              <a:t> = 0.1.</a:t>
+              <a:t>.</a:t>
             </a:r>
           </a:p>
           <a:p>
@@ -14775,21 +14919,7 @@
                 <a:latin typeface="Arial" panose="020B0604020202020204" pitchFamily="34" charset="0"/>
                 <a:cs typeface="Arial" panose="020B0604020202020204" pitchFamily="34" charset="0"/>
               </a:rPr>
-              <a:t>Este cambio en el ancho de las guías y del ajuste de los </a:t>
-            </a:r>
-            <a:r>
-              <a:rPr lang="es-ES" sz="1000">
-                <a:latin typeface="Arial" panose="020B0604020202020204" pitchFamily="34" charset="0"/>
-                <a:cs typeface="Arial" panose="020B0604020202020204" pitchFamily="34" charset="0"/>
-              </a:rPr>
-              <a:t>parámetros geométricos </a:t>
-            </a:r>
-            <a:r>
-              <a:rPr lang="es-ES" sz="1000" dirty="0">
-                <a:latin typeface="Arial" panose="020B0604020202020204" pitchFamily="34" charset="0"/>
-                <a:cs typeface="Arial" panose="020B0604020202020204" pitchFamily="34" charset="0"/>
-              </a:rPr>
-              <a:t>implica una modificación de los modos propagados en la estructura, lo que permite mejorar el acoplo y optimizar la interferencia dentro del MMI. Como resultado, se ha obtenido una distribución de potencia prácticamente equitativa entre las salidas (0.5 / 0.5) y unas pérdidas reducidas de aproximadamente 0.08 dB, cumpliendo así con las especificaciones requeridas.</a:t>
+              <a:t>Este cambio en el ancho de las guías y del ajuste de los parámetros geométricos implica una modificación de los modos propagados en la estructura, lo que permite mejorar el acoplo y optimizar la interferencia dentro del MMI. Como resultado, se ha obtenido una distribución de potencia prácticamente equitativa entre las salidas (0.5 / 0.5) y unas pérdidas reducidas de aproximadamente 0.08 dB, cumpliendo así con las especificaciones requeridas.</a:t>
             </a:r>
           </a:p>
           <a:p>
@@ -14809,7 +14939,7 @@
               <a:t>Por último, se observa que el aumento del ancho de las guías contribuye principalmente a la reducción de las pérdidas del dispositivo, mientras que el reparto de potencia entre las salidas depende en mayor medida de los parámetros </a:t>
             </a:r>
             <a:r>
-              <a:rPr lang="es-ES" sz="1000" dirty="0" err="1">
+              <a:rPr lang="es-ES" sz="1000" i="1" dirty="0" err="1">
                 <a:latin typeface="Arial" panose="020B0604020202020204" pitchFamily="34" charset="0"/>
                 <a:cs typeface="Arial" panose="020B0604020202020204" pitchFamily="34" charset="0"/>
               </a:rPr>
@@ -14823,7 +14953,7 @@
               <a:t> y </a:t>
             </a:r>
             <a:r>
-              <a:rPr lang="es-ES" sz="1000" dirty="0" err="1">
+              <a:rPr lang="es-ES" sz="1000" i="1" dirty="0" err="1">
                 <a:latin typeface="Arial" panose="020B0604020202020204" pitchFamily="34" charset="0"/>
                 <a:cs typeface="Arial" panose="020B0604020202020204" pitchFamily="34" charset="0"/>
               </a:rPr>
@@ -14837,7 +14967,7 @@
               <a:t>, siendo especialmente sensible al valor de </a:t>
             </a:r>
             <a:r>
-              <a:rPr lang="es-ES" sz="1000" dirty="0" err="1">
+              <a:rPr lang="es-ES" sz="1000" i="1" dirty="0" err="1">
                 <a:latin typeface="Arial" panose="020B0604020202020204" pitchFamily="34" charset="0"/>
                 <a:cs typeface="Arial" panose="020B0604020202020204" pitchFamily="34" charset="0"/>
               </a:rPr>
@@ -14951,14 +15081,25 @@
               <a:t>Wavelength 1.55 µm, </a:t>
             </a:r>
             <a:r>
-              <a:rPr lang="en-US" b="0" dirty="0" err="1"/>
+              <a:rPr lang="en-US" dirty="0" err="1">
+                <a:solidFill>
+                  <a:srgbClr val="00B050"/>
+                </a:solidFill>
+              </a:rPr>
               <a:t>wMMI</a:t>
             </a:r>
             <a:r>
-              <a:rPr lang="en-US" b="0" dirty="0"/>
-              <a:t> = ? µm</a:t>
-            </a:r>
-            <a:endParaRPr lang="en-US" sz="2500" b="0" dirty="0">
+              <a:rPr lang="en-US" dirty="0">
+                <a:solidFill>
+                  <a:srgbClr val="00B050"/>
+                </a:solidFill>
+              </a:rPr>
+              <a:t> = 6.2 µm</a:t>
+            </a:r>
+            <a:endParaRPr lang="en-US" sz="2500" dirty="0">
+              <a:solidFill>
+                <a:srgbClr val="00B050"/>
+              </a:solidFill>
               <a:latin typeface="+mj-lt"/>
               <a:cs typeface="Lucida Sans"/>
             </a:endParaRPr>
@@ -15066,103 +15207,6 @@
       </p:sp>
       <p:sp>
         <p:nvSpPr>
-          <p:cNvPr id="2" name="CuadroTexto 1">
-            <a:extLst>
-              <a:ext uri="{FF2B5EF4-FFF2-40B4-BE49-F238E27FC236}">
-                <a16:creationId xmlns:a16="http://schemas.microsoft.com/office/drawing/2014/main" id="{42D73A2E-0E5A-8A39-6B70-F9E94D6DBB70}"/>
-              </a:ext>
-            </a:extLst>
-          </p:cNvPr>
-          <p:cNvSpPr txBox="1"/>
-          <p:nvPr/>
-        </p:nvSpPr>
-        <p:spPr>
-          <a:xfrm>
-            <a:off x="609441" y="4819471"/>
-            <a:ext cx="11199971" cy="1200329"/>
-          </a:xfrm>
-          <a:prstGeom prst="rect">
-            <a:avLst/>
-          </a:prstGeom>
-          <a:solidFill>
-            <a:schemeClr val="bg1">
-              <a:lumMod val="95000"/>
-            </a:schemeClr>
-          </a:solidFill>
-          <a:ln w="28575">
-            <a:solidFill>
-              <a:srgbClr val="E0700D"/>
-            </a:solidFill>
-          </a:ln>
-        </p:spPr>
-        <p:txBody>
-          <a:bodyPr wrap="square" rtlCol="0">
-            <a:spAutoFit/>
-          </a:bodyPr>
-          <a:lstStyle/>
-          <a:p>
-            <a:pPr algn="just"/>
-            <a:r>
-              <a:rPr lang="en-US" sz="1200" dirty="0">
-                <a:latin typeface="Arial" panose="020B0604020202020204" pitchFamily="34" charset="0"/>
-                <a:cs typeface="Arial" panose="020B0604020202020204" pitchFamily="34" charset="0"/>
-              </a:rPr>
-              <a:t>Repeat all the design </a:t>
-            </a:r>
-            <a:r>
-              <a:rPr lang="en-US" sz="1200">
-                <a:latin typeface="Arial" panose="020B0604020202020204" pitchFamily="34" charset="0"/>
-                <a:cs typeface="Arial" panose="020B0604020202020204" pitchFamily="34" charset="0"/>
-              </a:rPr>
-              <a:t>process for a </a:t>
-            </a:r>
-            <a:r>
-              <a:rPr lang="en-US" sz="1200" dirty="0">
-                <a:latin typeface="Arial" panose="020B0604020202020204" pitchFamily="34" charset="0"/>
-                <a:cs typeface="Arial" panose="020B0604020202020204" pitchFamily="34" charset="0"/>
-              </a:rPr>
-              <a:t>1x4 MMI Coupler.  </a:t>
-            </a:r>
-          </a:p>
-          <a:p>
-            <a:pPr algn="just"/>
-            <a:endParaRPr lang="en-US" sz="1200" dirty="0">
-              <a:latin typeface="Arial" panose="020B0604020202020204" pitchFamily="34" charset="0"/>
-              <a:cs typeface="Arial" panose="020B0604020202020204" pitchFamily="34" charset="0"/>
-            </a:endParaRPr>
-          </a:p>
-          <a:p>
-            <a:pPr algn="just"/>
-            <a:endParaRPr lang="en-US" sz="1200" dirty="0">
-              <a:latin typeface="Arial" panose="020B0604020202020204" pitchFamily="34" charset="0"/>
-              <a:cs typeface="Arial" panose="020B0604020202020204" pitchFamily="34" charset="0"/>
-            </a:endParaRPr>
-          </a:p>
-          <a:p>
-            <a:pPr algn="just"/>
-            <a:endParaRPr lang="en-US" sz="1200" dirty="0">
-              <a:latin typeface="Arial" panose="020B0604020202020204" pitchFamily="34" charset="0"/>
-              <a:cs typeface="Arial" panose="020B0604020202020204" pitchFamily="34" charset="0"/>
-            </a:endParaRPr>
-          </a:p>
-          <a:p>
-            <a:pPr algn="just"/>
-            <a:endParaRPr lang="en-US" sz="1200" dirty="0">
-              <a:latin typeface="Arial" panose="020B0604020202020204" pitchFamily="34" charset="0"/>
-              <a:cs typeface="Arial" panose="020B0604020202020204" pitchFamily="34" charset="0"/>
-            </a:endParaRPr>
-          </a:p>
-          <a:p>
-            <a:pPr algn="just"/>
-            <a:endParaRPr lang="en-US" sz="1200" dirty="0">
-              <a:latin typeface="Arial" panose="020B0604020202020204" pitchFamily="34" charset="0"/>
-              <a:cs typeface="Arial" panose="020B0604020202020204" pitchFamily="34" charset="0"/>
-            </a:endParaRPr>
-          </a:p>
-        </p:txBody>
-      </p:sp>
-      <p:sp>
-        <p:nvSpPr>
           <p:cNvPr id="7" name="Rectángulo 6">
             <a:extLst>
               <a:ext uri="{FF2B5EF4-FFF2-40B4-BE49-F238E27FC236}">
@@ -15175,8 +15219,8 @@
         </p:nvSpPr>
         <p:spPr>
           <a:xfrm>
-            <a:off x="609441" y="1377510"/>
-            <a:ext cx="11199971" cy="3306028"/>
+            <a:off x="914400" y="1377510"/>
+            <a:ext cx="10439400" cy="3306028"/>
           </a:xfrm>
           <a:prstGeom prst="rect">
             <a:avLst/>
@@ -15213,57 +15257,66 @@
           </a:p>
         </p:txBody>
       </p:sp>
-      <p:sp>
-        <p:nvSpPr>
-          <p:cNvPr id="8" name="CuadroTexto 7">
+      <p:pic>
+        <p:nvPicPr>
+          <p:cNvPr id="5" name="Imagen 4">
             <a:extLst>
               <a:ext uri="{FF2B5EF4-FFF2-40B4-BE49-F238E27FC236}">
-                <a16:creationId xmlns:a16="http://schemas.microsoft.com/office/drawing/2014/main" id="{C3506757-32B7-9151-DA89-AADDB7F7D093}"/>
+                <a16:creationId xmlns:a16="http://schemas.microsoft.com/office/drawing/2014/main" id="{9C001F98-F39C-6E09-FB93-AF7A466D2476}"/>
               </a:ext>
             </a:extLst>
           </p:cNvPr>
-          <p:cNvSpPr txBox="1"/>
+          <p:cNvPicPr>
+            <a:picLocks noChangeAspect="1"/>
+          </p:cNvPicPr>
           <p:nvPr/>
-        </p:nvSpPr>
+        </p:nvPicPr>
+        <p:blipFill>
+          <a:blip r:embed="rId4"/>
+          <a:stretch>
+            <a:fillRect/>
+          </a:stretch>
+        </p:blipFill>
         <p:spPr>
           <a:xfrm>
-            <a:off x="2286000" y="2630415"/>
-            <a:ext cx="7718580" cy="923330"/>
+            <a:off x="1108650" y="1450461"/>
+            <a:ext cx="4800600" cy="3147934"/>
           </a:xfrm>
           <a:prstGeom prst="rect">
             <a:avLst/>
           </a:prstGeom>
-          <a:noFill/>
         </p:spPr>
-        <p:txBody>
-          <a:bodyPr wrap="square" rtlCol="0">
-            <a:spAutoFit/>
-          </a:bodyPr>
-          <a:lstStyle/>
-          <a:p>
-            <a:pPr algn="ctr"/>
-            <a:r>
-              <a:rPr lang="en-US" b="1" dirty="0"/>
-              <a:t>deep</a:t>
-            </a:r>
-            <a:r>
-              <a:rPr lang="en-US" dirty="0"/>
-              <a:t> waveguide</a:t>
-            </a:r>
-          </a:p>
-          <a:p>
-            <a:pPr algn="ctr"/>
-            <a:endParaRPr lang="en-US" dirty="0"/>
-          </a:p>
-          <a:p>
-            <a:pPr algn="ctr"/>
-            <a:r>
-              <a:rPr lang="en-US" dirty="0"/>
-              <a:t>Paste propagation plots and console results</a:t>
-            </a:r>
-          </a:p>
-        </p:txBody>
-      </p:sp>
+      </p:pic>
+      <p:pic>
+        <p:nvPicPr>
+          <p:cNvPr id="9" name="Imagen 8">
+            <a:extLst>
+              <a:ext uri="{FF2B5EF4-FFF2-40B4-BE49-F238E27FC236}">
+                <a16:creationId xmlns:a16="http://schemas.microsoft.com/office/drawing/2014/main" id="{30159A58-0B80-D939-378C-E7585B8C55B8}"/>
+              </a:ext>
+            </a:extLst>
+          </p:cNvPr>
+          <p:cNvPicPr>
+            <a:picLocks noChangeAspect="1"/>
+          </p:cNvPicPr>
+          <p:nvPr/>
+        </p:nvPicPr>
+        <p:blipFill>
+          <a:blip r:embed="rId5"/>
+          <a:stretch>
+            <a:fillRect/>
+          </a:stretch>
+        </p:blipFill>
+        <p:spPr>
+          <a:xfrm>
+            <a:off x="6282752" y="1831949"/>
+            <a:ext cx="4632198" cy="2269777"/>
+          </a:xfrm>
+          <a:prstGeom prst="rect">
+            <a:avLst/>
+          </a:prstGeom>
+        </p:spPr>
+      </p:pic>
     </p:spTree>
     <p:extLst>
       <p:ext uri="{BB962C8B-B14F-4D97-AF65-F5344CB8AC3E}">
@@ -15278,6 +15331,1063 @@
 </file>
 
 <file path=ppt/slides/slide23.xml><?xml version="1.0" encoding="utf-8"?>
+<p:sld xmlns:a="http://schemas.openxmlformats.org/drawingml/2006/main" xmlns:r="http://schemas.openxmlformats.org/officeDocument/2006/relationships" xmlns:p="http://schemas.openxmlformats.org/presentationml/2006/main">
+  <p:cSld>
+    <p:spTree>
+      <p:nvGrpSpPr>
+        <p:cNvPr id="1" name="">
+          <a:extLst>
+            <a:ext uri="{FF2B5EF4-FFF2-40B4-BE49-F238E27FC236}">
+              <a16:creationId xmlns:a16="http://schemas.microsoft.com/office/drawing/2014/main" id="{D9FFA4A2-B106-65AB-3B19-59A1AC84B7A3}"/>
+            </a:ext>
+          </a:extLst>
+        </p:cNvPr>
+        <p:cNvGrpSpPr/>
+        <p:nvPr/>
+      </p:nvGrpSpPr>
+      <p:grpSpPr>
+        <a:xfrm>
+          <a:off x="0" y="0"/>
+          <a:ext cx="0" cy="0"/>
+          <a:chOff x="0" y="0"/>
+          <a:chExt cx="0" cy="0"/>
+        </a:xfrm>
+      </p:grpSpPr>
+      <p:sp>
+        <p:nvSpPr>
+          <p:cNvPr id="16" name="object 16">
+            <a:extLst>
+              <a:ext uri="{FF2B5EF4-FFF2-40B4-BE49-F238E27FC236}">
+                <a16:creationId xmlns:a16="http://schemas.microsoft.com/office/drawing/2014/main" id="{8CF9E29E-1A15-80D1-9D3A-34EA0165324D}"/>
+              </a:ext>
+            </a:extLst>
+          </p:cNvPr>
+          <p:cNvSpPr txBox="1">
+            <a:spLocks noGrp="1"/>
+          </p:cNvSpPr>
+          <p:nvPr>
+            <p:ph type="title"/>
+          </p:nvPr>
+        </p:nvSpPr>
+        <p:spPr>
+          <a:xfrm>
+            <a:off x="685800" y="408883"/>
+            <a:ext cx="10994410" cy="705321"/>
+          </a:xfrm>
+          <a:prstGeom prst="rect">
+            <a:avLst/>
+          </a:prstGeom>
+        </p:spPr>
+        <p:txBody>
+          <a:bodyPr vert="horz" wrap="square" lIns="0" tIns="12700" rIns="0" bIns="0" rtlCol="0">
+            <a:spAutoFit/>
+          </a:bodyPr>
+          <a:lstStyle/>
+          <a:p>
+            <a:pPr marL="12700">
+              <a:lnSpc>
+                <a:spcPct val="100000"/>
+              </a:lnSpc>
+              <a:spcBef>
+                <a:spcPts val="100"/>
+              </a:spcBef>
+            </a:pPr>
+            <a:r>
+              <a:rPr lang="en-US" sz="2500" dirty="0"/>
+              <a:t>Learning outcome #7 – 1x4 Multimode Interference Coupler </a:t>
+            </a:r>
+            <a:br>
+              <a:rPr lang="en-US" sz="2500" dirty="0"/>
+            </a:br>
+            <a:r>
+              <a:rPr lang="en-US" b="0" dirty="0"/>
+              <a:t>Wavelength 1.55 µm, </a:t>
+            </a:r>
+            <a:r>
+              <a:rPr lang="en-US" dirty="0" err="1">
+                <a:solidFill>
+                  <a:srgbClr val="00B050"/>
+                </a:solidFill>
+              </a:rPr>
+              <a:t>wMMI</a:t>
+            </a:r>
+            <a:r>
+              <a:rPr lang="en-US" dirty="0">
+                <a:solidFill>
+                  <a:srgbClr val="00B050"/>
+                </a:solidFill>
+              </a:rPr>
+              <a:t> = 6.2 µm</a:t>
+            </a:r>
+            <a:endParaRPr lang="en-US" sz="2500" dirty="0">
+              <a:solidFill>
+                <a:srgbClr val="00B050"/>
+              </a:solidFill>
+              <a:latin typeface="+mj-lt"/>
+              <a:cs typeface="Lucida Sans"/>
+            </a:endParaRPr>
+          </a:p>
+        </p:txBody>
+      </p:sp>
+      <p:pic>
+        <p:nvPicPr>
+          <p:cNvPr id="83" name="Gráfico 82">
+            <a:extLst>
+              <a:ext uri="{FF2B5EF4-FFF2-40B4-BE49-F238E27FC236}">
+                <a16:creationId xmlns:a16="http://schemas.microsoft.com/office/drawing/2014/main" id="{27533CA7-AB46-E8A2-DE9E-0C6186BB2A44}"/>
+              </a:ext>
+            </a:extLst>
+          </p:cNvPr>
+          <p:cNvPicPr>
+            <a:picLocks noChangeAspect="1"/>
+          </p:cNvPicPr>
+          <p:nvPr/>
+        </p:nvPicPr>
+        <p:blipFill>
+          <a:blip>
+            <a:extLst>
+              <a:ext uri="{96DAC541-7B7A-43D3-8B79-37D633B846F1}">
+                <asvg:svgBlip xmlns:asvg="http://schemas.microsoft.com/office/drawing/2016/SVG/main" r:embed="rId3"/>
+              </a:ext>
+            </a:extLst>
+          </a:blip>
+          <a:stretch>
+            <a:fillRect/>
+          </a:stretch>
+        </p:blipFill>
+        <p:spPr>
+          <a:xfrm>
+            <a:off x="5045006" y="6356057"/>
+            <a:ext cx="6409575" cy="363174"/>
+          </a:xfrm>
+          <a:prstGeom prst="rect">
+            <a:avLst/>
+          </a:prstGeom>
+        </p:spPr>
+      </p:pic>
+      <p:sp>
+        <p:nvSpPr>
+          <p:cNvPr id="84" name="Marcador de número de diapositiva 83">
+            <a:extLst>
+              <a:ext uri="{FF2B5EF4-FFF2-40B4-BE49-F238E27FC236}">
+                <a16:creationId xmlns:a16="http://schemas.microsoft.com/office/drawing/2014/main" id="{DBFA5AB7-648D-C061-881F-625CAE6892E0}"/>
+              </a:ext>
+            </a:extLst>
+          </p:cNvPr>
+          <p:cNvSpPr>
+            <a:spLocks noGrp="1"/>
+          </p:cNvSpPr>
+          <p:nvPr>
+            <p:ph type="sldNum" sz="quarter" idx="7"/>
+          </p:nvPr>
+        </p:nvSpPr>
+        <p:spPr/>
+        <p:txBody>
+          <a:bodyPr/>
+          <a:lstStyle/>
+          <a:p>
+            <a:fld id="{B6F15528-21DE-4FAA-801E-634DDDAF4B2B}" type="slidenum">
+              <a:rPr lang="es-ES" smtClean="0"/>
+              <a:t>23</a:t>
+            </a:fld>
+            <a:endParaRPr lang="es-ES"/>
+          </a:p>
+        </p:txBody>
+      </p:sp>
+      <p:sp>
+        <p:nvSpPr>
+          <p:cNvPr id="3" name="Marcador de pie de página 2">
+            <a:extLst>
+              <a:ext uri="{FF2B5EF4-FFF2-40B4-BE49-F238E27FC236}">
+                <a16:creationId xmlns:a16="http://schemas.microsoft.com/office/drawing/2014/main" id="{1E67F8A6-95D9-CD79-AFFA-5BFCF3302BF1}"/>
+              </a:ext>
+            </a:extLst>
+          </p:cNvPr>
+          <p:cNvSpPr>
+            <a:spLocks noGrp="1"/>
+          </p:cNvSpPr>
+          <p:nvPr>
+            <p:ph type="ftr" sz="quarter" idx="5"/>
+          </p:nvPr>
+        </p:nvSpPr>
+        <p:spPr/>
+        <p:txBody>
+          <a:bodyPr/>
+          <a:lstStyle/>
+          <a:p>
+            <a:pPr marL="12700">
+              <a:spcBef>
+                <a:spcPts val="15"/>
+              </a:spcBef>
+            </a:pPr>
+            <a:r>
+              <a:rPr lang="es-ES" spc="-5"/>
+              <a:t>LAB 2.0. COUPLERS</a:t>
+            </a:r>
+            <a:endParaRPr lang="es-ES" spc="-5" dirty="0"/>
+          </a:p>
+        </p:txBody>
+      </p:sp>
+      <mc:AlternateContent xmlns:mc="http://schemas.openxmlformats.org/markup-compatibility/2006">
+        <mc:Choice xmlns:a14="http://schemas.microsoft.com/office/drawing/2010/main" Requires="a14">
+          <p:sp>
+            <p:nvSpPr>
+              <p:cNvPr id="2" name="CuadroTexto 1">
+                <a:extLst>
+                  <a:ext uri="{FF2B5EF4-FFF2-40B4-BE49-F238E27FC236}">
+                    <a16:creationId xmlns:a16="http://schemas.microsoft.com/office/drawing/2014/main" id="{ACD60CE4-B0C1-29D7-CE40-DA4CA185A038}"/>
+                  </a:ext>
+                </a:extLst>
+              </p:cNvPr>
+              <p:cNvSpPr txBox="1"/>
+              <p:nvPr/>
+            </p:nvSpPr>
+            <p:spPr>
+              <a:xfrm>
+                <a:off x="583019" y="1447800"/>
+                <a:ext cx="11199971" cy="2403800"/>
+              </a:xfrm>
+              <a:prstGeom prst="rect">
+                <a:avLst/>
+              </a:prstGeom>
+              <a:solidFill>
+                <a:schemeClr val="bg1">
+                  <a:lumMod val="95000"/>
+                </a:schemeClr>
+              </a:solidFill>
+              <a:ln w="28575">
+                <a:solidFill>
+                  <a:srgbClr val="E0700D"/>
+                </a:solidFill>
+              </a:ln>
+            </p:spPr>
+            <p:txBody>
+              <a:bodyPr wrap="square" rtlCol="0">
+                <a:spAutoFit/>
+              </a:bodyPr>
+              <a:lstStyle/>
+              <a:p>
+                <a:pPr algn="just"/>
+                <a:r>
+                  <a:rPr lang="en-US" sz="1200" b="1" i="1" dirty="0">
+                    <a:latin typeface="Arial" panose="020B0604020202020204" pitchFamily="34" charset="0"/>
+                    <a:cs typeface="Arial" panose="020B0604020202020204" pitchFamily="34" charset="0"/>
+                  </a:rPr>
+                  <a:t>Repeat all the design process for a 1x4 MMI Coupler.  </a:t>
+                </a:r>
+              </a:p>
+              <a:p>
+                <a:pPr algn="just"/>
+                <a:endParaRPr lang="en-US" sz="1200" b="1" dirty="0">
+                  <a:latin typeface="Arial" panose="020B0604020202020204" pitchFamily="34" charset="0"/>
+                  <a:cs typeface="Arial" panose="020B0604020202020204" pitchFamily="34" charset="0"/>
+                </a:endParaRPr>
+              </a:p>
+              <a:p>
+                <a:pPr algn="just"/>
+                <a:r>
+                  <a:rPr lang="en-US" sz="1000" dirty="0">
+                    <a:latin typeface="Arial" panose="020B0604020202020204" pitchFamily="34" charset="0"/>
+                    <a:cs typeface="Arial" panose="020B0604020202020204" pitchFamily="34" charset="0"/>
+                  </a:rPr>
+                  <a:t>En </a:t>
+                </a:r>
+                <a:r>
+                  <a:rPr lang="en-US" sz="1000" dirty="0" err="1">
+                    <a:latin typeface="Arial" panose="020B0604020202020204" pitchFamily="34" charset="0"/>
+                    <a:cs typeface="Arial" panose="020B0604020202020204" pitchFamily="34" charset="0"/>
+                  </a:rPr>
+                  <a:t>este</a:t>
+                </a:r>
+                <a:r>
+                  <a:rPr lang="en-US" sz="1000" dirty="0">
+                    <a:latin typeface="Arial" panose="020B0604020202020204" pitchFamily="34" charset="0"/>
+                    <a:cs typeface="Arial" panose="020B0604020202020204" pitchFamily="34" charset="0"/>
+                  </a:rPr>
+                  <a:t> </a:t>
+                </a:r>
+                <a:r>
+                  <a:rPr lang="en-US" sz="1000" dirty="0" err="1">
+                    <a:latin typeface="Arial" panose="020B0604020202020204" pitchFamily="34" charset="0"/>
+                    <a:cs typeface="Arial" panose="020B0604020202020204" pitchFamily="34" charset="0"/>
+                  </a:rPr>
+                  <a:t>ejercicio</a:t>
+                </a:r>
+                <a:r>
+                  <a:rPr lang="en-US" sz="1000" dirty="0">
+                    <a:latin typeface="Arial" panose="020B0604020202020204" pitchFamily="34" charset="0"/>
+                    <a:cs typeface="Arial" panose="020B0604020202020204" pitchFamily="34" charset="0"/>
+                  </a:rPr>
+                  <a:t>, se ha </a:t>
+                </a:r>
+                <a:r>
+                  <a:rPr lang="en-US" sz="1000" dirty="0" err="1">
+                    <a:latin typeface="Arial" panose="020B0604020202020204" pitchFamily="34" charset="0"/>
+                    <a:cs typeface="Arial" panose="020B0604020202020204" pitchFamily="34" charset="0"/>
+                  </a:rPr>
+                  <a:t>simulado</a:t>
+                </a:r>
+                <a:r>
+                  <a:rPr lang="en-US" sz="1000" dirty="0">
+                    <a:latin typeface="Arial" panose="020B0604020202020204" pitchFamily="34" charset="0"/>
+                    <a:cs typeface="Arial" panose="020B0604020202020204" pitchFamily="34" charset="0"/>
+                  </a:rPr>
+                  <a:t> un </a:t>
+                </a:r>
+                <a:r>
+                  <a:rPr lang="en-US" sz="1000" dirty="0" err="1">
+                    <a:latin typeface="Arial" panose="020B0604020202020204" pitchFamily="34" charset="0"/>
+                    <a:cs typeface="Arial" panose="020B0604020202020204" pitchFamily="34" charset="0"/>
+                  </a:rPr>
+                  <a:t>acoplador</a:t>
+                </a:r>
+                <a:r>
+                  <a:rPr lang="en-US" sz="1000" dirty="0">
+                    <a:latin typeface="Arial" panose="020B0604020202020204" pitchFamily="34" charset="0"/>
+                    <a:cs typeface="Arial" panose="020B0604020202020204" pitchFamily="34" charset="0"/>
+                  </a:rPr>
+                  <a:t> MMI 1x4 </a:t>
+                </a:r>
+                <a:r>
+                  <a:rPr lang="en-US" sz="1000" dirty="0" err="1">
+                    <a:latin typeface="Arial" panose="020B0604020202020204" pitchFamily="34" charset="0"/>
+                    <a:cs typeface="Arial" panose="020B0604020202020204" pitchFamily="34" charset="0"/>
+                  </a:rPr>
+                  <a:t>basado</a:t>
+                </a:r>
+                <a:r>
+                  <a:rPr lang="en-US" sz="1000" dirty="0">
+                    <a:latin typeface="Arial" panose="020B0604020202020204" pitchFamily="34" charset="0"/>
+                    <a:cs typeface="Arial" panose="020B0604020202020204" pitchFamily="34" charset="0"/>
+                  </a:rPr>
+                  <a:t> </a:t>
+                </a:r>
+                <a:r>
+                  <a:rPr lang="en-US" sz="1000" dirty="0" err="1">
+                    <a:latin typeface="Arial" panose="020B0604020202020204" pitchFamily="34" charset="0"/>
+                    <a:cs typeface="Arial" panose="020B0604020202020204" pitchFamily="34" charset="0"/>
+                  </a:rPr>
+                  <a:t>en</a:t>
+                </a:r>
+                <a:r>
+                  <a:rPr lang="en-US" sz="1000" dirty="0">
+                    <a:latin typeface="Arial" panose="020B0604020202020204" pitchFamily="34" charset="0"/>
+                    <a:cs typeface="Arial" panose="020B0604020202020204" pitchFamily="34" charset="0"/>
+                  </a:rPr>
+                  <a:t> </a:t>
+                </a:r>
+                <a:r>
+                  <a:rPr lang="en-US" sz="1000" dirty="0" err="1">
+                    <a:latin typeface="Arial" panose="020B0604020202020204" pitchFamily="34" charset="0"/>
+                    <a:cs typeface="Arial" panose="020B0604020202020204" pitchFamily="34" charset="0"/>
+                  </a:rPr>
+                  <a:t>réplica</a:t>
+                </a:r>
+                <a:r>
+                  <a:rPr lang="en-US" sz="1000" dirty="0">
+                    <a:latin typeface="Arial" panose="020B0604020202020204" pitchFamily="34" charset="0"/>
+                    <a:cs typeface="Arial" panose="020B0604020202020204" pitchFamily="34" charset="0"/>
+                  </a:rPr>
+                  <a:t> de </a:t>
+                </a:r>
+                <a:r>
+                  <a:rPr lang="en-US" sz="1000" dirty="0" err="1">
+                    <a:latin typeface="Arial" panose="020B0604020202020204" pitchFamily="34" charset="0"/>
+                    <a:cs typeface="Arial" panose="020B0604020202020204" pitchFamily="34" charset="0"/>
+                  </a:rPr>
+                  <a:t>imágenes</a:t>
+                </a:r>
+                <a:r>
+                  <a:rPr lang="en-US" sz="1000" dirty="0">
+                    <a:latin typeface="Arial" panose="020B0604020202020204" pitchFamily="34" charset="0"/>
+                    <a:cs typeface="Arial" panose="020B0604020202020204" pitchFamily="34" charset="0"/>
+                  </a:rPr>
+                  <a:t> </a:t>
+                </a:r>
+                <a:r>
+                  <a:rPr lang="en-US" sz="1000" dirty="0" err="1">
+                    <a:latin typeface="Arial" panose="020B0604020202020204" pitchFamily="34" charset="0"/>
+                    <a:cs typeface="Arial" panose="020B0604020202020204" pitchFamily="34" charset="0"/>
+                  </a:rPr>
+                  <a:t>donde</a:t>
+                </a:r>
+                <a:r>
+                  <a:rPr lang="en-US" sz="1000" dirty="0">
+                    <a:latin typeface="Arial" panose="020B0604020202020204" pitchFamily="34" charset="0"/>
+                    <a:cs typeface="Arial" panose="020B0604020202020204" pitchFamily="34" charset="0"/>
+                  </a:rPr>
+                  <a:t> </a:t>
+                </a:r>
+                <a:r>
+                  <a:rPr lang="en-US" sz="1000" dirty="0" err="1">
+                    <a:latin typeface="Arial" panose="020B0604020202020204" pitchFamily="34" charset="0"/>
+                    <a:cs typeface="Arial" panose="020B0604020202020204" pitchFamily="34" charset="0"/>
+                  </a:rPr>
+                  <a:t>una</a:t>
+                </a:r>
+                <a:r>
+                  <a:rPr lang="en-US" sz="1000" dirty="0">
+                    <a:latin typeface="Arial" panose="020B0604020202020204" pitchFamily="34" charset="0"/>
+                    <a:cs typeface="Arial" panose="020B0604020202020204" pitchFamily="34" charset="0"/>
+                  </a:rPr>
+                  <a:t> </a:t>
+                </a:r>
+                <a:r>
+                  <a:rPr lang="en-US" sz="1000" dirty="0" err="1">
+                    <a:latin typeface="Arial" panose="020B0604020202020204" pitchFamily="34" charset="0"/>
+                    <a:cs typeface="Arial" panose="020B0604020202020204" pitchFamily="34" charset="0"/>
+                  </a:rPr>
+                  <a:t>única</a:t>
+                </a:r>
+                <a:r>
+                  <a:rPr lang="en-US" sz="1000" dirty="0">
+                    <a:latin typeface="Arial" panose="020B0604020202020204" pitchFamily="34" charset="0"/>
+                    <a:cs typeface="Arial" panose="020B0604020202020204" pitchFamily="34" charset="0"/>
+                  </a:rPr>
+                  <a:t> entrada genera cuatro replicas del campo </a:t>
+                </a:r>
+                <a:r>
+                  <a:rPr lang="en-US" sz="1000" dirty="0" err="1">
+                    <a:latin typeface="Arial" panose="020B0604020202020204" pitchFamily="34" charset="0"/>
+                    <a:cs typeface="Arial" panose="020B0604020202020204" pitchFamily="34" charset="0"/>
+                  </a:rPr>
+                  <a:t>en</a:t>
+                </a:r>
+                <a:r>
+                  <a:rPr lang="en-US" sz="1000" dirty="0">
+                    <a:latin typeface="Arial" panose="020B0604020202020204" pitchFamily="34" charset="0"/>
+                    <a:cs typeface="Arial" panose="020B0604020202020204" pitchFamily="34" charset="0"/>
+                  </a:rPr>
+                  <a:t> las </a:t>
+                </a:r>
+                <a:r>
+                  <a:rPr lang="en-US" sz="1000" dirty="0" err="1">
+                    <a:latin typeface="Arial" panose="020B0604020202020204" pitchFamily="34" charset="0"/>
+                    <a:cs typeface="Arial" panose="020B0604020202020204" pitchFamily="34" charset="0"/>
+                  </a:rPr>
+                  <a:t>salidas</a:t>
+                </a:r>
+                <a:r>
+                  <a:rPr lang="en-US" sz="1000" dirty="0">
+                    <a:latin typeface="Arial" panose="020B0604020202020204" pitchFamily="34" charset="0"/>
+                    <a:cs typeface="Arial" panose="020B0604020202020204" pitchFamily="34" charset="0"/>
+                  </a:rPr>
+                  <a:t>. En primer </a:t>
+                </a:r>
+                <a:r>
+                  <a:rPr lang="en-US" sz="1000" dirty="0" err="1">
+                    <a:latin typeface="Arial" panose="020B0604020202020204" pitchFamily="34" charset="0"/>
+                    <a:cs typeface="Arial" panose="020B0604020202020204" pitchFamily="34" charset="0"/>
+                  </a:rPr>
+                  <a:t>lugar</a:t>
+                </a:r>
+                <a:r>
+                  <a:rPr lang="en-US" sz="1000" dirty="0">
+                    <a:latin typeface="Arial" panose="020B0604020202020204" pitchFamily="34" charset="0"/>
+                    <a:cs typeface="Arial" panose="020B0604020202020204" pitchFamily="34" charset="0"/>
+                  </a:rPr>
+                  <a:t>, se ha </a:t>
+                </a:r>
+                <a:r>
+                  <a:rPr lang="en-US" sz="1000" dirty="0" err="1">
+                    <a:latin typeface="Arial" panose="020B0604020202020204" pitchFamily="34" charset="0"/>
+                    <a:cs typeface="Arial" panose="020B0604020202020204" pitchFamily="34" charset="0"/>
+                  </a:rPr>
+                  <a:t>fijado</a:t>
+                </a:r>
+                <a:r>
+                  <a:rPr lang="en-US" sz="1000" dirty="0">
+                    <a:latin typeface="Arial" panose="020B0604020202020204" pitchFamily="34" charset="0"/>
+                    <a:cs typeface="Arial" panose="020B0604020202020204" pitchFamily="34" charset="0"/>
+                  </a:rPr>
+                  <a:t> </a:t>
+                </a:r>
+                <a:r>
+                  <a:rPr lang="en-US" sz="1000" dirty="0" err="1">
+                    <a:latin typeface="Arial" panose="020B0604020202020204" pitchFamily="34" charset="0"/>
+                    <a:cs typeface="Arial" panose="020B0604020202020204" pitchFamily="34" charset="0"/>
+                  </a:rPr>
+                  <a:t>el</a:t>
+                </a:r>
+                <a:r>
+                  <a:rPr lang="en-US" sz="1000" dirty="0">
+                    <a:latin typeface="Arial" panose="020B0604020202020204" pitchFamily="34" charset="0"/>
+                    <a:cs typeface="Arial" panose="020B0604020202020204" pitchFamily="34" charset="0"/>
+                  </a:rPr>
+                  <a:t> </a:t>
+                </a:r>
+                <a:r>
+                  <a:rPr lang="en-US" sz="1000" dirty="0" err="1">
+                    <a:latin typeface="Arial" panose="020B0604020202020204" pitchFamily="34" charset="0"/>
+                    <a:cs typeface="Arial" panose="020B0604020202020204" pitchFamily="34" charset="0"/>
+                  </a:rPr>
+                  <a:t>parámetro</a:t>
+                </a:r>
+                <a:r>
+                  <a:rPr lang="en-US" sz="1000" dirty="0">
+                    <a:latin typeface="Arial" panose="020B0604020202020204" pitchFamily="34" charset="0"/>
+                    <a:cs typeface="Arial" panose="020B0604020202020204" pitchFamily="34" charset="0"/>
+                  </a:rPr>
+                  <a:t> </a:t>
+                </a:r>
+                <a:r>
+                  <a:rPr lang="en-US" sz="1000" i="1" dirty="0" err="1">
+                    <a:latin typeface="Arial" panose="020B0604020202020204" pitchFamily="34" charset="0"/>
+                    <a:cs typeface="Arial" panose="020B0604020202020204" pitchFamily="34" charset="0"/>
+                  </a:rPr>
+                  <a:t>wg_width_dw</a:t>
+                </a:r>
+                <a:r>
+                  <a:rPr lang="en-US" sz="1000" i="1" dirty="0">
+                    <a:latin typeface="Arial" panose="020B0604020202020204" pitchFamily="34" charset="0"/>
+                    <a:cs typeface="Arial" panose="020B0604020202020204" pitchFamily="34" charset="0"/>
+                  </a:rPr>
+                  <a:t> = 0.2</a:t>
+                </a:r>
+                <a:r>
+                  <a:rPr lang="en-US" sz="1000" dirty="0">
+                    <a:latin typeface="Arial" panose="020B0604020202020204" pitchFamily="34" charset="0"/>
+                    <a:cs typeface="Arial" panose="020B0604020202020204" pitchFamily="34" charset="0"/>
+                  </a:rPr>
+                  <a:t> y se ha </a:t>
+                </a:r>
+                <a:r>
+                  <a:rPr lang="en-US" sz="1000" dirty="0" err="1">
+                    <a:latin typeface="Arial" panose="020B0604020202020204" pitchFamily="34" charset="0"/>
+                    <a:cs typeface="Arial" panose="020B0604020202020204" pitchFamily="34" charset="0"/>
+                  </a:rPr>
+                  <a:t>procedido</a:t>
+                </a:r>
+                <a:r>
+                  <a:rPr lang="en-US" sz="1000" dirty="0">
+                    <a:latin typeface="Arial" panose="020B0604020202020204" pitchFamily="34" charset="0"/>
+                    <a:cs typeface="Arial" panose="020B0604020202020204" pitchFamily="34" charset="0"/>
+                  </a:rPr>
+                  <a:t> a </a:t>
+                </a:r>
+                <a:r>
+                  <a:rPr lang="en-US" sz="1000" dirty="0" err="1">
+                    <a:latin typeface="Arial" panose="020B0604020202020204" pitchFamily="34" charset="0"/>
+                    <a:cs typeface="Arial" panose="020B0604020202020204" pitchFamily="34" charset="0"/>
+                  </a:rPr>
+                  <a:t>optimizar</a:t>
+                </a:r>
+                <a:r>
+                  <a:rPr lang="en-US" sz="1000" dirty="0">
+                    <a:latin typeface="Arial" panose="020B0604020202020204" pitchFamily="34" charset="0"/>
+                    <a:cs typeface="Arial" panose="020B0604020202020204" pitchFamily="34" charset="0"/>
+                  </a:rPr>
+                  <a:t> </a:t>
+                </a:r>
+                <a:r>
+                  <a:rPr lang="en-US" sz="1000" dirty="0" err="1">
+                    <a:latin typeface="Arial" panose="020B0604020202020204" pitchFamily="34" charset="0"/>
+                    <a:cs typeface="Arial" panose="020B0604020202020204" pitchFamily="34" charset="0"/>
+                  </a:rPr>
+                  <a:t>el</a:t>
+                </a:r>
+                <a:r>
+                  <a:rPr lang="en-US" sz="1000" dirty="0">
+                    <a:latin typeface="Arial" panose="020B0604020202020204" pitchFamily="34" charset="0"/>
+                    <a:cs typeface="Arial" panose="020B0604020202020204" pitchFamily="34" charset="0"/>
+                  </a:rPr>
+                  <a:t> ancho del MMI (</a:t>
+                </a:r>
+                <a:r>
+                  <a:rPr lang="en-US" sz="1000" dirty="0" err="1">
+                    <a:latin typeface="Arial" panose="020B0604020202020204" pitchFamily="34" charset="0"/>
+                    <a:cs typeface="Arial" panose="020B0604020202020204" pitchFamily="34" charset="0"/>
+                  </a:rPr>
+                  <a:t>obteniendo</a:t>
+                </a:r>
+                <a:r>
+                  <a:rPr lang="en-US" sz="1000" dirty="0">
+                    <a:latin typeface="Arial" panose="020B0604020202020204" pitchFamily="34" charset="0"/>
+                    <a:cs typeface="Arial" panose="020B0604020202020204" pitchFamily="34" charset="0"/>
+                  </a:rPr>
+                  <a:t> </a:t>
+                </a:r>
+                <a:r>
+                  <a:rPr lang="en-US" sz="1000" dirty="0" err="1">
+                    <a:latin typeface="Arial" panose="020B0604020202020204" pitchFamily="34" charset="0"/>
+                    <a:cs typeface="Arial" panose="020B0604020202020204" pitchFamily="34" charset="0"/>
+                  </a:rPr>
+                  <a:t>como</a:t>
+                </a:r>
+                <a:r>
+                  <a:rPr lang="en-US" sz="1000" dirty="0">
+                    <a:latin typeface="Arial" panose="020B0604020202020204" pitchFamily="34" charset="0"/>
+                    <a:cs typeface="Arial" panose="020B0604020202020204" pitchFamily="34" charset="0"/>
+                  </a:rPr>
+                  <a:t> valor </a:t>
+                </a:r>
+                <a:r>
+                  <a:rPr lang="en-US" sz="1000" dirty="0" err="1">
+                    <a:latin typeface="Arial" panose="020B0604020202020204" pitchFamily="34" charset="0"/>
+                    <a:cs typeface="Arial" panose="020B0604020202020204" pitchFamily="34" charset="0"/>
+                  </a:rPr>
+                  <a:t>óptimo</a:t>
+                </a:r>
+                <a:r>
+                  <a:rPr lang="en-US" sz="1000" dirty="0">
+                    <a:latin typeface="Arial" panose="020B0604020202020204" pitchFamily="34" charset="0"/>
+                    <a:cs typeface="Arial" panose="020B0604020202020204" pitchFamily="34" charset="0"/>
+                  </a:rPr>
+                  <a:t> </a:t>
+                </a:r>
+                <a:r>
+                  <a:rPr lang="en-US" sz="1000" i="1" dirty="0" err="1">
+                    <a:latin typeface="Arial" panose="020B0604020202020204" pitchFamily="34" charset="0"/>
+                    <a:cs typeface="Arial" panose="020B0604020202020204" pitchFamily="34" charset="0"/>
+                  </a:rPr>
+                  <a:t>wMMI</a:t>
+                </a:r>
+                <a:r>
+                  <a:rPr lang="en-US" sz="1000" i="1" dirty="0">
+                    <a:latin typeface="Arial" panose="020B0604020202020204" pitchFamily="34" charset="0"/>
+                    <a:cs typeface="Arial" panose="020B0604020202020204" pitchFamily="34" charset="0"/>
+                  </a:rPr>
+                  <a:t> = 6.2 um</a:t>
+                </a:r>
+                <a:r>
+                  <a:rPr lang="en-US" sz="1000" dirty="0">
+                    <a:latin typeface="Arial" panose="020B0604020202020204" pitchFamily="34" charset="0"/>
+                    <a:cs typeface="Arial" panose="020B0604020202020204" pitchFamily="34" charset="0"/>
+                  </a:rPr>
+                  <a:t>) para </a:t>
+                </a:r>
+                <a:r>
+                  <a:rPr lang="en-US" sz="1000" dirty="0" err="1">
+                    <a:latin typeface="Arial" panose="020B0604020202020204" pitchFamily="34" charset="0"/>
+                    <a:cs typeface="Arial" panose="020B0604020202020204" pitchFamily="34" charset="0"/>
+                  </a:rPr>
+                  <a:t>reducir</a:t>
+                </a:r>
+                <a:r>
+                  <a:rPr lang="en-US" sz="1000" dirty="0">
+                    <a:latin typeface="Arial" panose="020B0604020202020204" pitchFamily="34" charset="0"/>
+                    <a:cs typeface="Arial" panose="020B0604020202020204" pitchFamily="34" charset="0"/>
+                  </a:rPr>
+                  <a:t> las </a:t>
+                </a:r>
+                <a:r>
+                  <a:rPr lang="en-US" sz="1000" dirty="0" err="1">
+                    <a:latin typeface="Arial" panose="020B0604020202020204" pitchFamily="34" charset="0"/>
+                    <a:cs typeface="Arial" panose="020B0604020202020204" pitchFamily="34" charset="0"/>
+                  </a:rPr>
+                  <a:t>pérdidas</a:t>
+                </a:r>
+                <a:r>
+                  <a:rPr lang="en-US" sz="1000" dirty="0">
+                    <a:latin typeface="Arial" panose="020B0604020202020204" pitchFamily="34" charset="0"/>
+                    <a:cs typeface="Arial" panose="020B0604020202020204" pitchFamily="34" charset="0"/>
+                  </a:rPr>
+                  <a:t> del </a:t>
+                </a:r>
+                <a:r>
+                  <a:rPr lang="en-US" sz="1000" dirty="0" err="1">
+                    <a:latin typeface="Arial" panose="020B0604020202020204" pitchFamily="34" charset="0"/>
+                    <a:cs typeface="Arial" panose="020B0604020202020204" pitchFamily="34" charset="0"/>
+                  </a:rPr>
+                  <a:t>dispositivo</a:t>
+                </a:r>
+                <a:r>
+                  <a:rPr lang="en-US" sz="1000" dirty="0">
+                    <a:latin typeface="Arial" panose="020B0604020202020204" pitchFamily="34" charset="0"/>
+                    <a:cs typeface="Arial" panose="020B0604020202020204" pitchFamily="34" charset="0"/>
+                  </a:rPr>
+                  <a:t>.</a:t>
+                </a:r>
+              </a:p>
+              <a:p>
+                <a:pPr algn="just"/>
+                <a:endParaRPr lang="en-US" sz="1000" dirty="0">
+                  <a:latin typeface="Arial" panose="020B0604020202020204" pitchFamily="34" charset="0"/>
+                  <a:cs typeface="Arial" panose="020B0604020202020204" pitchFamily="34" charset="0"/>
+                </a:endParaRPr>
+              </a:p>
+              <a:p>
+                <a:pPr algn="just"/>
+                <a:r>
+                  <a:rPr lang="es-ES" sz="1000" dirty="0">
+                    <a:latin typeface="Arial" panose="020B0604020202020204" pitchFamily="34" charset="0"/>
+                    <a:cs typeface="Arial" panose="020B0604020202020204" pitchFamily="34" charset="0"/>
+                  </a:rPr>
+                  <a:t>A continuación, se ha recalculado </a:t>
+                </a:r>
+                <a14:m>
+                  <m:oMath xmlns:m="http://schemas.openxmlformats.org/officeDocument/2006/math">
+                    <m:sSub>
+                      <m:sSubPr>
+                        <m:ctrlPr>
+                          <a:rPr lang="ar-AE" sz="1000">
+                            <a:latin typeface="Cambria Math" panose="02040503050406030204" pitchFamily="18" charset="0"/>
+                          </a:rPr>
+                        </m:ctrlPr>
+                      </m:sSubPr>
+                      <m:e>
+                        <m:r>
+                          <m:rPr>
+                            <m:sty m:val="p"/>
+                          </m:rPr>
+                          <a:rPr lang="ar-AE" sz="1000" b="0" i="0" smtClean="0">
+                            <a:latin typeface="Cambria Math" panose="02040503050406030204" pitchFamily="18" charset="0"/>
+                          </a:rPr>
+                          <m:t>L</m:t>
+                        </m:r>
+                      </m:e>
+                      <m:sub>
+                        <m:r>
+                          <m:rPr>
+                            <m:sty m:val="p"/>
+                          </m:rPr>
+                          <a:rPr lang="ar-AE" sz="1000" b="0" i="0" smtClean="0">
+                            <a:latin typeface="Cambria Math" panose="02040503050406030204" pitchFamily="18" charset="0"/>
+                          </a:rPr>
+                          <m:t>π</m:t>
+                        </m:r>
+                      </m:sub>
+                    </m:sSub>
+                  </m:oMath>
+                </a14:m>
+                <a:r>
+                  <a:rPr lang="es-ES" sz="1000" dirty="0">
+                    <a:latin typeface="Arial" panose="020B0604020202020204" pitchFamily="34" charset="0"/>
+                    <a:cs typeface="Arial" panose="020B0604020202020204" pitchFamily="34" charset="0"/>
+                  </a:rPr>
+                  <a:t> teniendo en cuenta la configuración con cuatro imágenes, utilizándose la relación correspondiente para estructuras 1×N simétricas. En este caso, la longitud del MMI se ha definido según </a:t>
+                </a:r>
+                <a14:m>
+                  <m:oMath xmlns:m="http://schemas.openxmlformats.org/officeDocument/2006/math">
+                    <m:r>
+                      <m:rPr>
+                        <m:sty m:val="p"/>
+                      </m:rPr>
+                      <a:rPr lang="es-ES" sz="1000" b="0" i="0" smtClean="0">
+                        <a:latin typeface="Cambria Math" panose="02040503050406030204" pitchFamily="18" charset="0"/>
+                      </a:rPr>
+                      <m:t>L</m:t>
+                    </m:r>
+                    <m:r>
+                      <a:rPr lang="es-ES" sz="1000" b="0" i="0" smtClean="0">
+                        <a:latin typeface="Cambria Math" panose="02040503050406030204" pitchFamily="18" charset="0"/>
+                      </a:rPr>
+                      <m:t>=</m:t>
+                    </m:r>
+                    <m:f>
+                      <m:fPr>
+                        <m:ctrlPr>
+                          <a:rPr lang="ar-AE" sz="1000">
+                            <a:latin typeface="Cambria Math" panose="02040503050406030204" pitchFamily="18" charset="0"/>
+                          </a:rPr>
+                        </m:ctrlPr>
+                      </m:fPr>
+                      <m:num>
+                        <m:r>
+                          <a:rPr lang="ar-AE" sz="1000" b="0" i="0" smtClean="0">
+                            <a:latin typeface="Cambria Math" panose="02040503050406030204" pitchFamily="18" charset="0"/>
+                          </a:rPr>
+                          <m:t>3</m:t>
+                        </m:r>
+                      </m:num>
+                      <m:den>
+                        <m:r>
+                          <a:rPr lang="ar-AE" sz="1000" b="0" i="0" smtClean="0">
+                            <a:latin typeface="Cambria Math" panose="02040503050406030204" pitchFamily="18" charset="0"/>
+                          </a:rPr>
+                          <m:t>16</m:t>
+                        </m:r>
+                      </m:den>
+                    </m:f>
+                    <m:sSub>
+                      <m:sSubPr>
+                        <m:ctrlPr>
+                          <a:rPr lang="ar-AE" sz="1000">
+                            <a:latin typeface="Cambria Math" panose="02040503050406030204" pitchFamily="18" charset="0"/>
+                          </a:rPr>
+                        </m:ctrlPr>
+                      </m:sSubPr>
+                      <m:e>
+                        <m:r>
+                          <a:rPr lang="es-ES" sz="1000" b="0" i="0" smtClean="0">
+                            <a:latin typeface="Cambria Math" panose="02040503050406030204" pitchFamily="18" charset="0"/>
+                          </a:rPr>
+                          <m:t>∗</m:t>
+                        </m:r>
+                        <m:r>
+                          <m:rPr>
+                            <m:sty m:val="p"/>
+                          </m:rPr>
+                          <a:rPr lang="ar-AE" sz="1000" b="0" i="0" smtClean="0">
+                            <a:latin typeface="Cambria Math" panose="02040503050406030204" pitchFamily="18" charset="0"/>
+                          </a:rPr>
+                          <m:t>L</m:t>
+                        </m:r>
+                      </m:e>
+                      <m:sub>
+                        <m:r>
+                          <m:rPr>
+                            <m:sty m:val="p"/>
+                          </m:rPr>
+                          <a:rPr lang="ar-AE" sz="1000" b="0" i="0" smtClean="0">
+                            <a:latin typeface="Cambria Math" panose="02040503050406030204" pitchFamily="18" charset="0"/>
+                          </a:rPr>
+                          <m:t>π</m:t>
+                        </m:r>
+                      </m:sub>
+                    </m:sSub>
+                  </m:oMath>
+                </a14:m>
+                <a:r>
+                  <a:rPr lang="ar-AE" sz="1000" dirty="0">
+                    <a:latin typeface="Arial" panose="020B0604020202020204" pitchFamily="34" charset="0"/>
+                    <a:cs typeface="Arial" panose="020B0604020202020204" pitchFamily="34" charset="0"/>
+                  </a:rPr>
+                  <a:t>, </a:t>
+                </a:r>
+                <a:r>
+                  <a:rPr lang="es-ES" sz="1000" dirty="0">
+                    <a:latin typeface="Arial" panose="020B0604020202020204" pitchFamily="34" charset="0"/>
+                    <a:cs typeface="Arial" panose="020B0604020202020204" pitchFamily="34" charset="0"/>
+                  </a:rPr>
+                  <a:t> obteniendo la formación de las autoimágenes en las posiciones deseadas.</a:t>
+                </a:r>
+                <a:endParaRPr lang="en-US" sz="1000" dirty="0">
+                  <a:latin typeface="Arial" panose="020B0604020202020204" pitchFamily="34" charset="0"/>
+                  <a:cs typeface="Arial" panose="020B0604020202020204" pitchFamily="34" charset="0"/>
+                </a:endParaRPr>
+              </a:p>
+              <a:p>
+                <a:pPr algn="just"/>
+                <a:endParaRPr lang="en-US" sz="1000" dirty="0">
+                  <a:latin typeface="Arial" panose="020B0604020202020204" pitchFamily="34" charset="0"/>
+                  <a:cs typeface="Arial" panose="020B0604020202020204" pitchFamily="34" charset="0"/>
+                </a:endParaRPr>
+              </a:p>
+              <a:p>
+                <a:pPr algn="just"/>
+                <a:r>
+                  <a:rPr lang="en-US" sz="1000" dirty="0" err="1">
+                    <a:latin typeface="Arial" panose="020B0604020202020204" pitchFamily="34" charset="0"/>
+                    <a:cs typeface="Arial" panose="020B0604020202020204" pitchFamily="34" charset="0"/>
+                  </a:rPr>
+                  <a:t>Posteriormente</a:t>
+                </a:r>
+                <a:r>
+                  <a:rPr lang="en-US" sz="1000" dirty="0">
+                    <a:latin typeface="Arial" panose="020B0604020202020204" pitchFamily="34" charset="0"/>
+                    <a:cs typeface="Arial" panose="020B0604020202020204" pitchFamily="34" charset="0"/>
+                  </a:rPr>
+                  <a:t>, se ha </a:t>
+                </a:r>
+                <a:r>
+                  <a:rPr lang="en-US" sz="1000" dirty="0" err="1">
+                    <a:latin typeface="Arial" panose="020B0604020202020204" pitchFamily="34" charset="0"/>
+                    <a:cs typeface="Arial" panose="020B0604020202020204" pitchFamily="34" charset="0"/>
+                  </a:rPr>
+                  <a:t>ajustado</a:t>
+                </a:r>
+                <a:r>
+                  <a:rPr lang="en-US" sz="1000" dirty="0">
+                    <a:latin typeface="Arial" panose="020B0604020202020204" pitchFamily="34" charset="0"/>
+                    <a:cs typeface="Arial" panose="020B0604020202020204" pitchFamily="34" charset="0"/>
+                  </a:rPr>
+                  <a:t> la </a:t>
+                </a:r>
+                <a:r>
+                  <a:rPr lang="en-US" sz="1000" dirty="0" err="1">
+                    <a:latin typeface="Arial" panose="020B0604020202020204" pitchFamily="34" charset="0"/>
+                    <a:cs typeface="Arial" panose="020B0604020202020204" pitchFamily="34" charset="0"/>
+                  </a:rPr>
+                  <a:t>longitud</a:t>
+                </a:r>
+                <a:r>
+                  <a:rPr lang="en-US" sz="1000" dirty="0">
+                    <a:latin typeface="Arial" panose="020B0604020202020204" pitchFamily="34" charset="0"/>
+                    <a:cs typeface="Arial" panose="020B0604020202020204" pitchFamily="34" charset="0"/>
+                  </a:rPr>
+                  <a:t> del </a:t>
+                </a:r>
+                <a:r>
+                  <a:rPr lang="en-US" sz="1000" dirty="0" err="1">
+                    <a:latin typeface="Arial" panose="020B0604020202020204" pitchFamily="34" charset="0"/>
+                    <a:cs typeface="Arial" panose="020B0604020202020204" pitchFamily="34" charset="0"/>
+                  </a:rPr>
+                  <a:t>dispositivo</a:t>
+                </a:r>
+                <a:r>
+                  <a:rPr lang="en-US" sz="1000" dirty="0">
+                    <a:latin typeface="Arial" panose="020B0604020202020204" pitchFamily="34" charset="0"/>
+                    <a:cs typeface="Arial" panose="020B0604020202020204" pitchFamily="34" charset="0"/>
+                  </a:rPr>
+                  <a:t> con </a:t>
+                </a:r>
+                <a:r>
+                  <a:rPr lang="en-US" sz="1000" dirty="0" err="1">
+                    <a:latin typeface="Arial" panose="020B0604020202020204" pitchFamily="34" charset="0"/>
+                    <a:cs typeface="Arial" panose="020B0604020202020204" pitchFamily="34" charset="0"/>
+                  </a:rPr>
+                  <a:t>el</a:t>
+                </a:r>
+                <a:r>
+                  <a:rPr lang="en-US" sz="1000" dirty="0">
+                    <a:latin typeface="Arial" panose="020B0604020202020204" pitchFamily="34" charset="0"/>
+                    <a:cs typeface="Arial" panose="020B0604020202020204" pitchFamily="34" charset="0"/>
+                  </a:rPr>
+                  <a:t> </a:t>
+                </a:r>
+                <a:r>
+                  <a:rPr lang="en-US" sz="1000" dirty="0" err="1">
+                    <a:latin typeface="Arial" panose="020B0604020202020204" pitchFamily="34" charset="0"/>
+                    <a:cs typeface="Arial" panose="020B0604020202020204" pitchFamily="34" charset="0"/>
+                  </a:rPr>
+                  <a:t>parámetro</a:t>
+                </a:r>
+                <a:r>
+                  <a:rPr lang="en-US" sz="1000" dirty="0">
+                    <a:latin typeface="Arial" panose="020B0604020202020204" pitchFamily="34" charset="0"/>
+                    <a:cs typeface="Arial" panose="020B0604020202020204" pitchFamily="34" charset="0"/>
+                  </a:rPr>
+                  <a:t> </a:t>
+                </a:r>
+                <a:r>
+                  <a:rPr lang="en-US" sz="1000" i="1" dirty="0" err="1">
+                    <a:latin typeface="Arial" panose="020B0604020202020204" pitchFamily="34" charset="0"/>
+                    <a:cs typeface="Arial" panose="020B0604020202020204" pitchFamily="34" charset="0"/>
+                  </a:rPr>
+                  <a:t>dL_MMI</a:t>
+                </a:r>
+                <a:r>
+                  <a:rPr lang="en-US" sz="1000" dirty="0">
+                    <a:latin typeface="Arial" panose="020B0604020202020204" pitchFamily="34" charset="0"/>
+                    <a:cs typeface="Arial" panose="020B0604020202020204" pitchFamily="34" charset="0"/>
+                  </a:rPr>
+                  <a:t>, </a:t>
+                </a:r>
+                <a:r>
+                  <a:rPr lang="es-ES" sz="1000" dirty="0">
+                    <a:latin typeface="Arial" panose="020B0604020202020204" pitchFamily="34" charset="0"/>
+                    <a:cs typeface="Arial" panose="020B0604020202020204" pitchFamily="34" charset="0"/>
+                  </a:rPr>
+                  <a:t>obteniendo un valor óptimo de </a:t>
+                </a:r>
+                <a:r>
+                  <a:rPr lang="es-ES" sz="1000" i="1" dirty="0" err="1">
+                    <a:latin typeface="Arial" panose="020B0604020202020204" pitchFamily="34" charset="0"/>
+                    <a:cs typeface="Arial" panose="020B0604020202020204" pitchFamily="34" charset="0"/>
+                  </a:rPr>
+                  <a:t>dL_MMI</a:t>
+                </a:r>
+                <a:r>
+                  <a:rPr lang="es-ES" sz="1000" i="1" dirty="0">
+                    <a:latin typeface="Arial" panose="020B0604020202020204" pitchFamily="34" charset="0"/>
+                    <a:cs typeface="Arial" panose="020B0604020202020204" pitchFamily="34" charset="0"/>
+                  </a:rPr>
+                  <a:t> = 0.8</a:t>
+                </a:r>
+                <a:r>
+                  <a:rPr lang="es-ES" sz="1000" dirty="0">
+                    <a:latin typeface="Arial" panose="020B0604020202020204" pitchFamily="34" charset="0"/>
+                    <a:cs typeface="Arial" panose="020B0604020202020204" pitchFamily="34" charset="0"/>
+                  </a:rPr>
+                  <a:t>, el cual actúa como una corrección sobre la longitud teórica, afinando la posición de las autoimágenes dentro del MMI. </a:t>
+                </a:r>
+              </a:p>
+              <a:p>
+                <a:pPr algn="just"/>
+                <a:endParaRPr lang="es-ES" sz="1000" dirty="0">
+                  <a:latin typeface="Arial" panose="020B0604020202020204" pitchFamily="34" charset="0"/>
+                  <a:cs typeface="Arial" panose="020B0604020202020204" pitchFamily="34" charset="0"/>
+                </a:endParaRPr>
+              </a:p>
+              <a:p>
+                <a:pPr algn="just"/>
+                <a:r>
+                  <a:rPr lang="es-ES" sz="1000" dirty="0">
+                    <a:latin typeface="Arial" panose="020B0604020202020204" pitchFamily="34" charset="0"/>
+                    <a:cs typeface="Arial" panose="020B0604020202020204" pitchFamily="34" charset="0"/>
+                  </a:rPr>
+                  <a:t>Como resultado, se ha obtenido una distribución de potencia prácticamente uniforme en las cuatro salidas (aproximadamente 0.25 en cada una), cumpliendo así el objetivo de diseño. Además, las pérdidas obtenidas son de aproximadamente 0.07 dB, lo que indica un funcionamiento eficiente del dispositivo, al ser inferiores a 0.1 dB.</a:t>
+                </a:r>
+                <a:endParaRPr lang="en-US" sz="1000" dirty="0">
+                  <a:latin typeface="Arial" panose="020B0604020202020204" pitchFamily="34" charset="0"/>
+                  <a:cs typeface="Arial" panose="020B0604020202020204" pitchFamily="34" charset="0"/>
+                </a:endParaRPr>
+              </a:p>
+              <a:p>
+                <a:pPr algn="just"/>
+                <a:endParaRPr lang="en-US" sz="1200" dirty="0">
+                  <a:latin typeface="Arial" panose="020B0604020202020204" pitchFamily="34" charset="0"/>
+                  <a:cs typeface="Arial" panose="020B0604020202020204" pitchFamily="34" charset="0"/>
+                </a:endParaRPr>
+              </a:p>
+            </p:txBody>
+          </p:sp>
+        </mc:Choice>
+        <mc:Fallback>
+          <p:sp>
+            <p:nvSpPr>
+              <p:cNvPr id="2" name="CuadroTexto 1">
+                <a:extLst>
+                  <a:ext uri="{FF2B5EF4-FFF2-40B4-BE49-F238E27FC236}">
+                    <a16:creationId xmlns:a16="http://schemas.microsoft.com/office/drawing/2014/main" id="{ACD60CE4-B0C1-29D7-CE40-DA4CA185A038}"/>
+                  </a:ext>
+                </a:extLst>
+              </p:cNvPr>
+              <p:cNvSpPr txBox="1">
+                <a:spLocks noRot="1" noChangeAspect="1" noMove="1" noResize="1" noEditPoints="1" noAdjustHandles="1" noChangeArrowheads="1" noChangeShapeType="1" noTextEdit="1"/>
+              </p:cNvSpPr>
+              <p:nvPr/>
+            </p:nvSpPr>
+            <p:spPr>
+              <a:xfrm>
+                <a:off x="583019" y="1447800"/>
+                <a:ext cx="11199971" cy="2403800"/>
+              </a:xfrm>
+              <a:prstGeom prst="rect">
+                <a:avLst/>
+              </a:prstGeom>
+              <a:blipFill>
+                <a:blip r:embed="rId4"/>
+                <a:stretch>
+                  <a:fillRect/>
+                </a:stretch>
+              </a:blipFill>
+              <a:ln w="28575">
+                <a:solidFill>
+                  <a:srgbClr val="E0700D"/>
+                </a:solidFill>
+              </a:ln>
+            </p:spPr>
+            <p:txBody>
+              <a:bodyPr/>
+              <a:lstStyle/>
+              <a:p>
+                <a:r>
+                  <a:rPr lang="es-ES">
+                    <a:noFill/>
+                  </a:rPr>
+                  <a:t> </a:t>
+                </a:r>
+              </a:p>
+            </p:txBody>
+          </p:sp>
+        </mc:Fallback>
+      </mc:AlternateContent>
+    </p:spTree>
+    <p:extLst>
+      <p:ext uri="{BB962C8B-B14F-4D97-AF65-F5344CB8AC3E}">
+        <p14:creationId xmlns:p14="http://schemas.microsoft.com/office/powerpoint/2010/main" val="2733029466"/>
+      </p:ext>
+    </p:extLst>
+  </p:cSld>
+  <p:clrMapOvr>
+    <a:masterClrMapping/>
+  </p:clrMapOvr>
+</p:sld>
+</file>
+
+<file path=ppt/slides/slide24.xml><?xml version="1.0" encoding="utf-8"?>
 <p:sld xmlns:a="http://schemas.openxmlformats.org/drawingml/2006/main" xmlns:r="http://schemas.openxmlformats.org/officeDocument/2006/relationships" xmlns:p="http://schemas.openxmlformats.org/presentationml/2006/main">
   <p:cSld>
     <p:spTree>
@@ -15430,7 +16540,7 @@
           <a:p>
             <a:fld id="{B6F15528-21DE-4FAA-801E-634DDDAF4B2B}" type="slidenum">
               <a:rPr lang="es-ES" smtClean="0"/>
-              <a:t>23</a:t>
+              <a:t>24</a:t>
             </a:fld>
             <a:endParaRPr lang="es-ES"/>
           </a:p>
@@ -15963,7 +17073,7 @@
 </p:sld>
 </file>
 
-<file path=ppt/slides/slide24.xml><?xml version="1.0" encoding="utf-8"?>
+<file path=ppt/slides/slide25.xml><?xml version="1.0" encoding="utf-8"?>
 <p:sld xmlns:a="http://schemas.openxmlformats.org/drawingml/2006/main" xmlns:r="http://schemas.openxmlformats.org/officeDocument/2006/relationships" xmlns:p="http://schemas.openxmlformats.org/presentationml/2006/main">
   <p:cSld>
     <p:spTree>
@@ -16119,7 +17229,7 @@
           <a:p>
             <a:fld id="{B6F15528-21DE-4FAA-801E-634DDDAF4B2B}" type="slidenum">
               <a:rPr lang="es-ES" smtClean="0"/>
-              <a:t>24</a:t>
+              <a:t>25</a:t>
             </a:fld>
             <a:endParaRPr lang="es-ES"/>
           </a:p>
@@ -16675,7 +17785,7 @@
 </p:sld>
 </file>
 
-<file path=ppt/slides/slide25.xml><?xml version="1.0" encoding="utf-8"?>
+<file path=ppt/slides/slide26.xml><?xml version="1.0" encoding="utf-8"?>
 <p:sld xmlns:a="http://schemas.openxmlformats.org/drawingml/2006/main" xmlns:r="http://schemas.openxmlformats.org/officeDocument/2006/relationships" xmlns:p="http://schemas.openxmlformats.org/presentationml/2006/main">
   <p:cSld>
     <p:spTree>
@@ -16825,7 +17935,7 @@
           <a:p>
             <a:fld id="{B6F15528-21DE-4FAA-801E-634DDDAF4B2B}" type="slidenum">
               <a:rPr lang="es-ES" smtClean="0"/>
-              <a:t>25</a:t>
+              <a:t>26</a:t>
             </a:fld>
             <a:endParaRPr lang="es-ES"/>
           </a:p>
@@ -17381,7 +18491,7 @@
 </p:sld>
 </file>
 
-<file path=ppt/slides/slide26.xml><?xml version="1.0" encoding="utf-8"?>
+<file path=ppt/slides/slide27.xml><?xml version="1.0" encoding="utf-8"?>
 <p:sld xmlns:a="http://schemas.openxmlformats.org/drawingml/2006/main" xmlns:r="http://schemas.openxmlformats.org/officeDocument/2006/relationships" xmlns:p="http://schemas.openxmlformats.org/presentationml/2006/main">
   <p:cSld>
     <p:spTree>
@@ -17531,7 +18641,7 @@
           <a:p>
             <a:fld id="{B6F15528-21DE-4FAA-801E-634DDDAF4B2B}" type="slidenum">
               <a:rPr lang="es-ES" smtClean="0"/>
-              <a:t>26</a:t>
+              <a:t>27</a:t>
             </a:fld>
             <a:endParaRPr lang="es-ES"/>
           </a:p>
@@ -18078,7 +19188,7 @@
 </p:sld>
 </file>
 
-<file path=ppt/slides/slide27.xml><?xml version="1.0" encoding="utf-8"?>
+<file path=ppt/slides/slide28.xml><?xml version="1.0" encoding="utf-8"?>
 <p:sld xmlns:a="http://schemas.openxmlformats.org/drawingml/2006/main" xmlns:r="http://schemas.openxmlformats.org/officeDocument/2006/relationships" xmlns:p="http://schemas.openxmlformats.org/presentationml/2006/main">
   <p:cSld>
     <p:spTree>
@@ -18217,7 +19327,7 @@
           <a:p>
             <a:fld id="{B6F15528-21DE-4FAA-801E-634DDDAF4B2B}" type="slidenum">
               <a:rPr lang="es-ES" smtClean="0"/>
-              <a:t>27</a:t>
+              <a:t>28</a:t>
             </a:fld>
             <a:endParaRPr lang="es-ES"/>
           </a:p>

--- a/LabBook_20.pptx
+++ b/LabBook_20.pptx
@@ -5,10 +5,10 @@
     <p:sldMasterId id="2147483648" r:id="rId1"/>
   </p:sldMasterIdLst>
   <p:notesMasterIdLst>
-    <p:notesMasterId r:id="rId30"/>
+    <p:notesMasterId r:id="rId32"/>
   </p:notesMasterIdLst>
   <p:handoutMasterIdLst>
-    <p:handoutMasterId r:id="rId31"/>
+    <p:handoutMasterId r:id="rId33"/>
   </p:handoutMasterIdLst>
   <p:sldIdLst>
     <p:sldId id="256" r:id="rId2"/>
@@ -35,10 +35,12 @@
     <p:sldId id="301" r:id="rId23"/>
     <p:sldId id="315" r:id="rId24"/>
     <p:sldId id="290" r:id="rId25"/>
-    <p:sldId id="297" r:id="rId26"/>
-    <p:sldId id="292" r:id="rId27"/>
-    <p:sldId id="298" r:id="rId28"/>
-    <p:sldId id="288" r:id="rId29"/>
+    <p:sldId id="316" r:id="rId26"/>
+    <p:sldId id="297" r:id="rId27"/>
+    <p:sldId id="317" r:id="rId28"/>
+    <p:sldId id="292" r:id="rId29"/>
+    <p:sldId id="298" r:id="rId30"/>
+    <p:sldId id="288" r:id="rId31"/>
   </p:sldIdLst>
   <p:sldSz cx="12192000" cy="6858000"/>
   <p:notesSz cx="12192000" cy="6858000"/>
@@ -829,7 +831,7 @@
           <a:p>
             <a:fld id="{8438F8DC-35B0-48E6-A86E-42F1F08DD00F}" type="datetimeFigureOut">
               <a:rPr lang="es-ES" smtClean="0"/>
-              <a:t>27/04/2026</a:t>
+              <a:t>29/04/2026</a:t>
             </a:fld>
             <a:endParaRPr lang="es-ES"/>
           </a:p>
@@ -1006,7 +1008,7 @@
           <a:p>
             <a:fld id="{FACBDC12-F39B-4B97-8F4D-6734F9D366FF}" type="datetimeFigureOut">
               <a:rPr lang="es-ES" smtClean="0"/>
-              <a:t>27/04/2026</a:t>
+              <a:t>29/04/2026</a:t>
             </a:fld>
             <a:endParaRPr lang="es-ES"/>
           </a:p>
@@ -2637,6 +2639,114 @@
         <p:cNvPr id="1" name="">
           <a:extLst>
             <a:ext uri="{FF2B5EF4-FFF2-40B4-BE49-F238E27FC236}">
+              <a16:creationId xmlns:a16="http://schemas.microsoft.com/office/drawing/2014/main" id="{FD363820-3581-F8D2-8EFF-C97772868F16}"/>
+            </a:ext>
+          </a:extLst>
+        </p:cNvPr>
+        <p:cNvGrpSpPr/>
+        <p:nvPr/>
+      </p:nvGrpSpPr>
+      <p:grpSpPr>
+        <a:xfrm>
+          <a:off x="0" y="0"/>
+          <a:ext cx="0" cy="0"/>
+          <a:chOff x="0" y="0"/>
+          <a:chExt cx="0" cy="0"/>
+        </a:xfrm>
+      </p:grpSpPr>
+      <p:sp>
+        <p:nvSpPr>
+          <p:cNvPr id="2" name="Marcador de imagen de diapositiva 1">
+            <a:extLst>
+              <a:ext uri="{FF2B5EF4-FFF2-40B4-BE49-F238E27FC236}">
+                <a16:creationId xmlns:a16="http://schemas.microsoft.com/office/drawing/2014/main" id="{F84D89D2-BECC-DD50-EC7D-5E64C468632D}"/>
+              </a:ext>
+            </a:extLst>
+          </p:cNvPr>
+          <p:cNvSpPr>
+            <a:spLocks noGrp="1" noRot="1" noChangeAspect="1"/>
+          </p:cNvSpPr>
+          <p:nvPr>
+            <p:ph type="sldImg"/>
+          </p:nvPr>
+        </p:nvSpPr>
+        <p:spPr/>
+      </p:sp>
+      <p:sp>
+        <p:nvSpPr>
+          <p:cNvPr id="3" name="Marcador de notas 2">
+            <a:extLst>
+              <a:ext uri="{FF2B5EF4-FFF2-40B4-BE49-F238E27FC236}">
+                <a16:creationId xmlns:a16="http://schemas.microsoft.com/office/drawing/2014/main" id="{9FE1EEC2-F2C0-404F-5D55-081E5B86127A}"/>
+              </a:ext>
+            </a:extLst>
+          </p:cNvPr>
+          <p:cNvSpPr>
+            <a:spLocks noGrp="1"/>
+          </p:cNvSpPr>
+          <p:nvPr>
+            <p:ph type="body" idx="1"/>
+          </p:nvPr>
+        </p:nvSpPr>
+        <p:spPr/>
+        <p:txBody>
+          <a:bodyPr/>
+          <a:lstStyle/>
+          <a:p>
+            <a:endParaRPr lang="es-ES" dirty="0"/>
+          </a:p>
+        </p:txBody>
+      </p:sp>
+      <p:sp>
+        <p:nvSpPr>
+          <p:cNvPr id="4" name="Marcador de número de diapositiva 3">
+            <a:extLst>
+              <a:ext uri="{FF2B5EF4-FFF2-40B4-BE49-F238E27FC236}">
+                <a16:creationId xmlns:a16="http://schemas.microsoft.com/office/drawing/2014/main" id="{2B4FF7EE-D814-FD95-0985-1DD43576A390}"/>
+              </a:ext>
+            </a:extLst>
+          </p:cNvPr>
+          <p:cNvSpPr>
+            <a:spLocks noGrp="1"/>
+          </p:cNvSpPr>
+          <p:nvPr>
+            <p:ph type="sldNum" sz="quarter" idx="5"/>
+          </p:nvPr>
+        </p:nvSpPr>
+        <p:spPr/>
+        <p:txBody>
+          <a:bodyPr/>
+          <a:lstStyle/>
+          <a:p>
+            <a:fld id="{676223B9-C868-4436-87D9-1A3152E1157A}" type="slidenum">
+              <a:rPr lang="es-ES" smtClean="0"/>
+              <a:t>25</a:t>
+            </a:fld>
+            <a:endParaRPr lang="es-ES"/>
+          </a:p>
+        </p:txBody>
+      </p:sp>
+    </p:spTree>
+    <p:extLst>
+      <p:ext uri="{BB962C8B-B14F-4D97-AF65-F5344CB8AC3E}">
+        <p14:creationId xmlns:p14="http://schemas.microsoft.com/office/powerpoint/2010/main" val="2580943197"/>
+      </p:ext>
+    </p:extLst>
+  </p:cSld>
+  <p:clrMapOvr>
+    <a:masterClrMapping/>
+  </p:clrMapOvr>
+</p:notes>
+</file>
+
+<file path=ppt/notesSlides/notesSlide22.xml><?xml version="1.0" encoding="utf-8"?>
+<p:notes xmlns:a="http://schemas.openxmlformats.org/drawingml/2006/main" xmlns:r="http://schemas.openxmlformats.org/officeDocument/2006/relationships" xmlns:p="http://schemas.openxmlformats.org/presentationml/2006/main">
+  <p:cSld>
+    <p:spTree>
+      <p:nvGrpSpPr>
+        <p:cNvPr id="1" name="">
+          <a:extLst>
+            <a:ext uri="{FF2B5EF4-FFF2-40B4-BE49-F238E27FC236}">
               <a16:creationId xmlns:a16="http://schemas.microsoft.com/office/drawing/2014/main" id="{1AC9112F-7FB7-4F49-F4F6-C1D0DC6ADBEE}"/>
             </a:ext>
           </a:extLst>
@@ -2718,7 +2828,7 @@
           <a:p>
             <a:fld id="{676223B9-C868-4436-87D9-1A3152E1157A}" type="slidenum">
               <a:rPr lang="es-ES" smtClean="0"/>
-              <a:t>25</a:t>
+              <a:t>26</a:t>
             </a:fld>
             <a:endParaRPr lang="es-ES"/>
           </a:p>
@@ -2737,7 +2847,115 @@
 </p:notes>
 </file>
 
-<file path=ppt/notesSlides/notesSlide22.xml><?xml version="1.0" encoding="utf-8"?>
+<file path=ppt/notesSlides/notesSlide23.xml><?xml version="1.0" encoding="utf-8"?>
+<p:notes xmlns:a="http://schemas.openxmlformats.org/drawingml/2006/main" xmlns:r="http://schemas.openxmlformats.org/officeDocument/2006/relationships" xmlns:p="http://schemas.openxmlformats.org/presentationml/2006/main">
+  <p:cSld>
+    <p:spTree>
+      <p:nvGrpSpPr>
+        <p:cNvPr id="1" name="">
+          <a:extLst>
+            <a:ext uri="{FF2B5EF4-FFF2-40B4-BE49-F238E27FC236}">
+              <a16:creationId xmlns:a16="http://schemas.microsoft.com/office/drawing/2014/main" id="{11308689-919D-C6D1-23DB-9D443034FEF5}"/>
+            </a:ext>
+          </a:extLst>
+        </p:cNvPr>
+        <p:cNvGrpSpPr/>
+        <p:nvPr/>
+      </p:nvGrpSpPr>
+      <p:grpSpPr>
+        <a:xfrm>
+          <a:off x="0" y="0"/>
+          <a:ext cx="0" cy="0"/>
+          <a:chOff x="0" y="0"/>
+          <a:chExt cx="0" cy="0"/>
+        </a:xfrm>
+      </p:grpSpPr>
+      <p:sp>
+        <p:nvSpPr>
+          <p:cNvPr id="2" name="Marcador de imagen de diapositiva 1">
+            <a:extLst>
+              <a:ext uri="{FF2B5EF4-FFF2-40B4-BE49-F238E27FC236}">
+                <a16:creationId xmlns:a16="http://schemas.microsoft.com/office/drawing/2014/main" id="{E6EC498C-71FA-B367-1AF8-849444AB2038}"/>
+              </a:ext>
+            </a:extLst>
+          </p:cNvPr>
+          <p:cNvSpPr>
+            <a:spLocks noGrp="1" noRot="1" noChangeAspect="1"/>
+          </p:cNvSpPr>
+          <p:nvPr>
+            <p:ph type="sldImg"/>
+          </p:nvPr>
+        </p:nvSpPr>
+        <p:spPr/>
+      </p:sp>
+      <p:sp>
+        <p:nvSpPr>
+          <p:cNvPr id="3" name="Marcador de notas 2">
+            <a:extLst>
+              <a:ext uri="{FF2B5EF4-FFF2-40B4-BE49-F238E27FC236}">
+                <a16:creationId xmlns:a16="http://schemas.microsoft.com/office/drawing/2014/main" id="{925AD165-93C6-0949-D5A3-47E7E7E96A9F}"/>
+              </a:ext>
+            </a:extLst>
+          </p:cNvPr>
+          <p:cNvSpPr>
+            <a:spLocks noGrp="1"/>
+          </p:cNvSpPr>
+          <p:nvPr>
+            <p:ph type="body" idx="1"/>
+          </p:nvPr>
+        </p:nvSpPr>
+        <p:spPr/>
+        <p:txBody>
+          <a:bodyPr/>
+          <a:lstStyle/>
+          <a:p>
+            <a:endParaRPr lang="es-ES" dirty="0"/>
+          </a:p>
+        </p:txBody>
+      </p:sp>
+      <p:sp>
+        <p:nvSpPr>
+          <p:cNvPr id="4" name="Marcador de número de diapositiva 3">
+            <a:extLst>
+              <a:ext uri="{FF2B5EF4-FFF2-40B4-BE49-F238E27FC236}">
+                <a16:creationId xmlns:a16="http://schemas.microsoft.com/office/drawing/2014/main" id="{765B6FFD-F2B4-58A2-A274-518A8E06A7E0}"/>
+              </a:ext>
+            </a:extLst>
+          </p:cNvPr>
+          <p:cNvSpPr>
+            <a:spLocks noGrp="1"/>
+          </p:cNvSpPr>
+          <p:nvPr>
+            <p:ph type="sldNum" sz="quarter" idx="5"/>
+          </p:nvPr>
+        </p:nvSpPr>
+        <p:spPr/>
+        <p:txBody>
+          <a:bodyPr/>
+          <a:lstStyle/>
+          <a:p>
+            <a:fld id="{676223B9-C868-4436-87D9-1A3152E1157A}" type="slidenum">
+              <a:rPr lang="es-ES" smtClean="0"/>
+              <a:t>27</a:t>
+            </a:fld>
+            <a:endParaRPr lang="es-ES"/>
+          </a:p>
+        </p:txBody>
+      </p:sp>
+    </p:spTree>
+    <p:extLst>
+      <p:ext uri="{BB962C8B-B14F-4D97-AF65-F5344CB8AC3E}">
+        <p14:creationId xmlns:p14="http://schemas.microsoft.com/office/powerpoint/2010/main" val="4025047709"/>
+      </p:ext>
+    </p:extLst>
+  </p:cSld>
+  <p:clrMapOvr>
+    <a:masterClrMapping/>
+  </p:clrMapOvr>
+</p:notes>
+</file>
+
+<file path=ppt/notesSlides/notesSlide24.xml><?xml version="1.0" encoding="utf-8"?>
 <p:notes xmlns:a="http://schemas.openxmlformats.org/drawingml/2006/main" xmlns:r="http://schemas.openxmlformats.org/officeDocument/2006/relationships" xmlns:p="http://schemas.openxmlformats.org/presentationml/2006/main">
   <p:cSld>
     <p:spTree>
@@ -2826,7 +3044,7 @@
           <a:p>
             <a:fld id="{676223B9-C868-4436-87D9-1A3152E1157A}" type="slidenum">
               <a:rPr lang="es-ES" smtClean="0"/>
-              <a:t>26</a:t>
+              <a:t>28</a:t>
             </a:fld>
             <a:endParaRPr lang="es-ES"/>
           </a:p>
@@ -2845,7 +3063,7 @@
 </p:notes>
 </file>
 
-<file path=ppt/notesSlides/notesSlide23.xml><?xml version="1.0" encoding="utf-8"?>
+<file path=ppt/notesSlides/notesSlide25.xml><?xml version="1.0" encoding="utf-8"?>
 <p:notes xmlns:a="http://schemas.openxmlformats.org/drawingml/2006/main" xmlns:r="http://schemas.openxmlformats.org/officeDocument/2006/relationships" xmlns:p="http://schemas.openxmlformats.org/presentationml/2006/main">
   <p:cSld>
     <p:spTree>
@@ -2934,7 +3152,7 @@
           <a:p>
             <a:fld id="{676223B9-C868-4436-87D9-1A3152E1157A}" type="slidenum">
               <a:rPr lang="es-ES" smtClean="0"/>
-              <a:t>27</a:t>
+              <a:t>29</a:t>
             </a:fld>
             <a:endParaRPr lang="es-ES"/>
           </a:p>
@@ -9872,8 +10090,8 @@
           </a:p>
         </p:txBody>
       </p:sp>
-      <mc:AlternateContent xmlns:mc="http://schemas.openxmlformats.org/markup-compatibility/2006">
-        <mc:Choice xmlns:a14="http://schemas.microsoft.com/office/drawing/2010/main" Requires="a14">
+      <mc:AlternateContent xmlns:mc="http://schemas.openxmlformats.org/markup-compatibility/2006" xmlns:a14="http://schemas.microsoft.com/office/drawing/2010/main">
+        <mc:Choice Requires="a14">
           <p:sp>
             <p:nvSpPr>
               <p:cNvPr id="2" name="CuadroTexto 1">
@@ -10933,7 +11151,7 @@
             </p:txBody>
           </p:sp>
         </mc:Choice>
-        <mc:Fallback>
+        <mc:Fallback xmlns="">
           <p:sp>
             <p:nvSpPr>
               <p:cNvPr id="2" name="CuadroTexto 1">
@@ -15528,8 +15746,8 @@
           </a:p>
         </p:txBody>
       </p:sp>
-      <mc:AlternateContent xmlns:mc="http://schemas.openxmlformats.org/markup-compatibility/2006">
-        <mc:Choice xmlns:a14="http://schemas.microsoft.com/office/drawing/2010/main" Requires="a14">
+      <mc:AlternateContent xmlns:mc="http://schemas.openxmlformats.org/markup-compatibility/2006" xmlns:a14="http://schemas.microsoft.com/office/drawing/2010/main">
+        <mc:Choice Requires="a14">
           <p:sp>
             <p:nvSpPr>
               <p:cNvPr id="2" name="CuadroTexto 1">
@@ -16020,7 +16238,7 @@
                     <m:sSub>
                       <m:sSubPr>
                         <m:ctrlPr>
-                          <a:rPr lang="ar-AE" sz="1000">
+                          <a:rPr lang="ar-AE" sz="1000" i="1">
                             <a:latin typeface="Cambria Math" panose="02040503050406030204" pitchFamily="18" charset="0"/>
                           </a:rPr>
                         </m:ctrlPr>
@@ -16077,7 +16295,7 @@
                     <m:f>
                       <m:fPr>
                         <m:ctrlPr>
-                          <a:rPr lang="ar-AE" sz="1000">
+                          <a:rPr lang="ar-AE" sz="1000" i="1">
                             <a:latin typeface="Cambria Math" panose="02040503050406030204" pitchFamily="18" charset="0"/>
                           </a:rPr>
                         </m:ctrlPr>
@@ -16102,7 +16320,7 @@
                     <m:sSub>
                       <m:sSubPr>
                         <m:ctrlPr>
-                          <a:rPr lang="ar-AE" sz="1000">
+                          <a:rPr lang="ar-AE" sz="1000" i="1">
                             <a:latin typeface="Cambria Math" panose="02040503050406030204" pitchFamily="18" charset="0"/>
                           </a:rPr>
                         </m:ctrlPr>
@@ -16324,7 +16542,7 @@
             </p:txBody>
           </p:sp>
         </mc:Choice>
-        <mc:Fallback>
+        <mc:Fallback xmlns="">
           <p:sp>
             <p:nvSpPr>
               <p:cNvPr id="2" name="CuadroTexto 1">
@@ -16582,82 +16800,6 @@
       </p:sp>
       <p:sp>
         <p:nvSpPr>
-          <p:cNvPr id="2" name="CuadroTexto 1">
-            <a:extLst>
-              <a:ext uri="{FF2B5EF4-FFF2-40B4-BE49-F238E27FC236}">
-                <a16:creationId xmlns:a16="http://schemas.microsoft.com/office/drawing/2014/main" id="{D0F8CF3B-B920-DBFC-F825-0C87B51EADA7}"/>
-              </a:ext>
-            </a:extLst>
-          </p:cNvPr>
-          <p:cNvSpPr txBox="1"/>
-          <p:nvPr/>
-        </p:nvSpPr>
-        <p:spPr>
-          <a:xfrm>
-            <a:off x="609441" y="4860334"/>
-            <a:ext cx="11199971" cy="1015663"/>
-          </a:xfrm>
-          <a:prstGeom prst="rect">
-            <a:avLst/>
-          </a:prstGeom>
-          <a:solidFill>
-            <a:schemeClr val="bg1">
-              <a:lumMod val="95000"/>
-            </a:schemeClr>
-          </a:solidFill>
-          <a:ln w="28575">
-            <a:solidFill>
-              <a:srgbClr val="E0700D"/>
-            </a:solidFill>
-          </a:ln>
-        </p:spPr>
-        <p:txBody>
-          <a:bodyPr wrap="square" rtlCol="0">
-            <a:spAutoFit/>
-          </a:bodyPr>
-          <a:lstStyle/>
-          <a:p>
-            <a:pPr algn="just"/>
-            <a:r>
-              <a:rPr lang="en-US" sz="1200" dirty="0">
-                <a:latin typeface="Arial" panose="020B0604020202020204" pitchFamily="34" charset="0"/>
-                <a:cs typeface="Arial" panose="020B0604020202020204" pitchFamily="34" charset="0"/>
-              </a:rPr>
-              <a:t>Make conclusions and observations from your results</a:t>
-            </a:r>
-          </a:p>
-          <a:p>
-            <a:pPr algn="just"/>
-            <a:endParaRPr lang="en-US" sz="1200" dirty="0">
-              <a:latin typeface="Arial" panose="020B0604020202020204" pitchFamily="34" charset="0"/>
-              <a:cs typeface="Arial" panose="020B0604020202020204" pitchFamily="34" charset="0"/>
-            </a:endParaRPr>
-          </a:p>
-          <a:p>
-            <a:pPr algn="just"/>
-            <a:endParaRPr lang="en-US" sz="1200" dirty="0">
-              <a:latin typeface="Arial" panose="020B0604020202020204" pitchFamily="34" charset="0"/>
-              <a:cs typeface="Arial" panose="020B0604020202020204" pitchFamily="34" charset="0"/>
-            </a:endParaRPr>
-          </a:p>
-          <a:p>
-            <a:pPr algn="just"/>
-            <a:endParaRPr lang="en-US" sz="1200" dirty="0">
-              <a:latin typeface="Arial" panose="020B0604020202020204" pitchFamily="34" charset="0"/>
-              <a:cs typeface="Arial" panose="020B0604020202020204" pitchFamily="34" charset="0"/>
-            </a:endParaRPr>
-          </a:p>
-          <a:p>
-            <a:pPr algn="just"/>
-            <a:endParaRPr lang="en-US" sz="1200" dirty="0">
-              <a:latin typeface="Arial" panose="020B0604020202020204" pitchFamily="34" charset="0"/>
-              <a:cs typeface="Arial" panose="020B0604020202020204" pitchFamily="34" charset="0"/>
-            </a:endParaRPr>
-          </a:p>
-        </p:txBody>
-      </p:sp>
-      <p:sp>
-        <p:nvSpPr>
           <p:cNvPr id="5" name="Rectángulo 4">
             <a:extLst>
               <a:ext uri="{FF2B5EF4-FFF2-40B4-BE49-F238E27FC236}">
@@ -16760,42 +16902,6 @@
           </a:p>
         </p:txBody>
       </p:sp>
-      <p:sp>
-        <p:nvSpPr>
-          <p:cNvPr id="7" name="CuadroTexto 6">
-            <a:extLst>
-              <a:ext uri="{FF2B5EF4-FFF2-40B4-BE49-F238E27FC236}">
-                <a16:creationId xmlns:a16="http://schemas.microsoft.com/office/drawing/2014/main" id="{6D309BFB-98FD-0CBA-3C6A-346D8859893B}"/>
-              </a:ext>
-            </a:extLst>
-          </p:cNvPr>
-          <p:cNvSpPr txBox="1"/>
-          <p:nvPr/>
-        </p:nvSpPr>
-        <p:spPr>
-          <a:xfrm>
-            <a:off x="6331152" y="4342178"/>
-            <a:ext cx="2269787" cy="369332"/>
-          </a:xfrm>
-          <a:prstGeom prst="rect">
-            <a:avLst/>
-          </a:prstGeom>
-          <a:noFill/>
-        </p:spPr>
-        <p:txBody>
-          <a:bodyPr wrap="square">
-            <a:spAutoFit/>
-          </a:bodyPr>
-          <a:lstStyle/>
-          <a:p>
-            <a:r>
-              <a:rPr lang="en-US" dirty="0"/>
-              <a:t>slab = 150nm</a:t>
-            </a:r>
-            <a:endParaRPr lang="es-ES" dirty="0"/>
-          </a:p>
-        </p:txBody>
-      </p:sp>
       <mc:AlternateContent xmlns:mc="http://schemas.openxmlformats.org/markup-compatibility/2006" xmlns:a14="http://schemas.microsoft.com/office/drawing/2010/main">
         <mc:Choice Requires="a14">
           <p:sp>
@@ -17060,6 +17166,66 @@
           </p:sp>
         </mc:Fallback>
       </mc:AlternateContent>
+      <p:pic>
+        <p:nvPicPr>
+          <p:cNvPr id="10" name="Imagen 9">
+            <a:extLst>
+              <a:ext uri="{FF2B5EF4-FFF2-40B4-BE49-F238E27FC236}">
+                <a16:creationId xmlns:a16="http://schemas.microsoft.com/office/drawing/2014/main" id="{EDA44C1E-8688-AC34-01A5-54163625980D}"/>
+              </a:ext>
+            </a:extLst>
+          </p:cNvPr>
+          <p:cNvPicPr>
+            <a:picLocks noChangeAspect="1"/>
+          </p:cNvPicPr>
+          <p:nvPr/>
+        </p:nvPicPr>
+        <p:blipFill>
+          <a:blip r:embed="rId7"/>
+          <a:stretch>
+            <a:fillRect/>
+          </a:stretch>
+        </p:blipFill>
+        <p:spPr>
+          <a:xfrm>
+            <a:off x="1310422" y="1538273"/>
+            <a:ext cx="4084595" cy="3125082"/>
+          </a:xfrm>
+          <a:prstGeom prst="rect">
+            <a:avLst/>
+          </a:prstGeom>
+        </p:spPr>
+      </p:pic>
+      <p:pic>
+        <p:nvPicPr>
+          <p:cNvPr id="12" name="Imagen 11">
+            <a:extLst>
+              <a:ext uri="{FF2B5EF4-FFF2-40B4-BE49-F238E27FC236}">
+                <a16:creationId xmlns:a16="http://schemas.microsoft.com/office/drawing/2014/main" id="{95A741F0-2A7E-84DA-9167-F91851BF2E91}"/>
+              </a:ext>
+            </a:extLst>
+          </p:cNvPr>
+          <p:cNvPicPr>
+            <a:picLocks noChangeAspect="1"/>
+          </p:cNvPicPr>
+          <p:nvPr/>
+        </p:nvPicPr>
+        <p:blipFill>
+          <a:blip r:embed="rId8"/>
+          <a:stretch>
+            <a:fillRect/>
+          </a:stretch>
+        </p:blipFill>
+        <p:spPr>
+          <a:xfrm>
+            <a:off x="7005571" y="1498925"/>
+            <a:ext cx="4107026" cy="3164430"/>
+          </a:xfrm>
+          <a:prstGeom prst="rect">
+            <a:avLst/>
+          </a:prstGeom>
+        </p:spPr>
+      </p:pic>
     </p:spTree>
     <p:extLst>
       <p:ext uri="{BB962C8B-B14F-4D97-AF65-F5344CB8AC3E}">
@@ -17074,6 +17240,654 @@
 </file>
 
 <file path=ppt/slides/slide25.xml><?xml version="1.0" encoding="utf-8"?>
+<p:sld xmlns:a="http://schemas.openxmlformats.org/drawingml/2006/main" xmlns:r="http://schemas.openxmlformats.org/officeDocument/2006/relationships" xmlns:p="http://schemas.openxmlformats.org/presentationml/2006/main">
+  <p:cSld>
+    <p:spTree>
+      <p:nvGrpSpPr>
+        <p:cNvPr id="1" name="">
+          <a:extLst>
+            <a:ext uri="{FF2B5EF4-FFF2-40B4-BE49-F238E27FC236}">
+              <a16:creationId xmlns:a16="http://schemas.microsoft.com/office/drawing/2014/main" id="{5472D1A9-CD98-8B8E-6121-7F6EC000F95B}"/>
+            </a:ext>
+          </a:extLst>
+        </p:cNvPr>
+        <p:cNvGrpSpPr/>
+        <p:nvPr/>
+      </p:nvGrpSpPr>
+      <p:grpSpPr>
+        <a:xfrm>
+          <a:off x="0" y="0"/>
+          <a:ext cx="0" cy="0"/>
+          <a:chOff x="0" y="0"/>
+          <a:chExt cx="0" cy="0"/>
+        </a:xfrm>
+      </p:grpSpPr>
+      <p:sp>
+        <p:nvSpPr>
+          <p:cNvPr id="16" name="object 16">
+            <a:extLst>
+              <a:ext uri="{FF2B5EF4-FFF2-40B4-BE49-F238E27FC236}">
+                <a16:creationId xmlns:a16="http://schemas.microsoft.com/office/drawing/2014/main" id="{07745D7B-7629-1578-718C-26F2AD549FEB}"/>
+              </a:ext>
+            </a:extLst>
+          </p:cNvPr>
+          <p:cNvSpPr txBox="1">
+            <a:spLocks noGrp="1"/>
+          </p:cNvSpPr>
+          <p:nvPr>
+            <p:ph type="title"/>
+          </p:nvPr>
+        </p:nvSpPr>
+        <p:spPr>
+          <a:xfrm>
+            <a:off x="685800" y="408883"/>
+            <a:ext cx="10994410" cy="1090042"/>
+          </a:xfrm>
+          <a:prstGeom prst="rect">
+            <a:avLst/>
+          </a:prstGeom>
+        </p:spPr>
+        <p:txBody>
+          <a:bodyPr vert="horz" wrap="square" lIns="0" tIns="12700" rIns="0" bIns="0" rtlCol="0">
+            <a:spAutoFit/>
+          </a:bodyPr>
+          <a:lstStyle/>
+          <a:p>
+            <a:pPr marL="12700">
+              <a:lnSpc>
+                <a:spcPct val="100000"/>
+              </a:lnSpc>
+              <a:spcBef>
+                <a:spcPts val="100"/>
+              </a:spcBef>
+            </a:pPr>
+            <a:r>
+              <a:rPr lang="en-US" sz="2500" dirty="0"/>
+              <a:t>Extra #1 – Directional coupler gap dependence</a:t>
+            </a:r>
+            <a:br>
+              <a:rPr lang="en-US" sz="2500" dirty="0"/>
+            </a:br>
+            <a:r>
+              <a:rPr lang="en-US" b="0" dirty="0"/>
+              <a:t>Wavelength 1.55 µm, width 1.0 µm, </a:t>
+            </a:r>
+            <a:r>
+              <a:rPr lang="en-US" dirty="0"/>
+              <a:t>gap 0.2-2.4 µm </a:t>
+            </a:r>
+            <a:r>
+              <a:rPr lang="en-US" b="0" dirty="0"/>
+              <a:t>(step 0.2 µm)</a:t>
+            </a:r>
+            <a:br>
+              <a:rPr lang="es-ES" sz="2500" spc="-5" dirty="0">
+                <a:latin typeface="+mj-lt"/>
+                <a:cs typeface="Lucida Sans"/>
+              </a:rPr>
+            </a:br>
+            <a:endParaRPr sz="2500" b="0" dirty="0">
+              <a:latin typeface="+mj-lt"/>
+              <a:cs typeface="Lucida Sans"/>
+            </a:endParaRPr>
+          </a:p>
+        </p:txBody>
+      </p:sp>
+      <p:pic>
+        <p:nvPicPr>
+          <p:cNvPr id="83" name="Gráfico 82">
+            <a:extLst>
+              <a:ext uri="{FF2B5EF4-FFF2-40B4-BE49-F238E27FC236}">
+                <a16:creationId xmlns:a16="http://schemas.microsoft.com/office/drawing/2014/main" id="{E206F50A-2EBF-E614-FA80-DC9DD4809F2B}"/>
+              </a:ext>
+            </a:extLst>
+          </p:cNvPr>
+          <p:cNvPicPr>
+            <a:picLocks noChangeAspect="1"/>
+          </p:cNvPicPr>
+          <p:nvPr/>
+        </p:nvPicPr>
+        <p:blipFill>
+          <a:blip>
+            <a:extLst>
+              <a:ext uri="{96DAC541-7B7A-43D3-8B79-37D633B846F1}">
+                <asvg:svgBlip xmlns:asvg="http://schemas.microsoft.com/office/drawing/2016/SVG/main" r:embed="rId3"/>
+              </a:ext>
+            </a:extLst>
+          </a:blip>
+          <a:stretch>
+            <a:fillRect/>
+          </a:stretch>
+        </p:blipFill>
+        <p:spPr>
+          <a:xfrm>
+            <a:off x="5045006" y="6356057"/>
+            <a:ext cx="6409575" cy="363174"/>
+          </a:xfrm>
+          <a:prstGeom prst="rect">
+            <a:avLst/>
+          </a:prstGeom>
+        </p:spPr>
+      </p:pic>
+      <p:sp>
+        <p:nvSpPr>
+          <p:cNvPr id="84" name="Marcador de número de diapositiva 83">
+            <a:extLst>
+              <a:ext uri="{FF2B5EF4-FFF2-40B4-BE49-F238E27FC236}">
+                <a16:creationId xmlns:a16="http://schemas.microsoft.com/office/drawing/2014/main" id="{9B52DFDD-C90B-8310-C025-E0ECE8C0B9E2}"/>
+              </a:ext>
+            </a:extLst>
+          </p:cNvPr>
+          <p:cNvSpPr>
+            <a:spLocks noGrp="1"/>
+          </p:cNvSpPr>
+          <p:nvPr>
+            <p:ph type="sldNum" sz="quarter" idx="7"/>
+          </p:nvPr>
+        </p:nvSpPr>
+        <p:spPr/>
+        <p:txBody>
+          <a:bodyPr/>
+          <a:lstStyle/>
+          <a:p>
+            <a:fld id="{B6F15528-21DE-4FAA-801E-634DDDAF4B2B}" type="slidenum">
+              <a:rPr lang="es-ES" smtClean="0"/>
+              <a:t>25</a:t>
+            </a:fld>
+            <a:endParaRPr lang="es-ES"/>
+          </a:p>
+        </p:txBody>
+      </p:sp>
+      <p:sp>
+        <p:nvSpPr>
+          <p:cNvPr id="3" name="Marcador de pie de página 2">
+            <a:extLst>
+              <a:ext uri="{FF2B5EF4-FFF2-40B4-BE49-F238E27FC236}">
+                <a16:creationId xmlns:a16="http://schemas.microsoft.com/office/drawing/2014/main" id="{6DC26FAC-847F-CF6D-E736-C19DBE61E213}"/>
+              </a:ext>
+            </a:extLst>
+          </p:cNvPr>
+          <p:cNvSpPr>
+            <a:spLocks noGrp="1"/>
+          </p:cNvSpPr>
+          <p:nvPr>
+            <p:ph type="ftr" sz="quarter" idx="5"/>
+          </p:nvPr>
+        </p:nvSpPr>
+        <p:spPr/>
+        <p:txBody>
+          <a:bodyPr/>
+          <a:lstStyle/>
+          <a:p>
+            <a:pPr marL="12700">
+              <a:spcBef>
+                <a:spcPts val="15"/>
+              </a:spcBef>
+            </a:pPr>
+            <a:r>
+              <a:rPr lang="es-ES" spc="-5"/>
+              <a:t>LAB 2.0. COUPLERS</a:t>
+            </a:r>
+            <a:endParaRPr lang="es-ES" spc="-5" dirty="0"/>
+          </a:p>
+        </p:txBody>
+      </p:sp>
+      <mc:AlternateContent xmlns:mc="http://schemas.openxmlformats.org/markup-compatibility/2006">
+        <mc:Choice xmlns:a14="http://schemas.microsoft.com/office/drawing/2010/main" Requires="a14">
+          <p:sp>
+            <p:nvSpPr>
+              <p:cNvPr id="2" name="CuadroTexto 1">
+                <a:extLst>
+                  <a:ext uri="{FF2B5EF4-FFF2-40B4-BE49-F238E27FC236}">
+                    <a16:creationId xmlns:a16="http://schemas.microsoft.com/office/drawing/2014/main" id="{79C670B6-5DD9-B08F-DDF1-A71B39764366}"/>
+                  </a:ext>
+                </a:extLst>
+              </p:cNvPr>
+              <p:cNvSpPr txBox="1"/>
+              <p:nvPr/>
+            </p:nvSpPr>
+            <p:spPr>
+              <a:xfrm>
+                <a:off x="496014" y="1447800"/>
+                <a:ext cx="11199971" cy="2646878"/>
+              </a:xfrm>
+              <a:prstGeom prst="rect">
+                <a:avLst/>
+              </a:prstGeom>
+              <a:solidFill>
+                <a:schemeClr val="bg1">
+                  <a:lumMod val="95000"/>
+                </a:schemeClr>
+              </a:solidFill>
+              <a:ln w="28575">
+                <a:solidFill>
+                  <a:srgbClr val="E0700D"/>
+                </a:solidFill>
+              </a:ln>
+            </p:spPr>
+            <p:txBody>
+              <a:bodyPr wrap="square" rtlCol="0">
+                <a:spAutoFit/>
+              </a:bodyPr>
+              <a:lstStyle/>
+              <a:p>
+                <a:pPr algn="just"/>
+                <a:r>
+                  <a:rPr lang="en-US" sz="1200" b="1" i="1" dirty="0">
+                    <a:latin typeface="Arial" panose="020B0604020202020204" pitchFamily="34" charset="0"/>
+                    <a:cs typeface="Arial" panose="020B0604020202020204" pitchFamily="34" charset="0"/>
+                  </a:rPr>
+                  <a:t>Make conclusions and observations from your results</a:t>
+                </a:r>
+              </a:p>
+              <a:p>
+                <a:pPr algn="just"/>
+                <a:endParaRPr lang="en-US" sz="1200" b="1" i="1" dirty="0">
+                  <a:latin typeface="Arial" panose="020B0604020202020204" pitchFamily="34" charset="0"/>
+                  <a:cs typeface="Arial" panose="020B0604020202020204" pitchFamily="34" charset="0"/>
+                </a:endParaRPr>
+              </a:p>
+              <a:p>
+                <a:pPr algn="just"/>
+                <a:r>
+                  <a:rPr lang="es-ES" sz="1000" dirty="0">
+                    <a:latin typeface="Arial" panose="020B0604020202020204" pitchFamily="34" charset="0"/>
+                    <a:cs typeface="Arial" panose="020B0604020202020204" pitchFamily="34" charset="0"/>
+                  </a:rPr>
+                  <a:t>En este ejercicio, se ha diseñado un acoplador direccional y se ha realizado un barrido de su gap, es decir, la distancia entre sus dos guías. Posteriormente, se ha simulado la longitud de acoplo </a:t>
+                </a:r>
+                <a14:m>
+                  <m:oMath xmlns:m="http://schemas.openxmlformats.org/officeDocument/2006/math">
+                    <m:sSub>
+                      <m:sSubPr>
+                        <m:ctrlPr>
+                          <a:rPr lang="ar-AE" sz="1000"/>
+                        </m:ctrlPr>
+                      </m:sSubPr>
+                      <m:e>
+                        <m:r>
+                          <m:rPr>
+                            <m:sty m:val="p"/>
+                          </m:rPr>
+                          <a:rPr lang="ar-AE" sz="1000" b="0" i="0"/>
+                          <m:t>L</m:t>
+                        </m:r>
+                      </m:e>
+                      <m:sub>
+                        <m:r>
+                          <m:rPr>
+                            <m:sty m:val="p"/>
+                          </m:rPr>
+                          <a:rPr lang="ar-AE" sz="1000" b="0" i="0"/>
+                          <m:t>π</m:t>
+                        </m:r>
+                        <m:r>
+                          <a:rPr lang="es-ES" sz="1000" b="0" i="0" smtClean="0">
+                            <a:latin typeface="Cambria Math" panose="02040503050406030204" pitchFamily="18" charset="0"/>
+                          </a:rPr>
+                          <m:t> </m:t>
+                        </m:r>
+                      </m:sub>
+                    </m:sSub>
+                  </m:oMath>
+                </a14:m>
+                <a:r>
+                  <a:rPr lang="es-ES" sz="1000" dirty="0">
+                    <a:latin typeface="Arial" panose="020B0604020202020204" pitchFamily="34" charset="0"/>
+                    <a:cs typeface="Arial" panose="020B0604020202020204" pitchFamily="34" charset="0"/>
+                  </a:rPr>
+                  <a:t>en función de dicho gap.</a:t>
+                </a:r>
+              </a:p>
+              <a:p>
+                <a:pPr algn="just"/>
+                <a:endParaRPr lang="es-ES" sz="1000" dirty="0">
+                  <a:latin typeface="Arial" panose="020B0604020202020204" pitchFamily="34" charset="0"/>
+                  <a:cs typeface="Arial" panose="020B0604020202020204" pitchFamily="34" charset="0"/>
+                </a:endParaRPr>
+              </a:p>
+              <a:p>
+                <a:pPr algn="just"/>
+                <a:r>
+                  <a:rPr lang="es-ES" sz="1000" dirty="0">
+                    <a:latin typeface="Arial" panose="020B0604020202020204" pitchFamily="34" charset="0"/>
+                    <a:cs typeface="Arial" panose="020B0604020202020204" pitchFamily="34" charset="0"/>
+                  </a:rPr>
+                  <a:t>Se observa que al aumentar el gap, </a:t>
+                </a:r>
+                <a14:m>
+                  <m:oMath xmlns:m="http://schemas.openxmlformats.org/officeDocument/2006/math">
+                    <m:sSub>
+                      <m:sSubPr>
+                        <m:ctrlPr>
+                          <a:rPr lang="ar-AE" sz="1000"/>
+                        </m:ctrlPr>
+                      </m:sSubPr>
+                      <m:e>
+                        <m:r>
+                          <m:rPr>
+                            <m:sty m:val="p"/>
+                          </m:rPr>
+                          <a:rPr lang="ar-AE" sz="1000" b="0" i="0"/>
+                          <m:t>L</m:t>
+                        </m:r>
+                      </m:e>
+                      <m:sub>
+                        <m:r>
+                          <m:rPr>
+                            <m:sty m:val="p"/>
+                          </m:rPr>
+                          <a:rPr lang="ar-AE" sz="1000" b="0" i="0"/>
+                          <m:t>π</m:t>
+                        </m:r>
+                      </m:sub>
+                    </m:sSub>
+                  </m:oMath>
+                </a14:m>
+                <a:r>
+                  <a:rPr lang="es-ES" sz="1000" dirty="0">
+                    <a:latin typeface="Arial" panose="020B0604020202020204" pitchFamily="34" charset="0"/>
+                    <a:cs typeface="Arial" panose="020B0604020202020204" pitchFamily="34" charset="0"/>
+                  </a:rPr>
+                  <a:t> aumenta significativamente porque al separar más las guías, el solapamiento de los campos evanescentes disminuye, al igual que la diferencia entre los índices efectivos, reduciendo el acoplo entre ellas.</a:t>
+                </a:r>
+              </a:p>
+              <a:p>
+                <a:pPr algn="just"/>
+                <a:r>
+                  <a:rPr lang="es-ES" sz="1000" dirty="0">
+                    <a:latin typeface="Arial" panose="020B0604020202020204" pitchFamily="34" charset="0"/>
+                    <a:cs typeface="Arial" panose="020B0604020202020204" pitchFamily="34" charset="0"/>
+                  </a:rPr>
+                  <a:t>Como consecuencia, la transferencia de potencia entre las guías es más lenta, por lo que se necesita una mayor longitud de propagación para completar el acoplo. Por tanto, al aumentar el gap, el acoplo disminuye y la longitud de acoplo </a:t>
+                </a:r>
+                <a14:m>
+                  <m:oMath xmlns:m="http://schemas.openxmlformats.org/officeDocument/2006/math">
+                    <m:sSub>
+                      <m:sSubPr>
+                        <m:ctrlPr>
+                          <a:rPr lang="ar-AE" sz="1000"/>
+                        </m:ctrlPr>
+                      </m:sSubPr>
+                      <m:e>
+                        <m:r>
+                          <m:rPr>
+                            <m:sty m:val="p"/>
+                          </m:rPr>
+                          <a:rPr lang="ar-AE" sz="1000" b="0" i="0"/>
+                          <m:t>L</m:t>
+                        </m:r>
+                      </m:e>
+                      <m:sub>
+                        <m:r>
+                          <m:rPr>
+                            <m:sty m:val="p"/>
+                          </m:rPr>
+                          <a:rPr lang="ar-AE" sz="1000" b="0" i="0"/>
+                          <m:t>π</m:t>
+                        </m:r>
+                      </m:sub>
+                    </m:sSub>
+                  </m:oMath>
+                </a14:m>
+                <a:r>
+                  <a:rPr lang="es-ES" sz="1000" dirty="0">
+                    <a:latin typeface="Arial" panose="020B0604020202020204" pitchFamily="34" charset="0"/>
+                    <a:cs typeface="Arial" panose="020B0604020202020204" pitchFamily="34" charset="0"/>
+                  </a:rPr>
+                  <a:t> aumenta.</a:t>
+                </a:r>
+                <a:endParaRPr lang="ar-AE" sz="1000" dirty="0">
+                  <a:latin typeface="Arial" panose="020B0604020202020204" pitchFamily="34" charset="0"/>
+                  <a:cs typeface="Arial" panose="020B0604020202020204" pitchFamily="34" charset="0"/>
+                </a:endParaRPr>
+              </a:p>
+              <a:p>
+                <a:pPr algn="just"/>
+                <a:endParaRPr lang="en-US" sz="1000" dirty="0">
+                  <a:latin typeface="Arial" panose="020B0604020202020204" pitchFamily="34" charset="0"/>
+                  <a:cs typeface="Arial" panose="020B0604020202020204" pitchFamily="34" charset="0"/>
+                </a:endParaRPr>
+              </a:p>
+              <a:p>
+                <a:pPr algn="just"/>
+                <a:r>
+                  <a:rPr lang="es-ES" sz="1000" dirty="0">
+                    <a:latin typeface="Arial" panose="020B0604020202020204" pitchFamily="34" charset="0"/>
+                    <a:cs typeface="Arial" panose="020B0604020202020204" pitchFamily="34" charset="0"/>
+                  </a:rPr>
+                  <a:t>Además, tal y como se ve en las gráficas este aumento no es lineal, sino que presenta un crecimiento aproximadamente exponencial, debido a la naturaleza exponencial de la disminución de los campos evanescentes.</a:t>
+                </a:r>
+              </a:p>
+              <a:p>
+                <a:pPr algn="just"/>
+                <a:endParaRPr lang="es-ES" sz="1000" dirty="0">
+                  <a:latin typeface="Arial" panose="020B0604020202020204" pitchFamily="34" charset="0"/>
+                  <a:cs typeface="Arial" panose="020B0604020202020204" pitchFamily="34" charset="0"/>
+                </a:endParaRPr>
+              </a:p>
+              <a:p>
+                <a:pPr algn="just"/>
+                <a:r>
+                  <a:rPr lang="es-ES" sz="1000" dirty="0">
+                    <a:latin typeface="Arial" panose="020B0604020202020204" pitchFamily="34" charset="0"/>
+                    <a:cs typeface="Arial" panose="020B0604020202020204" pitchFamily="34" charset="0"/>
+                  </a:rPr>
+                  <a:t>Por último, comparando los casos </a:t>
+                </a:r>
+                <a:r>
+                  <a:rPr lang="es-ES" sz="1000" dirty="0" err="1">
+                    <a:latin typeface="Arial" panose="020B0604020202020204" pitchFamily="34" charset="0"/>
+                    <a:cs typeface="Arial" panose="020B0604020202020204" pitchFamily="34" charset="0"/>
+                  </a:rPr>
+                  <a:t>deep</a:t>
+                </a:r>
+                <a:r>
+                  <a:rPr lang="es-ES" sz="1000" dirty="0">
+                    <a:latin typeface="Arial" panose="020B0604020202020204" pitchFamily="34" charset="0"/>
+                    <a:cs typeface="Arial" panose="020B0604020202020204" pitchFamily="34" charset="0"/>
+                  </a:rPr>
+                  <a:t> y </a:t>
+                </a:r>
+                <a:r>
+                  <a:rPr lang="es-ES" sz="1000" dirty="0" err="1">
+                    <a:latin typeface="Arial" panose="020B0604020202020204" pitchFamily="34" charset="0"/>
+                    <a:cs typeface="Arial" panose="020B0604020202020204" pitchFamily="34" charset="0"/>
+                  </a:rPr>
+                  <a:t>shallow</a:t>
+                </a:r>
+                <a:r>
+                  <a:rPr lang="es-ES" sz="1000" dirty="0">
+                    <a:latin typeface="Arial" panose="020B0604020202020204" pitchFamily="34" charset="0"/>
+                    <a:cs typeface="Arial" panose="020B0604020202020204" pitchFamily="34" charset="0"/>
+                  </a:rPr>
+                  <a:t>, se observa que el acoplo es mayor en el caso </a:t>
+                </a:r>
+                <a:r>
+                  <a:rPr lang="es-ES" sz="1000" dirty="0" err="1">
+                    <a:latin typeface="Arial" panose="020B0604020202020204" pitchFamily="34" charset="0"/>
+                    <a:cs typeface="Arial" panose="020B0604020202020204" pitchFamily="34" charset="0"/>
+                  </a:rPr>
+                  <a:t>shallow</a:t>
+                </a:r>
+                <a:r>
+                  <a:rPr lang="es-ES" sz="1000" dirty="0">
+                    <a:latin typeface="Arial" panose="020B0604020202020204" pitchFamily="34" charset="0"/>
+                    <a:cs typeface="Arial" panose="020B0604020202020204" pitchFamily="34" charset="0"/>
+                  </a:rPr>
+                  <a:t>: presenta menor </a:t>
+                </a:r>
+                <a14:m>
+                  <m:oMath xmlns:m="http://schemas.openxmlformats.org/officeDocument/2006/math">
+                    <m:sSub>
+                      <m:sSubPr>
+                        <m:ctrlPr>
+                          <a:rPr lang="ar-AE" sz="1000"/>
+                        </m:ctrlPr>
+                      </m:sSubPr>
+                      <m:e>
+                        <m:r>
+                          <m:rPr>
+                            <m:sty m:val="p"/>
+                          </m:rPr>
+                          <a:rPr lang="ar-AE" sz="1000" b="0" i="0"/>
+                          <m:t>L</m:t>
+                        </m:r>
+                      </m:e>
+                      <m:sub>
+                        <m:r>
+                          <m:rPr>
+                            <m:sty m:val="p"/>
+                          </m:rPr>
+                          <a:rPr lang="ar-AE" sz="1000" b="0" i="0"/>
+                          <m:t>π</m:t>
+                        </m:r>
+                      </m:sub>
+                    </m:sSub>
+                    <m:r>
+                      <a:rPr lang="es-ES" sz="1000" b="0" i="0" smtClean="0">
+                        <a:latin typeface="Cambria Math" panose="02040503050406030204" pitchFamily="18" charset="0"/>
+                      </a:rPr>
+                      <m:t>, </m:t>
+                    </m:r>
+                  </m:oMath>
+                </a14:m>
+                <a:r>
+                  <a:rPr lang="es-ES" sz="1000" dirty="0">
+                    <a:latin typeface="Arial" panose="020B0604020202020204" pitchFamily="34" charset="0"/>
+                    <a:cs typeface="Arial" panose="020B0604020202020204" pitchFamily="34" charset="0"/>
+                  </a:rPr>
+                  <a:t>ya que el campo se extiende más fuera del núcleo por la menor confinación, aumentando el solapamiento entre las guías. En cambio, en el caso </a:t>
+                </a:r>
+                <a:r>
+                  <a:rPr lang="es-ES" sz="1000" dirty="0" err="1">
+                    <a:latin typeface="Arial" panose="020B0604020202020204" pitchFamily="34" charset="0"/>
+                    <a:cs typeface="Arial" panose="020B0604020202020204" pitchFamily="34" charset="0"/>
+                  </a:rPr>
+                  <a:t>deep</a:t>
+                </a:r>
+                <a:r>
+                  <a:rPr lang="es-ES" sz="1000" dirty="0">
+                    <a:latin typeface="Arial" panose="020B0604020202020204" pitchFamily="34" charset="0"/>
+                    <a:cs typeface="Arial" panose="020B0604020202020204" pitchFamily="34" charset="0"/>
+                  </a:rPr>
+                  <a:t> el confinamiento es mayor y el acoplo es más débil, dando lugar a valores de </a:t>
+                </a:r>
+                <a14:m>
+                  <m:oMath xmlns:m="http://schemas.openxmlformats.org/officeDocument/2006/math">
+                    <m:sSub>
+                      <m:sSubPr>
+                        <m:ctrlPr>
+                          <a:rPr lang="ar-AE" sz="1000"/>
+                        </m:ctrlPr>
+                      </m:sSubPr>
+                      <m:e>
+                        <m:r>
+                          <m:rPr>
+                            <m:sty m:val="p"/>
+                          </m:rPr>
+                          <a:rPr lang="ar-AE" sz="1000" b="0" i="0"/>
+                          <m:t>L</m:t>
+                        </m:r>
+                      </m:e>
+                      <m:sub>
+                        <m:r>
+                          <m:rPr>
+                            <m:sty m:val="p"/>
+                          </m:rPr>
+                          <a:rPr lang="ar-AE" sz="1000" b="0" i="0"/>
+                          <m:t>π</m:t>
+                        </m:r>
+                      </m:sub>
+                    </m:sSub>
+                  </m:oMath>
+                </a14:m>
+                <a:r>
+                  <a:rPr lang="es-ES" sz="1000" dirty="0">
+                    <a:latin typeface="Arial" panose="020B0604020202020204" pitchFamily="34" charset="0"/>
+                    <a:cs typeface="Arial" panose="020B0604020202020204" pitchFamily="34" charset="0"/>
+                  </a:rPr>
+                  <a:t>más altos.</a:t>
+                </a:r>
+                <a:endParaRPr lang="en-US" sz="1200" dirty="0">
+                  <a:latin typeface="Arial" panose="020B0604020202020204" pitchFamily="34" charset="0"/>
+                  <a:cs typeface="Arial" panose="020B0604020202020204" pitchFamily="34" charset="0"/>
+                </a:endParaRPr>
+              </a:p>
+              <a:p>
+                <a:pPr algn="just"/>
+                <a:endParaRPr lang="en-US" sz="1200" dirty="0">
+                  <a:latin typeface="Arial" panose="020B0604020202020204" pitchFamily="34" charset="0"/>
+                  <a:cs typeface="Arial" panose="020B0604020202020204" pitchFamily="34" charset="0"/>
+                </a:endParaRPr>
+              </a:p>
+            </p:txBody>
+          </p:sp>
+        </mc:Choice>
+        <mc:Fallback>
+          <p:sp>
+            <p:nvSpPr>
+              <p:cNvPr id="2" name="CuadroTexto 1">
+                <a:extLst>
+                  <a:ext uri="{FF2B5EF4-FFF2-40B4-BE49-F238E27FC236}">
+                    <a16:creationId xmlns:a16="http://schemas.microsoft.com/office/drawing/2014/main" id="{79C670B6-5DD9-B08F-DDF1-A71B39764366}"/>
+                  </a:ext>
+                </a:extLst>
+              </p:cNvPr>
+              <p:cNvSpPr txBox="1">
+                <a:spLocks noRot="1" noChangeAspect="1" noMove="1" noResize="1" noEditPoints="1" noAdjustHandles="1" noChangeArrowheads="1" noChangeShapeType="1" noTextEdit="1"/>
+              </p:cNvSpPr>
+              <p:nvPr/>
+            </p:nvSpPr>
+            <p:spPr>
+              <a:xfrm>
+                <a:off x="496014" y="1447800"/>
+                <a:ext cx="11199971" cy="2646878"/>
+              </a:xfrm>
+              <a:prstGeom prst="rect">
+                <a:avLst/>
+              </a:prstGeom>
+              <a:blipFill>
+                <a:blip r:embed="rId4"/>
+                <a:stretch>
+                  <a:fillRect/>
+                </a:stretch>
+              </a:blipFill>
+              <a:ln w="28575">
+                <a:solidFill>
+                  <a:srgbClr val="E0700D"/>
+                </a:solidFill>
+              </a:ln>
+            </p:spPr>
+            <p:txBody>
+              <a:bodyPr/>
+              <a:lstStyle/>
+              <a:p>
+                <a:r>
+                  <a:rPr lang="es-ES">
+                    <a:noFill/>
+                  </a:rPr>
+                  <a:t> </a:t>
+                </a:r>
+              </a:p>
+            </p:txBody>
+          </p:sp>
+        </mc:Fallback>
+      </mc:AlternateContent>
+    </p:spTree>
+    <p:extLst>
+      <p:ext uri="{BB962C8B-B14F-4D97-AF65-F5344CB8AC3E}">
+        <p14:creationId xmlns:p14="http://schemas.microsoft.com/office/powerpoint/2010/main" val="2452912536"/>
+      </p:ext>
+    </p:extLst>
+  </p:cSld>
+  <p:clrMapOvr>
+    <a:masterClrMapping/>
+  </p:clrMapOvr>
+</p:sld>
+</file>
+
+<file path=ppt/slides/slide26.xml><?xml version="1.0" encoding="utf-8"?>
 <p:sld xmlns:a="http://schemas.openxmlformats.org/drawingml/2006/main" xmlns:r="http://schemas.openxmlformats.org/officeDocument/2006/relationships" xmlns:p="http://schemas.openxmlformats.org/presentationml/2006/main">
   <p:cSld>
     <p:spTree>
@@ -17229,7 +18043,7 @@
           <a:p>
             <a:fld id="{B6F15528-21DE-4FAA-801E-634DDDAF4B2B}" type="slidenum">
               <a:rPr lang="es-ES" smtClean="0"/>
-              <a:t>25</a:t>
+              <a:t>26</a:t>
             </a:fld>
             <a:endParaRPr lang="es-ES"/>
           </a:p>
@@ -17266,89 +18080,6 @@
               <a:t>LAB 2.0. COUPLERS</a:t>
             </a:r>
             <a:endParaRPr lang="es-ES" spc="-5" dirty="0"/>
-          </a:p>
-        </p:txBody>
-      </p:sp>
-      <p:sp>
-        <p:nvSpPr>
-          <p:cNvPr id="2" name="CuadroTexto 1">
-            <a:extLst>
-              <a:ext uri="{FF2B5EF4-FFF2-40B4-BE49-F238E27FC236}">
-                <a16:creationId xmlns:a16="http://schemas.microsoft.com/office/drawing/2014/main" id="{181326FD-308E-2C47-D5D2-57B3357241AA}"/>
-              </a:ext>
-            </a:extLst>
-          </p:cNvPr>
-          <p:cNvSpPr txBox="1"/>
-          <p:nvPr/>
-        </p:nvSpPr>
-        <p:spPr>
-          <a:xfrm>
-            <a:off x="609441" y="4860334"/>
-            <a:ext cx="11199971" cy="1200329"/>
-          </a:xfrm>
-          <a:prstGeom prst="rect">
-            <a:avLst/>
-          </a:prstGeom>
-          <a:solidFill>
-            <a:schemeClr val="bg1">
-              <a:lumMod val="95000"/>
-            </a:schemeClr>
-          </a:solidFill>
-          <a:ln w="28575">
-            <a:solidFill>
-              <a:srgbClr val="E0700D"/>
-            </a:solidFill>
-          </a:ln>
-        </p:spPr>
-        <p:txBody>
-          <a:bodyPr wrap="square" rtlCol="0">
-            <a:spAutoFit/>
-          </a:bodyPr>
-          <a:lstStyle/>
-          <a:p>
-            <a:pPr algn="just"/>
-            <a:r>
-              <a:rPr lang="en-US" sz="1200" dirty="0">
-                <a:latin typeface="Arial" panose="020B0604020202020204" pitchFamily="34" charset="0"/>
-                <a:cs typeface="Arial" panose="020B0604020202020204" pitchFamily="34" charset="0"/>
-              </a:rPr>
-              <a:t>Comment results</a:t>
-            </a:r>
-          </a:p>
-          <a:p>
-            <a:pPr algn="just"/>
-            <a:endParaRPr lang="en-US" sz="1200" dirty="0">
-              <a:latin typeface="Arial" panose="020B0604020202020204" pitchFamily="34" charset="0"/>
-              <a:cs typeface="Arial" panose="020B0604020202020204" pitchFamily="34" charset="0"/>
-            </a:endParaRPr>
-          </a:p>
-          <a:p>
-            <a:pPr algn="just"/>
-            <a:endParaRPr lang="en-US" sz="1200" dirty="0">
-              <a:latin typeface="Arial" panose="020B0604020202020204" pitchFamily="34" charset="0"/>
-              <a:cs typeface="Arial" panose="020B0604020202020204" pitchFamily="34" charset="0"/>
-            </a:endParaRPr>
-          </a:p>
-          <a:p>
-            <a:pPr algn="just"/>
-            <a:endParaRPr lang="en-US" sz="1200" dirty="0">
-              <a:latin typeface="Arial" panose="020B0604020202020204" pitchFamily="34" charset="0"/>
-              <a:cs typeface="Arial" panose="020B0604020202020204" pitchFamily="34" charset="0"/>
-            </a:endParaRPr>
-          </a:p>
-          <a:p>
-            <a:pPr algn="just"/>
-            <a:endParaRPr lang="en-US" sz="1200" dirty="0">
-              <a:latin typeface="Arial" panose="020B0604020202020204" pitchFamily="34" charset="0"/>
-              <a:cs typeface="Arial" panose="020B0604020202020204" pitchFamily="34" charset="0"/>
-            </a:endParaRPr>
-          </a:p>
-          <a:p>
-            <a:pPr algn="just"/>
-            <a:endParaRPr lang="en-US" sz="1200" dirty="0">
-              <a:latin typeface="Arial" panose="020B0604020202020204" pitchFamily="34" charset="0"/>
-              <a:cs typeface="Arial" panose="020B0604020202020204" pitchFamily="34" charset="0"/>
-            </a:endParaRPr>
           </a:p>
         </p:txBody>
       </p:sp>
@@ -17456,42 +18187,6 @@
           </a:p>
         </p:txBody>
       </p:sp>
-      <p:sp>
-        <p:nvSpPr>
-          <p:cNvPr id="7" name="CuadroTexto 6">
-            <a:extLst>
-              <a:ext uri="{FF2B5EF4-FFF2-40B4-BE49-F238E27FC236}">
-                <a16:creationId xmlns:a16="http://schemas.microsoft.com/office/drawing/2014/main" id="{5F16E403-DF61-C9A0-D57F-2E61BEFA8887}"/>
-              </a:ext>
-            </a:extLst>
-          </p:cNvPr>
-          <p:cNvSpPr txBox="1"/>
-          <p:nvPr/>
-        </p:nvSpPr>
-        <p:spPr>
-          <a:xfrm>
-            <a:off x="6331152" y="4342178"/>
-            <a:ext cx="2269787" cy="369332"/>
-          </a:xfrm>
-          <a:prstGeom prst="rect">
-            <a:avLst/>
-          </a:prstGeom>
-          <a:noFill/>
-        </p:spPr>
-        <p:txBody>
-          <a:bodyPr wrap="square">
-            <a:spAutoFit/>
-          </a:bodyPr>
-          <a:lstStyle/>
-          <a:p>
-            <a:r>
-              <a:rPr lang="en-US" dirty="0"/>
-              <a:t>slab = 150nm</a:t>
-            </a:r>
-            <a:endParaRPr lang="es-ES" dirty="0"/>
-          </a:p>
-        </p:txBody>
-      </p:sp>
       <mc:AlternateContent xmlns:mc="http://schemas.openxmlformats.org/markup-compatibility/2006" xmlns:a14="http://schemas.microsoft.com/office/drawing/2010/main">
         <mc:Choice Requires="a14">
           <p:sp>
@@ -17772,6 +18467,66 @@
           </p:sp>
         </mc:Fallback>
       </mc:AlternateContent>
+      <p:pic>
+        <p:nvPicPr>
+          <p:cNvPr id="10" name="Imagen 9">
+            <a:extLst>
+              <a:ext uri="{FF2B5EF4-FFF2-40B4-BE49-F238E27FC236}">
+                <a16:creationId xmlns:a16="http://schemas.microsoft.com/office/drawing/2014/main" id="{685AEF6D-BFCD-F741-9C2F-23439D1A2085}"/>
+              </a:ext>
+            </a:extLst>
+          </p:cNvPr>
+          <p:cNvPicPr>
+            <a:picLocks noChangeAspect="1"/>
+          </p:cNvPicPr>
+          <p:nvPr/>
+        </p:nvPicPr>
+        <p:blipFill>
+          <a:blip r:embed="rId7"/>
+          <a:stretch>
+            <a:fillRect/>
+          </a:stretch>
+        </p:blipFill>
+        <p:spPr>
+          <a:xfrm>
+            <a:off x="931928" y="1637752"/>
+            <a:ext cx="5022796" cy="2926124"/>
+          </a:xfrm>
+          <a:prstGeom prst="rect">
+            <a:avLst/>
+          </a:prstGeom>
+        </p:spPr>
+      </p:pic>
+      <p:pic>
+        <p:nvPicPr>
+          <p:cNvPr id="12" name="Imagen 11">
+            <a:extLst>
+              <a:ext uri="{FF2B5EF4-FFF2-40B4-BE49-F238E27FC236}">
+                <a16:creationId xmlns:a16="http://schemas.microsoft.com/office/drawing/2014/main" id="{463FC4BF-F685-8F53-9E64-29BC9C63FFCC}"/>
+              </a:ext>
+            </a:extLst>
+          </p:cNvPr>
+          <p:cNvPicPr>
+            <a:picLocks noChangeAspect="1"/>
+          </p:cNvPicPr>
+          <p:nvPr/>
+        </p:nvPicPr>
+        <p:blipFill>
+          <a:blip r:embed="rId8"/>
+          <a:stretch>
+            <a:fillRect/>
+          </a:stretch>
+        </p:blipFill>
+        <p:spPr>
+          <a:xfrm>
+            <a:off x="6466714" y="1612870"/>
+            <a:ext cx="5195977" cy="3024524"/>
+          </a:xfrm>
+          <a:prstGeom prst="rect">
+            <a:avLst/>
+          </a:prstGeom>
+        </p:spPr>
+      </p:pic>
     </p:spTree>
     <p:extLst>
       <p:ext uri="{BB962C8B-B14F-4D97-AF65-F5344CB8AC3E}">
@@ -17785,7 +18540,677 @@
 </p:sld>
 </file>
 
-<file path=ppt/slides/slide26.xml><?xml version="1.0" encoding="utf-8"?>
+<file path=ppt/slides/slide27.xml><?xml version="1.0" encoding="utf-8"?>
+<p:sld xmlns:a="http://schemas.openxmlformats.org/drawingml/2006/main" xmlns:r="http://schemas.openxmlformats.org/officeDocument/2006/relationships" xmlns:p="http://schemas.openxmlformats.org/presentationml/2006/main">
+  <p:cSld>
+    <p:spTree>
+      <p:nvGrpSpPr>
+        <p:cNvPr id="1" name="">
+          <a:extLst>
+            <a:ext uri="{FF2B5EF4-FFF2-40B4-BE49-F238E27FC236}">
+              <a16:creationId xmlns:a16="http://schemas.microsoft.com/office/drawing/2014/main" id="{A916521D-8936-E7A3-655B-652E55EBA301}"/>
+            </a:ext>
+          </a:extLst>
+        </p:cNvPr>
+        <p:cNvGrpSpPr/>
+        <p:nvPr/>
+      </p:nvGrpSpPr>
+      <p:grpSpPr>
+        <a:xfrm>
+          <a:off x="0" y="0"/>
+          <a:ext cx="0" cy="0"/>
+          <a:chOff x="0" y="0"/>
+          <a:chExt cx="0" cy="0"/>
+        </a:xfrm>
+      </p:grpSpPr>
+      <p:sp>
+        <p:nvSpPr>
+          <p:cNvPr id="16" name="object 16">
+            <a:extLst>
+              <a:ext uri="{FF2B5EF4-FFF2-40B4-BE49-F238E27FC236}">
+                <a16:creationId xmlns:a16="http://schemas.microsoft.com/office/drawing/2014/main" id="{906D48DC-8D36-C44C-67D5-BFEF6524C62E}"/>
+              </a:ext>
+            </a:extLst>
+          </p:cNvPr>
+          <p:cNvSpPr txBox="1">
+            <a:spLocks noGrp="1"/>
+          </p:cNvSpPr>
+          <p:nvPr>
+            <p:ph type="title"/>
+          </p:nvPr>
+        </p:nvSpPr>
+        <p:spPr>
+          <a:xfrm>
+            <a:off x="685800" y="408883"/>
+            <a:ext cx="10994410" cy="1474763"/>
+          </a:xfrm>
+          <a:prstGeom prst="rect">
+            <a:avLst/>
+          </a:prstGeom>
+        </p:spPr>
+        <p:txBody>
+          <a:bodyPr vert="horz" wrap="square" lIns="0" tIns="12700" rIns="0" bIns="0" rtlCol="0">
+            <a:spAutoFit/>
+          </a:bodyPr>
+          <a:lstStyle/>
+          <a:p>
+            <a:pPr marL="12700">
+              <a:lnSpc>
+                <a:spcPct val="100000"/>
+              </a:lnSpc>
+              <a:spcBef>
+                <a:spcPts val="100"/>
+              </a:spcBef>
+            </a:pPr>
+            <a:r>
+              <a:rPr lang="en-US" sz="2500" dirty="0"/>
+              <a:t>Extra #2 – Directional wavelength dependence</a:t>
+            </a:r>
+            <a:br>
+              <a:rPr lang="en-US" sz="2500" dirty="0"/>
+            </a:br>
+            <a:r>
+              <a:rPr lang="en-US" b="0" dirty="0"/>
+              <a:t>Wavelengths </a:t>
+            </a:r>
+            <a:r>
+              <a:rPr lang="en-US" dirty="0"/>
+              <a:t>from 1.5 to 1.7 µm</a:t>
+            </a:r>
+            <a:r>
+              <a:rPr lang="en-US" b="0" dirty="0"/>
+              <a:t>, gap = 0.6 µm, width 1.0 µm</a:t>
+            </a:r>
+            <a:br>
+              <a:rPr lang="en-US" b="0" dirty="0"/>
+            </a:br>
+            <a:br>
+              <a:rPr lang="es-ES" sz="2500" spc="-5" dirty="0">
+                <a:latin typeface="+mj-lt"/>
+                <a:cs typeface="Lucida Sans"/>
+              </a:rPr>
+            </a:br>
+            <a:endParaRPr sz="2500" b="0" dirty="0">
+              <a:latin typeface="+mj-lt"/>
+              <a:cs typeface="Lucida Sans"/>
+            </a:endParaRPr>
+          </a:p>
+        </p:txBody>
+      </p:sp>
+      <p:pic>
+        <p:nvPicPr>
+          <p:cNvPr id="83" name="Gráfico 82">
+            <a:extLst>
+              <a:ext uri="{FF2B5EF4-FFF2-40B4-BE49-F238E27FC236}">
+                <a16:creationId xmlns:a16="http://schemas.microsoft.com/office/drawing/2014/main" id="{4E295E5C-0B9E-4B28-7F9C-9CE69CE62560}"/>
+              </a:ext>
+            </a:extLst>
+          </p:cNvPr>
+          <p:cNvPicPr>
+            <a:picLocks noChangeAspect="1"/>
+          </p:cNvPicPr>
+          <p:nvPr/>
+        </p:nvPicPr>
+        <p:blipFill>
+          <a:blip>
+            <a:extLst>
+              <a:ext uri="{96DAC541-7B7A-43D3-8B79-37D633B846F1}">
+                <asvg:svgBlip xmlns:asvg="http://schemas.microsoft.com/office/drawing/2016/SVG/main" r:embed="rId3"/>
+              </a:ext>
+            </a:extLst>
+          </a:blip>
+          <a:stretch>
+            <a:fillRect/>
+          </a:stretch>
+        </p:blipFill>
+        <p:spPr>
+          <a:xfrm>
+            <a:off x="5045006" y="6356057"/>
+            <a:ext cx="6409575" cy="363174"/>
+          </a:xfrm>
+          <a:prstGeom prst="rect">
+            <a:avLst/>
+          </a:prstGeom>
+        </p:spPr>
+      </p:pic>
+      <p:sp>
+        <p:nvSpPr>
+          <p:cNvPr id="84" name="Marcador de número de diapositiva 83">
+            <a:extLst>
+              <a:ext uri="{FF2B5EF4-FFF2-40B4-BE49-F238E27FC236}">
+                <a16:creationId xmlns:a16="http://schemas.microsoft.com/office/drawing/2014/main" id="{4A1A4E98-EBBD-C1CF-7FDF-3AA0AC7B09F8}"/>
+              </a:ext>
+            </a:extLst>
+          </p:cNvPr>
+          <p:cNvSpPr>
+            <a:spLocks noGrp="1"/>
+          </p:cNvSpPr>
+          <p:nvPr>
+            <p:ph type="sldNum" sz="quarter" idx="7"/>
+          </p:nvPr>
+        </p:nvSpPr>
+        <p:spPr/>
+        <p:txBody>
+          <a:bodyPr/>
+          <a:lstStyle/>
+          <a:p>
+            <a:fld id="{B6F15528-21DE-4FAA-801E-634DDDAF4B2B}" type="slidenum">
+              <a:rPr lang="es-ES" smtClean="0"/>
+              <a:t>27</a:t>
+            </a:fld>
+            <a:endParaRPr lang="es-ES"/>
+          </a:p>
+        </p:txBody>
+      </p:sp>
+      <p:sp>
+        <p:nvSpPr>
+          <p:cNvPr id="3" name="Marcador de pie de página 2">
+            <a:extLst>
+              <a:ext uri="{FF2B5EF4-FFF2-40B4-BE49-F238E27FC236}">
+                <a16:creationId xmlns:a16="http://schemas.microsoft.com/office/drawing/2014/main" id="{95B93DC7-CE29-91CD-1114-DE7A04C91D19}"/>
+              </a:ext>
+            </a:extLst>
+          </p:cNvPr>
+          <p:cNvSpPr>
+            <a:spLocks noGrp="1"/>
+          </p:cNvSpPr>
+          <p:nvPr>
+            <p:ph type="ftr" sz="quarter" idx="5"/>
+          </p:nvPr>
+        </p:nvSpPr>
+        <p:spPr/>
+        <p:txBody>
+          <a:bodyPr/>
+          <a:lstStyle/>
+          <a:p>
+            <a:pPr marL="12700">
+              <a:spcBef>
+                <a:spcPts val="15"/>
+              </a:spcBef>
+            </a:pPr>
+            <a:r>
+              <a:rPr lang="es-ES" spc="-5"/>
+              <a:t>LAB 2.0. COUPLERS</a:t>
+            </a:r>
+            <a:endParaRPr lang="es-ES" spc="-5" dirty="0"/>
+          </a:p>
+        </p:txBody>
+      </p:sp>
+      <mc:AlternateContent xmlns:mc="http://schemas.openxmlformats.org/markup-compatibility/2006">
+        <mc:Choice xmlns:a14="http://schemas.microsoft.com/office/drawing/2010/main" Requires="a14">
+          <p:sp>
+            <p:nvSpPr>
+              <p:cNvPr id="2" name="CuadroTexto 1">
+                <a:extLst>
+                  <a:ext uri="{FF2B5EF4-FFF2-40B4-BE49-F238E27FC236}">
+                    <a16:creationId xmlns:a16="http://schemas.microsoft.com/office/drawing/2014/main" id="{47F423D6-BF49-F16B-9504-5EEC1CA0F576}"/>
+                  </a:ext>
+                </a:extLst>
+              </p:cNvPr>
+              <p:cNvSpPr txBox="1"/>
+              <p:nvPr/>
+            </p:nvSpPr>
+            <p:spPr>
+              <a:xfrm>
+                <a:off x="583019" y="1524000"/>
+                <a:ext cx="11199971" cy="2800767"/>
+              </a:xfrm>
+              <a:prstGeom prst="rect">
+                <a:avLst/>
+              </a:prstGeom>
+              <a:solidFill>
+                <a:schemeClr val="bg1">
+                  <a:lumMod val="95000"/>
+                </a:schemeClr>
+              </a:solidFill>
+              <a:ln w="28575">
+                <a:solidFill>
+                  <a:srgbClr val="E0700D"/>
+                </a:solidFill>
+              </a:ln>
+            </p:spPr>
+            <p:txBody>
+              <a:bodyPr wrap="square" rtlCol="0">
+                <a:spAutoFit/>
+              </a:bodyPr>
+              <a:lstStyle/>
+              <a:p>
+                <a:pPr algn="just"/>
+                <a:r>
+                  <a:rPr lang="en-US" sz="1200" b="1" i="1" dirty="0">
+                    <a:latin typeface="Arial" panose="020B0604020202020204" pitchFamily="34" charset="0"/>
+                    <a:cs typeface="Arial" panose="020B0604020202020204" pitchFamily="34" charset="0"/>
+                  </a:rPr>
+                  <a:t>Comment results</a:t>
+                </a:r>
+              </a:p>
+              <a:p>
+                <a:pPr algn="just"/>
+                <a:endParaRPr lang="en-US" sz="1200" dirty="0">
+                  <a:latin typeface="Arial" panose="020B0604020202020204" pitchFamily="34" charset="0"/>
+                  <a:cs typeface="Arial" panose="020B0604020202020204" pitchFamily="34" charset="0"/>
+                </a:endParaRPr>
+              </a:p>
+              <a:p>
+                <a:pPr algn="just"/>
+                <a:r>
+                  <a:rPr lang="es-ES" sz="1000" dirty="0">
+                    <a:latin typeface="Arial" panose="020B0604020202020204" pitchFamily="34" charset="0"/>
+                    <a:cs typeface="Arial" panose="020B0604020202020204" pitchFamily="34" charset="0"/>
+                  </a:rPr>
+                  <a:t>En este caso, se ha vuelto a diseñar un acoplador direccional, con la diferencia de que ahora se ha llevado a cabo un barrido con la longitud de onda. Después se ha realizado una simulación de la longitud de acoplo </a:t>
+                </a:r>
+                <a14:m>
+                  <m:oMath xmlns:m="http://schemas.openxmlformats.org/officeDocument/2006/math">
+                    <m:sSub>
+                      <m:sSubPr>
+                        <m:ctrlPr>
+                          <a:rPr lang="ar-AE" sz="1000"/>
+                        </m:ctrlPr>
+                      </m:sSubPr>
+                      <m:e>
+                        <m:r>
+                          <m:rPr>
+                            <m:sty m:val="p"/>
+                          </m:rPr>
+                          <a:rPr lang="ar-AE" sz="1000" b="0" i="0"/>
+                          <m:t>L</m:t>
+                        </m:r>
+                      </m:e>
+                      <m:sub>
+                        <m:r>
+                          <m:rPr>
+                            <m:sty m:val="p"/>
+                          </m:rPr>
+                          <a:rPr lang="ar-AE" sz="1000" b="0" i="0"/>
+                          <m:t>π</m:t>
+                        </m:r>
+                      </m:sub>
+                    </m:sSub>
+                  </m:oMath>
+                </a14:m>
+                <a:r>
+                  <a:rPr lang="ar-AE" sz="1000" dirty="0">
+                    <a:latin typeface="Arial" panose="020B0604020202020204" pitchFamily="34" charset="0"/>
+                    <a:cs typeface="Arial" panose="020B0604020202020204" pitchFamily="34" charset="0"/>
+                  </a:rPr>
+                  <a:t>, </a:t>
+                </a:r>
+                <a:r>
+                  <a:rPr lang="es-ES" sz="1000" dirty="0">
+                    <a:latin typeface="Arial" panose="020B0604020202020204" pitchFamily="34" charset="0"/>
+                    <a:cs typeface="Arial" panose="020B0604020202020204" pitchFamily="34" charset="0"/>
+                  </a:rPr>
+                  <a:t>en función de dichas longitudes de onda.</a:t>
+                </a:r>
+              </a:p>
+              <a:p>
+                <a:pPr algn="just"/>
+                <a:endParaRPr lang="es-ES" sz="1000" dirty="0">
+                  <a:latin typeface="Arial" panose="020B0604020202020204" pitchFamily="34" charset="0"/>
+                  <a:cs typeface="Arial" panose="020B0604020202020204" pitchFamily="34" charset="0"/>
+                </a:endParaRPr>
+              </a:p>
+              <a:p>
+                <a:pPr algn="just"/>
+                <a:r>
+                  <a:rPr lang="es-ES" sz="1000" dirty="0">
+                    <a:latin typeface="Arial" panose="020B0604020202020204" pitchFamily="34" charset="0"/>
+                    <a:cs typeface="Arial" panose="020B0604020202020204" pitchFamily="34" charset="0"/>
+                  </a:rPr>
+                  <a:t>Se observa que, al aumentar la longitud de onda, la longitud de acoplo </a:t>
+                </a:r>
+                <a14:m>
+                  <m:oMath xmlns:m="http://schemas.openxmlformats.org/officeDocument/2006/math">
+                    <m:sSub>
+                      <m:sSubPr>
+                        <m:ctrlPr>
+                          <a:rPr lang="ar-AE" sz="1000"/>
+                        </m:ctrlPr>
+                      </m:sSubPr>
+                      <m:e>
+                        <m:r>
+                          <m:rPr>
+                            <m:sty m:val="p"/>
+                          </m:rPr>
+                          <a:rPr lang="ar-AE" sz="1000" b="0" i="0"/>
+                          <m:t>L</m:t>
+                        </m:r>
+                      </m:e>
+                      <m:sub>
+                        <m:r>
+                          <m:rPr>
+                            <m:sty m:val="p"/>
+                          </m:rPr>
+                          <a:rPr lang="ar-AE" sz="1000" b="0" i="0"/>
+                          <m:t>π</m:t>
+                        </m:r>
+                      </m:sub>
+                    </m:sSub>
+                  </m:oMath>
+                </a14:m>
+                <a:r>
+                  <a:rPr lang="es-ES" sz="1000" dirty="0">
+                    <a:latin typeface="Arial" panose="020B0604020202020204" pitchFamily="34" charset="0"/>
+                    <a:cs typeface="Arial" panose="020B0604020202020204" pitchFamily="34" charset="0"/>
+                  </a:rPr>
+                  <a:t>disminuye porque el campo óptico se extiende más fuera del núcleo, incrementando el solapamiento de los campos evanescentes entre las guías. Como consecuencia, el acoplo entre ellas se vuelve más fuerte.</a:t>
+                </a:r>
+              </a:p>
+              <a:p>
+                <a:pPr algn="just"/>
+                <a:endParaRPr lang="es-ES" sz="1000" dirty="0">
+                  <a:latin typeface="Arial" panose="020B0604020202020204" pitchFamily="34" charset="0"/>
+                  <a:cs typeface="Arial" panose="020B0604020202020204" pitchFamily="34" charset="0"/>
+                </a:endParaRPr>
+              </a:p>
+              <a:p>
+                <a:pPr algn="just"/>
+                <a:r>
+                  <a:rPr lang="es-ES" sz="1000" dirty="0">
+                    <a:latin typeface="Arial" panose="020B0604020202020204" pitchFamily="34" charset="0"/>
+                    <a:cs typeface="Arial" panose="020B0604020202020204" pitchFamily="34" charset="0"/>
+                  </a:rPr>
+                  <a:t>Además, la diferencia entre los índices efectivos de los modos acoplados aumenta, lo que implica, según la expresión de </a:t>
+                </a:r>
+                <a14:m>
+                  <m:oMath xmlns:m="http://schemas.openxmlformats.org/officeDocument/2006/math">
+                    <m:sSub>
+                      <m:sSubPr>
+                        <m:ctrlPr>
+                          <a:rPr lang="ar-AE" sz="1000"/>
+                        </m:ctrlPr>
+                      </m:sSubPr>
+                      <m:e>
+                        <m:r>
+                          <m:rPr>
+                            <m:sty m:val="p"/>
+                          </m:rPr>
+                          <a:rPr lang="ar-AE" sz="1000" b="0" i="0"/>
+                          <m:t>L</m:t>
+                        </m:r>
+                      </m:e>
+                      <m:sub>
+                        <m:r>
+                          <m:rPr>
+                            <m:sty m:val="p"/>
+                          </m:rPr>
+                          <a:rPr lang="ar-AE" sz="1000" b="0" i="0"/>
+                          <m:t>π</m:t>
+                        </m:r>
+                      </m:sub>
+                    </m:sSub>
+                  </m:oMath>
+                </a14:m>
+                <a:r>
+                  <a:rPr lang="ar-AE" sz="1000" dirty="0">
+                    <a:latin typeface="Arial" panose="020B0604020202020204" pitchFamily="34" charset="0"/>
+                    <a:cs typeface="Arial" panose="020B0604020202020204" pitchFamily="34" charset="0"/>
+                  </a:rPr>
+                  <a:t>, </a:t>
+                </a:r>
+                <a:r>
+                  <a:rPr lang="es-ES" sz="1000" dirty="0">
+                    <a:latin typeface="Arial" panose="020B0604020202020204" pitchFamily="34" charset="0"/>
+                    <a:cs typeface="Arial" panose="020B0604020202020204" pitchFamily="34" charset="0"/>
+                  </a:rPr>
+                  <a:t>que se necesita una menor longitud de propagación para transferir completamente la potencia de una guía a la otra.</a:t>
+                </a:r>
+              </a:p>
+              <a:p>
+                <a:pPr algn="just"/>
+                <a:endParaRPr lang="es-ES" sz="1000" dirty="0">
+                  <a:latin typeface="Arial" panose="020B0604020202020204" pitchFamily="34" charset="0"/>
+                  <a:cs typeface="Arial" panose="020B0604020202020204" pitchFamily="34" charset="0"/>
+                </a:endParaRPr>
+              </a:p>
+              <a:p>
+                <a:pPr algn="just"/>
+                <a:r>
+                  <a:rPr lang="es-ES" sz="1000" dirty="0">
+                    <a:latin typeface="Arial" panose="020B0604020202020204" pitchFamily="34" charset="0"/>
+                    <a:cs typeface="Arial" panose="020B0604020202020204" pitchFamily="34" charset="0"/>
+                  </a:rPr>
+                  <a:t>Por tanto, la transferencia de potencia es más rápida y la longitud de acoplo disminuye al aumentar la longitud de onda.</a:t>
+                </a:r>
+              </a:p>
+              <a:p>
+                <a:pPr algn="just"/>
+                <a:endParaRPr lang="es-ES" sz="1000" dirty="0">
+                  <a:latin typeface="Arial" panose="020B0604020202020204" pitchFamily="34" charset="0"/>
+                  <a:cs typeface="Arial" panose="020B0604020202020204" pitchFamily="34" charset="0"/>
+                </a:endParaRPr>
+              </a:p>
+              <a:p>
+                <a:pPr algn="just"/>
+                <a:r>
+                  <a:rPr lang="es-ES" sz="1000" dirty="0">
+                    <a:latin typeface="Arial" panose="020B0604020202020204" pitchFamily="34" charset="0"/>
+                    <a:cs typeface="Arial" panose="020B0604020202020204" pitchFamily="34" charset="0"/>
+                  </a:rPr>
+                  <a:t>Por último, comparando los casos </a:t>
+                </a:r>
+                <a:r>
+                  <a:rPr lang="es-ES" sz="1000" dirty="0" err="1">
+                    <a:latin typeface="Arial" panose="020B0604020202020204" pitchFamily="34" charset="0"/>
+                    <a:cs typeface="Arial" panose="020B0604020202020204" pitchFamily="34" charset="0"/>
+                  </a:rPr>
+                  <a:t>deep</a:t>
+                </a:r>
+                <a:r>
+                  <a:rPr lang="es-ES" sz="1000" dirty="0">
+                    <a:latin typeface="Arial" panose="020B0604020202020204" pitchFamily="34" charset="0"/>
+                    <a:cs typeface="Arial" panose="020B0604020202020204" pitchFamily="34" charset="0"/>
+                  </a:rPr>
+                  <a:t> y </a:t>
+                </a:r>
+                <a:r>
+                  <a:rPr lang="es-ES" sz="1000" dirty="0" err="1">
+                    <a:latin typeface="Arial" panose="020B0604020202020204" pitchFamily="34" charset="0"/>
+                    <a:cs typeface="Arial" panose="020B0604020202020204" pitchFamily="34" charset="0"/>
+                  </a:rPr>
+                  <a:t>shallow</a:t>
+                </a:r>
+                <a:r>
+                  <a:rPr lang="es-ES" sz="1000" dirty="0">
+                    <a:latin typeface="Arial" panose="020B0604020202020204" pitchFamily="34" charset="0"/>
+                    <a:cs typeface="Arial" panose="020B0604020202020204" pitchFamily="34" charset="0"/>
+                  </a:rPr>
+                  <a:t>, se observa que el acoplo es mayor en el caso </a:t>
+                </a:r>
+                <a:r>
+                  <a:rPr lang="es-ES" sz="1000" dirty="0" err="1">
+                    <a:latin typeface="Arial" panose="020B0604020202020204" pitchFamily="34" charset="0"/>
+                    <a:cs typeface="Arial" panose="020B0604020202020204" pitchFamily="34" charset="0"/>
+                  </a:rPr>
+                  <a:t>shallow</a:t>
+                </a:r>
+                <a:r>
+                  <a:rPr lang="es-ES" sz="1000" dirty="0">
+                    <a:latin typeface="Arial" panose="020B0604020202020204" pitchFamily="34" charset="0"/>
+                    <a:cs typeface="Arial" panose="020B0604020202020204" pitchFamily="34" charset="0"/>
+                  </a:rPr>
+                  <a:t> ya que presenta menor </a:t>
+                </a:r>
+                <a14:m>
+                  <m:oMath xmlns:m="http://schemas.openxmlformats.org/officeDocument/2006/math">
+                    <m:sSub>
+                      <m:sSubPr>
+                        <m:ctrlPr>
+                          <a:rPr lang="ar-AE" sz="1000"/>
+                        </m:ctrlPr>
+                      </m:sSubPr>
+                      <m:e>
+                        <m:r>
+                          <m:rPr>
+                            <m:sty m:val="p"/>
+                          </m:rPr>
+                          <a:rPr lang="ar-AE" sz="1000" b="0" i="0"/>
+                          <m:t>L</m:t>
+                        </m:r>
+                      </m:e>
+                      <m:sub>
+                        <m:r>
+                          <m:rPr>
+                            <m:sty m:val="p"/>
+                          </m:rPr>
+                          <a:rPr lang="ar-AE" sz="1000" b="0" i="0"/>
+                          <m:t>π</m:t>
+                        </m:r>
+                      </m:sub>
+                    </m:sSub>
+                  </m:oMath>
+                </a14:m>
+                <a:r>
+                  <a:rPr lang="es-ES" sz="1000" dirty="0">
+                    <a:latin typeface="Arial" panose="020B0604020202020204" pitchFamily="34" charset="0"/>
+                    <a:cs typeface="Arial" panose="020B0604020202020204" pitchFamily="34" charset="0"/>
+                  </a:rPr>
+                  <a:t> debido a que el campo se extiende más fuera del núcleo por la menor confinación, aumentando el solapamiento entre las guías. En el caso </a:t>
+                </a:r>
+                <a:r>
+                  <a:rPr lang="es-ES" sz="1000" dirty="0" err="1">
+                    <a:latin typeface="Arial" panose="020B0604020202020204" pitchFamily="34" charset="0"/>
+                    <a:cs typeface="Arial" panose="020B0604020202020204" pitchFamily="34" charset="0"/>
+                  </a:rPr>
+                  <a:t>deep</a:t>
+                </a:r>
+                <a:r>
+                  <a:rPr lang="es-ES" sz="1000" dirty="0">
+                    <a:latin typeface="Arial" panose="020B0604020202020204" pitchFamily="34" charset="0"/>
+                    <a:cs typeface="Arial" panose="020B0604020202020204" pitchFamily="34" charset="0"/>
+                  </a:rPr>
+                  <a:t>, el confinamiento es mayor, el acoplo es más débil y los valores de </a:t>
+                </a:r>
+                <a14:m>
+                  <m:oMath xmlns:m="http://schemas.openxmlformats.org/officeDocument/2006/math">
+                    <m:sSub>
+                      <m:sSubPr>
+                        <m:ctrlPr>
+                          <a:rPr lang="ar-AE" sz="1000"/>
+                        </m:ctrlPr>
+                      </m:sSubPr>
+                      <m:e>
+                        <m:r>
+                          <m:rPr>
+                            <m:sty m:val="p"/>
+                          </m:rPr>
+                          <a:rPr lang="ar-AE" sz="1000" b="0" i="0"/>
+                          <m:t>L</m:t>
+                        </m:r>
+                      </m:e>
+                      <m:sub>
+                        <m:r>
+                          <m:rPr>
+                            <m:sty m:val="p"/>
+                          </m:rPr>
+                          <a:rPr lang="ar-AE" sz="1000" b="0" i="0"/>
+                          <m:t>π</m:t>
+                        </m:r>
+                      </m:sub>
+                    </m:sSub>
+                  </m:oMath>
+                </a14:m>
+                <a:r>
+                  <a:rPr lang="es-ES" sz="1000" dirty="0">
+                    <a:latin typeface="Arial" panose="020B0604020202020204" pitchFamily="34" charset="0"/>
+                    <a:cs typeface="Arial" panose="020B0604020202020204" pitchFamily="34" charset="0"/>
+                  </a:rPr>
+                  <a:t>son más altos. Además, el caso </a:t>
+                </a:r>
+                <a:r>
+                  <a:rPr lang="es-ES" sz="1000" dirty="0" err="1">
+                    <a:latin typeface="Arial" panose="020B0604020202020204" pitchFamily="34" charset="0"/>
+                    <a:cs typeface="Arial" panose="020B0604020202020204" pitchFamily="34" charset="0"/>
+                  </a:rPr>
+                  <a:t>shallow</a:t>
+                </a:r>
+                <a:r>
+                  <a:rPr lang="es-ES" sz="1000" dirty="0">
+                    <a:latin typeface="Arial" panose="020B0604020202020204" pitchFamily="34" charset="0"/>
+                    <a:cs typeface="Arial" panose="020B0604020202020204" pitchFamily="34" charset="0"/>
+                  </a:rPr>
+                  <a:t> presenta una respuesta más suave frente a variaciones de longitud de onda, lo que lo hace más robusto que la Deep frente a cambios en dicho parámetro.</a:t>
+                </a:r>
+                <a:endParaRPr lang="en-US" sz="1000" dirty="0">
+                  <a:latin typeface="Arial" panose="020B0604020202020204" pitchFamily="34" charset="0"/>
+                  <a:cs typeface="Arial" panose="020B0604020202020204" pitchFamily="34" charset="0"/>
+                </a:endParaRPr>
+              </a:p>
+              <a:p>
+                <a:pPr algn="just"/>
+                <a:endParaRPr lang="en-US" sz="1200" dirty="0">
+                  <a:latin typeface="Arial" panose="020B0604020202020204" pitchFamily="34" charset="0"/>
+                  <a:cs typeface="Arial" panose="020B0604020202020204" pitchFamily="34" charset="0"/>
+                </a:endParaRPr>
+              </a:p>
+            </p:txBody>
+          </p:sp>
+        </mc:Choice>
+        <mc:Fallback>
+          <p:sp>
+            <p:nvSpPr>
+              <p:cNvPr id="2" name="CuadroTexto 1">
+                <a:extLst>
+                  <a:ext uri="{FF2B5EF4-FFF2-40B4-BE49-F238E27FC236}">
+                    <a16:creationId xmlns:a16="http://schemas.microsoft.com/office/drawing/2014/main" id="{47F423D6-BF49-F16B-9504-5EEC1CA0F576}"/>
+                  </a:ext>
+                </a:extLst>
+              </p:cNvPr>
+              <p:cNvSpPr txBox="1">
+                <a:spLocks noRot="1" noChangeAspect="1" noMove="1" noResize="1" noEditPoints="1" noAdjustHandles="1" noChangeArrowheads="1" noChangeShapeType="1" noTextEdit="1"/>
+              </p:cNvSpPr>
+              <p:nvPr/>
+            </p:nvSpPr>
+            <p:spPr>
+              <a:xfrm>
+                <a:off x="583019" y="1524000"/>
+                <a:ext cx="11199971" cy="2800767"/>
+              </a:xfrm>
+              <a:prstGeom prst="rect">
+                <a:avLst/>
+              </a:prstGeom>
+              <a:blipFill>
+                <a:blip r:embed="rId4"/>
+                <a:stretch>
+                  <a:fillRect/>
+                </a:stretch>
+              </a:blipFill>
+              <a:ln w="28575">
+                <a:solidFill>
+                  <a:srgbClr val="E0700D"/>
+                </a:solidFill>
+              </a:ln>
+            </p:spPr>
+            <p:txBody>
+              <a:bodyPr/>
+              <a:lstStyle/>
+              <a:p>
+                <a:r>
+                  <a:rPr lang="es-ES">
+                    <a:noFill/>
+                  </a:rPr>
+                  <a:t> </a:t>
+                </a:r>
+              </a:p>
+            </p:txBody>
+          </p:sp>
+        </mc:Fallback>
+      </mc:AlternateContent>
+    </p:spTree>
+    <p:extLst>
+      <p:ext uri="{BB962C8B-B14F-4D97-AF65-F5344CB8AC3E}">
+        <p14:creationId xmlns:p14="http://schemas.microsoft.com/office/powerpoint/2010/main" val="5043272"/>
+      </p:ext>
+    </p:extLst>
+  </p:cSld>
+  <p:clrMapOvr>
+    <a:masterClrMapping/>
+  </p:clrMapOvr>
+</p:sld>
+</file>
+
+<file path=ppt/slides/slide28.xml><?xml version="1.0" encoding="utf-8"?>
 <p:sld xmlns:a="http://schemas.openxmlformats.org/drawingml/2006/main" xmlns:r="http://schemas.openxmlformats.org/officeDocument/2006/relationships" xmlns:p="http://schemas.openxmlformats.org/presentationml/2006/main">
   <p:cSld>
     <p:spTree>
@@ -17935,7 +19360,7 @@
           <a:p>
             <a:fld id="{B6F15528-21DE-4FAA-801E-634DDDAF4B2B}" type="slidenum">
               <a:rPr lang="es-ES" smtClean="0"/>
-              <a:t>26</a:t>
+              <a:t>28</a:t>
             </a:fld>
             <a:endParaRPr lang="es-ES"/>
           </a:p>
@@ -18162,42 +19587,6 @@
           </a:p>
         </p:txBody>
       </p:sp>
-      <p:sp>
-        <p:nvSpPr>
-          <p:cNvPr id="6" name="CuadroTexto 5">
-            <a:extLst>
-              <a:ext uri="{FF2B5EF4-FFF2-40B4-BE49-F238E27FC236}">
-                <a16:creationId xmlns:a16="http://schemas.microsoft.com/office/drawing/2014/main" id="{0C016548-01A2-6E58-B80D-148384B98EB3}"/>
-              </a:ext>
-            </a:extLst>
-          </p:cNvPr>
-          <p:cNvSpPr txBox="1"/>
-          <p:nvPr/>
-        </p:nvSpPr>
-        <p:spPr>
-          <a:xfrm>
-            <a:off x="6331152" y="4342178"/>
-            <a:ext cx="2269787" cy="369332"/>
-          </a:xfrm>
-          <a:prstGeom prst="rect">
-            <a:avLst/>
-          </a:prstGeom>
-          <a:noFill/>
-        </p:spPr>
-        <p:txBody>
-          <a:bodyPr wrap="square">
-            <a:spAutoFit/>
-          </a:bodyPr>
-          <a:lstStyle/>
-          <a:p>
-            <a:r>
-              <a:rPr lang="en-US" dirty="0"/>
-              <a:t>slab = 150nm</a:t>
-            </a:r>
-            <a:endParaRPr lang="es-ES" dirty="0"/>
-          </a:p>
-        </p:txBody>
-      </p:sp>
       <mc:AlternateContent xmlns:mc="http://schemas.openxmlformats.org/markup-compatibility/2006" xmlns:a14="http://schemas.microsoft.com/office/drawing/2010/main">
         <mc:Choice Requires="a14">
           <p:sp>
@@ -18478,6 +19867,67 @@
           </p:sp>
         </mc:Fallback>
       </mc:AlternateContent>
+      <p:pic>
+        <p:nvPicPr>
+          <p:cNvPr id="8" name="Imagen 7">
+            <a:extLst>
+              <a:ext uri="{FF2B5EF4-FFF2-40B4-BE49-F238E27FC236}">
+                <a16:creationId xmlns:a16="http://schemas.microsoft.com/office/drawing/2014/main" id="{BA25E939-8302-DF96-BBAA-1F5765ECB437}"/>
+              </a:ext>
+            </a:extLst>
+          </p:cNvPr>
+          <p:cNvPicPr>
+            <a:picLocks noChangeAspect="1"/>
+          </p:cNvPicPr>
+          <p:nvPr/>
+        </p:nvPicPr>
+        <p:blipFill>
+          <a:blip r:embed="rId7"/>
+          <a:srcRect t="2221"/>
+          <a:stretch>
+            <a:fillRect/>
+          </a:stretch>
+        </p:blipFill>
+        <p:spPr>
+          <a:xfrm>
+            <a:off x="762638" y="1617862"/>
+            <a:ext cx="5190531" cy="2965904"/>
+          </a:xfrm>
+          <a:prstGeom prst="rect">
+            <a:avLst/>
+          </a:prstGeom>
+        </p:spPr>
+      </p:pic>
+      <p:pic>
+        <p:nvPicPr>
+          <p:cNvPr id="12" name="Imagen 11">
+            <a:extLst>
+              <a:ext uri="{FF2B5EF4-FFF2-40B4-BE49-F238E27FC236}">
+                <a16:creationId xmlns:a16="http://schemas.microsoft.com/office/drawing/2014/main" id="{F93A7FA9-C5A6-DF2A-1516-B3C2139CC821}"/>
+              </a:ext>
+            </a:extLst>
+          </p:cNvPr>
+          <p:cNvPicPr>
+            <a:picLocks noChangeAspect="1"/>
+          </p:cNvPicPr>
+          <p:nvPr/>
+        </p:nvPicPr>
+        <p:blipFill>
+          <a:blip r:embed="rId8"/>
+          <a:stretch>
+            <a:fillRect/>
+          </a:stretch>
+        </p:blipFill>
+        <p:spPr>
+          <a:xfrm>
+            <a:off x="6578859" y="1592639"/>
+            <a:ext cx="5155647" cy="3016350"/>
+          </a:xfrm>
+          <a:prstGeom prst="rect">
+            <a:avLst/>
+          </a:prstGeom>
+        </p:spPr>
+      </p:pic>
     </p:spTree>
     <p:extLst>
       <p:ext uri="{BB962C8B-B14F-4D97-AF65-F5344CB8AC3E}">
@@ -18491,7 +19941,7 @@
 </p:sld>
 </file>
 
-<file path=ppt/slides/slide27.xml><?xml version="1.0" encoding="utf-8"?>
+<file path=ppt/slides/slide29.xml><?xml version="1.0" encoding="utf-8"?>
 <p:sld xmlns:a="http://schemas.openxmlformats.org/drawingml/2006/main" xmlns:r="http://schemas.openxmlformats.org/officeDocument/2006/relationships" xmlns:p="http://schemas.openxmlformats.org/presentationml/2006/main">
   <p:cSld>
     <p:spTree>
@@ -18641,7 +20091,7 @@
           <a:p>
             <a:fld id="{B6F15528-21DE-4FAA-801E-634DDDAF4B2B}" type="slidenum">
               <a:rPr lang="es-ES" smtClean="0"/>
-              <a:t>27</a:t>
+              <a:t>29</a:t>
             </a:fld>
             <a:endParaRPr lang="es-ES"/>
           </a:p>
@@ -18875,42 +20325,6 @@
           </a:p>
         </p:txBody>
       </p:sp>
-      <p:sp>
-        <p:nvSpPr>
-          <p:cNvPr id="6" name="CuadroTexto 5">
-            <a:extLst>
-              <a:ext uri="{FF2B5EF4-FFF2-40B4-BE49-F238E27FC236}">
-                <a16:creationId xmlns:a16="http://schemas.microsoft.com/office/drawing/2014/main" id="{154B5534-E510-6404-1E30-B73FDF73AD42}"/>
-              </a:ext>
-            </a:extLst>
-          </p:cNvPr>
-          <p:cNvSpPr txBox="1"/>
-          <p:nvPr/>
-        </p:nvSpPr>
-        <p:spPr>
-          <a:xfrm>
-            <a:off x="6331152" y="4342178"/>
-            <a:ext cx="2269787" cy="369332"/>
-          </a:xfrm>
-          <a:prstGeom prst="rect">
-            <a:avLst/>
-          </a:prstGeom>
-          <a:noFill/>
-        </p:spPr>
-        <p:txBody>
-          <a:bodyPr wrap="square">
-            <a:spAutoFit/>
-          </a:bodyPr>
-          <a:lstStyle/>
-          <a:p>
-            <a:r>
-              <a:rPr lang="en-US" dirty="0"/>
-              <a:t>slab = 150nm</a:t>
-            </a:r>
-            <a:endParaRPr lang="es-ES" dirty="0"/>
-          </a:p>
-        </p:txBody>
-      </p:sp>
       <mc:AlternateContent xmlns:mc="http://schemas.openxmlformats.org/markup-compatibility/2006" xmlns:a14="http://schemas.microsoft.com/office/drawing/2010/main">
         <mc:Choice Requires="a14">
           <p:sp>
@@ -19175,6 +20589,66 @@
           </p:sp>
         </mc:Fallback>
       </mc:AlternateContent>
+      <p:pic>
+        <p:nvPicPr>
+          <p:cNvPr id="8" name="Imagen 7">
+            <a:extLst>
+              <a:ext uri="{FF2B5EF4-FFF2-40B4-BE49-F238E27FC236}">
+                <a16:creationId xmlns:a16="http://schemas.microsoft.com/office/drawing/2014/main" id="{B802B6FA-71DA-4593-A6D6-F093940F1C7D}"/>
+              </a:ext>
+            </a:extLst>
+          </p:cNvPr>
+          <p:cNvPicPr>
+            <a:picLocks noChangeAspect="1"/>
+          </p:cNvPicPr>
+          <p:nvPr/>
+        </p:nvPicPr>
+        <p:blipFill>
+          <a:blip r:embed="rId7"/>
+          <a:stretch>
+            <a:fillRect/>
+          </a:stretch>
+        </p:blipFill>
+        <p:spPr>
+          <a:xfrm>
+            <a:off x="914400" y="1614914"/>
+            <a:ext cx="5117123" cy="2971800"/>
+          </a:xfrm>
+          <a:prstGeom prst="rect">
+            <a:avLst/>
+          </a:prstGeom>
+        </p:spPr>
+      </p:pic>
+      <p:pic>
+        <p:nvPicPr>
+          <p:cNvPr id="12" name="Imagen 11">
+            <a:extLst>
+              <a:ext uri="{FF2B5EF4-FFF2-40B4-BE49-F238E27FC236}">
+                <a16:creationId xmlns:a16="http://schemas.microsoft.com/office/drawing/2014/main" id="{7DE0037C-FE91-C3C4-3F74-D707078E978A}"/>
+              </a:ext>
+            </a:extLst>
+          </p:cNvPr>
+          <p:cNvPicPr>
+            <a:picLocks noChangeAspect="1"/>
+          </p:cNvPicPr>
+          <p:nvPr/>
+        </p:nvPicPr>
+        <p:blipFill>
+          <a:blip r:embed="rId8"/>
+          <a:stretch>
+            <a:fillRect/>
+          </a:stretch>
+        </p:blipFill>
+        <p:spPr>
+          <a:xfrm>
+            <a:off x="6506141" y="1613012"/>
+            <a:ext cx="5117123" cy="2973702"/>
+          </a:xfrm>
+          <a:prstGeom prst="rect">
+            <a:avLst/>
+          </a:prstGeom>
+        </p:spPr>
+      </p:pic>
     </p:spTree>
     <p:extLst>
       <p:ext uri="{BB962C8B-B14F-4D97-AF65-F5344CB8AC3E}">
@@ -19188,7 +20662,142 @@
 </p:sld>
 </file>
 
-<file path=ppt/slides/slide28.xml><?xml version="1.0" encoding="utf-8"?>
+<file path=ppt/slides/slide3.xml><?xml version="1.0" encoding="utf-8"?>
+<p:sld xmlns:a="http://schemas.openxmlformats.org/drawingml/2006/main" xmlns:r="http://schemas.openxmlformats.org/officeDocument/2006/relationships" xmlns:p="http://schemas.openxmlformats.org/presentationml/2006/main">
+  <p:cSld>
+    <p:spTree>
+      <p:nvGrpSpPr>
+        <p:cNvPr id="1" name=""/>
+        <p:cNvGrpSpPr/>
+        <p:nvPr/>
+      </p:nvGrpSpPr>
+      <p:grpSpPr>
+        <a:xfrm>
+          <a:off x="0" y="0"/>
+          <a:ext cx="0" cy="0"/>
+          <a:chOff x="0" y="0"/>
+          <a:chExt cx="0" cy="0"/>
+        </a:xfrm>
+      </p:grpSpPr>
+      <p:sp>
+        <p:nvSpPr>
+          <p:cNvPr id="4" name="Marcador de pie de página 3">
+            <a:extLst>
+              <a:ext uri="{FF2B5EF4-FFF2-40B4-BE49-F238E27FC236}">
+                <a16:creationId xmlns:a16="http://schemas.microsoft.com/office/drawing/2014/main" id="{1F74687F-7302-3F32-F9D1-0566D05F33AE}"/>
+              </a:ext>
+            </a:extLst>
+          </p:cNvPr>
+          <p:cNvSpPr>
+            <a:spLocks noGrp="1"/>
+          </p:cNvSpPr>
+          <p:nvPr>
+            <p:ph type="ftr" sz="quarter" idx="5"/>
+          </p:nvPr>
+        </p:nvSpPr>
+        <p:spPr/>
+        <p:txBody>
+          <a:bodyPr/>
+          <a:lstStyle/>
+          <a:p>
+            <a:pPr marL="12700">
+              <a:spcBef>
+                <a:spcPts val="15"/>
+              </a:spcBef>
+            </a:pPr>
+            <a:r>
+              <a:rPr lang="es-ES" spc="-5"/>
+              <a:t>LAB 2.0. COUPLERS</a:t>
+            </a:r>
+            <a:endParaRPr lang="es-ES" spc="-5" dirty="0"/>
+          </a:p>
+        </p:txBody>
+      </p:sp>
+      <p:sp>
+        <p:nvSpPr>
+          <p:cNvPr id="5" name="Marcador de número de diapositiva 4">
+            <a:extLst>
+              <a:ext uri="{FF2B5EF4-FFF2-40B4-BE49-F238E27FC236}">
+                <a16:creationId xmlns:a16="http://schemas.microsoft.com/office/drawing/2014/main" id="{78335A49-ACE2-C055-50CA-8DD755D2E76D}"/>
+              </a:ext>
+            </a:extLst>
+          </p:cNvPr>
+          <p:cNvSpPr>
+            <a:spLocks noGrp="1"/>
+          </p:cNvSpPr>
+          <p:nvPr>
+            <p:ph type="sldNum" sz="quarter" idx="7"/>
+          </p:nvPr>
+        </p:nvSpPr>
+        <p:spPr/>
+        <p:txBody>
+          <a:bodyPr/>
+          <a:lstStyle/>
+          <a:p>
+            <a:fld id="{B6F15528-21DE-4FAA-801E-634DDDAF4B2B}" type="slidenum">
+              <a:rPr lang="es-ES" smtClean="0"/>
+              <a:t>3</a:t>
+            </a:fld>
+            <a:endParaRPr lang="es-ES"/>
+          </a:p>
+        </p:txBody>
+      </p:sp>
+      <p:sp>
+        <p:nvSpPr>
+          <p:cNvPr id="6" name="Título 4">
+            <a:extLst>
+              <a:ext uri="{FF2B5EF4-FFF2-40B4-BE49-F238E27FC236}">
+                <a16:creationId xmlns:a16="http://schemas.microsoft.com/office/drawing/2014/main" id="{AF6692CA-D0D0-2BAF-E673-933E02AE2BB8}"/>
+              </a:ext>
+            </a:extLst>
+          </p:cNvPr>
+          <p:cNvSpPr>
+            <a:spLocks noGrp="1"/>
+          </p:cNvSpPr>
+          <p:nvPr>
+            <p:ph type="body" idx="1"/>
+          </p:nvPr>
+        </p:nvSpPr>
+        <p:spPr>
+          <a:xfrm>
+            <a:off x="609600" y="2152650"/>
+            <a:ext cx="10972800" cy="430887"/>
+          </a:xfrm>
+        </p:spPr>
+        <p:txBody>
+          <a:bodyPr/>
+          <a:lstStyle/>
+          <a:p>
+            <a:pPr algn="ctr"/>
+            <a:r>
+              <a:rPr lang="en-US" sz="2800" b="1" dirty="0">
+                <a:effectLst>
+                  <a:outerShdw blurRad="38100" dist="38100" dir="2700000" algn="tl">
+                    <a:srgbClr val="000000">
+                      <a:alpha val="43137"/>
+                    </a:srgbClr>
+                  </a:outerShdw>
+                </a:effectLst>
+              </a:rPr>
+              <a:t>Directional coupler</a:t>
+            </a:r>
+          </a:p>
+        </p:txBody>
+      </p:sp>
+    </p:spTree>
+    <p:extLst>
+      <p:ext uri="{BB962C8B-B14F-4D97-AF65-F5344CB8AC3E}">
+        <p14:creationId xmlns:p14="http://schemas.microsoft.com/office/powerpoint/2010/main" val="1640019522"/>
+      </p:ext>
+    </p:extLst>
+  </p:cSld>
+  <p:clrMapOvr>
+    <a:masterClrMapping/>
+  </p:clrMapOvr>
+</p:sld>
+</file>
+
+<file path=ppt/slides/slide30.xml><?xml version="1.0" encoding="utf-8"?>
 <p:sld xmlns:a="http://schemas.openxmlformats.org/drawingml/2006/main" xmlns:r="http://schemas.openxmlformats.org/officeDocument/2006/relationships" xmlns:p="http://schemas.openxmlformats.org/presentationml/2006/main">
   <p:cSld>
     <p:spTree>
@@ -19327,148 +20936,13 @@
           <a:p>
             <a:fld id="{B6F15528-21DE-4FAA-801E-634DDDAF4B2B}" type="slidenum">
               <a:rPr lang="es-ES" smtClean="0"/>
-              <a:t>28</a:t>
+              <a:t>30</a:t>
             </a:fld>
             <a:endParaRPr lang="es-ES"/>
           </a:p>
         </p:txBody>
       </p:sp>
     </p:spTree>
-  </p:cSld>
-  <p:clrMapOvr>
-    <a:masterClrMapping/>
-  </p:clrMapOvr>
-</p:sld>
-</file>
-
-<file path=ppt/slides/slide3.xml><?xml version="1.0" encoding="utf-8"?>
-<p:sld xmlns:a="http://schemas.openxmlformats.org/drawingml/2006/main" xmlns:r="http://schemas.openxmlformats.org/officeDocument/2006/relationships" xmlns:p="http://schemas.openxmlformats.org/presentationml/2006/main">
-  <p:cSld>
-    <p:spTree>
-      <p:nvGrpSpPr>
-        <p:cNvPr id="1" name=""/>
-        <p:cNvGrpSpPr/>
-        <p:nvPr/>
-      </p:nvGrpSpPr>
-      <p:grpSpPr>
-        <a:xfrm>
-          <a:off x="0" y="0"/>
-          <a:ext cx="0" cy="0"/>
-          <a:chOff x="0" y="0"/>
-          <a:chExt cx="0" cy="0"/>
-        </a:xfrm>
-      </p:grpSpPr>
-      <p:sp>
-        <p:nvSpPr>
-          <p:cNvPr id="4" name="Marcador de pie de página 3">
-            <a:extLst>
-              <a:ext uri="{FF2B5EF4-FFF2-40B4-BE49-F238E27FC236}">
-                <a16:creationId xmlns:a16="http://schemas.microsoft.com/office/drawing/2014/main" id="{1F74687F-7302-3F32-F9D1-0566D05F33AE}"/>
-              </a:ext>
-            </a:extLst>
-          </p:cNvPr>
-          <p:cNvSpPr>
-            <a:spLocks noGrp="1"/>
-          </p:cNvSpPr>
-          <p:nvPr>
-            <p:ph type="ftr" sz="quarter" idx="5"/>
-          </p:nvPr>
-        </p:nvSpPr>
-        <p:spPr/>
-        <p:txBody>
-          <a:bodyPr/>
-          <a:lstStyle/>
-          <a:p>
-            <a:pPr marL="12700">
-              <a:spcBef>
-                <a:spcPts val="15"/>
-              </a:spcBef>
-            </a:pPr>
-            <a:r>
-              <a:rPr lang="es-ES" spc="-5"/>
-              <a:t>LAB 2.0. COUPLERS</a:t>
-            </a:r>
-            <a:endParaRPr lang="es-ES" spc="-5" dirty="0"/>
-          </a:p>
-        </p:txBody>
-      </p:sp>
-      <p:sp>
-        <p:nvSpPr>
-          <p:cNvPr id="5" name="Marcador de número de diapositiva 4">
-            <a:extLst>
-              <a:ext uri="{FF2B5EF4-FFF2-40B4-BE49-F238E27FC236}">
-                <a16:creationId xmlns:a16="http://schemas.microsoft.com/office/drawing/2014/main" id="{78335A49-ACE2-C055-50CA-8DD755D2E76D}"/>
-              </a:ext>
-            </a:extLst>
-          </p:cNvPr>
-          <p:cNvSpPr>
-            <a:spLocks noGrp="1"/>
-          </p:cNvSpPr>
-          <p:nvPr>
-            <p:ph type="sldNum" sz="quarter" idx="7"/>
-          </p:nvPr>
-        </p:nvSpPr>
-        <p:spPr/>
-        <p:txBody>
-          <a:bodyPr/>
-          <a:lstStyle/>
-          <a:p>
-            <a:fld id="{B6F15528-21DE-4FAA-801E-634DDDAF4B2B}" type="slidenum">
-              <a:rPr lang="es-ES" smtClean="0"/>
-              <a:t>3</a:t>
-            </a:fld>
-            <a:endParaRPr lang="es-ES"/>
-          </a:p>
-        </p:txBody>
-      </p:sp>
-      <p:sp>
-        <p:nvSpPr>
-          <p:cNvPr id="6" name="Título 4">
-            <a:extLst>
-              <a:ext uri="{FF2B5EF4-FFF2-40B4-BE49-F238E27FC236}">
-                <a16:creationId xmlns:a16="http://schemas.microsoft.com/office/drawing/2014/main" id="{AF6692CA-D0D0-2BAF-E673-933E02AE2BB8}"/>
-              </a:ext>
-            </a:extLst>
-          </p:cNvPr>
-          <p:cNvSpPr>
-            <a:spLocks noGrp="1"/>
-          </p:cNvSpPr>
-          <p:nvPr>
-            <p:ph type="body" idx="1"/>
-          </p:nvPr>
-        </p:nvSpPr>
-        <p:spPr>
-          <a:xfrm>
-            <a:off x="609600" y="2152650"/>
-            <a:ext cx="10972800" cy="430887"/>
-          </a:xfrm>
-        </p:spPr>
-        <p:txBody>
-          <a:bodyPr/>
-          <a:lstStyle/>
-          <a:p>
-            <a:pPr algn="ctr"/>
-            <a:r>
-              <a:rPr lang="en-US" sz="2800" b="1" dirty="0">
-                <a:effectLst>
-                  <a:outerShdw blurRad="38100" dist="38100" dir="2700000" algn="tl">
-                    <a:srgbClr val="000000">
-                      <a:alpha val="43137"/>
-                    </a:srgbClr>
-                  </a:outerShdw>
-                </a:effectLst>
-              </a:rPr>
-              <a:t>Directional coupler</a:t>
-            </a:r>
-          </a:p>
-        </p:txBody>
-      </p:sp>
-    </p:spTree>
-    <p:extLst>
-      <p:ext uri="{BB962C8B-B14F-4D97-AF65-F5344CB8AC3E}">
-        <p14:creationId xmlns:p14="http://schemas.microsoft.com/office/powerpoint/2010/main" val="1640019522"/>
-      </p:ext>
-    </p:extLst>
   </p:cSld>
   <p:clrMapOvr>
     <a:masterClrMapping/>

--- a/LabBook_20.pptx
+++ b/LabBook_20.pptx
@@ -5,10 +5,10 @@
     <p:sldMasterId id="2147483648" r:id="rId1"/>
   </p:sldMasterIdLst>
   <p:notesMasterIdLst>
-    <p:notesMasterId r:id="rId32"/>
+    <p:notesMasterId r:id="rId34"/>
   </p:notesMasterIdLst>
   <p:handoutMasterIdLst>
-    <p:handoutMasterId r:id="rId33"/>
+    <p:handoutMasterId r:id="rId35"/>
   </p:handoutMasterIdLst>
   <p:sldIdLst>
     <p:sldId id="256" r:id="rId2"/>
@@ -39,8 +39,10 @@
     <p:sldId id="297" r:id="rId27"/>
     <p:sldId id="317" r:id="rId28"/>
     <p:sldId id="292" r:id="rId29"/>
-    <p:sldId id="298" r:id="rId30"/>
-    <p:sldId id="288" r:id="rId31"/>
+    <p:sldId id="318" r:id="rId30"/>
+    <p:sldId id="298" r:id="rId31"/>
+    <p:sldId id="319" r:id="rId32"/>
+    <p:sldId id="288" r:id="rId33"/>
   </p:sldIdLst>
   <p:sldSz cx="12192000" cy="6858000"/>
   <p:notesSz cx="12192000" cy="6858000"/>
@@ -3071,7 +3073,7 @@
         <p:cNvPr id="1" name="">
           <a:extLst>
             <a:ext uri="{FF2B5EF4-FFF2-40B4-BE49-F238E27FC236}">
-              <a16:creationId xmlns:a16="http://schemas.microsoft.com/office/drawing/2014/main" id="{D3E3BE0A-4FED-FF2A-A29F-A3D3BA9386AE}"/>
+              <a16:creationId xmlns:a16="http://schemas.microsoft.com/office/drawing/2014/main" id="{67E0241B-A7F6-AB79-EADB-A8E364AA7C7E}"/>
             </a:ext>
           </a:extLst>
         </p:cNvPr>
@@ -3091,7 +3093,7 @@
           <p:cNvPr id="2" name="Marcador de imagen de diapositiva 1">
             <a:extLst>
               <a:ext uri="{FF2B5EF4-FFF2-40B4-BE49-F238E27FC236}">
-                <a16:creationId xmlns:a16="http://schemas.microsoft.com/office/drawing/2014/main" id="{F78D4508-C900-33E0-69A9-12D9A5EC8BE2}"/>
+                <a16:creationId xmlns:a16="http://schemas.microsoft.com/office/drawing/2014/main" id="{95ADB45A-5A94-32A7-2E95-A690B3375BED}"/>
               </a:ext>
             </a:extLst>
           </p:cNvPr>
@@ -3109,7 +3111,7 @@
           <p:cNvPr id="3" name="Marcador de notas 2">
             <a:extLst>
               <a:ext uri="{FF2B5EF4-FFF2-40B4-BE49-F238E27FC236}">
-                <a16:creationId xmlns:a16="http://schemas.microsoft.com/office/drawing/2014/main" id="{23678FD2-F52A-F464-A6DC-9AE4044DCA67}"/>
+                <a16:creationId xmlns:a16="http://schemas.microsoft.com/office/drawing/2014/main" id="{0E993C81-C881-F4D5-2636-C7825D862F15}"/>
               </a:ext>
             </a:extLst>
           </p:cNvPr>
@@ -3134,7 +3136,7 @@
           <p:cNvPr id="4" name="Marcador de número de diapositiva 3">
             <a:extLst>
               <a:ext uri="{FF2B5EF4-FFF2-40B4-BE49-F238E27FC236}">
-                <a16:creationId xmlns:a16="http://schemas.microsoft.com/office/drawing/2014/main" id="{A6FF2B29-AFFB-903E-D5AD-4E4E99BA5701}"/>
+                <a16:creationId xmlns:a16="http://schemas.microsoft.com/office/drawing/2014/main" id="{FA29EB9A-26EF-A5E9-0CE6-1B6652DEB84A}"/>
               </a:ext>
             </a:extLst>
           </p:cNvPr>
@@ -3161,7 +3163,223 @@
     </p:spTree>
     <p:extLst>
       <p:ext uri="{BB962C8B-B14F-4D97-AF65-F5344CB8AC3E}">
+        <p14:creationId xmlns:p14="http://schemas.microsoft.com/office/powerpoint/2010/main" val="4273027579"/>
+      </p:ext>
+    </p:extLst>
+  </p:cSld>
+  <p:clrMapOvr>
+    <a:masterClrMapping/>
+  </p:clrMapOvr>
+</p:notes>
+</file>
+
+<file path=ppt/notesSlides/notesSlide26.xml><?xml version="1.0" encoding="utf-8"?>
+<p:notes xmlns:a="http://schemas.openxmlformats.org/drawingml/2006/main" xmlns:r="http://schemas.openxmlformats.org/officeDocument/2006/relationships" xmlns:p="http://schemas.openxmlformats.org/presentationml/2006/main">
+  <p:cSld>
+    <p:spTree>
+      <p:nvGrpSpPr>
+        <p:cNvPr id="1" name="">
+          <a:extLst>
+            <a:ext uri="{FF2B5EF4-FFF2-40B4-BE49-F238E27FC236}">
+              <a16:creationId xmlns:a16="http://schemas.microsoft.com/office/drawing/2014/main" id="{D3E3BE0A-4FED-FF2A-A29F-A3D3BA9386AE}"/>
+            </a:ext>
+          </a:extLst>
+        </p:cNvPr>
+        <p:cNvGrpSpPr/>
+        <p:nvPr/>
+      </p:nvGrpSpPr>
+      <p:grpSpPr>
+        <a:xfrm>
+          <a:off x="0" y="0"/>
+          <a:ext cx="0" cy="0"/>
+          <a:chOff x="0" y="0"/>
+          <a:chExt cx="0" cy="0"/>
+        </a:xfrm>
+      </p:grpSpPr>
+      <p:sp>
+        <p:nvSpPr>
+          <p:cNvPr id="2" name="Marcador de imagen de diapositiva 1">
+            <a:extLst>
+              <a:ext uri="{FF2B5EF4-FFF2-40B4-BE49-F238E27FC236}">
+                <a16:creationId xmlns:a16="http://schemas.microsoft.com/office/drawing/2014/main" id="{F78D4508-C900-33E0-69A9-12D9A5EC8BE2}"/>
+              </a:ext>
+            </a:extLst>
+          </p:cNvPr>
+          <p:cNvSpPr>
+            <a:spLocks noGrp="1" noRot="1" noChangeAspect="1"/>
+          </p:cNvSpPr>
+          <p:nvPr>
+            <p:ph type="sldImg"/>
+          </p:nvPr>
+        </p:nvSpPr>
+        <p:spPr/>
+      </p:sp>
+      <p:sp>
+        <p:nvSpPr>
+          <p:cNvPr id="3" name="Marcador de notas 2">
+            <a:extLst>
+              <a:ext uri="{FF2B5EF4-FFF2-40B4-BE49-F238E27FC236}">
+                <a16:creationId xmlns:a16="http://schemas.microsoft.com/office/drawing/2014/main" id="{23678FD2-F52A-F464-A6DC-9AE4044DCA67}"/>
+              </a:ext>
+            </a:extLst>
+          </p:cNvPr>
+          <p:cNvSpPr>
+            <a:spLocks noGrp="1"/>
+          </p:cNvSpPr>
+          <p:nvPr>
+            <p:ph type="body" idx="1"/>
+          </p:nvPr>
+        </p:nvSpPr>
+        <p:spPr/>
+        <p:txBody>
+          <a:bodyPr/>
+          <a:lstStyle/>
+          <a:p>
+            <a:endParaRPr lang="es-ES" dirty="0"/>
+          </a:p>
+        </p:txBody>
+      </p:sp>
+      <p:sp>
+        <p:nvSpPr>
+          <p:cNvPr id="4" name="Marcador de número de diapositiva 3">
+            <a:extLst>
+              <a:ext uri="{FF2B5EF4-FFF2-40B4-BE49-F238E27FC236}">
+                <a16:creationId xmlns:a16="http://schemas.microsoft.com/office/drawing/2014/main" id="{A6FF2B29-AFFB-903E-D5AD-4E4E99BA5701}"/>
+              </a:ext>
+            </a:extLst>
+          </p:cNvPr>
+          <p:cNvSpPr>
+            <a:spLocks noGrp="1"/>
+          </p:cNvSpPr>
+          <p:nvPr>
+            <p:ph type="sldNum" sz="quarter" idx="5"/>
+          </p:nvPr>
+        </p:nvSpPr>
+        <p:spPr/>
+        <p:txBody>
+          <a:bodyPr/>
+          <a:lstStyle/>
+          <a:p>
+            <a:fld id="{676223B9-C868-4436-87D9-1A3152E1157A}" type="slidenum">
+              <a:rPr lang="es-ES" smtClean="0"/>
+              <a:t>30</a:t>
+            </a:fld>
+            <a:endParaRPr lang="es-ES"/>
+          </a:p>
+        </p:txBody>
+      </p:sp>
+    </p:spTree>
+    <p:extLst>
+      <p:ext uri="{BB962C8B-B14F-4D97-AF65-F5344CB8AC3E}">
         <p14:creationId xmlns:p14="http://schemas.microsoft.com/office/powerpoint/2010/main" val="1083298638"/>
+      </p:ext>
+    </p:extLst>
+  </p:cSld>
+  <p:clrMapOvr>
+    <a:masterClrMapping/>
+  </p:clrMapOvr>
+</p:notes>
+</file>
+
+<file path=ppt/notesSlides/notesSlide27.xml><?xml version="1.0" encoding="utf-8"?>
+<p:notes xmlns:a="http://schemas.openxmlformats.org/drawingml/2006/main" xmlns:r="http://schemas.openxmlformats.org/officeDocument/2006/relationships" xmlns:p="http://schemas.openxmlformats.org/presentationml/2006/main">
+  <p:cSld>
+    <p:spTree>
+      <p:nvGrpSpPr>
+        <p:cNvPr id="1" name="">
+          <a:extLst>
+            <a:ext uri="{FF2B5EF4-FFF2-40B4-BE49-F238E27FC236}">
+              <a16:creationId xmlns:a16="http://schemas.microsoft.com/office/drawing/2014/main" id="{EF242403-CBBC-B481-3BDA-763027EF3582}"/>
+            </a:ext>
+          </a:extLst>
+        </p:cNvPr>
+        <p:cNvGrpSpPr/>
+        <p:nvPr/>
+      </p:nvGrpSpPr>
+      <p:grpSpPr>
+        <a:xfrm>
+          <a:off x="0" y="0"/>
+          <a:ext cx="0" cy="0"/>
+          <a:chOff x="0" y="0"/>
+          <a:chExt cx="0" cy="0"/>
+        </a:xfrm>
+      </p:grpSpPr>
+      <p:sp>
+        <p:nvSpPr>
+          <p:cNvPr id="2" name="Marcador de imagen de diapositiva 1">
+            <a:extLst>
+              <a:ext uri="{FF2B5EF4-FFF2-40B4-BE49-F238E27FC236}">
+                <a16:creationId xmlns:a16="http://schemas.microsoft.com/office/drawing/2014/main" id="{B4996A85-9E31-7086-6A06-1BA906C564A9}"/>
+              </a:ext>
+            </a:extLst>
+          </p:cNvPr>
+          <p:cNvSpPr>
+            <a:spLocks noGrp="1" noRot="1" noChangeAspect="1"/>
+          </p:cNvSpPr>
+          <p:nvPr>
+            <p:ph type="sldImg"/>
+          </p:nvPr>
+        </p:nvSpPr>
+        <p:spPr/>
+      </p:sp>
+      <p:sp>
+        <p:nvSpPr>
+          <p:cNvPr id="3" name="Marcador de notas 2">
+            <a:extLst>
+              <a:ext uri="{FF2B5EF4-FFF2-40B4-BE49-F238E27FC236}">
+                <a16:creationId xmlns:a16="http://schemas.microsoft.com/office/drawing/2014/main" id="{5962C9DE-1917-B8AE-D51D-B91A7B92459A}"/>
+              </a:ext>
+            </a:extLst>
+          </p:cNvPr>
+          <p:cNvSpPr>
+            <a:spLocks noGrp="1"/>
+          </p:cNvSpPr>
+          <p:nvPr>
+            <p:ph type="body" idx="1"/>
+          </p:nvPr>
+        </p:nvSpPr>
+        <p:spPr/>
+        <p:txBody>
+          <a:bodyPr/>
+          <a:lstStyle/>
+          <a:p>
+            <a:endParaRPr lang="es-ES" dirty="0"/>
+          </a:p>
+        </p:txBody>
+      </p:sp>
+      <p:sp>
+        <p:nvSpPr>
+          <p:cNvPr id="4" name="Marcador de número de diapositiva 3">
+            <a:extLst>
+              <a:ext uri="{FF2B5EF4-FFF2-40B4-BE49-F238E27FC236}">
+                <a16:creationId xmlns:a16="http://schemas.microsoft.com/office/drawing/2014/main" id="{EB1709D0-8BB8-F36B-7712-982F09FD12FD}"/>
+              </a:ext>
+            </a:extLst>
+          </p:cNvPr>
+          <p:cNvSpPr>
+            <a:spLocks noGrp="1"/>
+          </p:cNvSpPr>
+          <p:nvPr>
+            <p:ph type="sldNum" sz="quarter" idx="5"/>
+          </p:nvPr>
+        </p:nvSpPr>
+        <p:spPr/>
+        <p:txBody>
+          <a:bodyPr/>
+          <a:lstStyle/>
+          <a:p>
+            <a:fld id="{676223B9-C868-4436-87D9-1A3152E1157A}" type="slidenum">
+              <a:rPr lang="es-ES" smtClean="0"/>
+              <a:t>31</a:t>
+            </a:fld>
+            <a:endParaRPr lang="es-ES"/>
+          </a:p>
+        </p:txBody>
+      </p:sp>
+    </p:spTree>
+    <p:extLst>
+      <p:ext uri="{BB962C8B-B14F-4D97-AF65-F5344CB8AC3E}">
+        <p14:creationId xmlns:p14="http://schemas.microsoft.com/office/powerpoint/2010/main" val="1167986101"/>
       </p:ext>
     </p:extLst>
   </p:cSld>
@@ -17432,8 +17650,8 @@
           </a:p>
         </p:txBody>
       </p:sp>
-      <mc:AlternateContent xmlns:mc="http://schemas.openxmlformats.org/markup-compatibility/2006">
-        <mc:Choice xmlns:a14="http://schemas.microsoft.com/office/drawing/2010/main" Requires="a14">
+      <mc:AlternateContent xmlns:mc="http://schemas.openxmlformats.org/markup-compatibility/2006" xmlns:a14="http://schemas.microsoft.com/office/drawing/2010/main">
+        <mc:Choice Requires="a14">
           <p:sp>
             <p:nvSpPr>
               <p:cNvPr id="2" name="CuadroTexto 1">
@@ -17501,7 +17719,9 @@
                     <m:sSub>
                       <m:sSubPr>
                         <m:ctrlPr>
-                          <a:rPr lang="ar-AE" sz="1000"/>
+                          <a:rPr lang="ar-AE" sz="1000" i="1">
+                            <a:latin typeface="Cambria Math" panose="02040503050406030204" pitchFamily="18" charset="0"/>
+                          </a:rPr>
                         </m:ctrlPr>
                       </m:sSubPr>
                       <m:e>
@@ -17509,7 +17729,9 @@
                           <m:rPr>
                             <m:sty m:val="p"/>
                           </m:rPr>
-                          <a:rPr lang="ar-AE" sz="1000" b="0" i="0"/>
+                          <a:rPr lang="ar-AE" sz="1000" b="0" i="0">
+                            <a:latin typeface="Cambria Math" panose="02040503050406030204" pitchFamily="18" charset="0"/>
+                          </a:rPr>
                           <m:t>L</m:t>
                         </m:r>
                       </m:e>
@@ -17518,7 +17740,9 @@
                           <m:rPr>
                             <m:sty m:val="p"/>
                           </m:rPr>
-                          <a:rPr lang="ar-AE" sz="1000" b="0" i="0"/>
+                          <a:rPr lang="ar-AE" sz="1000" b="0" i="0">
+                            <a:latin typeface="Cambria Math" panose="02040503050406030204" pitchFamily="18" charset="0"/>
+                          </a:rPr>
                           <m:t>π</m:t>
                         </m:r>
                         <m:r>
@@ -17560,7 +17784,9 @@
                     <m:sSub>
                       <m:sSubPr>
                         <m:ctrlPr>
-                          <a:rPr lang="ar-AE" sz="1000"/>
+                          <a:rPr lang="ar-AE" sz="1000" i="1">
+                            <a:latin typeface="Cambria Math" panose="02040503050406030204" pitchFamily="18" charset="0"/>
+                          </a:rPr>
                         </m:ctrlPr>
                       </m:sSubPr>
                       <m:e>
@@ -17568,7 +17794,9 @@
                           <m:rPr>
                             <m:sty m:val="p"/>
                           </m:rPr>
-                          <a:rPr lang="ar-AE" sz="1000" b="0" i="0"/>
+                          <a:rPr lang="ar-AE" sz="1000" b="0" i="0">
+                            <a:latin typeface="Cambria Math" panose="02040503050406030204" pitchFamily="18" charset="0"/>
+                          </a:rPr>
                           <m:t>L</m:t>
                         </m:r>
                       </m:e>
@@ -17577,7 +17805,9 @@
                           <m:rPr>
                             <m:sty m:val="p"/>
                           </m:rPr>
-                          <a:rPr lang="ar-AE" sz="1000" b="0" i="0"/>
+                          <a:rPr lang="ar-AE" sz="1000" b="0" i="0">
+                            <a:latin typeface="Cambria Math" panose="02040503050406030204" pitchFamily="18" charset="0"/>
+                          </a:rPr>
                           <m:t>π</m:t>
                         </m:r>
                       </m:sub>
@@ -17606,7 +17836,9 @@
                     <m:sSub>
                       <m:sSubPr>
                         <m:ctrlPr>
-                          <a:rPr lang="ar-AE" sz="1000"/>
+                          <a:rPr lang="ar-AE" sz="1000" i="1">
+                            <a:latin typeface="Cambria Math" panose="02040503050406030204" pitchFamily="18" charset="0"/>
+                          </a:rPr>
                         </m:ctrlPr>
                       </m:sSubPr>
                       <m:e>
@@ -17614,7 +17846,9 @@
                           <m:rPr>
                             <m:sty m:val="p"/>
                           </m:rPr>
-                          <a:rPr lang="ar-AE" sz="1000" b="0" i="0"/>
+                          <a:rPr lang="ar-AE" sz="1000" b="0" i="0">
+                            <a:latin typeface="Cambria Math" panose="02040503050406030204" pitchFamily="18" charset="0"/>
+                          </a:rPr>
                           <m:t>L</m:t>
                         </m:r>
                       </m:e>
@@ -17623,7 +17857,9 @@
                           <m:rPr>
                             <m:sty m:val="p"/>
                           </m:rPr>
-                          <a:rPr lang="ar-AE" sz="1000" b="0" i="0"/>
+                          <a:rPr lang="ar-AE" sz="1000" b="0" i="0">
+                            <a:latin typeface="Cambria Math" panose="02040503050406030204" pitchFamily="18" charset="0"/>
+                          </a:rPr>
                           <m:t>π</m:t>
                         </m:r>
                       </m:sub>
@@ -17722,7 +17958,9 @@
                     <m:sSub>
                       <m:sSubPr>
                         <m:ctrlPr>
-                          <a:rPr lang="ar-AE" sz="1000"/>
+                          <a:rPr lang="ar-AE" sz="1000" i="1">
+                            <a:latin typeface="Cambria Math" panose="02040503050406030204" pitchFamily="18" charset="0"/>
+                          </a:rPr>
                         </m:ctrlPr>
                       </m:sSubPr>
                       <m:e>
@@ -17730,7 +17968,9 @@
                           <m:rPr>
                             <m:sty m:val="p"/>
                           </m:rPr>
-                          <a:rPr lang="ar-AE" sz="1000" b="0" i="0"/>
+                          <a:rPr lang="ar-AE" sz="1000" b="0" i="0">
+                            <a:latin typeface="Cambria Math" panose="02040503050406030204" pitchFamily="18" charset="0"/>
+                          </a:rPr>
                           <m:t>L</m:t>
                         </m:r>
                       </m:e>
@@ -17739,7 +17979,9 @@
                           <m:rPr>
                             <m:sty m:val="p"/>
                           </m:rPr>
-                          <a:rPr lang="ar-AE" sz="1000" b="0" i="0"/>
+                          <a:rPr lang="ar-AE" sz="1000" b="0" i="0">
+                            <a:latin typeface="Cambria Math" panose="02040503050406030204" pitchFamily="18" charset="0"/>
+                          </a:rPr>
                           <m:t>π</m:t>
                         </m:r>
                       </m:sub>
@@ -17778,7 +18020,9 @@
                     <m:sSub>
                       <m:sSubPr>
                         <m:ctrlPr>
-                          <a:rPr lang="ar-AE" sz="1000"/>
+                          <a:rPr lang="ar-AE" sz="1000" i="1">
+                            <a:latin typeface="Cambria Math" panose="02040503050406030204" pitchFamily="18" charset="0"/>
+                          </a:rPr>
                         </m:ctrlPr>
                       </m:sSubPr>
                       <m:e>
@@ -17786,7 +18030,9 @@
                           <m:rPr>
                             <m:sty m:val="p"/>
                           </m:rPr>
-                          <a:rPr lang="ar-AE" sz="1000" b="0" i="0"/>
+                          <a:rPr lang="ar-AE" sz="1000" b="0" i="0">
+                            <a:latin typeface="Cambria Math" panose="02040503050406030204" pitchFamily="18" charset="0"/>
+                          </a:rPr>
                           <m:t>L</m:t>
                         </m:r>
                       </m:e>
@@ -17795,7 +18041,9 @@
                           <m:rPr>
                             <m:sty m:val="p"/>
                           </m:rPr>
-                          <a:rPr lang="ar-AE" sz="1000" b="0" i="0"/>
+                          <a:rPr lang="ar-AE" sz="1000" b="0" i="0">
+                            <a:latin typeface="Cambria Math" panose="02040503050406030204" pitchFamily="18" charset="0"/>
+                          </a:rPr>
                           <m:t>π</m:t>
                         </m:r>
                       </m:sub>
@@ -17824,7 +18072,7 @@
             </p:txBody>
           </p:sp>
         </mc:Choice>
-        <mc:Fallback>
+        <mc:Fallback xmlns="">
           <p:sp>
             <p:nvSpPr>
               <p:cNvPr id="2" name="CuadroTexto 1">
@@ -18805,7 +19053,9 @@
                     <m:sSub>
                       <m:sSubPr>
                         <m:ctrlPr>
-                          <a:rPr lang="ar-AE" sz="1000"/>
+                          <a:rPr lang="ar-AE" sz="1000" i="1">
+                            <a:latin typeface="Cambria Math" panose="02040503050406030204" pitchFamily="18" charset="0"/>
+                          </a:rPr>
                         </m:ctrlPr>
                       </m:sSubPr>
                       <m:e>
@@ -18813,7 +19063,9 @@
                           <m:rPr>
                             <m:sty m:val="p"/>
                           </m:rPr>
-                          <a:rPr lang="ar-AE" sz="1000" b="0" i="0"/>
+                          <a:rPr lang="ar-AE" sz="1000" b="0" i="0">
+                            <a:latin typeface="Cambria Math" panose="02040503050406030204" pitchFamily="18" charset="0"/>
+                          </a:rPr>
                           <m:t>L</m:t>
                         </m:r>
                       </m:e>
@@ -18822,7 +19074,9 @@
                           <m:rPr>
                             <m:sty m:val="p"/>
                           </m:rPr>
-                          <a:rPr lang="ar-AE" sz="1000" b="0" i="0"/>
+                          <a:rPr lang="ar-AE" sz="1000" b="0" i="0">
+                            <a:latin typeface="Cambria Math" panose="02040503050406030204" pitchFamily="18" charset="0"/>
+                          </a:rPr>
                           <m:t>π</m:t>
                         </m:r>
                       </m:sub>
@@ -18865,7 +19119,9 @@
                     <m:sSub>
                       <m:sSubPr>
                         <m:ctrlPr>
-                          <a:rPr lang="ar-AE" sz="1000"/>
+                          <a:rPr lang="ar-AE" sz="1000" i="1">
+                            <a:latin typeface="Cambria Math" panose="02040503050406030204" pitchFamily="18" charset="0"/>
+                          </a:rPr>
                         </m:ctrlPr>
                       </m:sSubPr>
                       <m:e>
@@ -18873,7 +19129,9 @@
                           <m:rPr>
                             <m:sty m:val="p"/>
                           </m:rPr>
-                          <a:rPr lang="ar-AE" sz="1000" b="0" i="0"/>
+                          <a:rPr lang="ar-AE" sz="1000" b="0" i="0">
+                            <a:latin typeface="Cambria Math" panose="02040503050406030204" pitchFamily="18" charset="0"/>
+                          </a:rPr>
                           <m:t>L</m:t>
                         </m:r>
                       </m:e>
@@ -18882,7 +19140,9 @@
                           <m:rPr>
                             <m:sty m:val="p"/>
                           </m:rPr>
-                          <a:rPr lang="ar-AE" sz="1000" b="0" i="0"/>
+                          <a:rPr lang="ar-AE" sz="1000" b="0" i="0">
+                            <a:latin typeface="Cambria Math" panose="02040503050406030204" pitchFamily="18" charset="0"/>
+                          </a:rPr>
                           <m:t>π</m:t>
                         </m:r>
                       </m:sub>
@@ -18894,7 +19154,7 @@
                     <a:latin typeface="Arial" panose="020B0604020202020204" pitchFamily="34" charset="0"/>
                     <a:cs typeface="Arial" panose="020B0604020202020204" pitchFamily="34" charset="0"/>
                   </a:rPr>
-                  <a:t>disminuye porque el campo óptico se extiende más fuera del núcleo, incrementando el solapamiento de los campos evanescentes entre las guías. Como consecuencia, el acoplo entre ellas se vuelve más fuerte.</a:t>
+                  <a:t> disminuye porque el campo óptico se extiende más fuera del núcleo, incrementando el solapamiento de los campos evanescentes entre las guías. Como consecuencia, el acoplo entre ellas se vuelve más fuerte.</a:t>
                 </a:r>
               </a:p>
               <a:p>
@@ -18918,7 +19178,9 @@
                     <m:sSub>
                       <m:sSubPr>
                         <m:ctrlPr>
-                          <a:rPr lang="ar-AE" sz="1000"/>
+                          <a:rPr lang="ar-AE" sz="1000" i="1" smtClean="0">
+                            <a:latin typeface="Cambria Math" panose="02040503050406030204" pitchFamily="18" charset="0"/>
+                          </a:rPr>
                         </m:ctrlPr>
                       </m:sSubPr>
                       <m:e>
@@ -18926,7 +19188,9 @@
                           <m:rPr>
                             <m:sty m:val="p"/>
                           </m:rPr>
-                          <a:rPr lang="ar-AE" sz="1000" b="0" i="0"/>
+                          <a:rPr lang="ar-AE" sz="1000" b="0" i="0">
+                            <a:latin typeface="Cambria Math" panose="02040503050406030204" pitchFamily="18" charset="0"/>
+                          </a:rPr>
                           <m:t>L</m:t>
                         </m:r>
                       </m:e>
@@ -18935,7 +19199,9 @@
                           <m:rPr>
                             <m:sty m:val="p"/>
                           </m:rPr>
-                          <a:rPr lang="ar-AE" sz="1000" b="0" i="0"/>
+                          <a:rPr lang="ar-AE" sz="1000" b="0" i="0">
+                            <a:latin typeface="Cambria Math" panose="02040503050406030204" pitchFamily="18" charset="0"/>
+                          </a:rPr>
                           <m:t>π</m:t>
                         </m:r>
                       </m:sub>
@@ -19037,7 +19303,9 @@
                     <m:sSub>
                       <m:sSubPr>
                         <m:ctrlPr>
-                          <a:rPr lang="ar-AE" sz="1000"/>
+                          <a:rPr lang="ar-AE" sz="1000" i="1">
+                            <a:latin typeface="Cambria Math" panose="02040503050406030204" pitchFamily="18" charset="0"/>
+                          </a:rPr>
                         </m:ctrlPr>
                       </m:sSubPr>
                       <m:e>
@@ -19045,7 +19313,9 @@
                           <m:rPr>
                             <m:sty m:val="p"/>
                           </m:rPr>
-                          <a:rPr lang="ar-AE" sz="1000" b="0" i="0"/>
+                          <a:rPr lang="ar-AE" sz="1000" b="0" i="0">
+                            <a:latin typeface="Cambria Math" panose="02040503050406030204" pitchFamily="18" charset="0"/>
+                          </a:rPr>
                           <m:t>L</m:t>
                         </m:r>
                       </m:e>
@@ -19054,7 +19324,9 @@
                           <m:rPr>
                             <m:sty m:val="p"/>
                           </m:rPr>
-                          <a:rPr lang="ar-AE" sz="1000" b="0" i="0"/>
+                          <a:rPr lang="ar-AE" sz="1000" b="0" i="0">
+                            <a:latin typeface="Cambria Math" panose="02040503050406030204" pitchFamily="18" charset="0"/>
+                          </a:rPr>
                           <m:t>π</m:t>
                         </m:r>
                       </m:sub>
@@ -19087,7 +19359,9 @@
                     <m:sSub>
                       <m:sSubPr>
                         <m:ctrlPr>
-                          <a:rPr lang="ar-AE" sz="1000"/>
+                          <a:rPr lang="ar-AE" sz="1000" i="1">
+                            <a:latin typeface="Cambria Math" panose="02040503050406030204" pitchFamily="18" charset="0"/>
+                          </a:rPr>
                         </m:ctrlPr>
                       </m:sSubPr>
                       <m:e>
@@ -19095,7 +19369,9 @@
                           <m:rPr>
                             <m:sty m:val="p"/>
                           </m:rPr>
-                          <a:rPr lang="ar-AE" sz="1000" b="0" i="0"/>
+                          <a:rPr lang="ar-AE" sz="1000" b="0" i="0">
+                            <a:latin typeface="Cambria Math" panose="02040503050406030204" pitchFamily="18" charset="0"/>
+                          </a:rPr>
                           <m:t>L</m:t>
                         </m:r>
                       </m:e>
@@ -19104,7 +19380,9 @@
                           <m:rPr>
                             <m:sty m:val="p"/>
                           </m:rPr>
-                          <a:rPr lang="ar-AE" sz="1000" b="0" i="0"/>
+                          <a:rPr lang="ar-AE" sz="1000" b="0" i="0">
+                            <a:latin typeface="Cambria Math" panose="02040503050406030204" pitchFamily="18" charset="0"/>
+                          </a:rPr>
                           <m:t>π</m:t>
                         </m:r>
                       </m:sub>
@@ -19116,7 +19394,7 @@
                     <a:latin typeface="Arial" panose="020B0604020202020204" pitchFamily="34" charset="0"/>
                     <a:cs typeface="Arial" panose="020B0604020202020204" pitchFamily="34" charset="0"/>
                   </a:rPr>
-                  <a:t>son más altos. Además, el caso </a:t>
+                  <a:t> son más altos. Además, el caso </a:t>
                 </a:r>
                 <a:r>
                   <a:rPr lang="es-ES" sz="1000" dirty="0" err="1">
@@ -19397,89 +19675,6 @@
               <a:t>LAB 2.0. COUPLERS</a:t>
             </a:r>
             <a:endParaRPr lang="es-ES" spc="-5" dirty="0"/>
-          </a:p>
-        </p:txBody>
-      </p:sp>
-      <p:sp>
-        <p:nvSpPr>
-          <p:cNvPr id="2" name="CuadroTexto 1">
-            <a:extLst>
-              <a:ext uri="{FF2B5EF4-FFF2-40B4-BE49-F238E27FC236}">
-                <a16:creationId xmlns:a16="http://schemas.microsoft.com/office/drawing/2014/main" id="{82A62DD6-5488-72A1-9926-0CAEE59089A9}"/>
-              </a:ext>
-            </a:extLst>
-          </p:cNvPr>
-          <p:cNvSpPr txBox="1"/>
-          <p:nvPr/>
-        </p:nvSpPr>
-        <p:spPr>
-          <a:xfrm>
-            <a:off x="609441" y="4860334"/>
-            <a:ext cx="11199971" cy="1200329"/>
-          </a:xfrm>
-          <a:prstGeom prst="rect">
-            <a:avLst/>
-          </a:prstGeom>
-          <a:solidFill>
-            <a:schemeClr val="bg1">
-              <a:lumMod val="95000"/>
-            </a:schemeClr>
-          </a:solidFill>
-          <a:ln w="28575">
-            <a:solidFill>
-              <a:srgbClr val="E0700D"/>
-            </a:solidFill>
-          </a:ln>
-        </p:spPr>
-        <p:txBody>
-          <a:bodyPr wrap="square" rtlCol="0">
-            <a:spAutoFit/>
-          </a:bodyPr>
-          <a:lstStyle/>
-          <a:p>
-            <a:pPr algn="just"/>
-            <a:r>
-              <a:rPr lang="en-US" sz="1200" dirty="0">
-                <a:latin typeface="Arial" panose="020B0604020202020204" pitchFamily="34" charset="0"/>
-                <a:cs typeface="Arial" panose="020B0604020202020204" pitchFamily="34" charset="0"/>
-              </a:rPr>
-              <a:t>Comment results (Important. Compare with Directional Coupler)</a:t>
-            </a:r>
-          </a:p>
-          <a:p>
-            <a:pPr algn="just"/>
-            <a:endParaRPr lang="en-US" sz="1200" dirty="0">
-              <a:latin typeface="Arial" panose="020B0604020202020204" pitchFamily="34" charset="0"/>
-              <a:cs typeface="Arial" panose="020B0604020202020204" pitchFamily="34" charset="0"/>
-            </a:endParaRPr>
-          </a:p>
-          <a:p>
-            <a:pPr algn="just"/>
-            <a:endParaRPr lang="en-US" sz="1200" dirty="0">
-              <a:latin typeface="Arial" panose="020B0604020202020204" pitchFamily="34" charset="0"/>
-              <a:cs typeface="Arial" panose="020B0604020202020204" pitchFamily="34" charset="0"/>
-            </a:endParaRPr>
-          </a:p>
-          <a:p>
-            <a:pPr algn="just"/>
-            <a:endParaRPr lang="en-US" sz="1200" dirty="0">
-              <a:latin typeface="Arial" panose="020B0604020202020204" pitchFamily="34" charset="0"/>
-              <a:cs typeface="Arial" panose="020B0604020202020204" pitchFamily="34" charset="0"/>
-            </a:endParaRPr>
-          </a:p>
-          <a:p>
-            <a:pPr algn="just"/>
-            <a:endParaRPr lang="en-US" sz="1200" dirty="0">
-              <a:latin typeface="Arial" panose="020B0604020202020204" pitchFamily="34" charset="0"/>
-              <a:cs typeface="Arial" panose="020B0604020202020204" pitchFamily="34" charset="0"/>
-            </a:endParaRPr>
-          </a:p>
-          <a:p>
-            <a:pPr algn="just"/>
-            <a:endParaRPr lang="en-US" sz="1200" dirty="0">
-              <a:latin typeface="Arial" panose="020B0604020202020204" pitchFamily="34" charset="0"/>
-              <a:cs typeface="Arial" panose="020B0604020202020204" pitchFamily="34" charset="0"/>
-            </a:endParaRPr>
           </a:p>
         </p:txBody>
       </p:sp>
@@ -19949,7 +20144,7 @@
         <p:cNvPr id="1" name="">
           <a:extLst>
             <a:ext uri="{FF2B5EF4-FFF2-40B4-BE49-F238E27FC236}">
-              <a16:creationId xmlns:a16="http://schemas.microsoft.com/office/drawing/2014/main" id="{2D55C897-D580-E5C1-161C-F8E072695C0C}"/>
+              <a16:creationId xmlns:a16="http://schemas.microsoft.com/office/drawing/2014/main" id="{B7FD9D7B-5298-CA1F-39AC-FA5C5CB26297}"/>
             </a:ext>
           </a:extLst>
         </p:cNvPr>
@@ -19969,7 +20164,7 @@
           <p:cNvPr id="16" name="object 16">
             <a:extLst>
               <a:ext uri="{FF2B5EF4-FFF2-40B4-BE49-F238E27FC236}">
-                <a16:creationId xmlns:a16="http://schemas.microsoft.com/office/drawing/2014/main" id="{53FFBD12-4EFF-41C1-4765-2AD268B2BD94}"/>
+                <a16:creationId xmlns:a16="http://schemas.microsoft.com/office/drawing/2014/main" id="{3A317342-DDC2-8330-FF61-961B3B54FA83}"/>
               </a:ext>
             </a:extLst>
           </p:cNvPr>
@@ -20005,7 +20200,7 @@
             </a:pPr>
             <a:r>
               <a:rPr lang="en-US" sz="2500" dirty="0"/>
-              <a:t>Extra #4 – MMI coupler body width dependence</a:t>
+              <a:t>Extra #3 – MMI coupler wavelength dependence</a:t>
             </a:r>
             <a:br>
               <a:rPr lang="en-US" sz="2500" spc="-5" dirty="0">
@@ -20015,7 +20210,7 @@
             </a:br>
             <a:r>
               <a:rPr lang="en-US" b="0" dirty="0"/>
-              <a:t>Wavelength 1.55 µm, </a:t>
+              <a:t>Wavelengths from 1.5 to 1.7 µm, </a:t>
             </a:r>
             <a:r>
               <a:rPr lang="en-US" b="0" dirty="0" err="1"/>
@@ -20023,7 +20218,7 @@
             </a:r>
             <a:r>
               <a:rPr lang="en-US" b="0" dirty="0"/>
-              <a:t> = 5-10 µm (steps 0.5 µm)</a:t>
+              <a:t> = 6.6 µm</a:t>
             </a:r>
             <a:endParaRPr lang="en-US" sz="2500" b="0" dirty="0">
               <a:latin typeface="+mj-lt"/>
@@ -20037,7 +20232,7 @@
           <p:cNvPr id="83" name="Gráfico 82">
             <a:extLst>
               <a:ext uri="{FF2B5EF4-FFF2-40B4-BE49-F238E27FC236}">
-                <a16:creationId xmlns:a16="http://schemas.microsoft.com/office/drawing/2014/main" id="{C14AF521-052E-A1FA-D63D-CB0826C48D28}"/>
+                <a16:creationId xmlns:a16="http://schemas.microsoft.com/office/drawing/2014/main" id="{4C2CE5BF-292D-5F87-CBF6-C4E1DF0F9226}"/>
               </a:ext>
             </a:extLst>
           </p:cNvPr>
@@ -20073,7 +20268,7 @@
           <p:cNvPr id="84" name="Marcador de número de diapositiva 83">
             <a:extLst>
               <a:ext uri="{FF2B5EF4-FFF2-40B4-BE49-F238E27FC236}">
-                <a16:creationId xmlns:a16="http://schemas.microsoft.com/office/drawing/2014/main" id="{6C87B233-8A68-967F-55BC-3A828B5F39BA}"/>
+                <a16:creationId xmlns:a16="http://schemas.microsoft.com/office/drawing/2014/main" id="{C3A463DB-6857-1D5A-184E-D821DDAD435F}"/>
               </a:ext>
             </a:extLst>
           </p:cNvPr>
@@ -20102,7 +20297,7 @@
           <p:cNvPr id="3" name="Marcador de pie de página 2">
             <a:extLst>
               <a:ext uri="{FF2B5EF4-FFF2-40B4-BE49-F238E27FC236}">
-                <a16:creationId xmlns:a16="http://schemas.microsoft.com/office/drawing/2014/main" id="{DB1B524E-0E15-1C98-31B0-C98BD07BFBE8}"/>
+                <a16:creationId xmlns:a16="http://schemas.microsoft.com/office/drawing/2014/main" id="{620551E9-49A3-B7D5-09A1-3033375961A0}"/>
               </a:ext>
             </a:extLst>
           </p:cNvPr>
@@ -20131,93 +20326,979 @@
           </a:p>
         </p:txBody>
       </p:sp>
+      <mc:AlternateContent xmlns:mc="http://schemas.openxmlformats.org/markup-compatibility/2006">
+        <mc:Choice xmlns:a14="http://schemas.microsoft.com/office/drawing/2010/main" Requires="a14">
+          <p:sp>
+            <p:nvSpPr>
+              <p:cNvPr id="2" name="CuadroTexto 1">
+                <a:extLst>
+                  <a:ext uri="{FF2B5EF4-FFF2-40B4-BE49-F238E27FC236}">
+                    <a16:creationId xmlns:a16="http://schemas.microsoft.com/office/drawing/2014/main" id="{EF19EADB-54F2-D747-B597-94834008F2F7}"/>
+                  </a:ext>
+                </a:extLst>
+              </p:cNvPr>
+              <p:cNvSpPr txBox="1"/>
+              <p:nvPr/>
+            </p:nvSpPr>
+            <p:spPr>
+              <a:xfrm>
+                <a:off x="496014" y="1447800"/>
+                <a:ext cx="11199971" cy="3416320"/>
+              </a:xfrm>
+              <a:prstGeom prst="rect">
+                <a:avLst/>
+              </a:prstGeom>
+              <a:solidFill>
+                <a:schemeClr val="bg1">
+                  <a:lumMod val="95000"/>
+                </a:schemeClr>
+              </a:solidFill>
+              <a:ln w="28575">
+                <a:solidFill>
+                  <a:srgbClr val="E0700D"/>
+                </a:solidFill>
+              </a:ln>
+            </p:spPr>
+            <p:txBody>
+              <a:bodyPr wrap="square" rtlCol="0">
+                <a:spAutoFit/>
+              </a:bodyPr>
+              <a:lstStyle/>
+              <a:p>
+                <a:pPr algn="just"/>
+                <a:r>
+                  <a:rPr lang="en-US" sz="1200" b="1" i="1" dirty="0">
+                    <a:latin typeface="Arial" panose="020B0604020202020204" pitchFamily="34" charset="0"/>
+                    <a:cs typeface="Arial" panose="020B0604020202020204" pitchFamily="34" charset="0"/>
+                  </a:rPr>
+                  <a:t>Comment results (Important. Compare with Directional Coupler)</a:t>
+                </a:r>
+              </a:p>
+              <a:p>
+                <a:pPr algn="just"/>
+                <a:endParaRPr lang="en-US" sz="1200" dirty="0">
+                  <a:latin typeface="Arial" panose="020B0604020202020204" pitchFamily="34" charset="0"/>
+                  <a:cs typeface="Arial" panose="020B0604020202020204" pitchFamily="34" charset="0"/>
+                </a:endParaRPr>
+              </a:p>
+              <a:p>
+                <a:pPr algn="just"/>
+                <a:r>
+                  <a:rPr lang="es-ES" sz="1000" dirty="0">
+                    <a:latin typeface="Arial" panose="020B0604020202020204" pitchFamily="34" charset="0"/>
+                    <a:cs typeface="Arial" panose="020B0604020202020204" pitchFamily="34" charset="0"/>
+                  </a:rPr>
+                  <a:t>En este ejercicio, se ha diseñado un acoplador MMI y se ha realizado un barrido de la longitud de onda y posteriormente, se ha simulado la longitud de acoplo </a:t>
+                </a:r>
+                <a14:m>
+                  <m:oMath xmlns:m="http://schemas.openxmlformats.org/officeDocument/2006/math">
+                    <m:sSub>
+                      <m:sSubPr>
+                        <m:ctrlPr>
+                          <a:rPr lang="ar-AE" sz="1000"/>
+                        </m:ctrlPr>
+                      </m:sSubPr>
+                      <m:e>
+                        <m:r>
+                          <m:rPr>
+                            <m:sty m:val="p"/>
+                          </m:rPr>
+                          <a:rPr lang="ar-AE" sz="1000" b="0" i="0"/>
+                          <m:t>L</m:t>
+                        </m:r>
+                      </m:e>
+                      <m:sub>
+                        <m:r>
+                          <m:rPr>
+                            <m:sty m:val="p"/>
+                          </m:rPr>
+                          <a:rPr lang="ar-AE" sz="1000" b="0" i="0"/>
+                          <m:t>π</m:t>
+                        </m:r>
+                      </m:sub>
+                    </m:sSub>
+                  </m:oMath>
+                </a14:m>
+                <a:r>
+                  <a:rPr lang="es-ES" sz="1000" dirty="0">
+                    <a:latin typeface="Arial" panose="020B0604020202020204" pitchFamily="34" charset="0"/>
+                    <a:cs typeface="Arial" panose="020B0604020202020204" pitchFamily="34" charset="0"/>
+                  </a:rPr>
+                  <a:t> en función de dicha longitud de onda.</a:t>
+                </a:r>
+              </a:p>
+              <a:p>
+                <a:pPr algn="just"/>
+                <a:endParaRPr lang="es-ES" sz="1000" dirty="0">
+                  <a:latin typeface="Arial" panose="020B0604020202020204" pitchFamily="34" charset="0"/>
+                  <a:cs typeface="Arial" panose="020B0604020202020204" pitchFamily="34" charset="0"/>
+                </a:endParaRPr>
+              </a:p>
+              <a:p>
+                <a:pPr algn="just"/>
+                <a:r>
+                  <a:rPr lang="es-ES" sz="1000" dirty="0">
+                    <a:latin typeface="Arial" panose="020B0604020202020204" pitchFamily="34" charset="0"/>
+                    <a:cs typeface="Arial" panose="020B0604020202020204" pitchFamily="34" charset="0"/>
+                  </a:rPr>
+                  <a:t>Se observa que, al aumentar la longitud de onda, </a:t>
+                </a:r>
+                <a14:m>
+                  <m:oMath xmlns:m="http://schemas.openxmlformats.org/officeDocument/2006/math">
+                    <m:sSub>
+                      <m:sSubPr>
+                        <m:ctrlPr>
+                          <a:rPr lang="ar-AE" sz="1000"/>
+                        </m:ctrlPr>
+                      </m:sSubPr>
+                      <m:e>
+                        <m:r>
+                          <m:rPr>
+                            <m:sty m:val="p"/>
+                          </m:rPr>
+                          <a:rPr lang="ar-AE" sz="1000" b="0" i="0"/>
+                          <m:t>L</m:t>
+                        </m:r>
+                      </m:e>
+                      <m:sub>
+                        <m:r>
+                          <m:rPr>
+                            <m:sty m:val="p"/>
+                          </m:rPr>
+                          <a:rPr lang="ar-AE" sz="1000" b="0" i="0"/>
+                          <m:t>π</m:t>
+                        </m:r>
+                      </m:sub>
+                    </m:sSub>
+                  </m:oMath>
+                </a14:m>
+                <a:r>
+                  <a:rPr lang="es-ES" sz="1000" dirty="0">
+                    <a:latin typeface="Arial" panose="020B0604020202020204" pitchFamily="34" charset="0"/>
+                    <a:cs typeface="Arial" panose="020B0604020202020204" pitchFamily="34" charset="0"/>
+                  </a:rPr>
+                  <a:t> disminuye. Esto es similar a lo que ocurría en el acoplador direccional y se debe a que, al aumentar la longitud de onda, el campo se extiende más fuera del núcleo, aumentando la interacción entre los modos dentro de la región multimodo. Como consecuencia, el acoplo entre modos es mayor.</a:t>
+                </a:r>
+              </a:p>
+              <a:p>
+                <a:pPr algn="just"/>
+                <a:r>
+                  <a:rPr lang="es-ES" sz="1000" dirty="0">
+                    <a:latin typeface="Arial" panose="020B0604020202020204" pitchFamily="34" charset="0"/>
+                    <a:cs typeface="Arial" panose="020B0604020202020204" pitchFamily="34" charset="0"/>
+                  </a:rPr>
+                  <a:t>Además, la diferencia entre los índices efectivos de los modos aumenta, por lo que según la expresión de </a:t>
+                </a:r>
+                <a14:m>
+                  <m:oMath xmlns:m="http://schemas.openxmlformats.org/officeDocument/2006/math">
+                    <m:sSub>
+                      <m:sSubPr>
+                        <m:ctrlPr>
+                          <a:rPr lang="ar-AE" sz="1000"/>
+                        </m:ctrlPr>
+                      </m:sSubPr>
+                      <m:e>
+                        <m:r>
+                          <m:rPr>
+                            <m:sty m:val="p"/>
+                          </m:rPr>
+                          <a:rPr lang="ar-AE" sz="1000" b="0" i="0"/>
+                          <m:t>L</m:t>
+                        </m:r>
+                      </m:e>
+                      <m:sub>
+                        <m:r>
+                          <m:rPr>
+                            <m:sty m:val="p"/>
+                          </m:rPr>
+                          <a:rPr lang="ar-AE" sz="1000" b="0" i="0"/>
+                          <m:t>π</m:t>
+                        </m:r>
+                      </m:sub>
+                    </m:sSub>
+                  </m:oMath>
+                </a14:m>
+                <a:r>
+                  <a:rPr lang="ar-AE" sz="1000" dirty="0">
+                    <a:latin typeface="Arial" panose="020B0604020202020204" pitchFamily="34" charset="0"/>
+                    <a:cs typeface="Arial" panose="020B0604020202020204" pitchFamily="34" charset="0"/>
+                  </a:rPr>
+                  <a:t>, </a:t>
+                </a:r>
+                <a:r>
+                  <a:rPr lang="es-ES" sz="1000" dirty="0">
+                    <a:latin typeface="Arial" panose="020B0604020202020204" pitchFamily="34" charset="0"/>
+                    <a:cs typeface="Arial" panose="020B0604020202020204" pitchFamily="34" charset="0"/>
+                  </a:rPr>
+                  <a:t> se necesita menos longitud para que la señal pase de una guía a otra. Por tanto, el acoplo se produce más rápido y </a:t>
+                </a:r>
+                <a14:m>
+                  <m:oMath xmlns:m="http://schemas.openxmlformats.org/officeDocument/2006/math">
+                    <m:sSub>
+                      <m:sSubPr>
+                        <m:ctrlPr>
+                          <a:rPr lang="ar-AE" sz="1000"/>
+                        </m:ctrlPr>
+                      </m:sSubPr>
+                      <m:e>
+                        <m:r>
+                          <m:rPr>
+                            <m:sty m:val="p"/>
+                          </m:rPr>
+                          <a:rPr lang="ar-AE" sz="1000" b="0" i="0"/>
+                          <m:t>L</m:t>
+                        </m:r>
+                      </m:e>
+                      <m:sub>
+                        <m:r>
+                          <m:rPr>
+                            <m:sty m:val="p"/>
+                          </m:rPr>
+                          <a:rPr lang="ar-AE" sz="1000" b="0" i="0"/>
+                          <m:t>π</m:t>
+                        </m:r>
+                        <m:r>
+                          <a:rPr lang="es-ES" sz="1000" b="0" i="0" smtClean="0">
+                            <a:latin typeface="Cambria Math" panose="02040503050406030204" pitchFamily="18" charset="0"/>
+                          </a:rPr>
+                          <m:t> </m:t>
+                        </m:r>
+                      </m:sub>
+                    </m:sSub>
+                  </m:oMath>
+                </a14:m>
+                <a:r>
+                  <a:rPr lang="es-ES" sz="1000" dirty="0">
+                    <a:latin typeface="Arial" panose="020B0604020202020204" pitchFamily="34" charset="0"/>
+                    <a:cs typeface="Arial" panose="020B0604020202020204" pitchFamily="34" charset="0"/>
+                  </a:rPr>
+                  <a:t>disminuye.</a:t>
+                </a:r>
+              </a:p>
+              <a:p>
+                <a:pPr algn="just"/>
+                <a:endParaRPr lang="es-ES" sz="1000" dirty="0">
+                  <a:latin typeface="Arial" panose="020B0604020202020204" pitchFamily="34" charset="0"/>
+                  <a:cs typeface="Arial" panose="020B0604020202020204" pitchFamily="34" charset="0"/>
+                </a:endParaRPr>
+              </a:p>
+              <a:p>
+                <a:pPr algn="just"/>
+                <a:r>
+                  <a:rPr lang="es-ES" sz="1000" dirty="0">
+                    <a:latin typeface="Arial" panose="020B0604020202020204" pitchFamily="34" charset="0"/>
+                    <a:cs typeface="Arial" panose="020B0604020202020204" pitchFamily="34" charset="0"/>
+                  </a:rPr>
+                  <a:t>A diferencia del acoplador direccional, en el MMI intervienen varios modos, por lo que la respuesta es algo más irregular y aparecen pequeñas variaciones en la gráfica.</a:t>
+                </a:r>
+              </a:p>
+              <a:p>
+                <a:pPr algn="just"/>
+                <a:r>
+                  <a:rPr lang="es-ES" sz="1000" dirty="0">
+                    <a:latin typeface="Arial" panose="020B0604020202020204" pitchFamily="34" charset="0"/>
+                    <a:cs typeface="Arial" panose="020B0604020202020204" pitchFamily="34" charset="0"/>
+                  </a:rPr>
+                  <a:t>En resumen, comparando los casos </a:t>
+                </a:r>
+                <a:r>
+                  <a:rPr lang="es-ES" sz="1000" dirty="0" err="1">
+                    <a:latin typeface="Arial" panose="020B0604020202020204" pitchFamily="34" charset="0"/>
+                    <a:cs typeface="Arial" panose="020B0604020202020204" pitchFamily="34" charset="0"/>
+                  </a:rPr>
+                  <a:t>deep</a:t>
+                </a:r>
+                <a:r>
+                  <a:rPr lang="es-ES" sz="1000" dirty="0">
+                    <a:latin typeface="Arial" panose="020B0604020202020204" pitchFamily="34" charset="0"/>
+                    <a:cs typeface="Arial" panose="020B0604020202020204" pitchFamily="34" charset="0"/>
+                  </a:rPr>
+                  <a:t> y </a:t>
+                </a:r>
+                <a:r>
+                  <a:rPr lang="es-ES" sz="1000" dirty="0" err="1">
+                    <a:latin typeface="Arial" panose="020B0604020202020204" pitchFamily="34" charset="0"/>
+                    <a:cs typeface="Arial" panose="020B0604020202020204" pitchFamily="34" charset="0"/>
+                  </a:rPr>
+                  <a:t>shallow</a:t>
+                </a:r>
+                <a:r>
+                  <a:rPr lang="es-ES" sz="1000" dirty="0">
+                    <a:latin typeface="Arial" panose="020B0604020202020204" pitchFamily="34" charset="0"/>
+                    <a:cs typeface="Arial" panose="020B0604020202020204" pitchFamily="34" charset="0"/>
+                  </a:rPr>
+                  <a:t>, se observa que el acoplo es mayor en el caso </a:t>
+                </a:r>
+                <a:r>
+                  <a:rPr lang="es-ES" sz="1000" dirty="0" err="1">
+                    <a:latin typeface="Arial" panose="020B0604020202020204" pitchFamily="34" charset="0"/>
+                    <a:cs typeface="Arial" panose="020B0604020202020204" pitchFamily="34" charset="0"/>
+                  </a:rPr>
+                  <a:t>shallow</a:t>
+                </a:r>
+                <a:r>
+                  <a:rPr lang="es-ES" sz="1000" dirty="0">
+                    <a:latin typeface="Arial" panose="020B0604020202020204" pitchFamily="34" charset="0"/>
+                    <a:cs typeface="Arial" panose="020B0604020202020204" pitchFamily="34" charset="0"/>
+                  </a:rPr>
+                  <a:t>, ya que tiene valores ligeramente más bajos de </a:t>
+                </a:r>
+                <a14:m>
+                  <m:oMath xmlns:m="http://schemas.openxmlformats.org/officeDocument/2006/math">
+                    <m:sSub>
+                      <m:sSubPr>
+                        <m:ctrlPr>
+                          <a:rPr lang="ar-AE" sz="1000"/>
+                        </m:ctrlPr>
+                      </m:sSubPr>
+                      <m:e>
+                        <m:r>
+                          <m:rPr>
+                            <m:sty m:val="p"/>
+                          </m:rPr>
+                          <a:rPr lang="ar-AE" sz="1000" b="0" i="0"/>
+                          <m:t>L</m:t>
+                        </m:r>
+                      </m:e>
+                      <m:sub>
+                        <m:r>
+                          <m:rPr>
+                            <m:sty m:val="p"/>
+                          </m:rPr>
+                          <a:rPr lang="ar-AE" sz="1000" b="0" i="0"/>
+                          <m:t>π</m:t>
+                        </m:r>
+                      </m:sub>
+                    </m:sSub>
+                  </m:oMath>
+                </a14:m>
+                <a:r>
+                  <a:rPr lang="es-ES" sz="1000" dirty="0">
+                    <a:latin typeface="Arial" panose="020B0604020202020204" pitchFamily="34" charset="0"/>
+                    <a:cs typeface="Arial" panose="020B0604020202020204" pitchFamily="34" charset="0"/>
+                  </a:rPr>
+                  <a:t> debido a que el campo está menos confinado y se extiende más, aumentando la interacción entre modos. Además, esta varía de forma más suave con la longitud de onda, por lo que es más estable frente a cambios en este parámetro.</a:t>
+                </a:r>
+              </a:p>
+              <a:p>
+                <a:pPr algn="just"/>
+                <a:endParaRPr lang="es-ES" sz="1000" dirty="0">
+                  <a:latin typeface="Arial" panose="020B0604020202020204" pitchFamily="34" charset="0"/>
+                  <a:cs typeface="Arial" panose="020B0604020202020204" pitchFamily="34" charset="0"/>
+                </a:endParaRPr>
+              </a:p>
+              <a:p>
+                <a:pPr algn="just"/>
+                <a:r>
+                  <a:rPr lang="es-ES" sz="1000" dirty="0">
+                    <a:latin typeface="Arial" panose="020B0604020202020204" pitchFamily="34" charset="0"/>
+                    <a:cs typeface="Arial" panose="020B0604020202020204" pitchFamily="34" charset="0"/>
+                  </a:rPr>
+                  <a:t>Por último, en el caso </a:t>
+                </a:r>
+                <a:r>
+                  <a:rPr lang="es-ES" sz="1000" dirty="0" err="1">
+                    <a:latin typeface="Arial" panose="020B0604020202020204" pitchFamily="34" charset="0"/>
+                    <a:cs typeface="Arial" panose="020B0604020202020204" pitchFamily="34" charset="0"/>
+                  </a:rPr>
+                  <a:t>deep</a:t>
+                </a:r>
+                <a:r>
+                  <a:rPr lang="es-ES" sz="1000" dirty="0">
+                    <a:latin typeface="Arial" panose="020B0604020202020204" pitchFamily="34" charset="0"/>
+                    <a:cs typeface="Arial" panose="020B0604020202020204" pitchFamily="34" charset="0"/>
+                  </a:rPr>
+                  <a:t> el campo está más confinado, el acoplo es menor y los valores de </a:t>
+                </a:r>
+                <a14:m>
+                  <m:oMath xmlns:m="http://schemas.openxmlformats.org/officeDocument/2006/math">
+                    <m:sSub>
+                      <m:sSubPr>
+                        <m:ctrlPr>
+                          <a:rPr lang="ar-AE" sz="1000"/>
+                        </m:ctrlPr>
+                      </m:sSubPr>
+                      <m:e>
+                        <m:r>
+                          <m:rPr>
+                            <m:sty m:val="p"/>
+                          </m:rPr>
+                          <a:rPr lang="ar-AE" sz="1000" b="0" i="0"/>
+                          <m:t>L</m:t>
+                        </m:r>
+                      </m:e>
+                      <m:sub>
+                        <m:r>
+                          <m:rPr>
+                            <m:sty m:val="p"/>
+                          </m:rPr>
+                          <a:rPr lang="ar-AE" sz="1000" b="0" i="0"/>
+                          <m:t>π</m:t>
+                        </m:r>
+                      </m:sub>
+                    </m:sSub>
+                  </m:oMath>
+                </a14:m>
+                <a:r>
+                  <a:rPr lang="es-ES" sz="1000" dirty="0">
+                    <a:latin typeface="Arial" panose="020B0604020202020204" pitchFamily="34" charset="0"/>
+                    <a:cs typeface="Arial" panose="020B0604020202020204" pitchFamily="34" charset="0"/>
+                  </a:rPr>
+                  <a:t> son más altos. </a:t>
+                </a:r>
+              </a:p>
+              <a:p>
+                <a:pPr algn="just"/>
+                <a:endParaRPr lang="es-ES" sz="1000" dirty="0">
+                  <a:latin typeface="Arial" panose="020B0604020202020204" pitchFamily="34" charset="0"/>
+                  <a:cs typeface="Arial" panose="020B0604020202020204" pitchFamily="34" charset="0"/>
+                </a:endParaRPr>
+              </a:p>
+              <a:p>
+                <a:pPr algn="just"/>
+                <a:r>
+                  <a:rPr lang="es-ES" sz="1000" dirty="0">
+                    <a:latin typeface="Arial" panose="020B0604020202020204" pitchFamily="34" charset="0"/>
+                    <a:cs typeface="Arial" panose="020B0604020202020204" pitchFamily="34" charset="0"/>
+                  </a:rPr>
+                  <a:t>Como análisis final, podemos decir que tras haber simulado tanto las guías </a:t>
+                </a:r>
+                <a:r>
+                  <a:rPr lang="es-ES" sz="1000" dirty="0" err="1">
+                    <a:latin typeface="Arial" panose="020B0604020202020204" pitchFamily="34" charset="0"/>
+                    <a:cs typeface="Arial" panose="020B0604020202020204" pitchFamily="34" charset="0"/>
+                  </a:rPr>
+                  <a:t>deep</a:t>
+                </a:r>
+                <a:r>
+                  <a:rPr lang="es-ES" sz="1000" dirty="0">
+                    <a:latin typeface="Arial" panose="020B0604020202020204" pitchFamily="34" charset="0"/>
+                    <a:cs typeface="Arial" panose="020B0604020202020204" pitchFamily="34" charset="0"/>
+                  </a:rPr>
+                  <a:t> como </a:t>
+                </a:r>
+                <a:r>
+                  <a:rPr lang="es-ES" sz="1000" dirty="0" err="1">
+                    <a:latin typeface="Arial" panose="020B0604020202020204" pitchFamily="34" charset="0"/>
+                    <a:cs typeface="Arial" panose="020B0604020202020204" pitchFamily="34" charset="0"/>
+                  </a:rPr>
+                  <a:t>shallow</a:t>
+                </a:r>
+                <a:r>
+                  <a:rPr lang="es-ES" sz="1000" dirty="0">
+                    <a:latin typeface="Arial" panose="020B0604020202020204" pitchFamily="34" charset="0"/>
+                    <a:cs typeface="Arial" panose="020B0604020202020204" pitchFamily="34" charset="0"/>
+                  </a:rPr>
+                  <a:t> para los dos tipos de acopladores, el mejor es el acoplador MMI </a:t>
+                </a:r>
+                <a:r>
+                  <a:rPr lang="es-ES" sz="1000" dirty="0" err="1">
+                    <a:latin typeface="Arial" panose="020B0604020202020204" pitchFamily="34" charset="0"/>
+                    <a:cs typeface="Arial" panose="020B0604020202020204" pitchFamily="34" charset="0"/>
+                  </a:rPr>
+                  <a:t>shallow</a:t>
+                </a:r>
+                <a:r>
+                  <a:rPr lang="es-ES" sz="1000" dirty="0">
+                    <a:latin typeface="Arial" panose="020B0604020202020204" pitchFamily="34" charset="0"/>
+                    <a:cs typeface="Arial" panose="020B0604020202020204" pitchFamily="34" charset="0"/>
+                  </a:rPr>
+                  <a:t>, ya que es el que presenta la menor variación de </a:t>
+                </a:r>
+                <a14:m>
+                  <m:oMath xmlns:m="http://schemas.openxmlformats.org/officeDocument/2006/math">
+                    <m:sSub>
+                      <m:sSubPr>
+                        <m:ctrlPr>
+                          <a:rPr lang="ar-AE" sz="1000" i="1">
+                            <a:latin typeface="Cambria Math" panose="02040503050406030204" pitchFamily="18" charset="0"/>
+                          </a:rPr>
+                        </m:ctrlPr>
+                      </m:sSubPr>
+                      <m:e>
+                        <m:r>
+                          <m:rPr>
+                            <m:sty m:val="p"/>
+                          </m:rPr>
+                          <a:rPr lang="ar-AE" sz="1000">
+                            <a:latin typeface="Cambria Math" panose="02040503050406030204" pitchFamily="18" charset="0"/>
+                          </a:rPr>
+                          <m:t>L</m:t>
+                        </m:r>
+                      </m:e>
+                      <m:sub>
+                        <m:r>
+                          <m:rPr>
+                            <m:sty m:val="p"/>
+                          </m:rPr>
+                          <a:rPr lang="ar-AE" sz="1000">
+                            <a:latin typeface="Cambria Math" panose="02040503050406030204" pitchFamily="18" charset="0"/>
+                          </a:rPr>
+                          <m:t>π</m:t>
+                        </m:r>
+                      </m:sub>
+                    </m:sSub>
+                  </m:oMath>
+                </a14:m>
+                <a:r>
+                  <a:rPr lang="es-ES" sz="1000" dirty="0">
+                    <a:latin typeface="Arial" panose="020B0604020202020204" pitchFamily="34" charset="0"/>
+                    <a:cs typeface="Arial" panose="020B0604020202020204" pitchFamily="34" charset="0"/>
+                  </a:rPr>
+                  <a:t> en función de la longitud de onda, a pesar de que dicha mejora no sea muy notable, con respecto al resto de acopladores.  El único peor es el acoplador direccional </a:t>
+                </a:r>
+                <a:r>
+                  <a:rPr lang="es-ES" sz="1000" dirty="0" err="1">
+                    <a:latin typeface="Arial" panose="020B0604020202020204" pitchFamily="34" charset="0"/>
+                    <a:cs typeface="Arial" panose="020B0604020202020204" pitchFamily="34" charset="0"/>
+                  </a:rPr>
+                  <a:t>deep</a:t>
+                </a:r>
+                <a:r>
+                  <a:rPr lang="es-ES" sz="1000" dirty="0">
+                    <a:latin typeface="Arial" panose="020B0604020202020204" pitchFamily="34" charset="0"/>
+                    <a:cs typeface="Arial" panose="020B0604020202020204" pitchFamily="34" charset="0"/>
+                  </a:rPr>
+                  <a:t>, ya que presenta el cuádruple de variación de </a:t>
+                </a:r>
+                <a14:m>
+                  <m:oMath xmlns:m="http://schemas.openxmlformats.org/officeDocument/2006/math">
+                    <m:sSub>
+                      <m:sSubPr>
+                        <m:ctrlPr>
+                          <a:rPr lang="ar-AE" sz="1000" i="1">
+                            <a:latin typeface="Cambria Math" panose="02040503050406030204" pitchFamily="18" charset="0"/>
+                          </a:rPr>
+                        </m:ctrlPr>
+                      </m:sSubPr>
+                      <m:e>
+                        <m:r>
+                          <m:rPr>
+                            <m:sty m:val="p"/>
+                          </m:rPr>
+                          <a:rPr lang="ar-AE" sz="1000">
+                            <a:latin typeface="Cambria Math" panose="02040503050406030204" pitchFamily="18" charset="0"/>
+                          </a:rPr>
+                          <m:t>L</m:t>
+                        </m:r>
+                      </m:e>
+                      <m:sub>
+                        <m:r>
+                          <m:rPr>
+                            <m:sty m:val="p"/>
+                          </m:rPr>
+                          <a:rPr lang="ar-AE" sz="1000">
+                            <a:latin typeface="Cambria Math" panose="02040503050406030204" pitchFamily="18" charset="0"/>
+                          </a:rPr>
+                          <m:t>π</m:t>
+                        </m:r>
+                      </m:sub>
+                    </m:sSub>
+                  </m:oMath>
+                </a14:m>
+                <a:r>
+                  <a:rPr lang="es-ES" sz="1000" dirty="0">
+                    <a:latin typeface="Arial" panose="020B0604020202020204" pitchFamily="34" charset="0"/>
+                    <a:cs typeface="Arial" panose="020B0604020202020204" pitchFamily="34" charset="0"/>
+                  </a:rPr>
+                  <a:t> que el resto.</a:t>
+                </a:r>
+              </a:p>
+              <a:p>
+                <a:pPr algn="just"/>
+                <a:endParaRPr lang="en-US" sz="1200" dirty="0">
+                  <a:latin typeface="Arial" panose="020B0604020202020204" pitchFamily="34" charset="0"/>
+                  <a:cs typeface="Arial" panose="020B0604020202020204" pitchFamily="34" charset="0"/>
+                </a:endParaRPr>
+              </a:p>
+            </p:txBody>
+          </p:sp>
+        </mc:Choice>
+        <mc:Fallback>
+          <p:sp>
+            <p:nvSpPr>
+              <p:cNvPr id="2" name="CuadroTexto 1">
+                <a:extLst>
+                  <a:ext uri="{FF2B5EF4-FFF2-40B4-BE49-F238E27FC236}">
+                    <a16:creationId xmlns:a16="http://schemas.microsoft.com/office/drawing/2014/main" id="{EF19EADB-54F2-D747-B597-94834008F2F7}"/>
+                  </a:ext>
+                </a:extLst>
+              </p:cNvPr>
+              <p:cNvSpPr txBox="1">
+                <a:spLocks noRot="1" noChangeAspect="1" noMove="1" noResize="1" noEditPoints="1" noAdjustHandles="1" noChangeArrowheads="1" noChangeShapeType="1" noTextEdit="1"/>
+              </p:cNvSpPr>
+              <p:nvPr/>
+            </p:nvSpPr>
+            <p:spPr>
+              <a:xfrm>
+                <a:off x="496014" y="1447800"/>
+                <a:ext cx="11199971" cy="3416320"/>
+              </a:xfrm>
+              <a:prstGeom prst="rect">
+                <a:avLst/>
+              </a:prstGeom>
+              <a:blipFill>
+                <a:blip r:embed="rId4"/>
+                <a:stretch>
+                  <a:fillRect/>
+                </a:stretch>
+              </a:blipFill>
+              <a:ln w="28575">
+                <a:solidFill>
+                  <a:srgbClr val="E0700D"/>
+                </a:solidFill>
+              </a:ln>
+            </p:spPr>
+            <p:txBody>
+              <a:bodyPr/>
+              <a:lstStyle/>
+              <a:p>
+                <a:r>
+                  <a:rPr lang="es-ES">
+                    <a:noFill/>
+                  </a:rPr>
+                  <a:t> </a:t>
+                </a:r>
+              </a:p>
+            </p:txBody>
+          </p:sp>
+        </mc:Fallback>
+      </mc:AlternateContent>
+    </p:spTree>
+    <p:extLst>
+      <p:ext uri="{BB962C8B-B14F-4D97-AF65-F5344CB8AC3E}">
+        <p14:creationId xmlns:p14="http://schemas.microsoft.com/office/powerpoint/2010/main" val="2303490395"/>
+      </p:ext>
+    </p:extLst>
+  </p:cSld>
+  <p:clrMapOvr>
+    <a:masterClrMapping/>
+  </p:clrMapOvr>
+</p:sld>
+</file>
+
+<file path=ppt/slides/slide3.xml><?xml version="1.0" encoding="utf-8"?>
+<p:sld xmlns:a="http://schemas.openxmlformats.org/drawingml/2006/main" xmlns:r="http://schemas.openxmlformats.org/officeDocument/2006/relationships" xmlns:p="http://schemas.openxmlformats.org/presentationml/2006/main">
+  <p:cSld>
+    <p:spTree>
+      <p:nvGrpSpPr>
+        <p:cNvPr id="1" name=""/>
+        <p:cNvGrpSpPr/>
+        <p:nvPr/>
+      </p:nvGrpSpPr>
+      <p:grpSpPr>
+        <a:xfrm>
+          <a:off x="0" y="0"/>
+          <a:ext cx="0" cy="0"/>
+          <a:chOff x="0" y="0"/>
+          <a:chExt cx="0" cy="0"/>
+        </a:xfrm>
+      </p:grpSpPr>
       <p:sp>
         <p:nvSpPr>
-          <p:cNvPr id="2" name="CuadroTexto 1">
+          <p:cNvPr id="4" name="Marcador de pie de página 3">
             <a:extLst>
               <a:ext uri="{FF2B5EF4-FFF2-40B4-BE49-F238E27FC236}">
-                <a16:creationId xmlns:a16="http://schemas.microsoft.com/office/drawing/2014/main" id="{8D88CB07-C5F5-9BB7-9F41-E171F0F0E2B9}"/>
+                <a16:creationId xmlns:a16="http://schemas.microsoft.com/office/drawing/2014/main" id="{1F74687F-7302-3F32-F9D1-0566D05F33AE}"/>
               </a:ext>
             </a:extLst>
           </p:cNvPr>
-          <p:cNvSpPr txBox="1"/>
-          <p:nvPr/>
+          <p:cNvSpPr>
+            <a:spLocks noGrp="1"/>
+          </p:cNvSpPr>
+          <p:nvPr>
+            <p:ph type="ftr" sz="quarter" idx="5"/>
+          </p:nvPr>
+        </p:nvSpPr>
+        <p:spPr/>
+        <p:txBody>
+          <a:bodyPr/>
+          <a:lstStyle/>
+          <a:p>
+            <a:pPr marL="12700">
+              <a:spcBef>
+                <a:spcPts val="15"/>
+              </a:spcBef>
+            </a:pPr>
+            <a:r>
+              <a:rPr lang="es-ES" spc="-5"/>
+              <a:t>LAB 2.0. COUPLERS</a:t>
+            </a:r>
+            <a:endParaRPr lang="es-ES" spc="-5" dirty="0"/>
+          </a:p>
+        </p:txBody>
+      </p:sp>
+      <p:sp>
+        <p:nvSpPr>
+          <p:cNvPr id="5" name="Marcador de número de diapositiva 4">
+            <a:extLst>
+              <a:ext uri="{FF2B5EF4-FFF2-40B4-BE49-F238E27FC236}">
+                <a16:creationId xmlns:a16="http://schemas.microsoft.com/office/drawing/2014/main" id="{78335A49-ACE2-C055-50CA-8DD755D2E76D}"/>
+              </a:ext>
+            </a:extLst>
+          </p:cNvPr>
+          <p:cNvSpPr>
+            <a:spLocks noGrp="1"/>
+          </p:cNvSpPr>
+          <p:nvPr>
+            <p:ph type="sldNum" sz="quarter" idx="7"/>
+          </p:nvPr>
+        </p:nvSpPr>
+        <p:spPr/>
+        <p:txBody>
+          <a:bodyPr/>
+          <a:lstStyle/>
+          <a:p>
+            <a:fld id="{B6F15528-21DE-4FAA-801E-634DDDAF4B2B}" type="slidenum">
+              <a:rPr lang="es-ES" smtClean="0"/>
+              <a:t>3</a:t>
+            </a:fld>
+            <a:endParaRPr lang="es-ES"/>
+          </a:p>
+        </p:txBody>
+      </p:sp>
+      <p:sp>
+        <p:nvSpPr>
+          <p:cNvPr id="6" name="Título 4">
+            <a:extLst>
+              <a:ext uri="{FF2B5EF4-FFF2-40B4-BE49-F238E27FC236}">
+                <a16:creationId xmlns:a16="http://schemas.microsoft.com/office/drawing/2014/main" id="{AF6692CA-D0D0-2BAF-E673-933E02AE2BB8}"/>
+              </a:ext>
+            </a:extLst>
+          </p:cNvPr>
+          <p:cNvSpPr>
+            <a:spLocks noGrp="1"/>
+          </p:cNvSpPr>
+          <p:nvPr>
+            <p:ph type="body" idx="1"/>
+          </p:nvPr>
         </p:nvSpPr>
         <p:spPr>
           <a:xfrm>
-            <a:off x="609441" y="4860334"/>
-            <a:ext cx="11199971" cy="1384995"/>
+            <a:off x="609600" y="2152650"/>
+            <a:ext cx="10972800" cy="430887"/>
+          </a:xfrm>
+        </p:spPr>
+        <p:txBody>
+          <a:bodyPr/>
+          <a:lstStyle/>
+          <a:p>
+            <a:pPr algn="ctr"/>
+            <a:r>
+              <a:rPr lang="en-US" sz="2800" b="1" dirty="0">
+                <a:effectLst>
+                  <a:outerShdw blurRad="38100" dist="38100" dir="2700000" algn="tl">
+                    <a:srgbClr val="000000">
+                      <a:alpha val="43137"/>
+                    </a:srgbClr>
+                  </a:outerShdw>
+                </a:effectLst>
+              </a:rPr>
+              <a:t>Directional coupler</a:t>
+            </a:r>
+          </a:p>
+        </p:txBody>
+      </p:sp>
+    </p:spTree>
+    <p:extLst>
+      <p:ext uri="{BB962C8B-B14F-4D97-AF65-F5344CB8AC3E}">
+        <p14:creationId xmlns:p14="http://schemas.microsoft.com/office/powerpoint/2010/main" val="1640019522"/>
+      </p:ext>
+    </p:extLst>
+  </p:cSld>
+  <p:clrMapOvr>
+    <a:masterClrMapping/>
+  </p:clrMapOvr>
+</p:sld>
+</file>
+
+<file path=ppt/slides/slide30.xml><?xml version="1.0" encoding="utf-8"?>
+<p:sld xmlns:a="http://schemas.openxmlformats.org/drawingml/2006/main" xmlns:r="http://schemas.openxmlformats.org/officeDocument/2006/relationships" xmlns:p="http://schemas.openxmlformats.org/presentationml/2006/main">
+  <p:cSld>
+    <p:spTree>
+      <p:nvGrpSpPr>
+        <p:cNvPr id="1" name="">
+          <a:extLst>
+            <a:ext uri="{FF2B5EF4-FFF2-40B4-BE49-F238E27FC236}">
+              <a16:creationId xmlns:a16="http://schemas.microsoft.com/office/drawing/2014/main" id="{2D55C897-D580-E5C1-161C-F8E072695C0C}"/>
+            </a:ext>
+          </a:extLst>
+        </p:cNvPr>
+        <p:cNvGrpSpPr/>
+        <p:nvPr/>
+      </p:nvGrpSpPr>
+      <p:grpSpPr>
+        <a:xfrm>
+          <a:off x="0" y="0"/>
+          <a:ext cx="0" cy="0"/>
+          <a:chOff x="0" y="0"/>
+          <a:chExt cx="0" cy="0"/>
+        </a:xfrm>
+      </p:grpSpPr>
+      <p:sp>
+        <p:nvSpPr>
+          <p:cNvPr id="16" name="object 16">
+            <a:extLst>
+              <a:ext uri="{FF2B5EF4-FFF2-40B4-BE49-F238E27FC236}">
+                <a16:creationId xmlns:a16="http://schemas.microsoft.com/office/drawing/2014/main" id="{53FFBD12-4EFF-41C1-4765-2AD268B2BD94}"/>
+              </a:ext>
+            </a:extLst>
+          </p:cNvPr>
+          <p:cNvSpPr txBox="1">
+            <a:spLocks noGrp="1"/>
+          </p:cNvSpPr>
+          <p:nvPr>
+            <p:ph type="title"/>
+          </p:nvPr>
+        </p:nvSpPr>
+        <p:spPr>
+          <a:xfrm>
+            <a:off x="685800" y="408883"/>
+            <a:ext cx="10994410" cy="705321"/>
           </a:xfrm>
           <a:prstGeom prst="rect">
             <a:avLst/>
           </a:prstGeom>
-          <a:solidFill>
-            <a:schemeClr val="bg1">
-              <a:lumMod val="95000"/>
-            </a:schemeClr>
-          </a:solidFill>
-          <a:ln w="28575">
-            <a:solidFill>
-              <a:srgbClr val="E0700D"/>
-            </a:solidFill>
-          </a:ln>
         </p:spPr>
         <p:txBody>
-          <a:bodyPr wrap="square" rtlCol="0">
+          <a:bodyPr vert="horz" wrap="square" lIns="0" tIns="12700" rIns="0" bIns="0" rtlCol="0">
             <a:spAutoFit/>
           </a:bodyPr>
           <a:lstStyle/>
           <a:p>
-            <a:pPr algn="just"/>
-            <a:r>
-              <a:rPr lang="en-US" sz="1200" dirty="0">
-                <a:latin typeface="Arial" panose="020B0604020202020204" pitchFamily="34" charset="0"/>
-                <a:cs typeface="Arial" panose="020B0604020202020204" pitchFamily="34" charset="0"/>
-              </a:rPr>
-              <a:t>Polarization independent coupler: is there any point for which the MMI coupler can work identically for TE and TM? Answer yes / no and explain why?</a:t>
-            </a:r>
-          </a:p>
-          <a:p>
-            <a:pPr algn="just"/>
-            <a:endParaRPr lang="en-US" sz="1200" dirty="0">
-              <a:latin typeface="Arial" panose="020B0604020202020204" pitchFamily="34" charset="0"/>
-              <a:cs typeface="Arial" panose="020B0604020202020204" pitchFamily="34" charset="0"/>
+            <a:pPr marL="12700">
+              <a:lnSpc>
+                <a:spcPct val="100000"/>
+              </a:lnSpc>
+              <a:spcBef>
+                <a:spcPts val="100"/>
+              </a:spcBef>
+            </a:pPr>
+            <a:r>
+              <a:rPr lang="en-US" sz="2500" dirty="0"/>
+              <a:t>Extra #4 – MMI coupler body width dependence</a:t>
+            </a:r>
+            <a:br>
+              <a:rPr lang="en-US" sz="2500" spc="-5" dirty="0">
+                <a:latin typeface="+mj-lt"/>
+                <a:cs typeface="Lucida Sans"/>
+              </a:rPr>
+            </a:br>
+            <a:r>
+              <a:rPr lang="en-US" b="0" dirty="0"/>
+              <a:t>Wavelength 1.55 µm, </a:t>
+            </a:r>
+            <a:r>
+              <a:rPr lang="en-US" b="0" dirty="0" err="1"/>
+              <a:t>wMMI</a:t>
+            </a:r>
+            <a:r>
+              <a:rPr lang="en-US" b="0" dirty="0"/>
+              <a:t> = 5-10 µm (steps 0.5 µm)</a:t>
+            </a:r>
+            <a:endParaRPr lang="en-US" sz="2500" b="0" dirty="0">
+              <a:latin typeface="+mj-lt"/>
+              <a:cs typeface="Lucida Sans"/>
             </a:endParaRPr>
           </a:p>
+        </p:txBody>
+      </p:sp>
+      <p:pic>
+        <p:nvPicPr>
+          <p:cNvPr id="83" name="Gráfico 82">
+            <a:extLst>
+              <a:ext uri="{FF2B5EF4-FFF2-40B4-BE49-F238E27FC236}">
+                <a16:creationId xmlns:a16="http://schemas.microsoft.com/office/drawing/2014/main" id="{C14AF521-052E-A1FA-D63D-CB0826C48D28}"/>
+              </a:ext>
+            </a:extLst>
+          </p:cNvPr>
+          <p:cNvPicPr>
+            <a:picLocks noChangeAspect="1"/>
+          </p:cNvPicPr>
+          <p:nvPr/>
+        </p:nvPicPr>
+        <p:blipFill>
+          <a:blip>
+            <a:extLst>
+              <a:ext uri="{96DAC541-7B7A-43D3-8B79-37D633B846F1}">
+                <asvg:svgBlip xmlns:asvg="http://schemas.microsoft.com/office/drawing/2016/SVG/main" r:embed="rId3"/>
+              </a:ext>
+            </a:extLst>
+          </a:blip>
+          <a:stretch>
+            <a:fillRect/>
+          </a:stretch>
+        </p:blipFill>
+        <p:spPr>
+          <a:xfrm>
+            <a:off x="5045006" y="6356057"/>
+            <a:ext cx="6409575" cy="363174"/>
+          </a:xfrm>
+          <a:prstGeom prst="rect">
+            <a:avLst/>
+          </a:prstGeom>
+        </p:spPr>
+      </p:pic>
+      <p:sp>
+        <p:nvSpPr>
+          <p:cNvPr id="84" name="Marcador de número de diapositiva 83">
+            <a:extLst>
+              <a:ext uri="{FF2B5EF4-FFF2-40B4-BE49-F238E27FC236}">
+                <a16:creationId xmlns:a16="http://schemas.microsoft.com/office/drawing/2014/main" id="{6C87B233-8A68-967F-55BC-3A828B5F39BA}"/>
+              </a:ext>
+            </a:extLst>
+          </p:cNvPr>
+          <p:cNvSpPr>
+            <a:spLocks noGrp="1"/>
+          </p:cNvSpPr>
+          <p:nvPr>
+            <p:ph type="sldNum" sz="quarter" idx="7"/>
+          </p:nvPr>
+        </p:nvSpPr>
+        <p:spPr/>
+        <p:txBody>
+          <a:bodyPr/>
+          <a:lstStyle/>
           <a:p>
-            <a:pPr algn="just"/>
-            <a:endParaRPr lang="en-US" sz="1200" dirty="0">
-              <a:latin typeface="Arial" panose="020B0604020202020204" pitchFamily="34" charset="0"/>
-              <a:cs typeface="Arial" panose="020B0604020202020204" pitchFamily="34" charset="0"/>
-            </a:endParaRPr>
+            <a:fld id="{B6F15528-21DE-4FAA-801E-634DDDAF4B2B}" type="slidenum">
+              <a:rPr lang="es-ES" smtClean="0"/>
+              <a:t>30</a:t>
+            </a:fld>
+            <a:endParaRPr lang="es-ES"/>
           </a:p>
+        </p:txBody>
+      </p:sp>
+      <p:sp>
+        <p:nvSpPr>
+          <p:cNvPr id="3" name="Marcador de pie de página 2">
+            <a:extLst>
+              <a:ext uri="{FF2B5EF4-FFF2-40B4-BE49-F238E27FC236}">
+                <a16:creationId xmlns:a16="http://schemas.microsoft.com/office/drawing/2014/main" id="{DB1B524E-0E15-1C98-31B0-C98BD07BFBE8}"/>
+              </a:ext>
+            </a:extLst>
+          </p:cNvPr>
+          <p:cNvSpPr>
+            <a:spLocks noGrp="1"/>
+          </p:cNvSpPr>
+          <p:nvPr>
+            <p:ph type="ftr" sz="quarter" idx="5"/>
+          </p:nvPr>
+        </p:nvSpPr>
+        <p:spPr/>
+        <p:txBody>
+          <a:bodyPr/>
+          <a:lstStyle/>
           <a:p>
-            <a:pPr algn="just"/>
-            <a:endParaRPr lang="en-US" sz="1200" dirty="0">
-              <a:latin typeface="Arial" panose="020B0604020202020204" pitchFamily="34" charset="0"/>
-              <a:cs typeface="Arial" panose="020B0604020202020204" pitchFamily="34" charset="0"/>
-            </a:endParaRPr>
-          </a:p>
-          <a:p>
-            <a:pPr algn="just"/>
-            <a:endParaRPr lang="en-US" sz="1200" dirty="0">
-              <a:latin typeface="Arial" panose="020B0604020202020204" pitchFamily="34" charset="0"/>
-              <a:cs typeface="Arial" panose="020B0604020202020204" pitchFamily="34" charset="0"/>
-            </a:endParaRPr>
-          </a:p>
-          <a:p>
-            <a:pPr algn="just"/>
-            <a:endParaRPr lang="en-US" sz="1200" dirty="0">
-              <a:latin typeface="Arial" panose="020B0604020202020204" pitchFamily="34" charset="0"/>
-              <a:cs typeface="Arial" panose="020B0604020202020204" pitchFamily="34" charset="0"/>
-            </a:endParaRPr>
-          </a:p>
-          <a:p>
-            <a:pPr algn="just"/>
-            <a:endParaRPr lang="en-US" sz="1200" dirty="0">
-              <a:latin typeface="Arial" panose="020B0604020202020204" pitchFamily="34" charset="0"/>
-              <a:cs typeface="Arial" panose="020B0604020202020204" pitchFamily="34" charset="0"/>
-            </a:endParaRPr>
+            <a:pPr marL="12700">
+              <a:spcBef>
+                <a:spcPts val="15"/>
+              </a:spcBef>
+            </a:pPr>
+            <a:r>
+              <a:rPr lang="es-ES" spc="-5"/>
+              <a:t>LAB 2.0. COUPLERS</a:t>
+            </a:r>
+            <a:endParaRPr lang="es-ES" spc="-5" dirty="0"/>
           </a:p>
         </p:txBody>
       </p:sp>
@@ -20591,10 +21672,10 @@
       </mc:AlternateContent>
       <p:pic>
         <p:nvPicPr>
-          <p:cNvPr id="8" name="Imagen 7">
+          <p:cNvPr id="7" name="Imagen 6">
             <a:extLst>
               <a:ext uri="{FF2B5EF4-FFF2-40B4-BE49-F238E27FC236}">
-                <a16:creationId xmlns:a16="http://schemas.microsoft.com/office/drawing/2014/main" id="{B802B6FA-71DA-4593-A6D6-F093940F1C7D}"/>
+                <a16:creationId xmlns:a16="http://schemas.microsoft.com/office/drawing/2014/main" id="{58458D74-9CF2-5BC2-2F0C-1608E6E3420E}"/>
               </a:ext>
             </a:extLst>
           </p:cNvPr>
@@ -20611,8 +21692,8 @@
         </p:blipFill>
         <p:spPr>
           <a:xfrm>
-            <a:off x="914400" y="1614914"/>
-            <a:ext cx="5117123" cy="2971800"/>
+            <a:off x="842410" y="1599763"/>
+            <a:ext cx="5020620" cy="2986951"/>
           </a:xfrm>
           <a:prstGeom prst="rect">
             <a:avLst/>
@@ -20621,10 +21702,10 @@
       </p:pic>
       <p:pic>
         <p:nvPicPr>
-          <p:cNvPr id="12" name="Imagen 11">
+          <p:cNvPr id="13" name="Imagen 12">
             <a:extLst>
               <a:ext uri="{FF2B5EF4-FFF2-40B4-BE49-F238E27FC236}">
-                <a16:creationId xmlns:a16="http://schemas.microsoft.com/office/drawing/2014/main" id="{7DE0037C-FE91-C3C4-3F74-D707078E978A}"/>
+                <a16:creationId xmlns:a16="http://schemas.microsoft.com/office/drawing/2014/main" id="{0AA03AE9-167A-C735-4B98-BB5F130D4EC9}"/>
               </a:ext>
             </a:extLst>
           </p:cNvPr>
@@ -20641,8 +21722,8 @@
         </p:blipFill>
         <p:spPr>
           <a:xfrm>
-            <a:off x="6506141" y="1613012"/>
-            <a:ext cx="5117123" cy="2973702"/>
+            <a:off x="6455381" y="1649236"/>
+            <a:ext cx="5139210" cy="3043049"/>
           </a:xfrm>
           <a:prstGeom prst="rect">
             <a:avLst/>
@@ -20662,12 +21743,18 @@
 </p:sld>
 </file>
 
-<file path=ppt/slides/slide3.xml><?xml version="1.0" encoding="utf-8"?>
+<file path=ppt/slides/slide31.xml><?xml version="1.0" encoding="utf-8"?>
 <p:sld xmlns:a="http://schemas.openxmlformats.org/drawingml/2006/main" xmlns:r="http://schemas.openxmlformats.org/officeDocument/2006/relationships" xmlns:p="http://schemas.openxmlformats.org/presentationml/2006/main">
   <p:cSld>
     <p:spTree>
       <p:nvGrpSpPr>
-        <p:cNvPr id="1" name=""/>
+        <p:cNvPr id="1" name="">
+          <a:extLst>
+            <a:ext uri="{FF2B5EF4-FFF2-40B4-BE49-F238E27FC236}">
+              <a16:creationId xmlns:a16="http://schemas.microsoft.com/office/drawing/2014/main" id="{C8986706-1D7A-2E22-80A9-EC578358A976}"/>
+            </a:ext>
+          </a:extLst>
+        </p:cNvPr>
         <p:cNvGrpSpPr/>
         <p:nvPr/>
       </p:nvGrpSpPr>
@@ -20681,10 +21768,143 @@
       </p:grpSpPr>
       <p:sp>
         <p:nvSpPr>
-          <p:cNvPr id="4" name="Marcador de pie de página 3">
+          <p:cNvPr id="16" name="object 16">
             <a:extLst>
               <a:ext uri="{FF2B5EF4-FFF2-40B4-BE49-F238E27FC236}">
-                <a16:creationId xmlns:a16="http://schemas.microsoft.com/office/drawing/2014/main" id="{1F74687F-7302-3F32-F9D1-0566D05F33AE}"/>
+                <a16:creationId xmlns:a16="http://schemas.microsoft.com/office/drawing/2014/main" id="{D34685FC-B3CD-C675-7151-DA7AA93B3090}"/>
+              </a:ext>
+            </a:extLst>
+          </p:cNvPr>
+          <p:cNvSpPr txBox="1">
+            <a:spLocks noGrp="1"/>
+          </p:cNvSpPr>
+          <p:nvPr>
+            <p:ph type="title"/>
+          </p:nvPr>
+        </p:nvSpPr>
+        <p:spPr>
+          <a:xfrm>
+            <a:off x="685800" y="408883"/>
+            <a:ext cx="10994410" cy="705321"/>
+          </a:xfrm>
+          <a:prstGeom prst="rect">
+            <a:avLst/>
+          </a:prstGeom>
+        </p:spPr>
+        <p:txBody>
+          <a:bodyPr vert="horz" wrap="square" lIns="0" tIns="12700" rIns="0" bIns="0" rtlCol="0">
+            <a:spAutoFit/>
+          </a:bodyPr>
+          <a:lstStyle/>
+          <a:p>
+            <a:pPr marL="12700">
+              <a:lnSpc>
+                <a:spcPct val="100000"/>
+              </a:lnSpc>
+              <a:spcBef>
+                <a:spcPts val="100"/>
+              </a:spcBef>
+            </a:pPr>
+            <a:r>
+              <a:rPr lang="en-US" sz="2500" dirty="0"/>
+              <a:t>Extra #4 – MMI coupler body width dependence</a:t>
+            </a:r>
+            <a:br>
+              <a:rPr lang="en-US" sz="2500" spc="-5" dirty="0">
+                <a:latin typeface="+mj-lt"/>
+                <a:cs typeface="Lucida Sans"/>
+              </a:rPr>
+            </a:br>
+            <a:r>
+              <a:rPr lang="en-US" b="0" dirty="0"/>
+              <a:t>Wavelength 1.55 µm, </a:t>
+            </a:r>
+            <a:r>
+              <a:rPr lang="en-US" b="0" dirty="0" err="1"/>
+              <a:t>wMMI</a:t>
+            </a:r>
+            <a:r>
+              <a:rPr lang="en-US" b="0" dirty="0"/>
+              <a:t> = 5-10 µm (steps 0.5 µm)</a:t>
+            </a:r>
+            <a:endParaRPr lang="en-US" sz="2500" b="0" dirty="0">
+              <a:latin typeface="+mj-lt"/>
+              <a:cs typeface="Lucida Sans"/>
+            </a:endParaRPr>
+          </a:p>
+        </p:txBody>
+      </p:sp>
+      <p:pic>
+        <p:nvPicPr>
+          <p:cNvPr id="83" name="Gráfico 82">
+            <a:extLst>
+              <a:ext uri="{FF2B5EF4-FFF2-40B4-BE49-F238E27FC236}">
+                <a16:creationId xmlns:a16="http://schemas.microsoft.com/office/drawing/2014/main" id="{286C3E4B-3346-C85F-08F6-5901D18FE3F7}"/>
+              </a:ext>
+            </a:extLst>
+          </p:cNvPr>
+          <p:cNvPicPr>
+            <a:picLocks noChangeAspect="1"/>
+          </p:cNvPicPr>
+          <p:nvPr/>
+        </p:nvPicPr>
+        <p:blipFill>
+          <a:blip>
+            <a:extLst>
+              <a:ext uri="{96DAC541-7B7A-43D3-8B79-37D633B846F1}">
+                <asvg:svgBlip xmlns:asvg="http://schemas.microsoft.com/office/drawing/2016/SVG/main" r:embed="rId3"/>
+              </a:ext>
+            </a:extLst>
+          </a:blip>
+          <a:stretch>
+            <a:fillRect/>
+          </a:stretch>
+        </p:blipFill>
+        <p:spPr>
+          <a:xfrm>
+            <a:off x="5045006" y="6356057"/>
+            <a:ext cx="6409575" cy="363174"/>
+          </a:xfrm>
+          <a:prstGeom prst="rect">
+            <a:avLst/>
+          </a:prstGeom>
+        </p:spPr>
+      </p:pic>
+      <p:sp>
+        <p:nvSpPr>
+          <p:cNvPr id="84" name="Marcador de número de diapositiva 83">
+            <a:extLst>
+              <a:ext uri="{FF2B5EF4-FFF2-40B4-BE49-F238E27FC236}">
+                <a16:creationId xmlns:a16="http://schemas.microsoft.com/office/drawing/2014/main" id="{ADC7DE75-49A0-7526-39B8-7B13ABC3772B}"/>
+              </a:ext>
+            </a:extLst>
+          </p:cNvPr>
+          <p:cNvSpPr>
+            <a:spLocks noGrp="1"/>
+          </p:cNvSpPr>
+          <p:nvPr>
+            <p:ph type="sldNum" sz="quarter" idx="7"/>
+          </p:nvPr>
+        </p:nvSpPr>
+        <p:spPr/>
+        <p:txBody>
+          <a:bodyPr/>
+          <a:lstStyle/>
+          <a:p>
+            <a:fld id="{B6F15528-21DE-4FAA-801E-634DDDAF4B2B}" type="slidenum">
+              <a:rPr lang="es-ES" smtClean="0"/>
+              <a:t>31</a:t>
+            </a:fld>
+            <a:endParaRPr lang="es-ES"/>
+          </a:p>
+        </p:txBody>
+      </p:sp>
+      <p:sp>
+        <p:nvSpPr>
+          <p:cNvPr id="3" name="Marcador de pie de página 2">
+            <a:extLst>
+              <a:ext uri="{FF2B5EF4-FFF2-40B4-BE49-F238E27FC236}">
+                <a16:creationId xmlns:a16="http://schemas.microsoft.com/office/drawing/2014/main" id="{5CF184EC-608D-C71D-D377-804A9FE5E66F}"/>
               </a:ext>
             </a:extLst>
           </p:cNvPr>
@@ -20713,81 +21933,287 @@
           </a:p>
         </p:txBody>
       </p:sp>
-      <p:sp>
-        <p:nvSpPr>
-          <p:cNvPr id="5" name="Marcador de número de diapositiva 4">
-            <a:extLst>
-              <a:ext uri="{FF2B5EF4-FFF2-40B4-BE49-F238E27FC236}">
-                <a16:creationId xmlns:a16="http://schemas.microsoft.com/office/drawing/2014/main" id="{78335A49-ACE2-C055-50CA-8DD755D2E76D}"/>
-              </a:ext>
-            </a:extLst>
-          </p:cNvPr>
-          <p:cNvSpPr>
-            <a:spLocks noGrp="1"/>
-          </p:cNvSpPr>
-          <p:nvPr>
-            <p:ph type="sldNum" sz="quarter" idx="7"/>
-          </p:nvPr>
-        </p:nvSpPr>
-        <p:spPr/>
-        <p:txBody>
-          <a:bodyPr/>
-          <a:lstStyle/>
-          <a:p>
-            <a:fld id="{B6F15528-21DE-4FAA-801E-634DDDAF4B2B}" type="slidenum">
-              <a:rPr lang="es-ES" smtClean="0"/>
-              <a:t>3</a:t>
-            </a:fld>
-            <a:endParaRPr lang="es-ES"/>
-          </a:p>
-        </p:txBody>
-      </p:sp>
-      <p:sp>
-        <p:nvSpPr>
-          <p:cNvPr id="6" name="Título 4">
-            <a:extLst>
-              <a:ext uri="{FF2B5EF4-FFF2-40B4-BE49-F238E27FC236}">
-                <a16:creationId xmlns:a16="http://schemas.microsoft.com/office/drawing/2014/main" id="{AF6692CA-D0D0-2BAF-E673-933E02AE2BB8}"/>
-              </a:ext>
-            </a:extLst>
-          </p:cNvPr>
-          <p:cNvSpPr>
-            <a:spLocks noGrp="1"/>
-          </p:cNvSpPr>
-          <p:nvPr>
-            <p:ph type="body" idx="1"/>
-          </p:nvPr>
-        </p:nvSpPr>
-        <p:spPr>
-          <a:xfrm>
-            <a:off x="609600" y="2152650"/>
-            <a:ext cx="10972800" cy="430887"/>
-          </a:xfrm>
-        </p:spPr>
-        <p:txBody>
-          <a:bodyPr/>
-          <a:lstStyle/>
-          <a:p>
-            <a:pPr algn="ctr"/>
-            <a:r>
-              <a:rPr lang="en-US" sz="2800" b="1" dirty="0">
-                <a:effectLst>
-                  <a:outerShdw blurRad="38100" dist="38100" dir="2700000" algn="tl">
-                    <a:srgbClr val="000000">
-                      <a:alpha val="43137"/>
-                    </a:srgbClr>
-                  </a:outerShdw>
-                </a:effectLst>
-              </a:rPr>
-              <a:t>Directional coupler</a:t>
-            </a:r>
-          </a:p>
-        </p:txBody>
-      </p:sp>
+      <mc:AlternateContent xmlns:mc="http://schemas.openxmlformats.org/markup-compatibility/2006">
+        <mc:Choice xmlns:a14="http://schemas.microsoft.com/office/drawing/2010/main" Requires="a14">
+          <p:sp>
+            <p:nvSpPr>
+              <p:cNvPr id="2" name="CuadroTexto 1">
+                <a:extLst>
+                  <a:ext uri="{FF2B5EF4-FFF2-40B4-BE49-F238E27FC236}">
+                    <a16:creationId xmlns:a16="http://schemas.microsoft.com/office/drawing/2014/main" id="{BF610AD5-2FAD-F5B2-CAFF-F97AE942BAF4}"/>
+                  </a:ext>
+                </a:extLst>
+              </p:cNvPr>
+              <p:cNvSpPr txBox="1"/>
+              <p:nvPr/>
+            </p:nvSpPr>
+            <p:spPr>
+              <a:xfrm>
+                <a:off x="502010" y="1447800"/>
+                <a:ext cx="11199971" cy="2185214"/>
+              </a:xfrm>
+              <a:prstGeom prst="rect">
+                <a:avLst/>
+              </a:prstGeom>
+              <a:solidFill>
+                <a:schemeClr val="bg1">
+                  <a:lumMod val="95000"/>
+                </a:schemeClr>
+              </a:solidFill>
+              <a:ln w="28575">
+                <a:solidFill>
+                  <a:srgbClr val="E0700D"/>
+                </a:solidFill>
+              </a:ln>
+            </p:spPr>
+            <p:txBody>
+              <a:bodyPr wrap="square" rtlCol="0">
+                <a:spAutoFit/>
+              </a:bodyPr>
+              <a:lstStyle/>
+              <a:p>
+                <a:pPr algn="just"/>
+                <a:r>
+                  <a:rPr lang="en-US" sz="1200" b="1" i="1" dirty="0">
+                    <a:latin typeface="Arial" panose="020B0604020202020204" pitchFamily="34" charset="0"/>
+                    <a:cs typeface="Arial" panose="020B0604020202020204" pitchFamily="34" charset="0"/>
+                  </a:rPr>
+                  <a:t>Polarization independent coupler: is there any point for which the MMI coupler can work identically for TE and TM? Answer yes / no and explain why?</a:t>
+                </a:r>
+              </a:p>
+              <a:p>
+                <a:pPr algn="just"/>
+                <a:endParaRPr lang="en-US" sz="1200" dirty="0">
+                  <a:latin typeface="Arial" panose="020B0604020202020204" pitchFamily="34" charset="0"/>
+                  <a:cs typeface="Arial" panose="020B0604020202020204" pitchFamily="34" charset="0"/>
+                </a:endParaRPr>
+              </a:p>
+              <a:p>
+                <a:pPr algn="just"/>
+                <a:r>
+                  <a:rPr lang="es-ES" sz="1000" dirty="0">
+                    <a:latin typeface="Arial" panose="020B0604020202020204" pitchFamily="34" charset="0"/>
+                    <a:cs typeface="Arial" panose="020B0604020202020204" pitchFamily="34" charset="0"/>
+                  </a:rPr>
+                  <a:t>En este ejercicio, se ha diseñado un acoplador MMI y se ha realizado un barrido del ancho de la región multimodo, manteniendo fija la longitud de onda y después se ha simulado la longitud de acoplo </a:t>
+                </a:r>
+                <a14:m>
+                  <m:oMath xmlns:m="http://schemas.openxmlformats.org/officeDocument/2006/math">
+                    <m:sSub>
+                      <m:sSubPr>
+                        <m:ctrlPr>
+                          <a:rPr lang="ar-AE" sz="1000"/>
+                        </m:ctrlPr>
+                      </m:sSubPr>
+                      <m:e>
+                        <m:r>
+                          <m:rPr>
+                            <m:sty m:val="p"/>
+                          </m:rPr>
+                          <a:rPr lang="ar-AE" sz="1000" b="0" i="0"/>
+                          <m:t>L</m:t>
+                        </m:r>
+                      </m:e>
+                      <m:sub>
+                        <m:r>
+                          <m:rPr>
+                            <m:sty m:val="p"/>
+                          </m:rPr>
+                          <a:rPr lang="ar-AE" sz="1000" b="0" i="0"/>
+                          <m:t>π</m:t>
+                        </m:r>
+                      </m:sub>
+                    </m:sSub>
+                  </m:oMath>
+                </a14:m>
+                <a:r>
+                  <a:rPr lang="es-ES" sz="1000" dirty="0">
+                    <a:latin typeface="Arial" panose="020B0604020202020204" pitchFamily="34" charset="0"/>
+                    <a:cs typeface="Arial" panose="020B0604020202020204" pitchFamily="34" charset="0"/>
+                  </a:rPr>
+                  <a:t> en función de dicho ancho.</a:t>
+                </a:r>
+              </a:p>
+              <a:p>
+                <a:pPr algn="just"/>
+                <a:endParaRPr lang="es-ES" sz="1000" dirty="0">
+                  <a:latin typeface="Arial" panose="020B0604020202020204" pitchFamily="34" charset="0"/>
+                  <a:cs typeface="Arial" panose="020B0604020202020204" pitchFamily="34" charset="0"/>
+                </a:endParaRPr>
+              </a:p>
+              <a:p>
+                <a:pPr algn="just"/>
+                <a:r>
+                  <a:rPr lang="es-ES" sz="1000" dirty="0">
+                    <a:latin typeface="Arial" panose="020B0604020202020204" pitchFamily="34" charset="0"/>
+                    <a:cs typeface="Arial" panose="020B0604020202020204" pitchFamily="34" charset="0"/>
+                  </a:rPr>
+                  <a:t>Se observa que al aumentar el ancho del MMI, la longitud de acoplo </a:t>
+                </a:r>
+                <a14:m>
+                  <m:oMath xmlns:m="http://schemas.openxmlformats.org/officeDocument/2006/math">
+                    <m:sSub>
+                      <m:sSubPr>
+                        <m:ctrlPr>
+                          <a:rPr lang="ar-AE" sz="1000"/>
+                        </m:ctrlPr>
+                      </m:sSubPr>
+                      <m:e>
+                        <m:r>
+                          <m:rPr>
+                            <m:sty m:val="p"/>
+                          </m:rPr>
+                          <a:rPr lang="ar-AE" sz="1000" b="0" i="0"/>
+                          <m:t>L</m:t>
+                        </m:r>
+                      </m:e>
+                      <m:sub>
+                        <m:r>
+                          <m:rPr>
+                            <m:sty m:val="p"/>
+                          </m:rPr>
+                          <a:rPr lang="ar-AE" sz="1000" b="0" i="0"/>
+                          <m:t>π</m:t>
+                        </m:r>
+                      </m:sub>
+                    </m:sSub>
+                  </m:oMath>
+                </a14:m>
+                <a:r>
+                  <a:rPr lang="es-ES" sz="1000" dirty="0">
+                    <a:latin typeface="Arial" panose="020B0604020202020204" pitchFamily="34" charset="0"/>
+                    <a:cs typeface="Arial" panose="020B0604020202020204" pitchFamily="34" charset="0"/>
+                  </a:rPr>
+                  <a:t> aumenta tanto para TE como para TM. Esto se debe a que al ser más ancho, los modos están más separados dentro de la estructura y el acoplo entre ellos es menor, por lo que se necesita más longitud para completar la transferencia de potencia.</a:t>
+                </a:r>
+              </a:p>
+              <a:p>
+                <a:pPr algn="just"/>
+                <a:r>
+                  <a:rPr lang="es-ES" sz="1000" dirty="0">
+                    <a:latin typeface="Arial" panose="020B0604020202020204" pitchFamily="34" charset="0"/>
+                    <a:cs typeface="Arial" panose="020B0604020202020204" pitchFamily="34" charset="0"/>
+                  </a:rPr>
+                  <a:t>Además, se puede ver que los valores de TE y TM son similares pero no iguales, ya que cada uno tiene distintos índices efectivos. En general, TM presenta valores ligeramente mayores que TE en este caso.</a:t>
+                </a:r>
+              </a:p>
+              <a:p>
+                <a:pPr algn="just"/>
+                <a:endParaRPr lang="es-ES" sz="1000" dirty="0">
+                  <a:latin typeface="Arial" panose="020B0604020202020204" pitchFamily="34" charset="0"/>
+                  <a:cs typeface="Arial" panose="020B0604020202020204" pitchFamily="34" charset="0"/>
+                </a:endParaRPr>
+              </a:p>
+              <a:p>
+                <a:pPr algn="just"/>
+                <a:r>
+                  <a:rPr lang="es-ES" sz="1000" dirty="0">
+                    <a:latin typeface="Arial" panose="020B0604020202020204" pitchFamily="34" charset="0"/>
+                    <a:cs typeface="Arial" panose="020B0604020202020204" pitchFamily="34" charset="0"/>
+                  </a:rPr>
+                  <a:t>Por otro lado, no existe un punto en el que el acoplador MMI funcione exactamente igual para TE y TM, ya que ambos modos tienen comportamientos diferentes. Sin embargo, sí hay anchos donde los valores de </a:t>
+                </a:r>
+                <a14:m>
+                  <m:oMath xmlns:m="http://schemas.openxmlformats.org/officeDocument/2006/math">
+                    <m:sSub>
+                      <m:sSubPr>
+                        <m:ctrlPr>
+                          <a:rPr lang="ar-AE" sz="1000"/>
+                        </m:ctrlPr>
+                      </m:sSubPr>
+                      <m:e>
+                        <m:r>
+                          <m:rPr>
+                            <m:sty m:val="p"/>
+                          </m:rPr>
+                          <a:rPr lang="ar-AE" sz="1000" b="0" i="0"/>
+                          <m:t>L</m:t>
+                        </m:r>
+                      </m:e>
+                      <m:sub>
+                        <m:r>
+                          <m:rPr>
+                            <m:sty m:val="p"/>
+                          </m:rPr>
+                          <a:rPr lang="ar-AE" sz="1000" b="0" i="0"/>
+                          <m:t>π</m:t>
+                        </m:r>
+                      </m:sub>
+                    </m:sSub>
+                  </m:oMath>
+                </a14:m>
+                <a:r>
+                  <a:rPr lang="es-ES" sz="1000" dirty="0">
+                    <a:latin typeface="Arial" panose="020B0604020202020204" pitchFamily="34" charset="0"/>
+                    <a:cs typeface="Arial" panose="020B0604020202020204" pitchFamily="34" charset="0"/>
+                  </a:rPr>
+                  <a:t> son bastante cercanos, por lo que el dispositivo puede considerarse aproximadamente independiente de la polarización en esas condiciones.</a:t>
+                </a:r>
+              </a:p>
+              <a:p>
+                <a:pPr algn="just"/>
+                <a:endParaRPr lang="en-US" sz="1200" dirty="0">
+                  <a:latin typeface="Arial" panose="020B0604020202020204" pitchFamily="34" charset="0"/>
+                  <a:cs typeface="Arial" panose="020B0604020202020204" pitchFamily="34" charset="0"/>
+                </a:endParaRPr>
+              </a:p>
+            </p:txBody>
+          </p:sp>
+        </mc:Choice>
+        <mc:Fallback>
+          <p:sp>
+            <p:nvSpPr>
+              <p:cNvPr id="2" name="CuadroTexto 1">
+                <a:extLst>
+                  <a:ext uri="{FF2B5EF4-FFF2-40B4-BE49-F238E27FC236}">
+                    <a16:creationId xmlns:a16="http://schemas.microsoft.com/office/drawing/2014/main" id="{BF610AD5-2FAD-F5B2-CAFF-F97AE942BAF4}"/>
+                  </a:ext>
+                </a:extLst>
+              </p:cNvPr>
+              <p:cNvSpPr txBox="1">
+                <a:spLocks noRot="1" noChangeAspect="1" noMove="1" noResize="1" noEditPoints="1" noAdjustHandles="1" noChangeArrowheads="1" noChangeShapeType="1" noTextEdit="1"/>
+              </p:cNvSpPr>
+              <p:nvPr/>
+            </p:nvSpPr>
+            <p:spPr>
+              <a:xfrm>
+                <a:off x="502010" y="1447800"/>
+                <a:ext cx="11199971" cy="2185214"/>
+              </a:xfrm>
+              <a:prstGeom prst="rect">
+                <a:avLst/>
+              </a:prstGeom>
+              <a:blipFill>
+                <a:blip r:embed="rId4"/>
+                <a:stretch>
+                  <a:fillRect/>
+                </a:stretch>
+              </a:blipFill>
+              <a:ln w="28575">
+                <a:solidFill>
+                  <a:srgbClr val="E0700D"/>
+                </a:solidFill>
+              </a:ln>
+            </p:spPr>
+            <p:txBody>
+              <a:bodyPr/>
+              <a:lstStyle/>
+              <a:p>
+                <a:r>
+                  <a:rPr lang="es-ES">
+                    <a:noFill/>
+                  </a:rPr>
+                  <a:t> </a:t>
+                </a:r>
+              </a:p>
+            </p:txBody>
+          </p:sp>
+        </mc:Fallback>
+      </mc:AlternateContent>
     </p:spTree>
     <p:extLst>
       <p:ext uri="{BB962C8B-B14F-4D97-AF65-F5344CB8AC3E}">
-        <p14:creationId xmlns:p14="http://schemas.microsoft.com/office/powerpoint/2010/main" val="1640019522"/>
+        <p14:creationId xmlns:p14="http://schemas.microsoft.com/office/powerpoint/2010/main" val="3044308600"/>
       </p:ext>
     </p:extLst>
   </p:cSld>
@@ -20797,7 +22223,7 @@
 </p:sld>
 </file>
 
-<file path=ppt/slides/slide30.xml><?xml version="1.0" encoding="utf-8"?>
+<file path=ppt/slides/slide32.xml><?xml version="1.0" encoding="utf-8"?>
 <p:sld xmlns:a="http://schemas.openxmlformats.org/drawingml/2006/main" xmlns:r="http://schemas.openxmlformats.org/officeDocument/2006/relationships" xmlns:p="http://schemas.openxmlformats.org/presentationml/2006/main">
   <p:cSld>
     <p:spTree>
@@ -20936,7 +22362,7 @@
           <a:p>
             <a:fld id="{B6F15528-21DE-4FAA-801E-634DDDAF4B2B}" type="slidenum">
               <a:rPr lang="es-ES" smtClean="0"/>
-              <a:t>30</a:t>
+              <a:t>32</a:t>
             </a:fld>
             <a:endParaRPr lang="es-ES"/>
           </a:p>

--- a/LabBook_20.pptx
+++ b/LabBook_20.pptx
@@ -833,7 +833,7 @@
           <a:p>
             <a:fld id="{8438F8DC-35B0-48E6-A86E-42F1F08DD00F}" type="datetimeFigureOut">
               <a:rPr lang="es-ES" smtClean="0"/>
-              <a:t>29/04/2026</a:t>
+              <a:t>30/04/2026</a:t>
             </a:fld>
             <a:endParaRPr lang="es-ES"/>
           </a:p>
@@ -1010,7 +1010,7 @@
           <a:p>
             <a:fld id="{FACBDC12-F39B-4B97-8F4D-6734F9D366FF}" type="datetimeFigureOut">
               <a:rPr lang="es-ES" smtClean="0"/>
-              <a:t>29/04/2026</a:t>
+              <a:t>30/04/2026</a:t>
             </a:fld>
             <a:endParaRPr lang="es-ES"/>
           </a:p>
@@ -5651,15 +5651,29 @@
               </a:spcBef>
             </a:pPr>
             <a:r>
+              <a:rPr lang="es-ES" b="1" i="1" spc="165" dirty="0">
+                <a:latin typeface="Arial" panose="020B0604020202020204" pitchFamily="34" charset="0"/>
+                <a:cs typeface="Arial" panose="020B0604020202020204" pitchFamily="34" charset="0"/>
+              </a:rPr>
+              <a:t>Student:</a:t>
+            </a:r>
+            <a:r>
               <a:rPr lang="es-ES" spc="165" dirty="0">
-                <a:latin typeface="Arial"/>
-                <a:cs typeface="Arial"/>
-              </a:rPr>
-              <a:t>Student: Lidia Tórtola Juan y Raúl Salido Calatayud</a:t>
-            </a:r>
-            <a:endParaRPr sz="1800" dirty="0">
-              <a:latin typeface="Arial"/>
-              <a:cs typeface="Arial"/>
+                <a:latin typeface="Arial" panose="020B0604020202020204" pitchFamily="34" charset="0"/>
+                <a:cs typeface="Arial" panose="020B0604020202020204" pitchFamily="34" charset="0"/>
+              </a:rPr>
+              <a:t> </a:t>
+            </a:r>
+            <a:r>
+              <a:rPr lang="es-ES" i="1" spc="165" dirty="0">
+                <a:latin typeface="Arial" panose="020B0604020202020204" pitchFamily="34" charset="0"/>
+                <a:cs typeface="Arial" panose="020B0604020202020204" pitchFamily="34" charset="0"/>
+              </a:rPr>
+              <a:t>Lidia Tórtola Juan y Raúl Salido Calatayud</a:t>
+            </a:r>
+            <a:endParaRPr sz="1800" i="1" dirty="0">
+              <a:latin typeface="Arial" panose="020B0604020202020204" pitchFamily="34" charset="0"/>
+              <a:cs typeface="Arial" panose="020B0604020202020204" pitchFamily="34" charset="0"/>
             </a:endParaRPr>
           </a:p>
         </p:txBody>
@@ -5719,6 +5733,51 @@
               <a:t>1</a:t>
             </a:fld>
             <a:endParaRPr lang="es-ES"/>
+          </a:p>
+        </p:txBody>
+      </p:sp>
+      <p:sp>
+        <p:nvSpPr>
+          <p:cNvPr id="2" name="CuadroTexto 1">
+            <a:extLst>
+              <a:ext uri="{FF2B5EF4-FFF2-40B4-BE49-F238E27FC236}">
+                <a16:creationId xmlns:a16="http://schemas.microsoft.com/office/drawing/2014/main" id="{4A43C179-AD18-7B9C-F96C-8B8312D4824A}"/>
+              </a:ext>
+            </a:extLst>
+          </p:cNvPr>
+          <p:cNvSpPr txBox="1"/>
+          <p:nvPr/>
+        </p:nvSpPr>
+        <p:spPr>
+          <a:xfrm>
+            <a:off x="2663890" y="5892089"/>
+            <a:ext cx="8305800" cy="369332"/>
+          </a:xfrm>
+          <a:prstGeom prst="rect">
+            <a:avLst/>
+          </a:prstGeom>
+          <a:noFill/>
+        </p:spPr>
+        <p:txBody>
+          <a:bodyPr wrap="square">
+            <a:spAutoFit/>
+          </a:bodyPr>
+          <a:lstStyle/>
+          <a:p>
+            <a:r>
+              <a:rPr lang="es-ES" b="1" i="1" dirty="0">
+                <a:latin typeface="Arial" panose="020B0604020202020204" pitchFamily="34" charset="0"/>
+                <a:cs typeface="Arial" panose="020B0604020202020204" pitchFamily="34" charset="0"/>
+              </a:rPr>
+              <a:t>URL:</a:t>
+            </a:r>
+            <a:r>
+              <a:rPr lang="es-ES" dirty="0">
+                <a:latin typeface="Arial" panose="020B0604020202020204" pitchFamily="34" charset="0"/>
+                <a:cs typeface="Arial" panose="020B0604020202020204" pitchFamily="34" charset="0"/>
+              </a:rPr>
+              <a:t> https://github.com/ltorjua/cifoin-lab2</a:t>
+            </a:r>
           </a:p>
         </p:txBody>
       </p:sp>
@@ -17386,10 +17445,10 @@
       </mc:AlternateContent>
       <p:pic>
         <p:nvPicPr>
-          <p:cNvPr id="10" name="Imagen 9">
+          <p:cNvPr id="4" name="Imagen 3">
             <a:extLst>
               <a:ext uri="{FF2B5EF4-FFF2-40B4-BE49-F238E27FC236}">
-                <a16:creationId xmlns:a16="http://schemas.microsoft.com/office/drawing/2014/main" id="{EDA44C1E-8688-AC34-01A5-54163625980D}"/>
+                <a16:creationId xmlns:a16="http://schemas.microsoft.com/office/drawing/2014/main" id="{D444DF02-553D-6164-452D-E3D39F2922C5}"/>
               </a:ext>
             </a:extLst>
           </p:cNvPr>
@@ -17406,8 +17465,8 @@
         </p:blipFill>
         <p:spPr>
           <a:xfrm>
-            <a:off x="1310422" y="1538273"/>
-            <a:ext cx="4084595" cy="3125082"/>
+            <a:off x="1337901" y="1567298"/>
+            <a:ext cx="4029637" cy="3096057"/>
           </a:xfrm>
           <a:prstGeom prst="rect">
             <a:avLst/>
@@ -17416,10 +17475,10 @@
       </p:pic>
       <p:pic>
         <p:nvPicPr>
-          <p:cNvPr id="12" name="Imagen 11">
+          <p:cNvPr id="11" name="Imagen 10">
             <a:extLst>
               <a:ext uri="{FF2B5EF4-FFF2-40B4-BE49-F238E27FC236}">
-                <a16:creationId xmlns:a16="http://schemas.microsoft.com/office/drawing/2014/main" id="{95A741F0-2A7E-84DA-9167-F91851BF2E91}"/>
+                <a16:creationId xmlns:a16="http://schemas.microsoft.com/office/drawing/2014/main" id="{81C24103-1DBE-E3FF-B7F0-4FE51C9D4C6D}"/>
               </a:ext>
             </a:extLst>
           </p:cNvPr>
@@ -17436,8 +17495,8 @@
         </p:blipFill>
         <p:spPr>
           <a:xfrm>
-            <a:off x="7005571" y="1498925"/>
-            <a:ext cx="4107026" cy="3164430"/>
+            <a:off x="6983200" y="1622732"/>
+            <a:ext cx="4163006" cy="3096057"/>
           </a:xfrm>
           <a:prstGeom prst="rect">
             <a:avLst/>
@@ -18717,10 +18776,10 @@
       </mc:AlternateContent>
       <p:pic>
         <p:nvPicPr>
-          <p:cNvPr id="10" name="Imagen 9">
+          <p:cNvPr id="4" name="Imagen 3">
             <a:extLst>
               <a:ext uri="{FF2B5EF4-FFF2-40B4-BE49-F238E27FC236}">
-                <a16:creationId xmlns:a16="http://schemas.microsoft.com/office/drawing/2014/main" id="{685AEF6D-BFCD-F741-9C2F-23439D1A2085}"/>
+                <a16:creationId xmlns:a16="http://schemas.microsoft.com/office/drawing/2014/main" id="{6E7410B8-4593-BFE3-2A43-912107C6065B}"/>
               </a:ext>
             </a:extLst>
           </p:cNvPr>
@@ -18737,8 +18796,8 @@
         </p:blipFill>
         <p:spPr>
           <a:xfrm>
-            <a:off x="931928" y="1637752"/>
-            <a:ext cx="5022796" cy="2926124"/>
+            <a:off x="942558" y="1709970"/>
+            <a:ext cx="4820323" cy="2781688"/>
           </a:xfrm>
           <a:prstGeom prst="rect">
             <a:avLst/>
@@ -18747,10 +18806,10 @@
       </p:pic>
       <p:pic>
         <p:nvPicPr>
-          <p:cNvPr id="12" name="Imagen 11">
+          <p:cNvPr id="11" name="Imagen 10">
             <a:extLst>
               <a:ext uri="{FF2B5EF4-FFF2-40B4-BE49-F238E27FC236}">
-                <a16:creationId xmlns:a16="http://schemas.microsoft.com/office/drawing/2014/main" id="{463FC4BF-F685-8F53-9E64-29BC9C63FFCC}"/>
+                <a16:creationId xmlns:a16="http://schemas.microsoft.com/office/drawing/2014/main" id="{20D3D7C2-1665-E3AB-C42A-EBA4C9944CB1}"/>
               </a:ext>
             </a:extLst>
           </p:cNvPr>
@@ -18767,8 +18826,8 @@
         </p:blipFill>
         <p:spPr>
           <a:xfrm>
-            <a:off x="6466714" y="1612870"/>
-            <a:ext cx="5195977" cy="3024524"/>
+            <a:off x="6672963" y="1784680"/>
+            <a:ext cx="4791744" cy="2772162"/>
           </a:xfrm>
           <a:prstGeom prst="rect">
             <a:avLst/>
@@ -18984,8 +19043,8 @@
           </a:p>
         </p:txBody>
       </p:sp>
-      <mc:AlternateContent xmlns:mc="http://schemas.openxmlformats.org/markup-compatibility/2006">
-        <mc:Choice xmlns:a14="http://schemas.microsoft.com/office/drawing/2010/main" Requires="a14">
+      <mc:AlternateContent xmlns:mc="http://schemas.openxmlformats.org/markup-compatibility/2006" xmlns:a14="http://schemas.microsoft.com/office/drawing/2010/main">
+        <mc:Choice Requires="a14">
           <p:sp>
             <p:nvSpPr>
               <p:cNvPr id="2" name="CuadroTexto 1">
@@ -19425,7 +19484,7 @@
             </p:txBody>
           </p:sp>
         </mc:Choice>
-        <mc:Fallback>
+        <mc:Fallback xmlns="">
           <p:sp>
             <p:nvSpPr>
               <p:cNvPr id="2" name="CuadroTexto 1">
@@ -20064,10 +20123,10 @@
       </mc:AlternateContent>
       <p:pic>
         <p:nvPicPr>
-          <p:cNvPr id="8" name="Imagen 7">
+          <p:cNvPr id="6" name="Imagen 5">
             <a:extLst>
               <a:ext uri="{FF2B5EF4-FFF2-40B4-BE49-F238E27FC236}">
-                <a16:creationId xmlns:a16="http://schemas.microsoft.com/office/drawing/2014/main" id="{BA25E939-8302-DF96-BBAA-1F5765ECB437}"/>
+                <a16:creationId xmlns:a16="http://schemas.microsoft.com/office/drawing/2014/main" id="{77375747-A98F-E23D-7DBE-C10FD59B1B53}"/>
               </a:ext>
             </a:extLst>
           </p:cNvPr>
@@ -20078,15 +20137,14 @@
         </p:nvPicPr>
         <p:blipFill>
           <a:blip r:embed="rId7"/>
-          <a:srcRect t="2221"/>
           <a:stretch>
             <a:fillRect/>
           </a:stretch>
         </p:blipFill>
         <p:spPr>
           <a:xfrm>
-            <a:off x="762638" y="1617862"/>
-            <a:ext cx="5190531" cy="2965904"/>
+            <a:off x="947322" y="1705206"/>
+            <a:ext cx="4810796" cy="2791215"/>
           </a:xfrm>
           <a:prstGeom prst="rect">
             <a:avLst/>
@@ -20095,10 +20153,10 @@
       </p:pic>
       <p:pic>
         <p:nvPicPr>
-          <p:cNvPr id="12" name="Imagen 11">
+          <p:cNvPr id="11" name="Imagen 10">
             <a:extLst>
               <a:ext uri="{FF2B5EF4-FFF2-40B4-BE49-F238E27FC236}">
-                <a16:creationId xmlns:a16="http://schemas.microsoft.com/office/drawing/2014/main" id="{F93A7FA9-C5A6-DF2A-1516-B3C2139CC821}"/>
+                <a16:creationId xmlns:a16="http://schemas.microsoft.com/office/drawing/2014/main" id="{9CF134C2-795B-140D-5765-0AED63C5A301}"/>
               </a:ext>
             </a:extLst>
           </p:cNvPr>
@@ -20115,8 +20173,8 @@
         </p:blipFill>
         <p:spPr>
           <a:xfrm>
-            <a:off x="6578859" y="1592639"/>
-            <a:ext cx="5155647" cy="3016350"/>
+            <a:off x="6769862" y="1779917"/>
+            <a:ext cx="4782217" cy="2781688"/>
           </a:xfrm>
           <a:prstGeom prst="rect">
             <a:avLst/>
@@ -20326,8 +20384,8 @@
           </a:p>
         </p:txBody>
       </p:sp>
-      <mc:AlternateContent xmlns:mc="http://schemas.openxmlformats.org/markup-compatibility/2006">
-        <mc:Choice xmlns:a14="http://schemas.microsoft.com/office/drawing/2010/main" Requires="a14">
+      <mc:AlternateContent xmlns:mc="http://schemas.openxmlformats.org/markup-compatibility/2006" xmlns:a14="http://schemas.microsoft.com/office/drawing/2010/main">
+        <mc:Choice Requires="a14">
           <p:sp>
             <p:nvSpPr>
               <p:cNvPr id="2" name="CuadroTexto 1">
@@ -20395,7 +20453,9 @@
                     <m:sSub>
                       <m:sSubPr>
                         <m:ctrlPr>
-                          <a:rPr lang="ar-AE" sz="1000"/>
+                          <a:rPr lang="ar-AE" sz="1000" i="1">
+                            <a:latin typeface="Cambria Math" panose="02040503050406030204" pitchFamily="18" charset="0"/>
+                          </a:rPr>
                         </m:ctrlPr>
                       </m:sSubPr>
                       <m:e>
@@ -20403,7 +20463,9 @@
                           <m:rPr>
                             <m:sty m:val="p"/>
                           </m:rPr>
-                          <a:rPr lang="ar-AE" sz="1000" b="0" i="0"/>
+                          <a:rPr lang="ar-AE" sz="1000" b="0" i="0">
+                            <a:latin typeface="Cambria Math" panose="02040503050406030204" pitchFamily="18" charset="0"/>
+                          </a:rPr>
                           <m:t>L</m:t>
                         </m:r>
                       </m:e>
@@ -20412,7 +20474,9 @@
                           <m:rPr>
                             <m:sty m:val="p"/>
                           </m:rPr>
-                          <a:rPr lang="ar-AE" sz="1000" b="0" i="0"/>
+                          <a:rPr lang="ar-AE" sz="1000" b="0" i="0">
+                            <a:latin typeface="Cambria Math" panose="02040503050406030204" pitchFamily="18" charset="0"/>
+                          </a:rPr>
                           <m:t>π</m:t>
                         </m:r>
                       </m:sub>
@@ -20448,7 +20512,9 @@
                     <m:sSub>
                       <m:sSubPr>
                         <m:ctrlPr>
-                          <a:rPr lang="ar-AE" sz="1000"/>
+                          <a:rPr lang="ar-AE" sz="1000" i="1">
+                            <a:latin typeface="Cambria Math" panose="02040503050406030204" pitchFamily="18" charset="0"/>
+                          </a:rPr>
                         </m:ctrlPr>
                       </m:sSubPr>
                       <m:e>
@@ -20456,7 +20522,9 @@
                           <m:rPr>
                             <m:sty m:val="p"/>
                           </m:rPr>
-                          <a:rPr lang="ar-AE" sz="1000" b="0" i="0"/>
+                          <a:rPr lang="ar-AE" sz="1000" b="0" i="0">
+                            <a:latin typeface="Cambria Math" panose="02040503050406030204" pitchFamily="18" charset="0"/>
+                          </a:rPr>
                           <m:t>L</m:t>
                         </m:r>
                       </m:e>
@@ -20465,7 +20533,9 @@
                           <m:rPr>
                             <m:sty m:val="p"/>
                           </m:rPr>
-                          <a:rPr lang="ar-AE" sz="1000" b="0" i="0"/>
+                          <a:rPr lang="ar-AE" sz="1000" b="0" i="0">
+                            <a:latin typeface="Cambria Math" panose="02040503050406030204" pitchFamily="18" charset="0"/>
+                          </a:rPr>
                           <m:t>π</m:t>
                         </m:r>
                       </m:sub>
@@ -20494,7 +20564,9 @@
                     <m:sSub>
                       <m:sSubPr>
                         <m:ctrlPr>
-                          <a:rPr lang="ar-AE" sz="1000"/>
+                          <a:rPr lang="ar-AE" sz="1000" i="1">
+                            <a:latin typeface="Cambria Math" panose="02040503050406030204" pitchFamily="18" charset="0"/>
+                          </a:rPr>
                         </m:ctrlPr>
                       </m:sSubPr>
                       <m:e>
@@ -20502,7 +20574,9 @@
                           <m:rPr>
                             <m:sty m:val="p"/>
                           </m:rPr>
-                          <a:rPr lang="ar-AE" sz="1000" b="0" i="0"/>
+                          <a:rPr lang="ar-AE" sz="1000" b="0" i="0">
+                            <a:latin typeface="Cambria Math" panose="02040503050406030204" pitchFamily="18" charset="0"/>
+                          </a:rPr>
                           <m:t>L</m:t>
                         </m:r>
                       </m:e>
@@ -20511,7 +20585,9 @@
                           <m:rPr>
                             <m:sty m:val="p"/>
                           </m:rPr>
-                          <a:rPr lang="ar-AE" sz="1000" b="0" i="0"/>
+                          <a:rPr lang="ar-AE" sz="1000" b="0" i="0">
+                            <a:latin typeface="Cambria Math" panose="02040503050406030204" pitchFamily="18" charset="0"/>
+                          </a:rPr>
                           <m:t>π</m:t>
                         </m:r>
                       </m:sub>
@@ -20537,7 +20613,9 @@
                     <m:sSub>
                       <m:sSubPr>
                         <m:ctrlPr>
-                          <a:rPr lang="ar-AE" sz="1000"/>
+                          <a:rPr lang="ar-AE" sz="1000" i="1">
+                            <a:latin typeface="Cambria Math" panose="02040503050406030204" pitchFamily="18" charset="0"/>
+                          </a:rPr>
                         </m:ctrlPr>
                       </m:sSubPr>
                       <m:e>
@@ -20545,7 +20623,9 @@
                           <m:rPr>
                             <m:sty m:val="p"/>
                           </m:rPr>
-                          <a:rPr lang="ar-AE" sz="1000" b="0" i="0"/>
+                          <a:rPr lang="ar-AE" sz="1000" b="0" i="0">
+                            <a:latin typeface="Cambria Math" panose="02040503050406030204" pitchFamily="18" charset="0"/>
+                          </a:rPr>
                           <m:t>L</m:t>
                         </m:r>
                       </m:e>
@@ -20554,7 +20634,9 @@
                           <m:rPr>
                             <m:sty m:val="p"/>
                           </m:rPr>
-                          <a:rPr lang="ar-AE" sz="1000" b="0" i="0"/>
+                          <a:rPr lang="ar-AE" sz="1000" b="0" i="0">
+                            <a:latin typeface="Cambria Math" panose="02040503050406030204" pitchFamily="18" charset="0"/>
+                          </a:rPr>
                           <m:t>π</m:t>
                         </m:r>
                         <m:r>
@@ -20648,7 +20730,9 @@
                     <m:sSub>
                       <m:sSubPr>
                         <m:ctrlPr>
-                          <a:rPr lang="ar-AE" sz="1000"/>
+                          <a:rPr lang="ar-AE" sz="1000" i="1">
+                            <a:latin typeface="Cambria Math" panose="02040503050406030204" pitchFamily="18" charset="0"/>
+                          </a:rPr>
                         </m:ctrlPr>
                       </m:sSubPr>
                       <m:e>
@@ -20656,7 +20740,9 @@
                           <m:rPr>
                             <m:sty m:val="p"/>
                           </m:rPr>
-                          <a:rPr lang="ar-AE" sz="1000" b="0" i="0"/>
+                          <a:rPr lang="ar-AE" sz="1000" b="0" i="0">
+                            <a:latin typeface="Cambria Math" panose="02040503050406030204" pitchFamily="18" charset="0"/>
+                          </a:rPr>
                           <m:t>L</m:t>
                         </m:r>
                       </m:e>
@@ -20665,7 +20751,9 @@
                           <m:rPr>
                             <m:sty m:val="p"/>
                           </m:rPr>
-                          <a:rPr lang="ar-AE" sz="1000" b="0" i="0"/>
+                          <a:rPr lang="ar-AE" sz="1000" b="0" i="0">
+                            <a:latin typeface="Cambria Math" panose="02040503050406030204" pitchFamily="18" charset="0"/>
+                          </a:rPr>
                           <m:t>π</m:t>
                         </m:r>
                       </m:sub>
@@ -20715,7 +20803,9 @@
                     <m:sSub>
                       <m:sSubPr>
                         <m:ctrlPr>
-                          <a:rPr lang="ar-AE" sz="1000"/>
+                          <a:rPr lang="ar-AE" sz="1000" i="1">
+                            <a:latin typeface="Cambria Math" panose="02040503050406030204" pitchFamily="18" charset="0"/>
+                          </a:rPr>
                         </m:ctrlPr>
                       </m:sSubPr>
                       <m:e>
@@ -20723,7 +20813,9 @@
                           <m:rPr>
                             <m:sty m:val="p"/>
                           </m:rPr>
-                          <a:rPr lang="ar-AE" sz="1000" b="0" i="0"/>
+                          <a:rPr lang="ar-AE" sz="1000" b="0" i="0">
+                            <a:latin typeface="Cambria Math" panose="02040503050406030204" pitchFamily="18" charset="0"/>
+                          </a:rPr>
                           <m:t>L</m:t>
                         </m:r>
                       </m:e>
@@ -20732,7 +20824,9 @@
                           <m:rPr>
                             <m:sty m:val="p"/>
                           </m:rPr>
-                          <a:rPr lang="ar-AE" sz="1000" b="0" i="0"/>
+                          <a:rPr lang="ar-AE" sz="1000" b="0" i="0">
+                            <a:latin typeface="Cambria Math" panose="02040503050406030204" pitchFamily="18" charset="0"/>
+                          </a:rPr>
                           <m:t>π</m:t>
                         </m:r>
                       </m:sub>
@@ -20914,7 +21008,7 @@
             </p:txBody>
           </p:sp>
         </mc:Choice>
-        <mc:Fallback>
+        <mc:Fallback xmlns="">
           <p:sp>
             <p:nvSpPr>
               <p:cNvPr id="2" name="CuadroTexto 1">
@@ -21672,10 +21766,10 @@
       </mc:AlternateContent>
       <p:pic>
         <p:nvPicPr>
-          <p:cNvPr id="7" name="Imagen 6">
+          <p:cNvPr id="6" name="Imagen 5">
             <a:extLst>
               <a:ext uri="{FF2B5EF4-FFF2-40B4-BE49-F238E27FC236}">
-                <a16:creationId xmlns:a16="http://schemas.microsoft.com/office/drawing/2014/main" id="{58458D74-9CF2-5BC2-2F0C-1608E6E3420E}"/>
+                <a16:creationId xmlns:a16="http://schemas.microsoft.com/office/drawing/2014/main" id="{07533929-779D-C958-DF3B-B11C1BDBAF0C}"/>
               </a:ext>
             </a:extLst>
           </p:cNvPr>
@@ -21692,8 +21786,8 @@
         </p:blipFill>
         <p:spPr>
           <a:xfrm>
-            <a:off x="842410" y="1599763"/>
-            <a:ext cx="5020620" cy="2986951"/>
+            <a:off x="808213" y="1666864"/>
+            <a:ext cx="4919260" cy="2907462"/>
           </a:xfrm>
           <a:prstGeom prst="rect">
             <a:avLst/>
@@ -21702,10 +21796,10 @@
       </p:pic>
       <p:pic>
         <p:nvPicPr>
-          <p:cNvPr id="13" name="Imagen 12">
+          <p:cNvPr id="11" name="Imagen 10">
             <a:extLst>
               <a:ext uri="{FF2B5EF4-FFF2-40B4-BE49-F238E27FC236}">
-                <a16:creationId xmlns:a16="http://schemas.microsoft.com/office/drawing/2014/main" id="{0AA03AE9-167A-C735-4B98-BB5F130D4EC9}"/>
+                <a16:creationId xmlns:a16="http://schemas.microsoft.com/office/drawing/2014/main" id="{983C3DFB-A789-2A10-C43F-6BBBCBAAD239}"/>
               </a:ext>
             </a:extLst>
           </p:cNvPr>
@@ -21722,8 +21816,8 @@
         </p:blipFill>
         <p:spPr>
           <a:xfrm>
-            <a:off x="6455381" y="1649236"/>
-            <a:ext cx="5139210" cy="3043049"/>
+            <a:off x="6730519" y="1666863"/>
+            <a:ext cx="4852328" cy="2867902"/>
           </a:xfrm>
           <a:prstGeom prst="rect">
             <a:avLst/>
@@ -21933,8 +22027,8 @@
           </a:p>
         </p:txBody>
       </p:sp>
-      <mc:AlternateContent xmlns:mc="http://schemas.openxmlformats.org/markup-compatibility/2006">
-        <mc:Choice xmlns:a14="http://schemas.microsoft.com/office/drawing/2010/main" Requires="a14">
+      <mc:AlternateContent xmlns:mc="http://schemas.openxmlformats.org/markup-compatibility/2006" xmlns:a14="http://schemas.microsoft.com/office/drawing/2010/main">
+        <mc:Choice Requires="a14">
           <p:sp>
             <p:nvSpPr>
               <p:cNvPr id="2" name="CuadroTexto 1">
@@ -22002,7 +22096,9 @@
                     <m:sSub>
                       <m:sSubPr>
                         <m:ctrlPr>
-                          <a:rPr lang="ar-AE" sz="1000"/>
+                          <a:rPr lang="ar-AE" sz="1000" i="1">
+                            <a:latin typeface="Cambria Math" panose="02040503050406030204" pitchFamily="18" charset="0"/>
+                          </a:rPr>
                         </m:ctrlPr>
                       </m:sSubPr>
                       <m:e>
@@ -22010,7 +22106,9 @@
                           <m:rPr>
                             <m:sty m:val="p"/>
                           </m:rPr>
-                          <a:rPr lang="ar-AE" sz="1000" b="0" i="0"/>
+                          <a:rPr lang="ar-AE" sz="1000" b="0" i="0">
+                            <a:latin typeface="Cambria Math" panose="02040503050406030204" pitchFamily="18" charset="0"/>
+                          </a:rPr>
                           <m:t>L</m:t>
                         </m:r>
                       </m:e>
@@ -22019,7 +22117,9 @@
                           <m:rPr>
                             <m:sty m:val="p"/>
                           </m:rPr>
-                          <a:rPr lang="ar-AE" sz="1000" b="0" i="0"/>
+                          <a:rPr lang="ar-AE" sz="1000" b="0" i="0">
+                            <a:latin typeface="Cambria Math" panose="02040503050406030204" pitchFamily="18" charset="0"/>
+                          </a:rPr>
                           <m:t>π</m:t>
                         </m:r>
                       </m:sub>
@@ -22055,7 +22155,9 @@
                     <m:sSub>
                       <m:sSubPr>
                         <m:ctrlPr>
-                          <a:rPr lang="ar-AE" sz="1000"/>
+                          <a:rPr lang="ar-AE" sz="1000" i="1">
+                            <a:latin typeface="Cambria Math" panose="02040503050406030204" pitchFamily="18" charset="0"/>
+                          </a:rPr>
                         </m:ctrlPr>
                       </m:sSubPr>
                       <m:e>
@@ -22063,7 +22165,9 @@
                           <m:rPr>
                             <m:sty m:val="p"/>
                           </m:rPr>
-                          <a:rPr lang="ar-AE" sz="1000" b="0" i="0"/>
+                          <a:rPr lang="ar-AE" sz="1000" b="0" i="0">
+                            <a:latin typeface="Cambria Math" panose="02040503050406030204" pitchFamily="18" charset="0"/>
+                          </a:rPr>
                           <m:t>L</m:t>
                         </m:r>
                       </m:e>
@@ -22072,7 +22176,9 @@
                           <m:rPr>
                             <m:sty m:val="p"/>
                           </m:rPr>
-                          <a:rPr lang="ar-AE" sz="1000" b="0" i="0"/>
+                          <a:rPr lang="ar-AE" sz="1000" b="0" i="0">
+                            <a:latin typeface="Cambria Math" panose="02040503050406030204" pitchFamily="18" charset="0"/>
+                          </a:rPr>
                           <m:t>π</m:t>
                         </m:r>
                       </m:sub>
@@ -22118,7 +22224,9 @@
                     <m:sSub>
                       <m:sSubPr>
                         <m:ctrlPr>
-                          <a:rPr lang="ar-AE" sz="1000"/>
+                          <a:rPr lang="ar-AE" sz="1000" i="1">
+                            <a:latin typeface="Cambria Math" panose="02040503050406030204" pitchFamily="18" charset="0"/>
+                          </a:rPr>
                         </m:ctrlPr>
                       </m:sSubPr>
                       <m:e>
@@ -22126,7 +22234,9 @@
                           <m:rPr>
                             <m:sty m:val="p"/>
                           </m:rPr>
-                          <a:rPr lang="ar-AE" sz="1000" b="0" i="0"/>
+                          <a:rPr lang="ar-AE" sz="1000" b="0" i="0">
+                            <a:latin typeface="Cambria Math" panose="02040503050406030204" pitchFamily="18" charset="0"/>
+                          </a:rPr>
                           <m:t>L</m:t>
                         </m:r>
                       </m:e>
@@ -22135,7 +22245,9 @@
                           <m:rPr>
                             <m:sty m:val="p"/>
                           </m:rPr>
-                          <a:rPr lang="ar-AE" sz="1000" b="0" i="0"/>
+                          <a:rPr lang="ar-AE" sz="1000" b="0" i="0">
+                            <a:latin typeface="Cambria Math" panose="02040503050406030204" pitchFamily="18" charset="0"/>
+                          </a:rPr>
                           <m:t>π</m:t>
                         </m:r>
                       </m:sub>
@@ -22160,7 +22272,7 @@
             </p:txBody>
           </p:sp>
         </mc:Choice>
-        <mc:Fallback>
+        <mc:Fallback xmlns="">
           <p:sp>
             <p:nvSpPr>
               <p:cNvPr id="2" name="CuadroTexto 1">

--- a/LabBook_20.pptx
+++ b/LabBook_20.pptx
@@ -833,7 +833,7 @@
           <a:p>
             <a:fld id="{8438F8DC-35B0-48E6-A86E-42F1F08DD00F}" type="datetimeFigureOut">
               <a:rPr lang="es-ES" smtClean="0"/>
-              <a:t>30/04/2026</a:t>
+              <a:t>01/05/2026</a:t>
             </a:fld>
             <a:endParaRPr lang="es-ES"/>
           </a:p>
@@ -1010,7 +1010,7 @@
           <a:p>
             <a:fld id="{FACBDC12-F39B-4B97-8F4D-6734F9D366FF}" type="datetimeFigureOut">
               <a:rPr lang="es-ES" smtClean="0"/>
-              <a:t>30/04/2026</a:t>
+              <a:t>01/05/2026</a:t>
             </a:fld>
             <a:endParaRPr lang="es-ES"/>
           </a:p>
@@ -17709,8 +17709,8 @@
           </a:p>
         </p:txBody>
       </p:sp>
-      <mc:AlternateContent xmlns:mc="http://schemas.openxmlformats.org/markup-compatibility/2006" xmlns:a14="http://schemas.microsoft.com/office/drawing/2010/main">
-        <mc:Choice Requires="a14">
+      <mc:AlternateContent xmlns:mc="http://schemas.openxmlformats.org/markup-compatibility/2006">
+        <mc:Choice xmlns:a14="http://schemas.microsoft.com/office/drawing/2010/main" Requires="a14">
           <p:sp>
             <p:nvSpPr>
               <p:cNvPr id="2" name="CuadroTexto 1">
@@ -17726,7 +17726,7 @@
             <p:spPr>
               <a:xfrm>
                 <a:off x="496014" y="1447800"/>
-                <a:ext cx="11199971" cy="2646878"/>
+                <a:ext cx="11199971" cy="4278094"/>
               </a:xfrm>
               <a:prstGeom prst="rect">
                 <a:avLst/>
@@ -17759,7 +17759,7 @@
               </a:p>
               <a:p>
                 <a:pPr algn="just"/>
-                <a:endParaRPr lang="en-US" sz="1200" b="1" i="1" dirty="0">
+                <a:endParaRPr lang="en-US" sz="1000" b="1" i="1" dirty="0">
                   <a:latin typeface="Arial" panose="020B0604020202020204" pitchFamily="34" charset="0"/>
                   <a:cs typeface="Arial" panose="020B0604020202020204" pitchFamily="34" charset="0"/>
                 </a:endParaRPr>
@@ -18114,9 +18114,209 @@
                     <a:latin typeface="Arial" panose="020B0604020202020204" pitchFamily="34" charset="0"/>
                     <a:cs typeface="Arial" panose="020B0604020202020204" pitchFamily="34" charset="0"/>
                   </a:rPr>
-                  <a:t>más altos.</a:t>
-                </a:r>
-                <a:endParaRPr lang="en-US" sz="1200" dirty="0">
+                  <a:t> más altos.</a:t>
+                </a:r>
+              </a:p>
+              <a:p>
+                <a:pPr algn="just"/>
+                <a:endParaRPr lang="es-ES" sz="1000" dirty="0">
+                  <a:latin typeface="Arial" panose="020B0604020202020204" pitchFamily="34" charset="0"/>
+                  <a:cs typeface="Arial" panose="020B0604020202020204" pitchFamily="34" charset="0"/>
+                </a:endParaRPr>
+              </a:p>
+              <a:p>
+                <a:pPr algn="just"/>
+                <a:r>
+                  <a:rPr lang="es-ES" sz="1000" dirty="0">
+                    <a:latin typeface="Arial" panose="020B0604020202020204" pitchFamily="34" charset="0"/>
+                    <a:cs typeface="Arial" panose="020B0604020202020204" pitchFamily="34" charset="0"/>
+                  </a:rPr>
+                  <a:t>En el caso </a:t>
+                </a:r>
+                <a:r>
+                  <a:rPr lang="es-ES" sz="1000" dirty="0" err="1">
+                    <a:latin typeface="Arial" panose="020B0604020202020204" pitchFamily="34" charset="0"/>
+                    <a:cs typeface="Arial" panose="020B0604020202020204" pitchFamily="34" charset="0"/>
+                  </a:rPr>
+                  <a:t>deep</a:t>
+                </a:r>
+                <a:r>
+                  <a:rPr lang="es-ES" sz="1000" dirty="0">
+                    <a:latin typeface="Arial" panose="020B0604020202020204" pitchFamily="34" charset="0"/>
+                    <a:cs typeface="Arial" panose="020B0604020202020204" pitchFamily="34" charset="0"/>
+                  </a:rPr>
+                  <a:t>, se observa que el modo TE presenta valores de </a:t>
+                </a:r>
+                <a14:m>
+                  <m:oMath xmlns:m="http://schemas.openxmlformats.org/officeDocument/2006/math">
+                    <m:sSub>
+                      <m:sSubPr>
+                        <m:ctrlPr>
+                          <a:rPr lang="ar-AE" sz="1000"/>
+                        </m:ctrlPr>
+                      </m:sSubPr>
+                      <m:e>
+                        <m:r>
+                          <m:rPr>
+                            <m:sty m:val="p"/>
+                          </m:rPr>
+                          <a:rPr lang="ar-AE" sz="1000" b="0" i="0"/>
+                          <m:t>L</m:t>
+                        </m:r>
+                      </m:e>
+                      <m:sub>
+                        <m:r>
+                          <m:rPr>
+                            <m:sty m:val="p"/>
+                          </m:rPr>
+                          <a:rPr lang="ar-AE" sz="1000" b="0" i="0"/>
+                          <m:t>π</m:t>
+                        </m:r>
+                      </m:sub>
+                    </m:sSub>
+                  </m:oMath>
+                </a14:m>
+                <a:r>
+                  <a:rPr lang="es-ES" sz="1000" dirty="0">
+                    <a:latin typeface="Arial" panose="020B0604020202020204" pitchFamily="34" charset="0"/>
+                    <a:cs typeface="Arial" panose="020B0604020202020204" pitchFamily="34" charset="0"/>
+                  </a:rPr>
+                  <a:t> mayores que el TM para gaps grandes, creciendo además mucho más rápido, lo que indica que el acoplo en TE se debilita más rápidamente al aumentar la separación. En cambio, el modo TM mantiene valores más bajos y crece de forma más suave, ya que el acoplo es relativamente más fuerte.</a:t>
+                </a:r>
+              </a:p>
+              <a:p>
+                <a:pPr algn="just"/>
+                <a:endParaRPr lang="es-ES" sz="1000" dirty="0">
+                  <a:latin typeface="Arial" panose="020B0604020202020204" pitchFamily="34" charset="0"/>
+                  <a:cs typeface="Arial" panose="020B0604020202020204" pitchFamily="34" charset="0"/>
+                </a:endParaRPr>
+              </a:p>
+              <a:p>
+                <a:pPr algn="just"/>
+                <a:r>
+                  <a:rPr lang="es-ES" sz="1000" dirty="0">
+                    <a:latin typeface="Arial" panose="020B0604020202020204" pitchFamily="34" charset="0"/>
+                    <a:cs typeface="Arial" panose="020B0604020202020204" pitchFamily="34" charset="0"/>
+                  </a:rPr>
+                  <a:t>Por otro lado, en el caso </a:t>
+                </a:r>
+                <a:r>
+                  <a:rPr lang="es-ES" sz="1000" dirty="0" err="1">
+                    <a:latin typeface="Arial" panose="020B0604020202020204" pitchFamily="34" charset="0"/>
+                    <a:cs typeface="Arial" panose="020B0604020202020204" pitchFamily="34" charset="0"/>
+                  </a:rPr>
+                  <a:t>shallow</a:t>
+                </a:r>
+                <a:r>
+                  <a:rPr lang="es-ES" sz="1000" dirty="0">
+                    <a:latin typeface="Arial" panose="020B0604020202020204" pitchFamily="34" charset="0"/>
+                    <a:cs typeface="Arial" panose="020B0604020202020204" pitchFamily="34" charset="0"/>
+                  </a:rPr>
+                  <a:t>, el comportamiento es diferente: ambos modos son bastante similares para gaps pequeños, pero el modo TM presenta un crecimiento muy brusco para valores altos de gap, llegando a valores muy elevados de </a:t>
+                </a:r>
+                <a14:m>
+                  <m:oMath xmlns:m="http://schemas.openxmlformats.org/officeDocument/2006/math">
+                    <m:sSub>
+                      <m:sSubPr>
+                        <m:ctrlPr>
+                          <a:rPr lang="ar-AE" sz="1000"/>
+                        </m:ctrlPr>
+                      </m:sSubPr>
+                      <m:e>
+                        <m:r>
+                          <m:rPr>
+                            <m:sty m:val="p"/>
+                          </m:rPr>
+                          <a:rPr lang="ar-AE" sz="1000" b="0" i="0"/>
+                          <m:t>L</m:t>
+                        </m:r>
+                      </m:e>
+                      <m:sub>
+                        <m:r>
+                          <m:rPr>
+                            <m:sty m:val="p"/>
+                          </m:rPr>
+                          <a:rPr lang="ar-AE" sz="1000" b="0" i="0"/>
+                          <m:t>π</m:t>
+                        </m:r>
+                      </m:sub>
+                    </m:sSub>
+                  </m:oMath>
+                </a14:m>
+                <a:r>
+                  <a:rPr lang="ar-AE" sz="1000" dirty="0">
+                    <a:latin typeface="Arial" panose="020B0604020202020204" pitchFamily="34" charset="0"/>
+                    <a:cs typeface="Arial" panose="020B0604020202020204" pitchFamily="34" charset="0"/>
+                  </a:rPr>
+                  <a:t>, </a:t>
+                </a:r>
+                <a:r>
+                  <a:rPr lang="es-ES" sz="1000" dirty="0">
+                    <a:latin typeface="Arial" panose="020B0604020202020204" pitchFamily="34" charset="0"/>
+                    <a:cs typeface="Arial" panose="020B0604020202020204" pitchFamily="34" charset="0"/>
+                  </a:rPr>
+                  <a:t>lo que indica una pérdida casi total de acoplo. Esto refleja que en </a:t>
+                </a:r>
+                <a:r>
+                  <a:rPr lang="es-ES" sz="1000" dirty="0" err="1">
+                    <a:latin typeface="Arial" panose="020B0604020202020204" pitchFamily="34" charset="0"/>
+                    <a:cs typeface="Arial" panose="020B0604020202020204" pitchFamily="34" charset="0"/>
+                  </a:rPr>
+                  <a:t>shallow</a:t>
+                </a:r>
+                <a:r>
+                  <a:rPr lang="es-ES" sz="1000" dirty="0">
+                    <a:latin typeface="Arial" panose="020B0604020202020204" pitchFamily="34" charset="0"/>
+                    <a:cs typeface="Arial" panose="020B0604020202020204" pitchFamily="34" charset="0"/>
+                  </a:rPr>
+                  <a:t> el TM es más sensible a la separación entre guías que el TE. </a:t>
+                </a:r>
+              </a:p>
+              <a:p>
+                <a:pPr algn="just"/>
+                <a:endParaRPr lang="es-ES" sz="1000" dirty="0">
+                  <a:latin typeface="Arial" panose="020B0604020202020204" pitchFamily="34" charset="0"/>
+                  <a:cs typeface="Arial" panose="020B0604020202020204" pitchFamily="34" charset="0"/>
+                </a:endParaRPr>
+              </a:p>
+              <a:p>
+                <a:pPr algn="just"/>
+                <a:r>
+                  <a:rPr lang="es-ES" sz="1000" dirty="0">
+                    <a:latin typeface="Arial" panose="020B0604020202020204" pitchFamily="34" charset="0"/>
+                    <a:cs typeface="Arial" panose="020B0604020202020204" pitchFamily="34" charset="0"/>
+                  </a:rPr>
+                  <a:t>En general, el acoplo es mayor en el caso </a:t>
+                </a:r>
+                <a:r>
+                  <a:rPr lang="es-ES" sz="1000" dirty="0" err="1">
+                    <a:latin typeface="Arial" panose="020B0604020202020204" pitchFamily="34" charset="0"/>
+                    <a:cs typeface="Arial" panose="020B0604020202020204" pitchFamily="34" charset="0"/>
+                  </a:rPr>
+                  <a:t>shallow</a:t>
+                </a:r>
+                <a:r>
+                  <a:rPr lang="es-ES" sz="1000" dirty="0">
+                    <a:latin typeface="Arial" panose="020B0604020202020204" pitchFamily="34" charset="0"/>
+                    <a:cs typeface="Arial" panose="020B0604020202020204" pitchFamily="34" charset="0"/>
+                  </a:rPr>
+                  <a:t> que en </a:t>
+                </a:r>
+                <a:r>
+                  <a:rPr lang="es-ES" sz="1000" dirty="0" err="1">
+                    <a:latin typeface="Arial" panose="020B0604020202020204" pitchFamily="34" charset="0"/>
+                    <a:cs typeface="Arial" panose="020B0604020202020204" pitchFamily="34" charset="0"/>
+                  </a:rPr>
+                  <a:t>deep</a:t>
+                </a:r>
+                <a:r>
+                  <a:rPr lang="es-ES" sz="1000" dirty="0">
+                    <a:latin typeface="Arial" panose="020B0604020202020204" pitchFamily="34" charset="0"/>
+                    <a:cs typeface="Arial" panose="020B0604020202020204" pitchFamily="34" charset="0"/>
+                  </a:rPr>
+                  <a:t> para valores pequeños y moderados de gap, ya que el campo está menos confinado y se extiende más fuera del núcleo, aumentando el solapamiento entre guías. Sin embargo, a partir de cierto valor de gap, la separación entre las guías es tan grande que el acoplo disminuye fuertemente en ambos casos, llegando prácticamente a anularse.</a:t>
+                </a:r>
+                <a:endParaRPr lang="en-US" sz="1000" dirty="0">
                   <a:latin typeface="Arial" panose="020B0604020202020204" pitchFamily="34" charset="0"/>
                   <a:cs typeface="Arial" panose="020B0604020202020204" pitchFamily="34" charset="0"/>
                 </a:endParaRPr>
@@ -18131,7 +18331,7 @@
             </p:txBody>
           </p:sp>
         </mc:Choice>
-        <mc:Fallback xmlns="">
+        <mc:Fallback>
           <p:sp>
             <p:nvSpPr>
               <p:cNvPr id="2" name="CuadroTexto 1">
@@ -18149,7 +18349,7 @@
             <p:spPr>
               <a:xfrm>
                 <a:off x="496014" y="1447800"/>
-                <a:ext cx="11199971" cy="2646878"/>
+                <a:ext cx="11199971" cy="4278094"/>
               </a:xfrm>
               <a:prstGeom prst="rect">
                 <a:avLst/>
@@ -19043,8 +19243,8 @@
           </a:p>
         </p:txBody>
       </p:sp>
-      <mc:AlternateContent xmlns:mc="http://schemas.openxmlformats.org/markup-compatibility/2006" xmlns:a14="http://schemas.microsoft.com/office/drawing/2010/main">
-        <mc:Choice Requires="a14">
+      <mc:AlternateContent xmlns:mc="http://schemas.openxmlformats.org/markup-compatibility/2006">
+        <mc:Choice xmlns:a14="http://schemas.microsoft.com/office/drawing/2010/main" Requires="a14">
           <p:sp>
             <p:nvSpPr>
               <p:cNvPr id="2" name="CuadroTexto 1">
@@ -19060,7 +19260,7 @@
             <p:spPr>
               <a:xfrm>
                 <a:off x="583019" y="1524000"/>
-                <a:ext cx="11199971" cy="2800767"/>
+                <a:ext cx="11199971" cy="3262432"/>
               </a:xfrm>
               <a:prstGeom prst="rect">
                 <a:avLst/>
@@ -19313,58 +19513,14 @@
                     <a:latin typeface="Arial" panose="020B0604020202020204" pitchFamily="34" charset="0"/>
                     <a:cs typeface="Arial" panose="020B0604020202020204" pitchFamily="34" charset="0"/>
                   </a:rPr>
-                  <a:t>Por último, comparando los casos </a:t>
-                </a:r>
-                <a:r>
-                  <a:rPr lang="es-ES" sz="1000" dirty="0" err="1">
-                    <a:latin typeface="Arial" panose="020B0604020202020204" pitchFamily="34" charset="0"/>
-                    <a:cs typeface="Arial" panose="020B0604020202020204" pitchFamily="34" charset="0"/>
-                  </a:rPr>
-                  <a:t>deep</a:t>
-                </a:r>
-                <a:r>
-                  <a:rPr lang="es-ES" sz="1000" dirty="0">
-                    <a:latin typeface="Arial" panose="020B0604020202020204" pitchFamily="34" charset="0"/>
-                    <a:cs typeface="Arial" panose="020B0604020202020204" pitchFamily="34" charset="0"/>
-                  </a:rPr>
-                  <a:t> y </a:t>
-                </a:r>
-                <a:r>
-                  <a:rPr lang="es-ES" sz="1000" dirty="0" err="1">
-                    <a:latin typeface="Arial" panose="020B0604020202020204" pitchFamily="34" charset="0"/>
-                    <a:cs typeface="Arial" panose="020B0604020202020204" pitchFamily="34" charset="0"/>
-                  </a:rPr>
-                  <a:t>shallow</a:t>
-                </a:r>
-                <a:r>
-                  <a:rPr lang="es-ES" sz="1000" dirty="0">
-                    <a:latin typeface="Arial" panose="020B0604020202020204" pitchFamily="34" charset="0"/>
-                    <a:cs typeface="Arial" panose="020B0604020202020204" pitchFamily="34" charset="0"/>
-                  </a:rPr>
-                  <a:t>, se observa que el acoplo es mayor en el caso </a:t>
-                </a:r>
-                <a:r>
-                  <a:rPr lang="es-ES" sz="1000" dirty="0" err="1">
-                    <a:latin typeface="Arial" panose="020B0604020202020204" pitchFamily="34" charset="0"/>
-                    <a:cs typeface="Arial" panose="020B0604020202020204" pitchFamily="34" charset="0"/>
-                  </a:rPr>
-                  <a:t>shallow</a:t>
-                </a:r>
-                <a:r>
-                  <a:rPr lang="es-ES" sz="1000" dirty="0">
-                    <a:latin typeface="Arial" panose="020B0604020202020204" pitchFamily="34" charset="0"/>
-                    <a:cs typeface="Arial" panose="020B0604020202020204" pitchFamily="34" charset="0"/>
-                  </a:rPr>
-                  <a:t> ya que presenta menor </a:t>
+                  <a:t>Además, comparando los modos TE y TM en ambos casos, se observa que los dos siguen la misma tendencia decreciente con la longitud de onda, pero con valores distintos de </a:t>
                 </a:r>
                 <a14:m>
                   <m:oMath xmlns:m="http://schemas.openxmlformats.org/officeDocument/2006/math">
                     <m:sSub>
                       <m:sSubPr>
                         <m:ctrlPr>
-                          <a:rPr lang="ar-AE" sz="1000" i="1">
-                            <a:latin typeface="Cambria Math" panose="02040503050406030204" pitchFamily="18" charset="0"/>
-                          </a:rPr>
+                          <a:rPr lang="ar-AE" sz="1000"/>
                         </m:ctrlPr>
                       </m:sSubPr>
                       <m:e>
@@ -19372,9 +19528,7 @@
                           <m:rPr>
                             <m:sty m:val="p"/>
                           </m:rPr>
-                          <a:rPr lang="ar-AE" sz="1000" b="0" i="0">
-                            <a:latin typeface="Cambria Math" panose="02040503050406030204" pitchFamily="18" charset="0"/>
-                          </a:rPr>
+                          <a:rPr lang="ar-AE" sz="1000" b="0" i="0"/>
                           <m:t>L</m:t>
                         </m:r>
                       </m:e>
@@ -19383,9 +19537,7 @@
                           <m:rPr>
                             <m:sty m:val="p"/>
                           </m:rPr>
-                          <a:rPr lang="ar-AE" sz="1000" b="0" i="0">
-                            <a:latin typeface="Cambria Math" panose="02040503050406030204" pitchFamily="18" charset="0"/>
-                          </a:rPr>
+                          <a:rPr lang="ar-AE" sz="1000" b="0" i="0"/>
                           <m:t>π</m:t>
                         </m:r>
                       </m:sub>
@@ -19393,11 +19545,18 @@
                   </m:oMath>
                 </a14:m>
                 <a:r>
+                  <a:rPr lang="ar-AE" sz="1000" dirty="0">
+                    <a:latin typeface="Arial" panose="020B0604020202020204" pitchFamily="34" charset="0"/>
+                    <a:cs typeface="Arial" panose="020B0604020202020204" pitchFamily="34" charset="0"/>
+                  </a:rPr>
+                  <a:t>. </a:t>
+                </a:r>
+                <a:r>
                   <a:rPr lang="es-ES" sz="1000" dirty="0">
                     <a:latin typeface="Arial" panose="020B0604020202020204" pitchFamily="34" charset="0"/>
                     <a:cs typeface="Arial" panose="020B0604020202020204" pitchFamily="34" charset="0"/>
                   </a:rPr>
-                  <a:t> debido a que el campo se extiende más fuera del núcleo por la menor confinación, aumentando el solapamiento entre las guías. En el caso </a:t>
+                  <a:t>En el caso </a:t>
                 </a:r>
                 <a:r>
                   <a:rPr lang="es-ES" sz="1000" dirty="0" err="1">
@@ -19411,16 +19570,14 @@
                     <a:latin typeface="Arial" panose="020B0604020202020204" pitchFamily="34" charset="0"/>
                     <a:cs typeface="Arial" panose="020B0604020202020204" pitchFamily="34" charset="0"/>
                   </a:rPr>
-                  <a:t>, el confinamiento es mayor, el acoplo es más débil y los valores de </a:t>
+                  <a:t>, la diferencia entre TE y TM es más clara, siendo el modo TE el que presenta valores más altos de </a:t>
                 </a:r>
                 <a14:m>
                   <m:oMath xmlns:m="http://schemas.openxmlformats.org/officeDocument/2006/math">
                     <m:sSub>
                       <m:sSubPr>
                         <m:ctrlPr>
-                          <a:rPr lang="ar-AE" sz="1000" i="1">
-                            <a:latin typeface="Cambria Math" panose="02040503050406030204" pitchFamily="18" charset="0"/>
-                          </a:rPr>
+                          <a:rPr lang="ar-AE" sz="1000"/>
                         </m:ctrlPr>
                       </m:sSubPr>
                       <m:e>
@@ -19428,9 +19585,7 @@
                           <m:rPr>
                             <m:sty m:val="p"/>
                           </m:rPr>
-                          <a:rPr lang="ar-AE" sz="1000" b="0" i="0">
-                            <a:latin typeface="Cambria Math" panose="02040503050406030204" pitchFamily="18" charset="0"/>
-                          </a:rPr>
+                          <a:rPr lang="ar-AE" sz="1000" b="0" i="0"/>
                           <m:t>L</m:t>
                         </m:r>
                       </m:e>
@@ -19439,9 +19594,7 @@
                           <m:rPr>
                             <m:sty m:val="p"/>
                           </m:rPr>
-                          <a:rPr lang="ar-AE" sz="1000" b="0" i="0">
-                            <a:latin typeface="Cambria Math" panose="02040503050406030204" pitchFamily="18" charset="0"/>
-                          </a:rPr>
+                          <a:rPr lang="ar-AE" sz="1000" b="0" i="0"/>
                           <m:t>π</m:t>
                         </m:r>
                       </m:sub>
@@ -19449,11 +19602,18 @@
                   </m:oMath>
                 </a14:m>
                 <a:r>
+                  <a:rPr lang="ar-AE" sz="1000" dirty="0">
+                    <a:latin typeface="Arial" panose="020B0604020202020204" pitchFamily="34" charset="0"/>
+                    <a:cs typeface="Arial" panose="020B0604020202020204" pitchFamily="34" charset="0"/>
+                  </a:rPr>
+                  <a:t>, </a:t>
+                </a:r>
+                <a:r>
                   <a:rPr lang="es-ES" sz="1000" dirty="0">
                     <a:latin typeface="Arial" panose="020B0604020202020204" pitchFamily="34" charset="0"/>
                     <a:cs typeface="Arial" panose="020B0604020202020204" pitchFamily="34" charset="0"/>
                   </a:rPr>
-                  <a:t> son más altos. Además, el caso </a:t>
+                  <a:t>lo que indica un acoplo más débil que en TM. En cambio, en el caso </a:t>
                 </a:r>
                 <a:r>
                   <a:rPr lang="es-ES" sz="1000" dirty="0" err="1">
@@ -19467,7 +19627,102 @@
                     <a:latin typeface="Arial" panose="020B0604020202020204" pitchFamily="34" charset="0"/>
                     <a:cs typeface="Arial" panose="020B0604020202020204" pitchFamily="34" charset="0"/>
                   </a:rPr>
-                  <a:t> presenta una respuesta más suave frente a variaciones de longitud de onda, lo que lo hace más robusto que la Deep frente a cambios en dicho parámetro.</a:t>
+                  <a:t>, ambos modos están más próximos entre sí y muestran un comportamiento más suave, aunque el TM presenta pequeñas variaciones y es algo más irregular. </a:t>
+                </a:r>
+              </a:p>
+              <a:p>
+                <a:pPr algn="just"/>
+                <a:endParaRPr lang="es-ES" sz="1000" dirty="0">
+                  <a:latin typeface="Arial" panose="020B0604020202020204" pitchFamily="34" charset="0"/>
+                  <a:cs typeface="Arial" panose="020B0604020202020204" pitchFamily="34" charset="0"/>
+                </a:endParaRPr>
+              </a:p>
+              <a:p>
+                <a:pPr algn="just"/>
+                <a:r>
+                  <a:rPr lang="es-ES" sz="1000" dirty="0">
+                    <a:latin typeface="Arial" panose="020B0604020202020204" pitchFamily="34" charset="0"/>
+                    <a:cs typeface="Arial" panose="020B0604020202020204" pitchFamily="34" charset="0"/>
+                  </a:rPr>
+                  <a:t>En general, el acoplo es mayor en el caso </a:t>
+                </a:r>
+                <a:r>
+                  <a:rPr lang="es-ES" sz="1000" dirty="0" err="1">
+                    <a:latin typeface="Arial" panose="020B0604020202020204" pitchFamily="34" charset="0"/>
+                    <a:cs typeface="Arial" panose="020B0604020202020204" pitchFamily="34" charset="0"/>
+                  </a:rPr>
+                  <a:t>shallow</a:t>
+                </a:r>
+                <a:r>
+                  <a:rPr lang="es-ES" sz="1000" dirty="0">
+                    <a:latin typeface="Arial" panose="020B0604020202020204" pitchFamily="34" charset="0"/>
+                    <a:cs typeface="Arial" panose="020B0604020202020204" pitchFamily="34" charset="0"/>
+                  </a:rPr>
+                  <a:t>, ya que el campo está menos confinado y se extiende más fuera del núcleo, aumentando el solapamiento entre guías. Por ello, los valores de </a:t>
+                </a:r>
+                <a14:m>
+                  <m:oMath xmlns:m="http://schemas.openxmlformats.org/officeDocument/2006/math">
+                    <m:sSub>
+                      <m:sSubPr>
+                        <m:ctrlPr>
+                          <a:rPr lang="ar-AE" sz="1000"/>
+                        </m:ctrlPr>
+                      </m:sSubPr>
+                      <m:e>
+                        <m:r>
+                          <m:rPr>
+                            <m:sty m:val="p"/>
+                          </m:rPr>
+                          <a:rPr lang="ar-AE" sz="1000" b="0" i="0"/>
+                          <m:t>L</m:t>
+                        </m:r>
+                      </m:e>
+                      <m:sub>
+                        <m:r>
+                          <m:rPr>
+                            <m:sty m:val="p"/>
+                          </m:rPr>
+                          <a:rPr lang="ar-AE" sz="1000" b="0" i="0"/>
+                          <m:t>π</m:t>
+                        </m:r>
+                      </m:sub>
+                    </m:sSub>
+                  </m:oMath>
+                </a14:m>
+                <a:r>
+                  <a:rPr lang="es-ES" sz="1000" dirty="0">
+                    <a:latin typeface="Arial" panose="020B0604020202020204" pitchFamily="34" charset="0"/>
+                    <a:cs typeface="Arial" panose="020B0604020202020204" pitchFamily="34" charset="0"/>
+                  </a:rPr>
+                  <a:t> son menores y la respuesta frente a cambios en la longitud de onda es más suave, lo que hace que el caso </a:t>
+                </a:r>
+                <a:r>
+                  <a:rPr lang="es-ES" sz="1000" dirty="0" err="1">
+                    <a:latin typeface="Arial" panose="020B0604020202020204" pitchFamily="34" charset="0"/>
+                    <a:cs typeface="Arial" panose="020B0604020202020204" pitchFamily="34" charset="0"/>
+                  </a:rPr>
+                  <a:t>shallow</a:t>
+                </a:r>
+                <a:r>
+                  <a:rPr lang="es-ES" sz="1000" dirty="0">
+                    <a:latin typeface="Arial" panose="020B0604020202020204" pitchFamily="34" charset="0"/>
+                    <a:cs typeface="Arial" panose="020B0604020202020204" pitchFamily="34" charset="0"/>
+                  </a:rPr>
+                  <a:t> sea más robusto que el </a:t>
+                </a:r>
+                <a:r>
+                  <a:rPr lang="es-ES" sz="1000" dirty="0" err="1">
+                    <a:latin typeface="Arial" panose="020B0604020202020204" pitchFamily="34" charset="0"/>
+                    <a:cs typeface="Arial" panose="020B0604020202020204" pitchFamily="34" charset="0"/>
+                  </a:rPr>
+                  <a:t>deep</a:t>
+                </a:r>
+                <a:r>
+                  <a:rPr lang="es-ES" sz="1000" dirty="0">
+                    <a:latin typeface="Arial" panose="020B0604020202020204" pitchFamily="34" charset="0"/>
+                    <a:cs typeface="Arial" panose="020B0604020202020204" pitchFamily="34" charset="0"/>
+                  </a:rPr>
+                  <a:t> frente a variaciones de este parámetro.</a:t>
                 </a:r>
                 <a:endParaRPr lang="en-US" sz="1000" dirty="0">
                   <a:latin typeface="Arial" panose="020B0604020202020204" pitchFamily="34" charset="0"/>
@@ -19484,7 +19739,7 @@
             </p:txBody>
           </p:sp>
         </mc:Choice>
-        <mc:Fallback xmlns="">
+        <mc:Fallback>
           <p:sp>
             <p:nvSpPr>
               <p:cNvPr id="2" name="CuadroTexto 1">
@@ -19502,7 +19757,7 @@
             <p:spPr>
               <a:xfrm>
                 <a:off x="583019" y="1524000"/>
-                <a:ext cx="11199971" cy="2800767"/>
+                <a:ext cx="11199971" cy="3262432"/>
               </a:xfrm>
               <a:prstGeom prst="rect">
                 <a:avLst/>
@@ -19510,7 +19765,7 @@
               <a:blipFill>
                 <a:blip r:embed="rId4"/>
                 <a:stretch>
-                  <a:fillRect/>
+                  <a:fillRect r="-54"/>
                 </a:stretch>
               </a:blipFill>
               <a:ln w="28575">
@@ -20384,8 +20639,8 @@
           </a:p>
         </p:txBody>
       </p:sp>
-      <mc:AlternateContent xmlns:mc="http://schemas.openxmlformats.org/markup-compatibility/2006" xmlns:a14="http://schemas.microsoft.com/office/drawing/2010/main">
-        <mc:Choice Requires="a14">
+      <mc:AlternateContent xmlns:mc="http://schemas.openxmlformats.org/markup-compatibility/2006">
+        <mc:Choice xmlns:a14="http://schemas.microsoft.com/office/drawing/2010/main" Requires="a14">
           <p:sp>
             <p:nvSpPr>
               <p:cNvPr id="2" name="CuadroTexto 1">
@@ -20401,7 +20656,7 @@
             <p:spPr>
               <a:xfrm>
                 <a:off x="496014" y="1447800"/>
-                <a:ext cx="11199971" cy="3416320"/>
+                <a:ext cx="11199971" cy="4117859"/>
               </a:xfrm>
               <a:prstGeom prst="rect">
                 <a:avLst/>
@@ -20843,10 +21098,7 @@
               </a:p>
               <a:p>
                 <a:pPr algn="just"/>
-                <a:endParaRPr lang="es-ES" sz="1000" dirty="0">
-                  <a:latin typeface="Arial" panose="020B0604020202020204" pitchFamily="34" charset="0"/>
-                  <a:cs typeface="Arial" panose="020B0604020202020204" pitchFamily="34" charset="0"/>
-                </a:endParaRPr>
+                <a:endParaRPr lang="es-ES" sz="1000" dirty="0"/>
               </a:p>
               <a:p>
                 <a:pPr algn="just"/>
@@ -20855,49 +21107,7 @@
                     <a:latin typeface="Arial" panose="020B0604020202020204" pitchFamily="34" charset="0"/>
                     <a:cs typeface="Arial" panose="020B0604020202020204" pitchFamily="34" charset="0"/>
                   </a:rPr>
-                  <a:t>Como análisis final, podemos decir que tras haber simulado tanto las guías </a:t>
-                </a:r>
-                <a:r>
-                  <a:rPr lang="es-ES" sz="1000" dirty="0" err="1">
-                    <a:latin typeface="Arial" panose="020B0604020202020204" pitchFamily="34" charset="0"/>
-                    <a:cs typeface="Arial" panose="020B0604020202020204" pitchFamily="34" charset="0"/>
-                  </a:rPr>
-                  <a:t>deep</a:t>
-                </a:r>
-                <a:r>
-                  <a:rPr lang="es-ES" sz="1000" dirty="0">
-                    <a:latin typeface="Arial" panose="020B0604020202020204" pitchFamily="34" charset="0"/>
-                    <a:cs typeface="Arial" panose="020B0604020202020204" pitchFamily="34" charset="0"/>
-                  </a:rPr>
-                  <a:t> como </a:t>
-                </a:r>
-                <a:r>
-                  <a:rPr lang="es-ES" sz="1000" dirty="0" err="1">
-                    <a:latin typeface="Arial" panose="020B0604020202020204" pitchFamily="34" charset="0"/>
-                    <a:cs typeface="Arial" panose="020B0604020202020204" pitchFamily="34" charset="0"/>
-                  </a:rPr>
-                  <a:t>shallow</a:t>
-                </a:r>
-                <a:r>
-                  <a:rPr lang="es-ES" sz="1000" dirty="0">
-                    <a:latin typeface="Arial" panose="020B0604020202020204" pitchFamily="34" charset="0"/>
-                    <a:cs typeface="Arial" panose="020B0604020202020204" pitchFamily="34" charset="0"/>
-                  </a:rPr>
-                  <a:t> para los dos tipos de acopladores, el mejor es el acoplador MMI </a:t>
-                </a:r>
-                <a:r>
-                  <a:rPr lang="es-ES" sz="1000" dirty="0" err="1">
-                    <a:latin typeface="Arial" panose="020B0604020202020204" pitchFamily="34" charset="0"/>
-                    <a:cs typeface="Arial" panose="020B0604020202020204" pitchFamily="34" charset="0"/>
-                  </a:rPr>
-                  <a:t>shallow</a:t>
-                </a:r>
-                <a:r>
-                  <a:rPr lang="es-ES" sz="1000" dirty="0">
-                    <a:latin typeface="Arial" panose="020B0604020202020204" pitchFamily="34" charset="0"/>
-                    <a:cs typeface="Arial" panose="020B0604020202020204" pitchFamily="34" charset="0"/>
-                  </a:rPr>
-                  <a:t>, ya que es el que presenta la menor variación de </a:t>
+                  <a:t>Además, si se comparan los modos TE y TM, se observa que ambos siguen una tendencia similar con la longitud de onda, pero con ligeras diferencias en los valores de </a:t>
                 </a:r>
                 <a14:m>
                   <m:oMath xmlns:m="http://schemas.openxmlformats.org/officeDocument/2006/math">
@@ -20939,7 +21149,7 @@
                     <a:latin typeface="Arial" panose="020B0604020202020204" pitchFamily="34" charset="0"/>
                     <a:cs typeface="Arial" panose="020B0604020202020204" pitchFamily="34" charset="0"/>
                   </a:rPr>
-                  <a:t> en función de la longitud de onda, a pesar de que dicha mejora no sea muy notable, con respecto al resto de acopladores.  El único peor es el acoplador direccional </a:t>
+                  <a:t> . En el caso </a:t>
                 </a:r>
                 <a:r>
                   <a:rPr lang="es-ES" sz="1000" dirty="0" err="1">
@@ -20953,7 +21163,7 @@
                     <a:latin typeface="Arial" panose="020B0604020202020204" pitchFamily="34" charset="0"/>
                     <a:cs typeface="Arial" panose="020B0604020202020204" pitchFamily="34" charset="0"/>
                   </a:rPr>
-                  <a:t>, ya que presenta el cuádruple de variación de </a:t>
+                  <a:t>, la separación entre TE y TM es más clara, siendo el modo TE el que presenta valores algo menores de </a:t>
                 </a:r>
                 <a14:m>
                   <m:oMath xmlns:m="http://schemas.openxmlformats.org/officeDocument/2006/math">
@@ -20995,12 +21205,140 @@
                     <a:latin typeface="Arial" panose="020B0604020202020204" pitchFamily="34" charset="0"/>
                     <a:cs typeface="Arial" panose="020B0604020202020204" pitchFamily="34" charset="0"/>
                   </a:rPr>
-                  <a:t> que el resto.</a:t>
+                  <a:t> , mientras que el TM es ligeramente mayor. En cambio, en el caso </a:t>
+                </a:r>
+                <a:r>
+                  <a:rPr lang="es-ES" sz="1000" dirty="0" err="1">
+                    <a:latin typeface="Arial" panose="020B0604020202020204" pitchFamily="34" charset="0"/>
+                    <a:cs typeface="Arial" panose="020B0604020202020204" pitchFamily="34" charset="0"/>
+                  </a:rPr>
+                  <a:t>shallow</a:t>
+                </a:r>
+                <a:r>
+                  <a:rPr lang="es-ES" sz="1000" dirty="0">
+                    <a:latin typeface="Arial" panose="020B0604020202020204" pitchFamily="34" charset="0"/>
+                    <a:cs typeface="Arial" panose="020B0604020202020204" pitchFamily="34" charset="0"/>
+                  </a:rPr>
+                  <a:t>, ambos modos están más próximos entre sí y el comportamiento es algo más irregular, debido a la mayor interacción entre modos. En general, las diferencias entre TE y TM son menores en </a:t>
+                </a:r>
+                <a:r>
+                  <a:rPr lang="es-ES" sz="1000" dirty="0" err="1">
+                    <a:latin typeface="Arial" panose="020B0604020202020204" pitchFamily="34" charset="0"/>
+                    <a:cs typeface="Arial" panose="020B0604020202020204" pitchFamily="34" charset="0"/>
+                  </a:rPr>
+                  <a:t>shallow</a:t>
+                </a:r>
+                <a:r>
+                  <a:rPr lang="es-ES" sz="1000" dirty="0">
+                    <a:latin typeface="Arial" panose="020B0604020202020204" pitchFamily="34" charset="0"/>
+                    <a:cs typeface="Arial" panose="020B0604020202020204" pitchFamily="34" charset="0"/>
+                  </a:rPr>
+                  <a:t> porque el campo está menos confinado y se extiende más.</a:t>
                 </a:r>
               </a:p>
               <a:p>
                 <a:pPr algn="just"/>
-                <a:endParaRPr lang="en-US" sz="1200" dirty="0">
+                <a:endParaRPr lang="es-ES" sz="1000" dirty="0">
+                  <a:latin typeface="Arial" panose="020B0604020202020204" pitchFamily="34" charset="0"/>
+                  <a:cs typeface="Arial" panose="020B0604020202020204" pitchFamily="34" charset="0"/>
+                </a:endParaRPr>
+              </a:p>
+              <a:p>
+                <a:pPr algn="just"/>
+                <a:r>
+                  <a:rPr lang="es-ES" sz="1000" dirty="0">
+                    <a:latin typeface="Arial" panose="020B0604020202020204" pitchFamily="34" charset="0"/>
+                    <a:cs typeface="Arial" panose="020B0604020202020204" pitchFamily="34" charset="0"/>
+                  </a:rPr>
+                  <a:t>Como análisis final, se puede decir que, tras haber simulado tanto las guías </a:t>
+                </a:r>
+                <a:r>
+                  <a:rPr lang="es-ES" sz="1000" dirty="0" err="1">
+                    <a:latin typeface="Arial" panose="020B0604020202020204" pitchFamily="34" charset="0"/>
+                    <a:cs typeface="Arial" panose="020B0604020202020204" pitchFamily="34" charset="0"/>
+                  </a:rPr>
+                  <a:t>deep</a:t>
+                </a:r>
+                <a:r>
+                  <a:rPr lang="es-ES" sz="1000" dirty="0">
+                    <a:latin typeface="Arial" panose="020B0604020202020204" pitchFamily="34" charset="0"/>
+                    <a:cs typeface="Arial" panose="020B0604020202020204" pitchFamily="34" charset="0"/>
+                  </a:rPr>
+                  <a:t> como </a:t>
+                </a:r>
+                <a:r>
+                  <a:rPr lang="es-ES" sz="1000" dirty="0" err="1">
+                    <a:latin typeface="Arial" panose="020B0604020202020204" pitchFamily="34" charset="0"/>
+                    <a:cs typeface="Arial" panose="020B0604020202020204" pitchFamily="34" charset="0"/>
+                  </a:rPr>
+                  <a:t>shallow</a:t>
+                </a:r>
+                <a:r>
+                  <a:rPr lang="es-ES" sz="1000" dirty="0">
+                    <a:latin typeface="Arial" panose="020B0604020202020204" pitchFamily="34" charset="0"/>
+                    <a:cs typeface="Arial" panose="020B0604020202020204" pitchFamily="34" charset="0"/>
+                  </a:rPr>
+                  <a:t> para los dos tipos de acopladores, el acoplador MMI </a:t>
+                </a:r>
+                <a:r>
+                  <a:rPr lang="es-ES" sz="1000" dirty="0" err="1">
+                    <a:latin typeface="Arial" panose="020B0604020202020204" pitchFamily="34" charset="0"/>
+                    <a:cs typeface="Arial" panose="020B0604020202020204" pitchFamily="34" charset="0"/>
+                  </a:rPr>
+                  <a:t>shallow</a:t>
+                </a:r>
+                <a:r>
+                  <a:rPr lang="es-ES" sz="1000" dirty="0">
+                    <a:latin typeface="Arial" panose="020B0604020202020204" pitchFamily="34" charset="0"/>
+                    <a:cs typeface="Arial" panose="020B0604020202020204" pitchFamily="34" charset="0"/>
+                  </a:rPr>
+                  <a:t> sigue siendo el más estable frente a variaciones de la longitud de onda, aunque ahora se observa que esta estabilidad también depende del modo considerado. En cambio, el acoplador direccional </a:t>
+                </a:r>
+                <a:r>
+                  <a:rPr lang="es-ES" sz="1000" dirty="0" err="1">
+                    <a:latin typeface="Arial" panose="020B0604020202020204" pitchFamily="34" charset="0"/>
+                    <a:cs typeface="Arial" panose="020B0604020202020204" pitchFamily="34" charset="0"/>
+                  </a:rPr>
+                  <a:t>deep</a:t>
+                </a:r>
+                <a:r>
+                  <a:rPr lang="es-ES" sz="1000" dirty="0">
+                    <a:latin typeface="Arial" panose="020B0604020202020204" pitchFamily="34" charset="0"/>
+                    <a:cs typeface="Arial" panose="020B0604020202020204" pitchFamily="34" charset="0"/>
+                  </a:rPr>
+                  <a:t> continúa siendo el más sensible a cambios en la longitud de onda, presentando las mayores variaciones de </a:t>
+                </a:r>
+                <a14:m>
+                  <m:oMath xmlns:m="http://schemas.openxmlformats.org/officeDocument/2006/math">
+                    <m:sSub>
+                      <m:sSubPr>
+                        <m:ctrlPr>
+                          <a:rPr lang="ar-AE" sz="1000"/>
+                        </m:ctrlPr>
+                      </m:sSubPr>
+                      <m:e>
+                        <m:r>
+                          <a:rPr lang="ar-AE" sz="1000" i="1"/>
+                          <m:t>𝐿</m:t>
+                        </m:r>
+                      </m:e>
+                      <m:sub>
+                        <m:r>
+                          <a:rPr lang="ar-AE" sz="1000" i="1"/>
+                          <m:t>𝜋</m:t>
+                        </m:r>
+                      </m:sub>
+                    </m:sSub>
+                  </m:oMath>
+                </a14:m>
+                <a:r>
+                  <a:rPr lang="es-ES" sz="1000" dirty="0">
+                    <a:latin typeface="Arial" panose="020B0604020202020204" pitchFamily="34" charset="0"/>
+                    <a:cs typeface="Arial" panose="020B0604020202020204" pitchFamily="34" charset="0"/>
+                  </a:rPr>
+                  <a:t>entre todos los casos analizados.</a:t>
+                </a:r>
+                <a:endParaRPr lang="en-US" sz="1000" dirty="0">
                   <a:latin typeface="Arial" panose="020B0604020202020204" pitchFamily="34" charset="0"/>
                   <a:cs typeface="Arial" panose="020B0604020202020204" pitchFamily="34" charset="0"/>
                 </a:endParaRPr>
@@ -21008,7 +21346,7 @@
             </p:txBody>
           </p:sp>
         </mc:Choice>
-        <mc:Fallback xmlns="">
+        <mc:Fallback>
           <p:sp>
             <p:nvSpPr>
               <p:cNvPr id="2" name="CuadroTexto 1">
@@ -21026,7 +21364,7 @@
             <p:spPr>
               <a:xfrm>
                 <a:off x="496014" y="1447800"/>
-                <a:ext cx="11199971" cy="3416320"/>
+                <a:ext cx="11199971" cy="4117859"/>
               </a:xfrm>
               <a:prstGeom prst="rect">
                 <a:avLst/>
@@ -22027,8 +22365,8 @@
           </a:p>
         </p:txBody>
       </p:sp>
-      <mc:AlternateContent xmlns:mc="http://schemas.openxmlformats.org/markup-compatibility/2006" xmlns:a14="http://schemas.microsoft.com/office/drawing/2010/main">
-        <mc:Choice Requires="a14">
+      <mc:AlternateContent xmlns:mc="http://schemas.openxmlformats.org/markup-compatibility/2006">
+        <mc:Choice xmlns:a14="http://schemas.microsoft.com/office/drawing/2010/main" Requires="a14">
           <p:sp>
             <p:nvSpPr>
               <p:cNvPr id="2" name="CuadroTexto 1">
@@ -22217,7 +22555,7 @@
                     <a:latin typeface="Arial" panose="020B0604020202020204" pitchFamily="34" charset="0"/>
                     <a:cs typeface="Arial" panose="020B0604020202020204" pitchFamily="34" charset="0"/>
                   </a:rPr>
-                  <a:t>Por otro lado, no existe un punto en el que el acoplador MMI funcione exactamente igual para TE y TM, ya que ambos modos tienen comportamientos diferentes. Sin embargo, sí hay anchos donde los valores de </a:t>
+                  <a:t>En conclusión, no existe un punto en el que el acoplador MMI funcione exactamente igual para TE y TM, ya que ambos modos tienen comportamientos diferentes debido a sus índices efectivos. Sin embargo, sí hay anchos donde los valores de </a:t>
                 </a:r>
                 <a14:m>
                   <m:oMath xmlns:m="http://schemas.openxmlformats.org/officeDocument/2006/math">
@@ -22272,7 +22610,7 @@
             </p:txBody>
           </p:sp>
         </mc:Choice>
-        <mc:Fallback xmlns="">
+        <mc:Fallback>
           <p:sp>
             <p:nvSpPr>
               <p:cNvPr id="2" name="CuadroTexto 1">

--- a/LabBook_20.pptx
+++ b/LabBook_20.pptx
@@ -5642,7 +5642,7 @@
           </a:bodyPr>
           <a:lstStyle/>
           <a:p>
-            <a:pPr marL="12700">
+            <a:pPr marL="12700" algn="just">
               <a:lnSpc>
                 <a:spcPct val="100000"/>
               </a:lnSpc>
@@ -5732,7 +5732,7 @@
               <a:rPr lang="es-ES" smtClean="0"/>
               <a:t>1</a:t>
             </a:fld>
-            <a:endParaRPr lang="es-ES"/>
+            <a:endParaRPr lang="es-ES" dirty="0"/>
           </a:p>
         </p:txBody>
       </p:sp>
